--- a/seminar/slides/세션4_원자연산과_에러핸들링.pptx
+++ b/seminar/slides/세션4_원자연산과_에러핸들링.pptx
@@ -17,9 +17,10 @@
     <p:sldId id="265" r:id="rId11"/>
     <p:sldId id="266" r:id="rId12"/>
     <p:sldId id="267" r:id="rId13"/>
+    <p:sldId id="268" r:id="rId14"/>
   </p:sldIdLst>
   <p:notesMasterIdLst>
-    <p:notesMasterId r:id="rId14"/>
+    <p:notesMasterId r:id="rId15"/>
   </p:notesMasterIdLst>
   <p:sldSz cx="12192000" cy="6858000"/>
   <p:notesSz cx="6858000" cy="12192000"/>
@@ -601,7 +602,7 @@
           <a:p>
             <a:r>
               <a:rPr lang="en-US" dirty="0"/>
-              <a:t>모든 Ex는 원복이 중요. 특히 Ex 3/4는 오류를 일부러 유발하므로 반드시 되돌리도록.</a:t>
+              <a:t>cudaDeviceReset은 GPU 상태를 깨끗이 되돌립니다. 멀티노드 검사에서 한 노드 오류가 전체를 멈추지 않게.</a:t>
             </a:r>
             <a:endParaRPr lang="en-US" dirty="0"/>
           </a:p>
@@ -689,7 +690,7 @@
           <a:p>
             <a:r>
               <a:rPr lang="en-US" dirty="0"/>
-              <a:t>네 가지 목표(슬라이드 2)로 돌아가 자가 점검을 유도하세요.</a:t>
+              <a:t>모든 Ex는 원복이 중요. 특히 Ex 3/4는 오류를 일부러 유발하므로 반드시 되돌리도록.</a:t>
             </a:r>
             <a:endParaRPr lang="en-US" dirty="0"/>
           </a:p>
@@ -777,7 +778,7 @@
           <a:p>
             <a:r>
               <a:rPr lang="en-US" dirty="0"/>
-              <a:t>세션 5는 종합 회차. 멀티 GPU 스레딩, 이식성, 그리고 캡스톤 프로젝트로 마무리.</a:t>
+              <a:t>네 가지 목표(슬라이드 2)로 돌아가 자가 점검을 유도하세요.</a:t>
             </a:r>
             <a:endParaRPr lang="en-US" dirty="0"/>
           </a:p>
@@ -801,6 +802,94 @@
             <a:fld id="{F7021451-1387-4CA6-816F-3879F97B5CBC}" type="slidenum">
               <a:rPr lang="en-US"/>
               <a:t>12</a:t>
+            </a:fld>
+            <a:endParaRPr lang="en-US"/>
+          </a:p>
+        </p:txBody>
+      </p:sp>
+    </p:spTree>
+    <p:extLst>
+      <p:ext uri="{BB962C8B-B14F-4D97-AF65-F5344CB8AC3E}">
+        <p14:creationId xmlns:p14="http://schemas.microsoft.com/office/powerpoint/2010/main" val="1024086991"/>
+      </p:ext>
+    </p:extLst>
+  </p:cSld>
+  <p:clrMapOvr>
+    <a:masterClrMapping/>
+  </p:clrMapOvr>
+</p:notes>
+</file>
+
+<file path=ppt/notesSlides/notesSlide13.xml><?xml version="1.0" encoding="utf-8"?>
+<p:notes xmlns:a="http://schemas.openxmlformats.org/drawingml/2006/main" xmlns:r="http://schemas.openxmlformats.org/officeDocument/2006/relationships" xmlns:p="http://schemas.openxmlformats.org/presentationml/2006/main">
+  <p:cSld>
+    <p:spTree>
+      <p:nvGrpSpPr>
+        <p:cNvPr id="1" name=""/>
+        <p:cNvGrpSpPr/>
+        <p:nvPr/>
+      </p:nvGrpSpPr>
+      <p:grpSpPr>
+        <a:xfrm>
+          <a:off x="0" y="0"/>
+          <a:ext cx="0" cy="0"/>
+          <a:chOff x="0" y="0"/>
+          <a:chExt cx="0" cy="0"/>
+        </a:xfrm>
+      </p:grpSpPr>
+      <p:sp>
+        <p:nvSpPr>
+          <p:cNvPr id="2" name="Slide Image Placeholder 1"/>
+          <p:cNvSpPr>
+            <a:spLocks noGrp="1" noRot="1" noChangeAspect="1"/>
+          </p:cNvSpPr>
+          <p:nvPr>
+            <p:ph type="sldImg"/>
+          </p:nvPr>
+        </p:nvSpPr>
+        <p:spPr/>
+      </p:sp>
+      <p:sp>
+        <p:nvSpPr>
+          <p:cNvPr id="3" name="Notes Placeholder 2"/>
+          <p:cNvSpPr>
+            <a:spLocks noGrp="1"/>
+          </p:cNvSpPr>
+          <p:nvPr>
+            <p:ph type="body" idx="1"/>
+          </p:nvPr>
+        </p:nvSpPr>
+        <p:spPr/>
+        <p:txBody>
+          <a:bodyPr/>
+          <a:lstStyle/>
+          <a:p>
+            <a:r>
+              <a:rPr lang="en-US" dirty="0"/>
+              <a:t>세션 5는 종합 회차. 멀티 GPU 스레딩, 이식성, 그리고 캡스톤 프로젝트로 마무리.</a:t>
+            </a:r>
+            <a:endParaRPr lang="en-US" dirty="0"/>
+          </a:p>
+        </p:txBody>
+      </p:sp>
+      <p:sp>
+        <p:nvSpPr>
+          <p:cNvPr id="4" name="Slide Number Placeholder 3"/>
+          <p:cNvSpPr>
+            <a:spLocks noGrp="1"/>
+          </p:cNvSpPr>
+          <p:nvPr>
+            <p:ph type="sldNum" sz="quarter" idx="10"/>
+          </p:nvPr>
+        </p:nvSpPr>
+        <p:spPr/>
+        <p:txBody>
+          <a:bodyPr/>
+          <a:lstStyle/>
+          <a:p>
+            <a:fld id="{F7021451-1387-4CA6-816F-3879F97B5CBC}" type="slidenum">
+              <a:rPr lang="en-US"/>
+              <a:t>13</a:t>
             </a:fld>
             <a:endParaRPr lang="en-US"/>
           </a:p>
@@ -1129,7 +1218,7 @@
           <a:p>
             <a:r>
               <a:rPr lang="en-US" dirty="0"/>
-              <a:t>각 필드가 무엇을 담는지 짚어주세요. second_read는 소프트 오류(일시적) vs 하드 오류(영구) 구별에 쓰임.</a:t>
+              <a:t>왼쪽=끼어들기로 유실, 오른쪽=원자연산이 읽기-쓰기를 직렬화해 정확. 슬라이드 3의 문제에 대한 해답 타임라인.</a:t>
             </a:r>
             <a:endParaRPr lang="en-US" dirty="0"/>
           </a:p>
@@ -1217,7 +1306,7 @@
           <a:p>
             <a:r>
               <a:rPr lang="en-US" dirty="0"/>
-              <a:t>atomicAdd의 반환값이 락 없이 고유 인덱스를 나눠주는 우아한 트릭. 병렬 프로그래밍의 흔한 관용구.</a:t>
+              <a:t>각 필드가 무엇을 담는지 짚어주세요. second_read는 소프트 오류(일시적) vs 하드 오류(영구) 구별에 쓰임.</a:t>
             </a:r>
             <a:endParaRPr lang="en-US" dirty="0"/>
           </a:p>
@@ -1305,7 +1394,7 @@
           <a:p>
             <a:r>
               <a:rPr lang="en-US" dirty="0"/>
-              <a:t>세션 3의 '커널은 비동기'와 직접 연결. 동기화 없이는 커널 오류를 잡을 수 없다는 점이 핵심.</a:t>
+              <a:t>atomicAdd의 반환값이 락 없이 고유 인덱스를 나눠주는 우아한 트릭. 병렬 프로그래밍의 흔한 관용구.</a:t>
             </a:r>
             <a:endParaRPr lang="en-US" dirty="0"/>
           </a:p>
@@ -1393,7 +1482,7 @@
           <a:p>
             <a:r>
               <a:rPr lang="en-US" dirty="0"/>
-              <a:t>CUERR은 동기 API 호출용, SYNC_CUERR_KERNEL은 커널 실행용. 둘 다 실패 시 위치를 찍고 종료.</a:t>
+              <a:t>세션 3의 '커널은 비동기'와 직접 연결. 동기화 없이는 커널 오류를 잡을 수 없다는 점이 핵심.</a:t>
             </a:r>
             <a:endParaRPr lang="en-US" dirty="0"/>
           </a:p>
@@ -1481,7 +1570,7 @@
           <a:p>
             <a:r>
               <a:rPr lang="en-US" dirty="0"/>
-              <a:t>cudaDeviceReset은 GPU 상태를 깨끗이 되돌립니다. 멀티노드 검사에서 한 노드 오류가 전체를 멈추지 않게.</a:t>
+              <a:t>CUERR은 동기 API 호출용, SYNC_CUERR_KERNEL은 커널 실행용. 둘 다 실패 시 위치를 찍고 종료.</a:t>
             </a:r>
             <a:endParaRPr lang="en-US" dirty="0"/>
           </a:p>
@@ -2191,7 +2280,7 @@
                 <a:ea typeface="Courier New" pitchFamily="34" charset="-122"/>
                 <a:cs typeface="Courier New" pitchFamily="34" charset="-120"/>
               </a:rPr>
-              <a:t>9</a:t>
+              <a:t>8</a:t>
             </a:r>
             <a:endParaRPr lang="en-US" sz="2200" dirty="0"/>
           </a:p>
@@ -2230,7 +2319,7 @@
                 <a:ea typeface="Malgun Gothic" pitchFamily="34" charset="-122"/>
                 <a:cs typeface="Malgun Gothic" pitchFamily="34" charset="-120"/>
               </a:rPr>
-              <a:t>실습 미리보기 · Lab 4</a:t>
+              <a:t>오류를 우아하게 · error_checking</a:t>
             </a:r>
             <a:endParaRPr lang="en-US" sz="3000" dirty="0"/>
           </a:p>
@@ -2238,18 +2327,57 @@
       </p:sp>
       <p:sp>
         <p:nvSpPr>
-          <p:cNvPr id="4" name="Shape 2"/>
-          <p:cNvSpPr/>
-          <p:nvPr/>
-        </p:nvSpPr>
-        <p:spPr>
-          <a:xfrm>
-            <a:off x="548640" y="1554480"/>
-            <a:ext cx="5303520" cy="1965960"/>
+          <p:cNvPr id="4" name="Text 2"/>
+          <p:cNvSpPr/>
+          <p:nvPr/>
+        </p:nvSpPr>
+        <p:spPr>
+          <a:xfrm>
+            <a:off x="548640" y="1463040"/>
+            <a:ext cx="11064240" cy="457200"/>
+          </a:xfrm>
+          <a:prstGeom prst="rect">
+            <a:avLst/>
+          </a:prstGeom>
+          <a:noFill/>
+          <a:ln/>
+        </p:spPr>
+        <p:txBody>
+          <a:bodyPr wrap="square" lIns="0" tIns="0" rIns="0" bIns="0" rtlCol="0" anchor="ctr"/>
+          <a:lstStyle/>
+          <a:p>
+            <a:pPr indent="0" marL="0">
+              <a:buNone/>
+            </a:pPr>
+            <a:r>
+              <a:rPr lang="en-US" sz="1600" dirty="0">
+                <a:solidFill>
+                  <a:srgbClr val="9AA6B2"/>
+                </a:solidFill>
+                <a:latin typeface="Malgun Gothic" pitchFamily="34" charset="0"/>
+                <a:ea typeface="Malgun Gothic" pitchFamily="34" charset="-122"/>
+                <a:cs typeface="Malgun Gothic" pitchFamily="34" charset="-120"/>
+              </a:rPr>
+              <a:t>오류가 발견되면 단순히 종료하지 않고, 정보를 기록하고 상태를 정리합니다.</a:t>
+            </a:r>
+            <a:endParaRPr lang="en-US" sz="1600" dirty="0"/>
+          </a:p>
+        </p:txBody>
+      </p:sp>
+      <p:sp>
+        <p:nvSpPr>
+          <p:cNvPr id="5" name="Shape 3"/>
+          <p:cNvSpPr/>
+          <p:nvPr/>
+        </p:nvSpPr>
+        <p:spPr>
+          <a:xfrm>
+            <a:off x="548640" y="2103120"/>
+            <a:ext cx="11064240" cy="868680"/>
           </a:xfrm>
           <a:prstGeom prst="roundRect">
             <a:avLst>
-              <a:gd name="adj" fmla="val 3721"/>
+              <a:gd name="adj" fmla="val 7368"/>
             </a:avLst>
           </a:prstGeom>
           <a:solidFill>
@@ -2260,142 +2388,96 @@
       </p:sp>
       <p:sp>
         <p:nvSpPr>
-          <p:cNvPr id="5" name="Text 3"/>
-          <p:cNvSpPr/>
-          <p:nvPr/>
-        </p:nvSpPr>
-        <p:spPr>
-          <a:xfrm>
-            <a:off x="804672" y="1755648"/>
-            <a:ext cx="1188720" cy="502920"/>
+          <p:cNvPr id="6" name="Text 4"/>
+          <p:cNvSpPr/>
+          <p:nvPr/>
+        </p:nvSpPr>
+        <p:spPr>
+          <a:xfrm>
+            <a:off x="822960" y="2212848"/>
+            <a:ext cx="3108960" cy="640080"/>
+          </a:xfrm>
+          <a:prstGeom prst="rect">
+            <a:avLst/>
+          </a:prstGeom>
+          <a:noFill/>
+          <a:ln/>
+        </p:spPr>
+        <p:txBody>
+          <a:bodyPr wrap="square" lIns="0" tIns="0" rIns="0" bIns="0" rtlCol="0" anchor="ctr"/>
+          <a:lstStyle/>
+          <a:p>
+            <a:pPr indent="0" marL="0">
+              <a:buNone/>
+            </a:pPr>
+            <a:r>
+              <a:rPr lang="en-US" sz="1700" b="1" dirty="0">
+                <a:solidFill>
+                  <a:srgbClr val="4FB0C6"/>
+                </a:solidFill>
+                <a:latin typeface="Malgun Gothic" pitchFamily="34" charset="0"/>
+                <a:ea typeface="Malgun Gothic" pitchFamily="34" charset="-122"/>
+                <a:cs typeface="Malgun Gothic" pitchFamily="34" charset="-120"/>
+              </a:rPr>
+              <a:t>오류 정보 복사</a:t>
+            </a:r>
+            <a:endParaRPr lang="en-US" sz="1700" dirty="0"/>
+          </a:p>
+        </p:txBody>
+      </p:sp>
+      <p:sp>
+        <p:nvSpPr>
+          <p:cNvPr id="7" name="Text 5"/>
+          <p:cNvSpPr/>
+          <p:nvPr/>
+        </p:nvSpPr>
+        <p:spPr>
+          <a:xfrm>
+            <a:off x="4114800" y="2212848"/>
+            <a:ext cx="7223760" cy="640080"/>
+          </a:xfrm>
+          <a:prstGeom prst="rect">
+            <a:avLst/>
+          </a:prstGeom>
+          <a:noFill/>
+          <a:ln/>
+        </p:spPr>
+        <p:txBody>
+          <a:bodyPr wrap="square" lIns="0" tIns="0" rIns="0" bIns="0" rtlCol="0" anchor="ctr"/>
+          <a:lstStyle/>
+          <a:p>
+            <a:pPr indent="0" marL="0">
+              <a:buNone/>
+            </a:pPr>
+            <a:r>
+              <a:rPr lang="en-US" sz="1500" dirty="0">
+                <a:solidFill>
+                  <a:srgbClr val="E8EDF2"/>
+                </a:solidFill>
+                <a:latin typeface="Malgun Gothic" pitchFamily="34" charset="0"/>
+                <a:ea typeface="Malgun Gothic" pitchFamily="34" charset="-122"/>
+                <a:cs typeface="Malgun Gothic" pitchFamily="34" charset="-120"/>
+              </a:rPr>
+              <a:t>cudaMemcpy로 err_count·주소·값을 CPU로 (tests.cpp:117)</a:t>
+            </a:r>
+            <a:endParaRPr lang="en-US" sz="1500" dirty="0"/>
+          </a:p>
+        </p:txBody>
+      </p:sp>
+      <p:sp>
+        <p:nvSpPr>
+          <p:cNvPr id="8" name="Shape 6"/>
+          <p:cNvSpPr/>
+          <p:nvPr/>
+        </p:nvSpPr>
+        <p:spPr>
+          <a:xfrm>
+            <a:off x="548640" y="3099816"/>
+            <a:ext cx="11064240" cy="868680"/>
           </a:xfrm>
           <a:prstGeom prst="roundRect">
             <a:avLst>
-              <a:gd name="adj" fmla="val 14545"/>
-            </a:avLst>
-          </a:prstGeom>
-          <a:solidFill>
-            <a:srgbClr val="E0645B"/>
-          </a:solidFill>
-          <a:ln/>
-        </p:spPr>
-        <p:txBody>
-          <a:bodyPr wrap="square" rtlCol="0" anchor="ctr"/>
-          <a:lstStyle/>
-          <a:p>
-            <a:pPr algn="ctr" indent="0" marL="0">
-              <a:buNone/>
-            </a:pPr>
-            <a:r>
-              <a:rPr lang="en-US" sz="1700" b="1" dirty="0">
-                <a:solidFill>
-                  <a:srgbClr val="13161C"/>
-                </a:solidFill>
-                <a:latin typeface="Courier New" pitchFamily="34" charset="0"/>
-                <a:ea typeface="Courier New" pitchFamily="34" charset="-122"/>
-                <a:cs typeface="Courier New" pitchFamily="34" charset="-120"/>
-              </a:rPr>
-              <a:t>Ex 1</a:t>
-            </a:r>
-            <a:endParaRPr lang="en-US" sz="1700" dirty="0"/>
-          </a:p>
-        </p:txBody>
-      </p:sp>
-      <p:sp>
-        <p:nvSpPr>
-          <p:cNvPr id="6" name="Text 4"/>
-          <p:cNvSpPr/>
-          <p:nvPr/>
-        </p:nvSpPr>
-        <p:spPr>
-          <a:xfrm>
-            <a:off x="2148840" y="1773936"/>
-            <a:ext cx="3474720" cy="822960"/>
-          </a:xfrm>
-          <a:prstGeom prst="rect">
-            <a:avLst/>
-          </a:prstGeom>
-          <a:noFill/>
-          <a:ln/>
-        </p:spPr>
-        <p:txBody>
-          <a:bodyPr wrap="square" lIns="0" tIns="0" rIns="0" bIns="0" rtlCol="0" anchor="t"/>
-          <a:lstStyle/>
-          <a:p>
-            <a:pPr indent="0" marL="0">
-              <a:buNone/>
-            </a:pPr>
-            <a:r>
-              <a:rPr lang="en-US" sz="1700" b="1" dirty="0">
-                <a:solidFill>
-                  <a:srgbClr val="E8EDF2"/>
-                </a:solidFill>
-                <a:latin typeface="Malgun Gothic" pitchFamily="34" charset="0"/>
-                <a:ea typeface="Malgun Gothic" pitchFamily="34" charset="-122"/>
-                <a:cs typeface="Malgun Gothic" pitchFamily="34" charset="-120"/>
-              </a:rPr>
-              <a:t>경쟁 조건 재현</a:t>
-            </a:r>
-            <a:endParaRPr lang="en-US" sz="1700" dirty="0"/>
-          </a:p>
-        </p:txBody>
-      </p:sp>
-      <p:sp>
-        <p:nvSpPr>
-          <p:cNvPr id="7" name="Text 5"/>
-          <p:cNvSpPr/>
-          <p:nvPr/>
-        </p:nvSpPr>
-        <p:spPr>
-          <a:xfrm>
-            <a:off x="804672" y="2651760"/>
-            <a:ext cx="4791456" cy="731520"/>
-          </a:xfrm>
-          <a:prstGeom prst="rect">
-            <a:avLst/>
-          </a:prstGeom>
-          <a:noFill/>
-          <a:ln/>
-        </p:spPr>
-        <p:txBody>
-          <a:bodyPr wrap="square" lIns="0" tIns="0" rIns="0" bIns="0" rtlCol="0" anchor="t"/>
-          <a:lstStyle/>
-          <a:p>
-            <a:pPr indent="0" marL="0">
-              <a:lnSpc>
-                <a:spcPct val="110000"/>
-              </a:lnSpc>
-              <a:buNone/>
-            </a:pPr>
-            <a:r>
-              <a:rPr lang="en-US" sz="1400" dirty="0">
-                <a:solidFill>
-                  <a:srgbClr val="9AA6B2"/>
-                </a:solidFill>
-                <a:latin typeface="Malgun Gothic" pitchFamily="34" charset="0"/>
-                <a:ea typeface="Malgun Gothic" pitchFamily="34" charset="-122"/>
-                <a:cs typeface="Malgun Gothic" pitchFamily="34" charset="-120"/>
-              </a:rPr>
-              <a:t>atomicAdd를 일반 덧셈으로 바꿔 카운트가 틀어짐 확인</a:t>
-            </a:r>
-            <a:endParaRPr lang="en-US" sz="1400" dirty="0"/>
-          </a:p>
-        </p:txBody>
-      </p:sp>
-      <p:sp>
-        <p:nvSpPr>
-          <p:cNvPr id="8" name="Shape 6"/>
-          <p:cNvSpPr/>
-          <p:nvPr/>
-        </p:nvSpPr>
-        <p:spPr>
-          <a:xfrm>
-            <a:off x="6309360" y="1554480"/>
-            <a:ext cx="5303520" cy="1965960"/>
-          </a:xfrm>
-          <a:prstGeom prst="roundRect">
-            <a:avLst>
-              <a:gd name="adj" fmla="val 3721"/>
+              <a:gd name="adj" fmla="val 7368"/>
             </a:avLst>
           </a:prstGeom>
           <a:solidFill>
@@ -2412,136 +2494,90 @@
         </p:nvSpPr>
         <p:spPr>
           <a:xfrm>
-            <a:off x="6565392" y="1755648"/>
-            <a:ext cx="1188720" cy="502920"/>
+            <a:off x="822960" y="3209544"/>
+            <a:ext cx="3108960" cy="640080"/>
+          </a:xfrm>
+          <a:prstGeom prst="rect">
+            <a:avLst/>
+          </a:prstGeom>
+          <a:noFill/>
+          <a:ln/>
+        </p:spPr>
+        <p:txBody>
+          <a:bodyPr wrap="square" lIns="0" tIns="0" rIns="0" bIns="0" rtlCol="0" anchor="ctr"/>
+          <a:lstStyle/>
+          <a:p>
+            <a:pPr indent="0" marL="0">
+              <a:buNone/>
+            </a:pPr>
+            <a:r>
+              <a:rPr lang="en-US" sz="1700" b="1" dirty="0">
+                <a:solidFill>
+                  <a:srgbClr val="8CC63F"/>
+                </a:solidFill>
+                <a:latin typeface="Malgun Gothic" pitchFamily="34" charset="0"/>
+                <a:ea typeface="Malgun Gothic" pitchFamily="34" charset="-122"/>
+                <a:cs typeface="Malgun Gothic" pitchFamily="34" charset="-120"/>
+              </a:rPr>
+              <a:t>보고 &amp; 로그</a:t>
+            </a:r>
+            <a:endParaRPr lang="en-US" sz="1700" dirty="0"/>
+          </a:p>
+        </p:txBody>
+      </p:sp>
+      <p:sp>
+        <p:nvSpPr>
+          <p:cNvPr id="10" name="Text 8"/>
+          <p:cNvSpPr/>
+          <p:nvPr/>
+        </p:nvSpPr>
+        <p:spPr>
+          <a:xfrm>
+            <a:off x="4114800" y="3209544"/>
+            <a:ext cx="7223760" cy="640080"/>
+          </a:xfrm>
+          <a:prstGeom prst="rect">
+            <a:avLst/>
+          </a:prstGeom>
+          <a:noFill/>
+          <a:ln/>
+        </p:spPr>
+        <p:txBody>
+          <a:bodyPr wrap="square" lIns="0" tIns="0" rIns="0" bIns="0" rtlCol="0" anchor="ctr"/>
+          <a:lstStyle/>
+          <a:p>
+            <a:pPr indent="0" marL="0">
+              <a:buNone/>
+            </a:pPr>
+            <a:r>
+              <a:rPr lang="en-US" sz="1500" dirty="0">
+                <a:solidFill>
+                  <a:srgbClr val="E8EDF2"/>
+                </a:solidFill>
+                <a:latin typeface="Malgun Gothic" pitchFamily="34" charset="0"/>
+                <a:ea typeface="Malgun Gothic" pitchFamily="34" charset="-122"/>
+                <a:cs typeface="Malgun Gothic" pitchFamily="34" charset="-120"/>
+              </a:rPr>
+              <a:t>오류 주소·기대값·실제값·diff 출력, 필요시 이메일 알림</a:t>
+            </a:r>
+            <a:endParaRPr lang="en-US" sz="1500" dirty="0"/>
+          </a:p>
+        </p:txBody>
+      </p:sp>
+      <p:sp>
+        <p:nvSpPr>
+          <p:cNvPr id="11" name="Shape 9"/>
+          <p:cNvSpPr/>
+          <p:nvPr/>
+        </p:nvSpPr>
+        <p:spPr>
+          <a:xfrm>
+            <a:off x="548640" y="4096512"/>
+            <a:ext cx="11064240" cy="868680"/>
           </a:xfrm>
           <a:prstGeom prst="roundRect">
             <a:avLst>
-              <a:gd name="adj" fmla="val 14545"/>
-            </a:avLst>
-          </a:prstGeom>
-          <a:solidFill>
-            <a:srgbClr val="4FB0C6"/>
-          </a:solidFill>
-          <a:ln/>
-        </p:spPr>
-        <p:txBody>
-          <a:bodyPr wrap="square" rtlCol="0" anchor="ctr"/>
-          <a:lstStyle/>
-          <a:p>
-            <a:pPr algn="ctr" indent="0" marL="0">
-              <a:buNone/>
-            </a:pPr>
-            <a:r>
-              <a:rPr lang="en-US" sz="1700" b="1" dirty="0">
-                <a:solidFill>
-                  <a:srgbClr val="13161C"/>
-                </a:solidFill>
-                <a:latin typeface="Courier New" pitchFamily="34" charset="0"/>
-                <a:ea typeface="Courier New" pitchFamily="34" charset="-122"/>
-                <a:cs typeface="Courier New" pitchFamily="34" charset="-120"/>
-              </a:rPr>
-              <a:t>Ex 2</a:t>
-            </a:r>
-            <a:endParaRPr lang="en-US" sz="1700" dirty="0"/>
-          </a:p>
-        </p:txBody>
-      </p:sp>
-      <p:sp>
-        <p:nvSpPr>
-          <p:cNvPr id="10" name="Text 8"/>
-          <p:cNvSpPr/>
-          <p:nvPr/>
-        </p:nvSpPr>
-        <p:spPr>
-          <a:xfrm>
-            <a:off x="7909560" y="1773936"/>
-            <a:ext cx="3474720" cy="822960"/>
-          </a:xfrm>
-          <a:prstGeom prst="rect">
-            <a:avLst/>
-          </a:prstGeom>
-          <a:noFill/>
-          <a:ln/>
-        </p:spPr>
-        <p:txBody>
-          <a:bodyPr wrap="square" lIns="0" tIns="0" rIns="0" bIns="0" rtlCol="0" anchor="t"/>
-          <a:lstStyle/>
-          <a:p>
-            <a:pPr indent="0" marL="0">
-              <a:buNone/>
-            </a:pPr>
-            <a:r>
-              <a:rPr lang="en-US" sz="1700" b="1" dirty="0">
-                <a:solidFill>
-                  <a:srgbClr val="E8EDF2"/>
-                </a:solidFill>
-                <a:latin typeface="Malgun Gothic" pitchFamily="34" charset="0"/>
-                <a:ea typeface="Malgun Gothic" pitchFamily="34" charset="-122"/>
-                <a:cs typeface="Malgun Gothic" pitchFamily="34" charset="-120"/>
-              </a:rPr>
-              <a:t>반환값 = 고유 인덱스</a:t>
-            </a:r>
-            <a:endParaRPr lang="en-US" sz="1700" dirty="0"/>
-          </a:p>
-        </p:txBody>
-      </p:sp>
-      <p:sp>
-        <p:nvSpPr>
-          <p:cNvPr id="11" name="Text 9"/>
-          <p:cNvSpPr/>
-          <p:nvPr/>
-        </p:nvSpPr>
-        <p:spPr>
-          <a:xfrm>
-            <a:off x="6565392" y="2651760"/>
-            <a:ext cx="4791456" cy="731520"/>
-          </a:xfrm>
-          <a:prstGeom prst="rect">
-            <a:avLst/>
-          </a:prstGeom>
-          <a:noFill/>
-          <a:ln/>
-        </p:spPr>
-        <p:txBody>
-          <a:bodyPr wrap="square" lIns="0" tIns="0" rIns="0" bIns="0" rtlCol="0" anchor="t"/>
-          <a:lstStyle/>
-          <a:p>
-            <a:pPr indent="0" marL="0">
-              <a:lnSpc>
-                <a:spcPct val="110000"/>
-              </a:lnSpc>
-              <a:buNone/>
-            </a:pPr>
-            <a:r>
-              <a:rPr lang="en-US" sz="1400" dirty="0">
-                <a:solidFill>
-                  <a:srgbClr val="9AA6B2"/>
-                </a:solidFill>
-                <a:latin typeface="Malgun Gothic" pitchFamily="34" charset="0"/>
-                <a:ea typeface="Malgun Gothic" pitchFamily="34" charset="-122"/>
-                <a:cs typeface="Malgun Gothic" pitchFamily="34" charset="-120"/>
-              </a:rPr>
-              <a:t>atomicAdd 반환 idx를 출력해 겹치지 않음 확인</a:t>
-            </a:r>
-            <a:endParaRPr lang="en-US" sz="1400" dirty="0"/>
-          </a:p>
-        </p:txBody>
-      </p:sp>
-      <p:sp>
-        <p:nvSpPr>
-          <p:cNvPr id="12" name="Shape 10"/>
-          <p:cNvSpPr/>
-          <p:nvPr/>
-        </p:nvSpPr>
-        <p:spPr>
-          <a:xfrm>
-            <a:off x="548640" y="3840480"/>
-            <a:ext cx="5303520" cy="1965960"/>
-          </a:xfrm>
-          <a:prstGeom prst="roundRect">
-            <a:avLst>
-              <a:gd name="adj" fmla="val 3721"/>
+              <a:gd name="adj" fmla="val 7368"/>
             </a:avLst>
           </a:prstGeom>
           <a:solidFill>
@@ -2552,142 +2588,96 @@
       </p:sp>
       <p:sp>
         <p:nvSpPr>
+          <p:cNvPr id="12" name="Text 10"/>
+          <p:cNvSpPr/>
+          <p:nvPr/>
+        </p:nvSpPr>
+        <p:spPr>
+          <a:xfrm>
+            <a:off x="822960" y="4206240"/>
+            <a:ext cx="3108960" cy="640080"/>
+          </a:xfrm>
+          <a:prstGeom prst="rect">
+            <a:avLst/>
+          </a:prstGeom>
+          <a:noFill/>
+          <a:ln/>
+        </p:spPr>
+        <p:txBody>
+          <a:bodyPr wrap="square" lIns="0" tIns="0" rIns="0" bIns="0" rtlCol="0" anchor="ctr"/>
+          <a:lstStyle/>
+          <a:p>
+            <a:pPr indent="0" marL="0">
+              <a:buNone/>
+            </a:pPr>
+            <a:r>
+              <a:rPr lang="en-US" sz="1700" b="1" dirty="0">
+                <a:solidFill>
+                  <a:srgbClr val="E0A458"/>
+                </a:solidFill>
+                <a:latin typeface="Malgun Gothic" pitchFamily="34" charset="0"/>
+                <a:ea typeface="Malgun Gothic" pitchFamily="34" charset="-122"/>
+                <a:cs typeface="Malgun Gothic" pitchFamily="34" charset="-120"/>
+              </a:rPr>
+              <a:t>카운터 재초기화</a:t>
+            </a:r>
+            <a:endParaRPr lang="en-US" sz="1700" dirty="0"/>
+          </a:p>
+        </p:txBody>
+      </p:sp>
+      <p:sp>
+        <p:nvSpPr>
           <p:cNvPr id="13" name="Text 11"/>
           <p:cNvSpPr/>
           <p:nvPr/>
         </p:nvSpPr>
         <p:spPr>
           <a:xfrm>
-            <a:off x="804672" y="4041648"/>
-            <a:ext cx="1188720" cy="502920"/>
+            <a:off x="4114800" y="4206240"/>
+            <a:ext cx="7223760" cy="640080"/>
+          </a:xfrm>
+          <a:prstGeom prst="rect">
+            <a:avLst/>
+          </a:prstGeom>
+          <a:noFill/>
+          <a:ln/>
+        </p:spPr>
+        <p:txBody>
+          <a:bodyPr wrap="square" lIns="0" tIns="0" rIns="0" bIns="0" rtlCol="0" anchor="ctr"/>
+          <a:lstStyle/>
+          <a:p>
+            <a:pPr indent="0" marL="0">
+              <a:buNone/>
+            </a:pPr>
+            <a:r>
+              <a:rPr lang="en-US" sz="1500" dirty="0">
+                <a:solidFill>
+                  <a:srgbClr val="E8EDF2"/>
+                </a:solidFill>
+                <a:latin typeface="Malgun Gothic" pitchFamily="34" charset="0"/>
+                <a:ea typeface="Malgun Gothic" pitchFamily="34" charset="-122"/>
+                <a:cs typeface="Malgun Gothic" pitchFamily="34" charset="-120"/>
+              </a:rPr>
+              <a:t>cudaMemset으로 err_count 등을 0으로 (다음 검사 준비)</a:t>
+            </a:r>
+            <a:endParaRPr lang="en-US" sz="1500" dirty="0"/>
+          </a:p>
+        </p:txBody>
+      </p:sp>
+      <p:sp>
+        <p:nvSpPr>
+          <p:cNvPr id="14" name="Shape 12"/>
+          <p:cNvSpPr/>
+          <p:nvPr/>
+        </p:nvSpPr>
+        <p:spPr>
+          <a:xfrm>
+            <a:off x="548640" y="5093208"/>
+            <a:ext cx="11064240" cy="868680"/>
           </a:xfrm>
           <a:prstGeom prst="roundRect">
             <a:avLst>
-              <a:gd name="adj" fmla="val 14545"/>
-            </a:avLst>
-          </a:prstGeom>
-          <a:solidFill>
-            <a:srgbClr val="E0A458"/>
-          </a:solidFill>
-          <a:ln/>
-        </p:spPr>
-        <p:txBody>
-          <a:bodyPr wrap="square" rtlCol="0" anchor="ctr"/>
-          <a:lstStyle/>
-          <a:p>
-            <a:pPr algn="ctr" indent="0" marL="0">
-              <a:buNone/>
-            </a:pPr>
-            <a:r>
-              <a:rPr lang="en-US" sz="1700" b="1" dirty="0">
-                <a:solidFill>
-                  <a:srgbClr val="13161C"/>
-                </a:solidFill>
-                <a:latin typeface="Courier New" pitchFamily="34" charset="0"/>
-                <a:ea typeface="Courier New" pitchFamily="34" charset="-122"/>
-                <a:cs typeface="Courier New" pitchFamily="34" charset="-120"/>
-              </a:rPr>
-              <a:t>Ex 3</a:t>
-            </a:r>
-            <a:endParaRPr lang="en-US" sz="1700" dirty="0"/>
-          </a:p>
-        </p:txBody>
-      </p:sp>
-      <p:sp>
-        <p:nvSpPr>
-          <p:cNvPr id="14" name="Text 12"/>
-          <p:cNvSpPr/>
-          <p:nvPr/>
-        </p:nvSpPr>
-        <p:spPr>
-          <a:xfrm>
-            <a:off x="2148840" y="4059936"/>
-            <a:ext cx="3474720" cy="822960"/>
-          </a:xfrm>
-          <a:prstGeom prst="rect">
-            <a:avLst/>
-          </a:prstGeom>
-          <a:noFill/>
-          <a:ln/>
-        </p:spPr>
-        <p:txBody>
-          <a:bodyPr wrap="square" lIns="0" tIns="0" rIns="0" bIns="0" rtlCol="0" anchor="t"/>
-          <a:lstStyle/>
-          <a:p>
-            <a:pPr indent="0" marL="0">
-              <a:buNone/>
-            </a:pPr>
-            <a:r>
-              <a:rPr lang="en-US" sz="1700" b="1" dirty="0">
-                <a:solidFill>
-                  <a:srgbClr val="E8EDF2"/>
-                </a:solidFill>
-                <a:latin typeface="Malgun Gothic" pitchFamily="34" charset="0"/>
-                <a:ea typeface="Malgun Gothic" pitchFamily="34" charset="-122"/>
-                <a:cs typeface="Malgun Gothic" pitchFamily="34" charset="-120"/>
-              </a:rPr>
-              <a:t>CUERR가 잡는 순간</a:t>
-            </a:r>
-            <a:endParaRPr lang="en-US" sz="1700" dirty="0"/>
-          </a:p>
-        </p:txBody>
-      </p:sp>
-      <p:sp>
-        <p:nvSpPr>
-          <p:cNvPr id="15" name="Text 13"/>
-          <p:cNvSpPr/>
-          <p:nvPr/>
-        </p:nvSpPr>
-        <p:spPr>
-          <a:xfrm>
-            <a:off x="804672" y="4937760"/>
-            <a:ext cx="4791456" cy="731520"/>
-          </a:xfrm>
-          <a:prstGeom prst="rect">
-            <a:avLst/>
-          </a:prstGeom>
-          <a:noFill/>
-          <a:ln/>
-        </p:spPr>
-        <p:txBody>
-          <a:bodyPr wrap="square" lIns="0" tIns="0" rIns="0" bIns="0" rtlCol="0" anchor="t"/>
-          <a:lstStyle/>
-          <a:p>
-            <a:pPr indent="0" marL="0">
-              <a:lnSpc>
-                <a:spcPct val="110000"/>
-              </a:lnSpc>
-              <a:buNone/>
-            </a:pPr>
-            <a:r>
-              <a:rPr lang="en-US" sz="1400" dirty="0">
-                <a:solidFill>
-                  <a:srgbClr val="9AA6B2"/>
-                </a:solidFill>
-                <a:latin typeface="Malgun Gothic" pitchFamily="34" charset="0"/>
-                <a:ea typeface="Malgun Gothic" pitchFamily="34" charset="-122"/>
-                <a:cs typeface="Malgun Gothic" pitchFamily="34" charset="-120"/>
-              </a:rPr>
-              <a:t>cudaMemcpy 크기를 틀리게 해 오류 메시지 유발</a:t>
-            </a:r>
-            <a:endParaRPr lang="en-US" sz="1400" dirty="0"/>
-          </a:p>
-        </p:txBody>
-      </p:sp>
-      <p:sp>
-        <p:nvSpPr>
-          <p:cNvPr id="16" name="Shape 14"/>
-          <p:cNvSpPr/>
-          <p:nvPr/>
-        </p:nvSpPr>
-        <p:spPr>
-          <a:xfrm>
-            <a:off x="6309360" y="3840480"/>
-            <a:ext cx="5303520" cy="1965960"/>
-          </a:xfrm>
-          <a:prstGeom prst="roundRect">
-            <a:avLst>
-              <a:gd name="adj" fmla="val 3721"/>
+              <a:gd name="adj" fmla="val 7368"/>
             </a:avLst>
           </a:prstGeom>
           <a:solidFill>
@@ -2698,115 +2688,108 @@
       </p:sp>
       <p:sp>
         <p:nvSpPr>
+          <p:cNvPr id="15" name="Text 13"/>
+          <p:cNvSpPr/>
+          <p:nvPr/>
+        </p:nvSpPr>
+        <p:spPr>
+          <a:xfrm>
+            <a:off x="822960" y="5202936"/>
+            <a:ext cx="3108960" cy="640080"/>
+          </a:xfrm>
+          <a:prstGeom prst="rect">
+            <a:avLst/>
+          </a:prstGeom>
+          <a:noFill/>
+          <a:ln/>
+        </p:spPr>
+        <p:txBody>
+          <a:bodyPr wrap="square" lIns="0" tIns="0" rIns="0" bIns="0" rtlCol="0" anchor="ctr"/>
+          <a:lstStyle/>
+          <a:p>
+            <a:pPr indent="0" marL="0">
+              <a:buNone/>
+            </a:pPr>
+            <a:r>
+              <a:rPr lang="en-US" sz="1700" b="1" dirty="0">
+                <a:solidFill>
+                  <a:srgbClr val="E0645B"/>
+                </a:solidFill>
+                <a:latin typeface="Malgun Gothic" pitchFamily="34" charset="0"/>
+                <a:ea typeface="Malgun Gothic" pitchFamily="34" charset="-122"/>
+                <a:cs typeface="Malgun Gothic" pitchFamily="34" charset="-120"/>
+              </a:rPr>
+              <a:t>필요시 안전 종료</a:t>
+            </a:r>
+            <a:endParaRPr lang="en-US" sz="1700" dirty="0"/>
+          </a:p>
+        </p:txBody>
+      </p:sp>
+      <p:sp>
+        <p:nvSpPr>
+          <p:cNvPr id="16" name="Text 14"/>
+          <p:cNvSpPr/>
+          <p:nvPr/>
+        </p:nvSpPr>
+        <p:spPr>
+          <a:xfrm>
+            <a:off x="4114800" y="5202936"/>
+            <a:ext cx="7223760" cy="640080"/>
+          </a:xfrm>
+          <a:prstGeom prst="rect">
+            <a:avLst/>
+          </a:prstGeom>
+          <a:noFill/>
+          <a:ln/>
+        </p:spPr>
+        <p:txBody>
+          <a:bodyPr wrap="square" lIns="0" tIns="0" rIns="0" bIns="0" rtlCol="0" anchor="ctr"/>
+          <a:lstStyle/>
+          <a:p>
+            <a:pPr indent="0" marL="0">
+              <a:buNone/>
+            </a:pPr>
+            <a:r>
+              <a:rPr lang="en-US" sz="1500" dirty="0">
+                <a:solidFill>
+                  <a:srgbClr val="E8EDF2"/>
+                </a:solidFill>
+                <a:latin typeface="Malgun Gothic" pitchFamily="34" charset="0"/>
+                <a:ea typeface="Malgun Gothic" pitchFamily="34" charset="-122"/>
+                <a:cs typeface="Malgun Gothic" pitchFamily="34" charset="-120"/>
+              </a:rPr>
+              <a:t>exit_on_error면 cudaDeviceReset 후 종료 (tests.cpp:196)</a:t>
+            </a:r>
+            <a:endParaRPr lang="en-US" sz="1500" dirty="0"/>
+          </a:p>
+        </p:txBody>
+      </p:sp>
+      <p:sp>
+        <p:nvSpPr>
           <p:cNvPr id="17" name="Text 15"/>
           <p:cNvSpPr/>
           <p:nvPr/>
         </p:nvSpPr>
         <p:spPr>
           <a:xfrm>
-            <a:off x="6565392" y="4041648"/>
-            <a:ext cx="1188720" cy="502920"/>
-          </a:xfrm>
-          <a:prstGeom prst="roundRect">
-            <a:avLst>
-              <a:gd name="adj" fmla="val 14545"/>
-            </a:avLst>
-          </a:prstGeom>
-          <a:solidFill>
-            <a:srgbClr val="8CC63F"/>
-          </a:solidFill>
-          <a:ln/>
-        </p:spPr>
-        <p:txBody>
-          <a:bodyPr wrap="square" rtlCol="0" anchor="ctr"/>
-          <a:lstStyle/>
-          <a:p>
-            <a:pPr algn="ctr" indent="0" marL="0">
-              <a:buNone/>
-            </a:pPr>
-            <a:r>
-              <a:rPr lang="en-US" sz="1700" b="1" dirty="0">
-                <a:solidFill>
-                  <a:srgbClr val="13161C"/>
-                </a:solidFill>
-                <a:latin typeface="Courier New" pitchFamily="34" charset="0"/>
-                <a:ea typeface="Courier New" pitchFamily="34" charset="-122"/>
-                <a:cs typeface="Courier New" pitchFamily="34" charset="-120"/>
-              </a:rPr>
-              <a:t>Ex 4</a:t>
-            </a:r>
-            <a:endParaRPr lang="en-US" sz="1700" dirty="0"/>
-          </a:p>
-        </p:txBody>
-      </p:sp>
-      <p:sp>
-        <p:nvSpPr>
-          <p:cNvPr id="18" name="Text 16"/>
-          <p:cNvSpPr/>
-          <p:nvPr/>
-        </p:nvSpPr>
-        <p:spPr>
-          <a:xfrm>
-            <a:off x="7909560" y="4059936"/>
-            <a:ext cx="3474720" cy="822960"/>
-          </a:xfrm>
-          <a:prstGeom prst="rect">
-            <a:avLst/>
-          </a:prstGeom>
-          <a:noFill/>
-          <a:ln/>
-        </p:spPr>
-        <p:txBody>
-          <a:bodyPr wrap="square" lIns="0" tIns="0" rIns="0" bIns="0" rtlCol="0" anchor="t"/>
-          <a:lstStyle/>
-          <a:p>
-            <a:pPr indent="0" marL="0">
-              <a:buNone/>
-            </a:pPr>
-            <a:r>
-              <a:rPr lang="en-US" sz="1700" b="1" dirty="0">
-                <a:solidFill>
-                  <a:srgbClr val="E8EDF2"/>
-                </a:solidFill>
-                <a:latin typeface="Malgun Gothic" pitchFamily="34" charset="0"/>
-                <a:ea typeface="Malgun Gothic" pitchFamily="34" charset="-122"/>
-                <a:cs typeface="Malgun Gothic" pitchFamily="34" charset="-120"/>
-              </a:rPr>
-              <a:t>비동기 오류 &amp; 동기화</a:t>
-            </a:r>
-            <a:endParaRPr lang="en-US" sz="1700" dirty="0"/>
-          </a:p>
-        </p:txBody>
-      </p:sp>
-      <p:sp>
-        <p:nvSpPr>
-          <p:cNvPr id="19" name="Text 17"/>
-          <p:cNvSpPr/>
-          <p:nvPr/>
-        </p:nvSpPr>
-        <p:spPr>
-          <a:xfrm>
-            <a:off x="6565392" y="4937760"/>
-            <a:ext cx="4791456" cy="731520"/>
-          </a:xfrm>
-          <a:prstGeom prst="rect">
-            <a:avLst/>
-          </a:prstGeom>
-          <a:noFill/>
-          <a:ln/>
-        </p:spPr>
-        <p:txBody>
-          <a:bodyPr wrap="square" lIns="0" tIns="0" rIns="0" bIns="0" rtlCol="0" anchor="t"/>
-          <a:lstStyle/>
-          <a:p>
-            <a:pPr indent="0" marL="0">
-              <a:lnSpc>
-                <a:spcPct val="110000"/>
-              </a:lnSpc>
-              <a:buNone/>
-            </a:pPr>
-            <a:r>
-              <a:rPr lang="en-US" sz="1400" dirty="0">
+            <a:off x="548640" y="6172200"/>
+            <a:ext cx="11064240" cy="365760"/>
+          </a:xfrm>
+          <a:prstGeom prst="rect">
+            <a:avLst/>
+          </a:prstGeom>
+          <a:noFill/>
+          <a:ln/>
+        </p:spPr>
+        <p:txBody>
+          <a:bodyPr wrap="square" lIns="0" tIns="0" rIns="0" bIns="0" rtlCol="0" anchor="ctr"/>
+          <a:lstStyle/>
+          <a:p>
+            <a:pPr indent="0" marL="0">
+              <a:buNone/>
+            </a:pPr>
+            <a:r>
+              <a:rPr lang="en-US" sz="1300" i="1" dirty="0">
                 <a:solidFill>
                   <a:srgbClr val="9AA6B2"/>
                 </a:solidFill>
@@ -2814,46 +2797,7 @@
                 <a:ea typeface="Malgun Gothic" pitchFamily="34" charset="-122"/>
                 <a:cs typeface="Malgun Gothic" pitchFamily="34" charset="-120"/>
               </a:rPr>
-              <a:t>커널 guard 제거 → SYNC_CUERR_KERNEL이 잡음</a:t>
-            </a:r>
-            <a:endParaRPr lang="en-US" sz="1400" dirty="0"/>
-          </a:p>
-        </p:txBody>
-      </p:sp>
-      <p:sp>
-        <p:nvSpPr>
-          <p:cNvPr id="20" name="Text 18"/>
-          <p:cNvSpPr/>
-          <p:nvPr/>
-        </p:nvSpPr>
-        <p:spPr>
-          <a:xfrm>
-            <a:off x="548640" y="5943600"/>
-            <a:ext cx="11064240" cy="365760"/>
-          </a:xfrm>
-          <a:prstGeom prst="rect">
-            <a:avLst/>
-          </a:prstGeom>
-          <a:noFill/>
-          <a:ln/>
-        </p:spPr>
-        <p:txBody>
-          <a:bodyPr wrap="square" lIns="0" tIns="0" rIns="0" bIns="0" rtlCol="0" anchor="ctr"/>
-          <a:lstStyle/>
-          <a:p>
-            <a:pPr algn="ctr" indent="0" marL="0">
-              <a:buNone/>
-            </a:pPr>
-            <a:r>
-              <a:rPr lang="en-US" sz="1300" i="1" dirty="0">
-                <a:solidFill>
-                  <a:srgbClr val="9AA6B2"/>
-                </a:solidFill>
-                <a:latin typeface="Malgun Gothic" pitchFamily="34" charset="0"/>
-                <a:ea typeface="Malgun Gothic" pitchFamily="34" charset="-122"/>
-                <a:cs typeface="Malgun Gothic" pitchFamily="34" charset="-120"/>
-              </a:rPr>
-              <a:t>Ex 1은 실행마다 결과가 달라집니다 — 그 자체가 경쟁 조건의 증거입니다.</a:t>
+              <a:t>장난감 예제와 프로덕션 코드의 차이 — 오류를 만나도 무너지지 않고 다음 노드·다음 검사를 준비합니다.</a:t>
             </a:r>
             <a:endParaRPr lang="en-US" sz="1300" dirty="0"/>
           </a:p>
@@ -2928,7 +2872,7 @@
                 <a:ea typeface="Courier New" pitchFamily="34" charset="-122"/>
                 <a:cs typeface="Courier New" pitchFamily="34" charset="-120"/>
               </a:rPr>
-              <a:t>10</a:t>
+              <a:t>9</a:t>
             </a:r>
             <a:endParaRPr lang="en-US" sz="2200" dirty="0"/>
           </a:p>
@@ -2967,7 +2911,7 @@
                 <a:ea typeface="Malgun Gothic" pitchFamily="34" charset="-122"/>
                 <a:cs typeface="Malgun Gothic" pitchFamily="34" charset="-120"/>
               </a:rPr>
-              <a:t>핵심 정리 &amp; 자주 하는 실수</a:t>
+              <a:t>실습 미리보기 · Lab 4</a:t>
             </a:r>
             <a:endParaRPr lang="en-US" sz="3000" dirty="0"/>
           </a:p>
@@ -2981,12 +2925,12 @@
         </p:nvSpPr>
         <p:spPr>
           <a:xfrm>
-            <a:off x="548640" y="1600200"/>
-            <a:ext cx="5349240" cy="4114800"/>
+            <a:off x="548640" y="1554480"/>
+            <a:ext cx="5303520" cy="1965960"/>
           </a:xfrm>
           <a:prstGeom prst="roundRect">
             <a:avLst>
-              <a:gd name="adj" fmla="val 1778"/>
+              <a:gd name="adj" fmla="val 3721"/>
             </a:avLst>
           </a:prstGeom>
           <a:solidFill>
@@ -3003,154 +2947,136 @@
         </p:nvSpPr>
         <p:spPr>
           <a:xfrm>
-            <a:off x="822960" y="1828800"/>
-            <a:ext cx="4800600" cy="457200"/>
-          </a:xfrm>
-          <a:prstGeom prst="rect">
-            <a:avLst/>
-          </a:prstGeom>
-          <a:noFill/>
-          <a:ln/>
-        </p:spPr>
-        <p:txBody>
-          <a:bodyPr wrap="square" lIns="0" tIns="0" rIns="0" bIns="0" rtlCol="0" anchor="ctr"/>
-          <a:lstStyle/>
-          <a:p>
-            <a:pPr indent="0" marL="0">
-              <a:buNone/>
-            </a:pPr>
-            <a:r>
-              <a:rPr lang="en-US" sz="2000" b="1" dirty="0">
-                <a:solidFill>
-                  <a:srgbClr val="8CC63F"/>
-                </a:solidFill>
-                <a:latin typeface="Malgun Gothic" pitchFamily="34" charset="0"/>
-                <a:ea typeface="Malgun Gothic" pitchFamily="34" charset="-122"/>
-                <a:cs typeface="Malgun Gothic" pitchFamily="34" charset="-120"/>
-              </a:rPr>
-              <a:t>기억할 것</a:t>
-            </a:r>
-            <a:endParaRPr lang="en-US" sz="2000" dirty="0"/>
-          </a:p>
-        </p:txBody>
-      </p:sp>
-      <p:sp>
-        <p:nvSpPr>
-          <p:cNvPr id="6" name="Text 4"/>
-          <p:cNvSpPr/>
-          <p:nvPr/>
-        </p:nvSpPr>
-        <p:spPr>
-          <a:xfrm>
-            <a:off x="822960" y="2423160"/>
-            <a:ext cx="4800600" cy="3108960"/>
-          </a:xfrm>
-          <a:prstGeom prst="rect">
-            <a:avLst/>
-          </a:prstGeom>
-          <a:noFill/>
-          <a:ln/>
-        </p:spPr>
-        <p:txBody>
-          <a:bodyPr wrap="square" lIns="0" tIns="0" rIns="0" bIns="0" rtlCol="0" anchor="t"/>
-          <a:lstStyle/>
-          <a:p>
-            <a:pPr marL="342900" indent="-342900">
-              <a:spcAft>
-                <a:spcPts val="1200"/>
-              </a:spcAft>
-              <a:buSzPct val="100000"/>
-              <a:buChar char="✓"/>
-            </a:pPr>
-            <a:r>
-              <a:rPr lang="en-US" sz="1550" dirty="0">
-                <a:solidFill>
-                  <a:srgbClr val="E8EDF2"/>
-                </a:solidFill>
-                <a:latin typeface="Malgun Gothic" pitchFamily="34" charset="0"/>
-                <a:ea typeface="Malgun Gothic" pitchFamily="34" charset="-122"/>
-                <a:cs typeface="Malgun Gothic" pitchFamily="34" charset="-120"/>
-              </a:rPr>
-              <a:t>동시 접근 카운트엔 atomicAdd</a:t>
-            </a:r>
-            <a:endParaRPr lang="en-US" sz="1550" dirty="0"/>
-          </a:p>
-          <a:p>
-            <a:pPr marL="342900" indent="-342900">
-              <a:spcAft>
-                <a:spcPts val="1200"/>
-              </a:spcAft>
-              <a:buSzPct val="100000"/>
-              <a:buChar char="✓"/>
-            </a:pPr>
-            <a:r>
-              <a:rPr lang="en-US" sz="1550" dirty="0">
-                <a:solidFill>
-                  <a:srgbClr val="E8EDF2"/>
-                </a:solidFill>
-                <a:latin typeface="Malgun Gothic" pitchFamily="34" charset="0"/>
-                <a:ea typeface="Malgun Gothic" pitchFamily="34" charset="-122"/>
-                <a:cs typeface="Malgun Gothic" pitchFamily="34" charset="-120"/>
-              </a:rPr>
-              <a:t>atomicAdd 반환값 = 고유 인덱스</a:t>
-            </a:r>
-            <a:endParaRPr lang="en-US" sz="1550" dirty="0"/>
-          </a:p>
-          <a:p>
-            <a:pPr marL="342900" indent="-342900">
-              <a:spcAft>
-                <a:spcPts val="1200"/>
-              </a:spcAft>
-              <a:buSzPct val="100000"/>
-              <a:buChar char="✓"/>
-            </a:pPr>
-            <a:r>
-              <a:rPr lang="en-US" sz="1550" dirty="0">
-                <a:solidFill>
-                  <a:srgbClr val="E8EDF2"/>
-                </a:solidFill>
-                <a:latin typeface="Malgun Gothic" pitchFamily="34" charset="0"/>
-                <a:ea typeface="Malgun Gothic" pitchFamily="34" charset="-122"/>
-                <a:cs typeface="Malgun Gothic" pitchFamily="34" charset="-120"/>
-              </a:rPr>
-              <a:t>커널 오류는 동기화 후에만 잡힌다</a:t>
-            </a:r>
-            <a:endParaRPr lang="en-US" sz="1550" dirty="0"/>
-          </a:p>
-          <a:p>
-            <a:pPr marL="342900" indent="-342900">
-              <a:buSzPct val="100000"/>
-              <a:buChar char="✓"/>
-            </a:pPr>
-            <a:r>
-              <a:rPr lang="en-US" sz="1550" dirty="0">
-                <a:solidFill>
-                  <a:srgbClr val="E8EDF2"/>
-                </a:solidFill>
-                <a:latin typeface="Malgun Gothic" pitchFamily="34" charset="0"/>
-                <a:ea typeface="Malgun Gothic" pitchFamily="34" charset="-122"/>
-                <a:cs typeface="Malgun Gothic" pitchFamily="34" charset="-120"/>
-              </a:rPr>
-              <a:t>모든 CUDA 호출을 CUERR로 감싸기</a:t>
-            </a:r>
-            <a:endParaRPr lang="en-US" sz="1550" dirty="0"/>
-          </a:p>
-        </p:txBody>
-      </p:sp>
-      <p:sp>
-        <p:nvSpPr>
-          <p:cNvPr id="7" name="Shape 5"/>
-          <p:cNvSpPr/>
-          <p:nvPr/>
-        </p:nvSpPr>
-        <p:spPr>
-          <a:xfrm>
-            <a:off x="6263640" y="1600200"/>
-            <a:ext cx="5349240" cy="4114800"/>
+            <a:off x="804672" y="1755648"/>
+            <a:ext cx="1188720" cy="502920"/>
           </a:xfrm>
           <a:prstGeom prst="roundRect">
             <a:avLst>
-              <a:gd name="adj" fmla="val 1778"/>
+              <a:gd name="adj" fmla="val 14545"/>
+            </a:avLst>
+          </a:prstGeom>
+          <a:solidFill>
+            <a:srgbClr val="E0645B"/>
+          </a:solidFill>
+          <a:ln/>
+        </p:spPr>
+        <p:txBody>
+          <a:bodyPr wrap="square" rtlCol="0" anchor="ctr"/>
+          <a:lstStyle/>
+          <a:p>
+            <a:pPr algn="ctr" indent="0" marL="0">
+              <a:buNone/>
+            </a:pPr>
+            <a:r>
+              <a:rPr lang="en-US" sz="1700" b="1" dirty="0">
+                <a:solidFill>
+                  <a:srgbClr val="13161C"/>
+                </a:solidFill>
+                <a:latin typeface="Courier New" pitchFamily="34" charset="0"/>
+                <a:ea typeface="Courier New" pitchFamily="34" charset="-122"/>
+                <a:cs typeface="Courier New" pitchFamily="34" charset="-120"/>
+              </a:rPr>
+              <a:t>Ex 1</a:t>
+            </a:r>
+            <a:endParaRPr lang="en-US" sz="1700" dirty="0"/>
+          </a:p>
+        </p:txBody>
+      </p:sp>
+      <p:sp>
+        <p:nvSpPr>
+          <p:cNvPr id="6" name="Text 4"/>
+          <p:cNvSpPr/>
+          <p:nvPr/>
+        </p:nvSpPr>
+        <p:spPr>
+          <a:xfrm>
+            <a:off x="2148840" y="1773936"/>
+            <a:ext cx="3474720" cy="822960"/>
+          </a:xfrm>
+          <a:prstGeom prst="rect">
+            <a:avLst/>
+          </a:prstGeom>
+          <a:noFill/>
+          <a:ln/>
+        </p:spPr>
+        <p:txBody>
+          <a:bodyPr wrap="square" lIns="0" tIns="0" rIns="0" bIns="0" rtlCol="0" anchor="t"/>
+          <a:lstStyle/>
+          <a:p>
+            <a:pPr indent="0" marL="0">
+              <a:buNone/>
+            </a:pPr>
+            <a:r>
+              <a:rPr lang="en-US" sz="1700" b="1" dirty="0">
+                <a:solidFill>
+                  <a:srgbClr val="E8EDF2"/>
+                </a:solidFill>
+                <a:latin typeface="Malgun Gothic" pitchFamily="34" charset="0"/>
+                <a:ea typeface="Malgun Gothic" pitchFamily="34" charset="-122"/>
+                <a:cs typeface="Malgun Gothic" pitchFamily="34" charset="-120"/>
+              </a:rPr>
+              <a:t>경쟁 조건 재현</a:t>
+            </a:r>
+            <a:endParaRPr lang="en-US" sz="1700" dirty="0"/>
+          </a:p>
+        </p:txBody>
+      </p:sp>
+      <p:sp>
+        <p:nvSpPr>
+          <p:cNvPr id="7" name="Text 5"/>
+          <p:cNvSpPr/>
+          <p:nvPr/>
+        </p:nvSpPr>
+        <p:spPr>
+          <a:xfrm>
+            <a:off x="804672" y="2651760"/>
+            <a:ext cx="4791456" cy="731520"/>
+          </a:xfrm>
+          <a:prstGeom prst="rect">
+            <a:avLst/>
+          </a:prstGeom>
+          <a:noFill/>
+          <a:ln/>
+        </p:spPr>
+        <p:txBody>
+          <a:bodyPr wrap="square" lIns="0" tIns="0" rIns="0" bIns="0" rtlCol="0" anchor="t"/>
+          <a:lstStyle/>
+          <a:p>
+            <a:pPr indent="0" marL="0">
+              <a:lnSpc>
+                <a:spcPct val="110000"/>
+              </a:lnSpc>
+              <a:buNone/>
+            </a:pPr>
+            <a:r>
+              <a:rPr lang="en-US" sz="1400" dirty="0">
+                <a:solidFill>
+                  <a:srgbClr val="9AA6B2"/>
+                </a:solidFill>
+                <a:latin typeface="Malgun Gothic" pitchFamily="34" charset="0"/>
+                <a:ea typeface="Malgun Gothic" pitchFamily="34" charset="-122"/>
+                <a:cs typeface="Malgun Gothic" pitchFamily="34" charset="-120"/>
+              </a:rPr>
+              <a:t>atomicAdd를 일반 덧셈으로 바꿔 카운트가 틀어짐 확인</a:t>
+            </a:r>
+            <a:endParaRPr lang="en-US" sz="1400" dirty="0"/>
+          </a:p>
+        </p:txBody>
+      </p:sp>
+      <p:sp>
+        <p:nvSpPr>
+          <p:cNvPr id="8" name="Shape 6"/>
+          <p:cNvSpPr/>
+          <p:nvPr/>
+        </p:nvSpPr>
+        <p:spPr>
+          <a:xfrm>
+            <a:off x="6309360" y="1554480"/>
+            <a:ext cx="5303520" cy="1965960"/>
+          </a:xfrm>
+          <a:prstGeom prst="roundRect">
+            <a:avLst>
+              <a:gd name="adj" fmla="val 3721"/>
             </a:avLst>
           </a:prstGeom>
           <a:solidFill>
@@ -3161,14 +3087,430 @@
       </p:sp>
       <p:sp>
         <p:nvSpPr>
-          <p:cNvPr id="8" name="Text 6"/>
-          <p:cNvSpPr/>
-          <p:nvPr/>
-        </p:nvSpPr>
-        <p:spPr>
-          <a:xfrm>
-            <a:off x="6537960" y="1828800"/>
-            <a:ext cx="4800600" cy="457200"/>
+          <p:cNvPr id="9" name="Text 7"/>
+          <p:cNvSpPr/>
+          <p:nvPr/>
+        </p:nvSpPr>
+        <p:spPr>
+          <a:xfrm>
+            <a:off x="6565392" y="1755648"/>
+            <a:ext cx="1188720" cy="502920"/>
+          </a:xfrm>
+          <a:prstGeom prst="roundRect">
+            <a:avLst>
+              <a:gd name="adj" fmla="val 14545"/>
+            </a:avLst>
+          </a:prstGeom>
+          <a:solidFill>
+            <a:srgbClr val="4FB0C6"/>
+          </a:solidFill>
+          <a:ln/>
+        </p:spPr>
+        <p:txBody>
+          <a:bodyPr wrap="square" rtlCol="0" anchor="ctr"/>
+          <a:lstStyle/>
+          <a:p>
+            <a:pPr algn="ctr" indent="0" marL="0">
+              <a:buNone/>
+            </a:pPr>
+            <a:r>
+              <a:rPr lang="en-US" sz="1700" b="1" dirty="0">
+                <a:solidFill>
+                  <a:srgbClr val="13161C"/>
+                </a:solidFill>
+                <a:latin typeface="Courier New" pitchFamily="34" charset="0"/>
+                <a:ea typeface="Courier New" pitchFamily="34" charset="-122"/>
+                <a:cs typeface="Courier New" pitchFamily="34" charset="-120"/>
+              </a:rPr>
+              <a:t>Ex 2</a:t>
+            </a:r>
+            <a:endParaRPr lang="en-US" sz="1700" dirty="0"/>
+          </a:p>
+        </p:txBody>
+      </p:sp>
+      <p:sp>
+        <p:nvSpPr>
+          <p:cNvPr id="10" name="Text 8"/>
+          <p:cNvSpPr/>
+          <p:nvPr/>
+        </p:nvSpPr>
+        <p:spPr>
+          <a:xfrm>
+            <a:off x="7909560" y="1773936"/>
+            <a:ext cx="3474720" cy="822960"/>
+          </a:xfrm>
+          <a:prstGeom prst="rect">
+            <a:avLst/>
+          </a:prstGeom>
+          <a:noFill/>
+          <a:ln/>
+        </p:spPr>
+        <p:txBody>
+          <a:bodyPr wrap="square" lIns="0" tIns="0" rIns="0" bIns="0" rtlCol="0" anchor="t"/>
+          <a:lstStyle/>
+          <a:p>
+            <a:pPr indent="0" marL="0">
+              <a:buNone/>
+            </a:pPr>
+            <a:r>
+              <a:rPr lang="en-US" sz="1700" b="1" dirty="0">
+                <a:solidFill>
+                  <a:srgbClr val="E8EDF2"/>
+                </a:solidFill>
+                <a:latin typeface="Malgun Gothic" pitchFamily="34" charset="0"/>
+                <a:ea typeface="Malgun Gothic" pitchFamily="34" charset="-122"/>
+                <a:cs typeface="Malgun Gothic" pitchFamily="34" charset="-120"/>
+              </a:rPr>
+              <a:t>반환값 = 고유 인덱스</a:t>
+            </a:r>
+            <a:endParaRPr lang="en-US" sz="1700" dirty="0"/>
+          </a:p>
+        </p:txBody>
+      </p:sp>
+      <p:sp>
+        <p:nvSpPr>
+          <p:cNvPr id="11" name="Text 9"/>
+          <p:cNvSpPr/>
+          <p:nvPr/>
+        </p:nvSpPr>
+        <p:spPr>
+          <a:xfrm>
+            <a:off x="6565392" y="2651760"/>
+            <a:ext cx="4791456" cy="731520"/>
+          </a:xfrm>
+          <a:prstGeom prst="rect">
+            <a:avLst/>
+          </a:prstGeom>
+          <a:noFill/>
+          <a:ln/>
+        </p:spPr>
+        <p:txBody>
+          <a:bodyPr wrap="square" lIns="0" tIns="0" rIns="0" bIns="0" rtlCol="0" anchor="t"/>
+          <a:lstStyle/>
+          <a:p>
+            <a:pPr indent="0" marL="0">
+              <a:lnSpc>
+                <a:spcPct val="110000"/>
+              </a:lnSpc>
+              <a:buNone/>
+            </a:pPr>
+            <a:r>
+              <a:rPr lang="en-US" sz="1400" dirty="0">
+                <a:solidFill>
+                  <a:srgbClr val="9AA6B2"/>
+                </a:solidFill>
+                <a:latin typeface="Malgun Gothic" pitchFamily="34" charset="0"/>
+                <a:ea typeface="Malgun Gothic" pitchFamily="34" charset="-122"/>
+                <a:cs typeface="Malgun Gothic" pitchFamily="34" charset="-120"/>
+              </a:rPr>
+              <a:t>atomicAdd 반환 idx를 출력해 겹치지 않음 확인</a:t>
+            </a:r>
+            <a:endParaRPr lang="en-US" sz="1400" dirty="0"/>
+          </a:p>
+        </p:txBody>
+      </p:sp>
+      <p:sp>
+        <p:nvSpPr>
+          <p:cNvPr id="12" name="Shape 10"/>
+          <p:cNvSpPr/>
+          <p:nvPr/>
+        </p:nvSpPr>
+        <p:spPr>
+          <a:xfrm>
+            <a:off x="548640" y="3840480"/>
+            <a:ext cx="5303520" cy="1965960"/>
+          </a:xfrm>
+          <a:prstGeom prst="roundRect">
+            <a:avLst>
+              <a:gd name="adj" fmla="val 3721"/>
+            </a:avLst>
+          </a:prstGeom>
+          <a:solidFill>
+            <a:srgbClr val="1E232C"/>
+          </a:solidFill>
+          <a:ln/>
+        </p:spPr>
+      </p:sp>
+      <p:sp>
+        <p:nvSpPr>
+          <p:cNvPr id="13" name="Text 11"/>
+          <p:cNvSpPr/>
+          <p:nvPr/>
+        </p:nvSpPr>
+        <p:spPr>
+          <a:xfrm>
+            <a:off x="804672" y="4041648"/>
+            <a:ext cx="1188720" cy="502920"/>
+          </a:xfrm>
+          <a:prstGeom prst="roundRect">
+            <a:avLst>
+              <a:gd name="adj" fmla="val 14545"/>
+            </a:avLst>
+          </a:prstGeom>
+          <a:solidFill>
+            <a:srgbClr val="E0A458"/>
+          </a:solidFill>
+          <a:ln/>
+        </p:spPr>
+        <p:txBody>
+          <a:bodyPr wrap="square" rtlCol="0" anchor="ctr"/>
+          <a:lstStyle/>
+          <a:p>
+            <a:pPr algn="ctr" indent="0" marL="0">
+              <a:buNone/>
+            </a:pPr>
+            <a:r>
+              <a:rPr lang="en-US" sz="1700" b="1" dirty="0">
+                <a:solidFill>
+                  <a:srgbClr val="13161C"/>
+                </a:solidFill>
+                <a:latin typeface="Courier New" pitchFamily="34" charset="0"/>
+                <a:ea typeface="Courier New" pitchFamily="34" charset="-122"/>
+                <a:cs typeface="Courier New" pitchFamily="34" charset="-120"/>
+              </a:rPr>
+              <a:t>Ex 3</a:t>
+            </a:r>
+            <a:endParaRPr lang="en-US" sz="1700" dirty="0"/>
+          </a:p>
+        </p:txBody>
+      </p:sp>
+      <p:sp>
+        <p:nvSpPr>
+          <p:cNvPr id="14" name="Text 12"/>
+          <p:cNvSpPr/>
+          <p:nvPr/>
+        </p:nvSpPr>
+        <p:spPr>
+          <a:xfrm>
+            <a:off x="2148840" y="4059936"/>
+            <a:ext cx="3474720" cy="822960"/>
+          </a:xfrm>
+          <a:prstGeom prst="rect">
+            <a:avLst/>
+          </a:prstGeom>
+          <a:noFill/>
+          <a:ln/>
+        </p:spPr>
+        <p:txBody>
+          <a:bodyPr wrap="square" lIns="0" tIns="0" rIns="0" bIns="0" rtlCol="0" anchor="t"/>
+          <a:lstStyle/>
+          <a:p>
+            <a:pPr indent="0" marL="0">
+              <a:buNone/>
+            </a:pPr>
+            <a:r>
+              <a:rPr lang="en-US" sz="1700" b="1" dirty="0">
+                <a:solidFill>
+                  <a:srgbClr val="E8EDF2"/>
+                </a:solidFill>
+                <a:latin typeface="Malgun Gothic" pitchFamily="34" charset="0"/>
+                <a:ea typeface="Malgun Gothic" pitchFamily="34" charset="-122"/>
+                <a:cs typeface="Malgun Gothic" pitchFamily="34" charset="-120"/>
+              </a:rPr>
+              <a:t>CUERR가 잡는 순간</a:t>
+            </a:r>
+            <a:endParaRPr lang="en-US" sz="1700" dirty="0"/>
+          </a:p>
+        </p:txBody>
+      </p:sp>
+      <p:sp>
+        <p:nvSpPr>
+          <p:cNvPr id="15" name="Text 13"/>
+          <p:cNvSpPr/>
+          <p:nvPr/>
+        </p:nvSpPr>
+        <p:spPr>
+          <a:xfrm>
+            <a:off x="804672" y="4937760"/>
+            <a:ext cx="4791456" cy="731520"/>
+          </a:xfrm>
+          <a:prstGeom prst="rect">
+            <a:avLst/>
+          </a:prstGeom>
+          <a:noFill/>
+          <a:ln/>
+        </p:spPr>
+        <p:txBody>
+          <a:bodyPr wrap="square" lIns="0" tIns="0" rIns="0" bIns="0" rtlCol="0" anchor="t"/>
+          <a:lstStyle/>
+          <a:p>
+            <a:pPr indent="0" marL="0">
+              <a:lnSpc>
+                <a:spcPct val="110000"/>
+              </a:lnSpc>
+              <a:buNone/>
+            </a:pPr>
+            <a:r>
+              <a:rPr lang="en-US" sz="1400" dirty="0">
+                <a:solidFill>
+                  <a:srgbClr val="9AA6B2"/>
+                </a:solidFill>
+                <a:latin typeface="Malgun Gothic" pitchFamily="34" charset="0"/>
+                <a:ea typeface="Malgun Gothic" pitchFamily="34" charset="-122"/>
+                <a:cs typeface="Malgun Gothic" pitchFamily="34" charset="-120"/>
+              </a:rPr>
+              <a:t>cudaMemcpy 크기를 틀리게 해 오류 메시지 유발</a:t>
+            </a:r>
+            <a:endParaRPr lang="en-US" sz="1400" dirty="0"/>
+          </a:p>
+        </p:txBody>
+      </p:sp>
+      <p:sp>
+        <p:nvSpPr>
+          <p:cNvPr id="16" name="Shape 14"/>
+          <p:cNvSpPr/>
+          <p:nvPr/>
+        </p:nvSpPr>
+        <p:spPr>
+          <a:xfrm>
+            <a:off x="6309360" y="3840480"/>
+            <a:ext cx="5303520" cy="1965960"/>
+          </a:xfrm>
+          <a:prstGeom prst="roundRect">
+            <a:avLst>
+              <a:gd name="adj" fmla="val 3721"/>
+            </a:avLst>
+          </a:prstGeom>
+          <a:solidFill>
+            <a:srgbClr val="1E232C"/>
+          </a:solidFill>
+          <a:ln/>
+        </p:spPr>
+      </p:sp>
+      <p:sp>
+        <p:nvSpPr>
+          <p:cNvPr id="17" name="Text 15"/>
+          <p:cNvSpPr/>
+          <p:nvPr/>
+        </p:nvSpPr>
+        <p:spPr>
+          <a:xfrm>
+            <a:off x="6565392" y="4041648"/>
+            <a:ext cx="1188720" cy="502920"/>
+          </a:xfrm>
+          <a:prstGeom prst="roundRect">
+            <a:avLst>
+              <a:gd name="adj" fmla="val 14545"/>
+            </a:avLst>
+          </a:prstGeom>
+          <a:solidFill>
+            <a:srgbClr val="8CC63F"/>
+          </a:solidFill>
+          <a:ln/>
+        </p:spPr>
+        <p:txBody>
+          <a:bodyPr wrap="square" rtlCol="0" anchor="ctr"/>
+          <a:lstStyle/>
+          <a:p>
+            <a:pPr algn="ctr" indent="0" marL="0">
+              <a:buNone/>
+            </a:pPr>
+            <a:r>
+              <a:rPr lang="en-US" sz="1700" b="1" dirty="0">
+                <a:solidFill>
+                  <a:srgbClr val="13161C"/>
+                </a:solidFill>
+                <a:latin typeface="Courier New" pitchFamily="34" charset="0"/>
+                <a:ea typeface="Courier New" pitchFamily="34" charset="-122"/>
+                <a:cs typeface="Courier New" pitchFamily="34" charset="-120"/>
+              </a:rPr>
+              <a:t>Ex 4</a:t>
+            </a:r>
+            <a:endParaRPr lang="en-US" sz="1700" dirty="0"/>
+          </a:p>
+        </p:txBody>
+      </p:sp>
+      <p:sp>
+        <p:nvSpPr>
+          <p:cNvPr id="18" name="Text 16"/>
+          <p:cNvSpPr/>
+          <p:nvPr/>
+        </p:nvSpPr>
+        <p:spPr>
+          <a:xfrm>
+            <a:off x="7909560" y="4059936"/>
+            <a:ext cx="3474720" cy="822960"/>
+          </a:xfrm>
+          <a:prstGeom prst="rect">
+            <a:avLst/>
+          </a:prstGeom>
+          <a:noFill/>
+          <a:ln/>
+        </p:spPr>
+        <p:txBody>
+          <a:bodyPr wrap="square" lIns="0" tIns="0" rIns="0" bIns="0" rtlCol="0" anchor="t"/>
+          <a:lstStyle/>
+          <a:p>
+            <a:pPr indent="0" marL="0">
+              <a:buNone/>
+            </a:pPr>
+            <a:r>
+              <a:rPr lang="en-US" sz="1700" b="1" dirty="0">
+                <a:solidFill>
+                  <a:srgbClr val="E8EDF2"/>
+                </a:solidFill>
+                <a:latin typeface="Malgun Gothic" pitchFamily="34" charset="0"/>
+                <a:ea typeface="Malgun Gothic" pitchFamily="34" charset="-122"/>
+                <a:cs typeface="Malgun Gothic" pitchFamily="34" charset="-120"/>
+              </a:rPr>
+              <a:t>비동기 오류 &amp; 동기화</a:t>
+            </a:r>
+            <a:endParaRPr lang="en-US" sz="1700" dirty="0"/>
+          </a:p>
+        </p:txBody>
+      </p:sp>
+      <p:sp>
+        <p:nvSpPr>
+          <p:cNvPr id="19" name="Text 17"/>
+          <p:cNvSpPr/>
+          <p:nvPr/>
+        </p:nvSpPr>
+        <p:spPr>
+          <a:xfrm>
+            <a:off x="6565392" y="4937760"/>
+            <a:ext cx="4791456" cy="731520"/>
+          </a:xfrm>
+          <a:prstGeom prst="rect">
+            <a:avLst/>
+          </a:prstGeom>
+          <a:noFill/>
+          <a:ln/>
+        </p:spPr>
+        <p:txBody>
+          <a:bodyPr wrap="square" lIns="0" tIns="0" rIns="0" bIns="0" rtlCol="0" anchor="t"/>
+          <a:lstStyle/>
+          <a:p>
+            <a:pPr indent="0" marL="0">
+              <a:lnSpc>
+                <a:spcPct val="110000"/>
+              </a:lnSpc>
+              <a:buNone/>
+            </a:pPr>
+            <a:r>
+              <a:rPr lang="en-US" sz="1400" dirty="0">
+                <a:solidFill>
+                  <a:srgbClr val="9AA6B2"/>
+                </a:solidFill>
+                <a:latin typeface="Malgun Gothic" pitchFamily="34" charset="0"/>
+                <a:ea typeface="Malgun Gothic" pitchFamily="34" charset="-122"/>
+                <a:cs typeface="Malgun Gothic" pitchFamily="34" charset="-120"/>
+              </a:rPr>
+              <a:t>커널 guard 제거 → SYNC_CUERR_KERNEL이 잡음</a:t>
+            </a:r>
+            <a:endParaRPr lang="en-US" sz="1400" dirty="0"/>
+          </a:p>
+        </p:txBody>
+      </p:sp>
+      <p:sp>
+        <p:nvSpPr>
+          <p:cNvPr id="20" name="Text 18"/>
+          <p:cNvSpPr/>
+          <p:nvPr/>
+        </p:nvSpPr>
+        <p:spPr>
+          <a:xfrm>
+            <a:off x="548640" y="5943600"/>
+            <a:ext cx="11064240" cy="365760"/>
           </a:xfrm>
           <a:prstGeom prst="rect">
             <a:avLst/>
@@ -3180,124 +3522,21 @@
           <a:bodyPr wrap="square" lIns="0" tIns="0" rIns="0" bIns="0" rtlCol="0" anchor="ctr"/>
           <a:lstStyle/>
           <a:p>
-            <a:pPr indent="0" marL="0">
-              <a:buNone/>
-            </a:pPr>
-            <a:r>
-              <a:rPr lang="en-US" sz="2000" b="1" dirty="0">
-                <a:solidFill>
-                  <a:srgbClr val="E0A458"/>
-                </a:solidFill>
-                <a:latin typeface="Malgun Gothic" pitchFamily="34" charset="0"/>
-                <a:ea typeface="Malgun Gothic" pitchFamily="34" charset="-122"/>
-                <a:cs typeface="Malgun Gothic" pitchFamily="34" charset="-120"/>
-              </a:rPr>
-              <a:t>입문자 함정</a:t>
-            </a:r>
-            <a:endParaRPr lang="en-US" sz="2000" dirty="0"/>
-          </a:p>
-        </p:txBody>
-      </p:sp>
-      <p:sp>
-        <p:nvSpPr>
-          <p:cNvPr id="9" name="Text 7"/>
-          <p:cNvSpPr/>
-          <p:nvPr/>
-        </p:nvSpPr>
-        <p:spPr>
-          <a:xfrm>
-            <a:off x="6537960" y="2423160"/>
-            <a:ext cx="4800600" cy="3108960"/>
-          </a:xfrm>
-          <a:prstGeom prst="rect">
-            <a:avLst/>
-          </a:prstGeom>
-          <a:noFill/>
-          <a:ln/>
-        </p:spPr>
-        <p:txBody>
-          <a:bodyPr wrap="square" lIns="0" tIns="0" rIns="0" bIns="0" rtlCol="0" anchor="t"/>
-          <a:lstStyle/>
-          <a:p>
-            <a:pPr marL="342900" indent="-342900">
-              <a:spcAft>
-                <a:spcPts val="1200"/>
-              </a:spcAft>
-              <a:buSzPct val="100000"/>
-              <a:buChar char="✗"/>
-            </a:pPr>
-            <a:r>
-              <a:rPr lang="en-US" sz="1550" dirty="0">
-                <a:solidFill>
-                  <a:srgbClr val="E8EDF2"/>
-                </a:solidFill>
-                <a:latin typeface="Malgun Gothic" pitchFamily="34" charset="0"/>
-                <a:ea typeface="Malgun Gothic" pitchFamily="34" charset="-122"/>
-                <a:cs typeface="Malgun Gothic" pitchFamily="34" charset="-120"/>
-              </a:rPr>
-              <a:t>공유 변수에 그냥 ++ → 증가 유실(race)</a:t>
-            </a:r>
-            <a:endParaRPr lang="en-US" sz="1550" dirty="0"/>
-          </a:p>
-          <a:p>
-            <a:pPr marL="342900" indent="-342900">
-              <a:spcAft>
-                <a:spcPts val="1200"/>
-              </a:spcAft>
-              <a:buSzPct val="100000"/>
-              <a:buChar char="✗"/>
-            </a:pPr>
-            <a:r>
-              <a:rPr lang="en-US" sz="1550" dirty="0">
-                <a:solidFill>
-                  <a:srgbClr val="E8EDF2"/>
-                </a:solidFill>
-                <a:latin typeface="Malgun Gothic" pitchFamily="34" charset="0"/>
-                <a:ea typeface="Malgun Gothic" pitchFamily="34" charset="-122"/>
-                <a:cs typeface="Malgun Gothic" pitchFamily="34" charset="-120"/>
-              </a:rPr>
-              <a:t>커널 실행만 하고 동기화 없이 결과 신뢰</a:t>
-            </a:r>
-            <a:endParaRPr lang="en-US" sz="1550" dirty="0"/>
-          </a:p>
-          <a:p>
-            <a:pPr marL="342900" indent="-342900">
-              <a:spcAft>
-                <a:spcPts val="1200"/>
-              </a:spcAft>
-              <a:buSzPct val="100000"/>
-              <a:buChar char="✗"/>
-            </a:pPr>
-            <a:r>
-              <a:rPr lang="en-US" sz="1550" dirty="0">
-                <a:solidFill>
-                  <a:srgbClr val="E8EDF2"/>
-                </a:solidFill>
-                <a:latin typeface="Malgun Gothic" pitchFamily="34" charset="0"/>
-                <a:ea typeface="Malgun Gothic" pitchFamily="34" charset="-122"/>
-                <a:cs typeface="Malgun Gothic" pitchFamily="34" charset="-120"/>
-              </a:rPr>
-              <a:t>CUDA 호출 반환값을 확인 안 함 → 조용한 실패</a:t>
-            </a:r>
-            <a:endParaRPr lang="en-US" sz="1550" dirty="0"/>
-          </a:p>
-          <a:p>
-            <a:pPr marL="342900" indent="-342900">
-              <a:buSzPct val="100000"/>
-              <a:buChar char="✗"/>
-            </a:pPr>
-            <a:r>
-              <a:rPr lang="en-US" sz="1550" dirty="0">
-                <a:solidFill>
-                  <a:srgbClr val="E8EDF2"/>
-                </a:solidFill>
-                <a:latin typeface="Malgun Gothic" pitchFamily="34" charset="0"/>
-                <a:ea typeface="Malgun Gothic" pitchFamily="34" charset="-122"/>
-                <a:cs typeface="Malgun Gothic" pitchFamily="34" charset="-120"/>
-              </a:rPr>
-              <a:t>atomic 남용 → 과도하면 성능 저하(꼭 필요한 곳만)</a:t>
-            </a:r>
-            <a:endParaRPr lang="en-US" sz="1550" dirty="0"/>
+            <a:pPr algn="ctr" indent="0" marL="0">
+              <a:buNone/>
+            </a:pPr>
+            <a:r>
+              <a:rPr lang="en-US" sz="1300" i="1" dirty="0">
+                <a:solidFill>
+                  <a:srgbClr val="9AA6B2"/>
+                </a:solidFill>
+                <a:latin typeface="Malgun Gothic" pitchFamily="34" charset="0"/>
+                <a:ea typeface="Malgun Gothic" pitchFamily="34" charset="-122"/>
+                <a:cs typeface="Malgun Gothic" pitchFamily="34" charset="-120"/>
+              </a:rPr>
+              <a:t>Ex 1은 실행마다 결과가 달라집니다 — 그 자체가 경쟁 조건의 증거입니다.</a:t>
+            </a:r>
+            <a:endParaRPr lang="en-US" sz="1300" dirty="0"/>
           </a:p>
         </p:txBody>
       </p:sp>
@@ -3341,6 +3580,448 @@
         </p:nvSpPr>
         <p:spPr>
           <a:xfrm>
+            <a:off x="548640" y="411480"/>
+            <a:ext cx="640080" cy="640080"/>
+          </a:xfrm>
+          <a:prstGeom prst="roundRect">
+            <a:avLst>
+              <a:gd name="adj" fmla="val 12857"/>
+            </a:avLst>
+          </a:prstGeom>
+          <a:solidFill>
+            <a:srgbClr val="8CC63F"/>
+          </a:solidFill>
+          <a:ln/>
+        </p:spPr>
+        <p:txBody>
+          <a:bodyPr wrap="square" rtlCol="0" anchor="ctr"/>
+          <a:lstStyle/>
+          <a:p>
+            <a:pPr algn="ctr" indent="0" marL="0">
+              <a:buNone/>
+            </a:pPr>
+            <a:r>
+              <a:rPr lang="en-US" sz="2200" b="1" dirty="0">
+                <a:solidFill>
+                  <a:srgbClr val="13161C"/>
+                </a:solidFill>
+                <a:latin typeface="Courier New" pitchFamily="34" charset="0"/>
+                <a:ea typeface="Courier New" pitchFamily="34" charset="-122"/>
+                <a:cs typeface="Courier New" pitchFamily="34" charset="-120"/>
+              </a:rPr>
+              <a:t>10</a:t>
+            </a:r>
+            <a:endParaRPr lang="en-US" sz="2200" dirty="0"/>
+          </a:p>
+        </p:txBody>
+      </p:sp>
+      <p:sp>
+        <p:nvSpPr>
+          <p:cNvPr id="3" name="Text 1"/>
+          <p:cNvSpPr/>
+          <p:nvPr/>
+        </p:nvSpPr>
+        <p:spPr>
+          <a:xfrm>
+            <a:off x="1325880" y="384048"/>
+            <a:ext cx="10287000" cy="694944"/>
+          </a:xfrm>
+          <a:prstGeom prst="rect">
+            <a:avLst/>
+          </a:prstGeom>
+          <a:noFill/>
+          <a:ln/>
+        </p:spPr>
+        <p:txBody>
+          <a:bodyPr wrap="square" lIns="0" tIns="0" rIns="0" bIns="0" rtlCol="0" anchor="ctr"/>
+          <a:lstStyle/>
+          <a:p>
+            <a:pPr algn="l" indent="0" marL="0">
+              <a:buNone/>
+            </a:pPr>
+            <a:r>
+              <a:rPr lang="en-US" sz="3000" b="1" dirty="0">
+                <a:solidFill>
+                  <a:srgbClr val="E8EDF2"/>
+                </a:solidFill>
+                <a:latin typeface="Malgun Gothic" pitchFamily="34" charset="0"/>
+                <a:ea typeface="Malgun Gothic" pitchFamily="34" charset="-122"/>
+                <a:cs typeface="Malgun Gothic" pitchFamily="34" charset="-120"/>
+              </a:rPr>
+              <a:t>핵심 정리 &amp; 자주 하는 실수</a:t>
+            </a:r>
+            <a:endParaRPr lang="en-US" sz="3000" dirty="0"/>
+          </a:p>
+        </p:txBody>
+      </p:sp>
+      <p:sp>
+        <p:nvSpPr>
+          <p:cNvPr id="4" name="Shape 2"/>
+          <p:cNvSpPr/>
+          <p:nvPr/>
+        </p:nvSpPr>
+        <p:spPr>
+          <a:xfrm>
+            <a:off x="548640" y="1600200"/>
+            <a:ext cx="5349240" cy="4114800"/>
+          </a:xfrm>
+          <a:prstGeom prst="roundRect">
+            <a:avLst>
+              <a:gd name="adj" fmla="val 1778"/>
+            </a:avLst>
+          </a:prstGeom>
+          <a:solidFill>
+            <a:srgbClr val="1E232C"/>
+          </a:solidFill>
+          <a:ln/>
+        </p:spPr>
+      </p:sp>
+      <p:sp>
+        <p:nvSpPr>
+          <p:cNvPr id="5" name="Text 3"/>
+          <p:cNvSpPr/>
+          <p:nvPr/>
+        </p:nvSpPr>
+        <p:spPr>
+          <a:xfrm>
+            <a:off x="822960" y="1828800"/>
+            <a:ext cx="4800600" cy="457200"/>
+          </a:xfrm>
+          <a:prstGeom prst="rect">
+            <a:avLst/>
+          </a:prstGeom>
+          <a:noFill/>
+          <a:ln/>
+        </p:spPr>
+        <p:txBody>
+          <a:bodyPr wrap="square" lIns="0" tIns="0" rIns="0" bIns="0" rtlCol="0" anchor="ctr"/>
+          <a:lstStyle/>
+          <a:p>
+            <a:pPr indent="0" marL="0">
+              <a:buNone/>
+            </a:pPr>
+            <a:r>
+              <a:rPr lang="en-US" sz="2000" b="1" dirty="0">
+                <a:solidFill>
+                  <a:srgbClr val="8CC63F"/>
+                </a:solidFill>
+                <a:latin typeface="Malgun Gothic" pitchFamily="34" charset="0"/>
+                <a:ea typeface="Malgun Gothic" pitchFamily="34" charset="-122"/>
+                <a:cs typeface="Malgun Gothic" pitchFamily="34" charset="-120"/>
+              </a:rPr>
+              <a:t>기억할 것</a:t>
+            </a:r>
+            <a:endParaRPr lang="en-US" sz="2000" dirty="0"/>
+          </a:p>
+        </p:txBody>
+      </p:sp>
+      <p:sp>
+        <p:nvSpPr>
+          <p:cNvPr id="6" name="Text 4"/>
+          <p:cNvSpPr/>
+          <p:nvPr/>
+        </p:nvSpPr>
+        <p:spPr>
+          <a:xfrm>
+            <a:off x="822960" y="2423160"/>
+            <a:ext cx="4800600" cy="3108960"/>
+          </a:xfrm>
+          <a:prstGeom prst="rect">
+            <a:avLst/>
+          </a:prstGeom>
+          <a:noFill/>
+          <a:ln/>
+        </p:spPr>
+        <p:txBody>
+          <a:bodyPr wrap="square" lIns="0" tIns="0" rIns="0" bIns="0" rtlCol="0" anchor="t"/>
+          <a:lstStyle/>
+          <a:p>
+            <a:pPr marL="342900" indent="-342900">
+              <a:spcAft>
+                <a:spcPts val="1200"/>
+              </a:spcAft>
+              <a:buSzPct val="100000"/>
+              <a:buChar char="✓"/>
+            </a:pPr>
+            <a:r>
+              <a:rPr lang="en-US" sz="1550" dirty="0">
+                <a:solidFill>
+                  <a:srgbClr val="E8EDF2"/>
+                </a:solidFill>
+                <a:latin typeface="Malgun Gothic" pitchFamily="34" charset="0"/>
+                <a:ea typeface="Malgun Gothic" pitchFamily="34" charset="-122"/>
+                <a:cs typeface="Malgun Gothic" pitchFamily="34" charset="-120"/>
+              </a:rPr>
+              <a:t>동시 접근 카운트엔 atomicAdd</a:t>
+            </a:r>
+            <a:endParaRPr lang="en-US" sz="1550" dirty="0"/>
+          </a:p>
+          <a:p>
+            <a:pPr marL="342900" indent="-342900">
+              <a:spcAft>
+                <a:spcPts val="1200"/>
+              </a:spcAft>
+              <a:buSzPct val="100000"/>
+              <a:buChar char="✓"/>
+            </a:pPr>
+            <a:r>
+              <a:rPr lang="en-US" sz="1550" dirty="0">
+                <a:solidFill>
+                  <a:srgbClr val="E8EDF2"/>
+                </a:solidFill>
+                <a:latin typeface="Malgun Gothic" pitchFamily="34" charset="0"/>
+                <a:ea typeface="Malgun Gothic" pitchFamily="34" charset="-122"/>
+                <a:cs typeface="Malgun Gothic" pitchFamily="34" charset="-120"/>
+              </a:rPr>
+              <a:t>atomicAdd 반환값 = 고유 인덱스</a:t>
+            </a:r>
+            <a:endParaRPr lang="en-US" sz="1550" dirty="0"/>
+          </a:p>
+          <a:p>
+            <a:pPr marL="342900" indent="-342900">
+              <a:spcAft>
+                <a:spcPts val="1200"/>
+              </a:spcAft>
+              <a:buSzPct val="100000"/>
+              <a:buChar char="✓"/>
+            </a:pPr>
+            <a:r>
+              <a:rPr lang="en-US" sz="1550" dirty="0">
+                <a:solidFill>
+                  <a:srgbClr val="E8EDF2"/>
+                </a:solidFill>
+                <a:latin typeface="Malgun Gothic" pitchFamily="34" charset="0"/>
+                <a:ea typeface="Malgun Gothic" pitchFamily="34" charset="-122"/>
+                <a:cs typeface="Malgun Gothic" pitchFamily="34" charset="-120"/>
+              </a:rPr>
+              <a:t>커널 오류는 동기화 후에만 잡힌다</a:t>
+            </a:r>
+            <a:endParaRPr lang="en-US" sz="1550" dirty="0"/>
+          </a:p>
+          <a:p>
+            <a:pPr marL="342900" indent="-342900">
+              <a:buSzPct val="100000"/>
+              <a:buChar char="✓"/>
+            </a:pPr>
+            <a:r>
+              <a:rPr lang="en-US" sz="1550" dirty="0">
+                <a:solidFill>
+                  <a:srgbClr val="E8EDF2"/>
+                </a:solidFill>
+                <a:latin typeface="Malgun Gothic" pitchFamily="34" charset="0"/>
+                <a:ea typeface="Malgun Gothic" pitchFamily="34" charset="-122"/>
+                <a:cs typeface="Malgun Gothic" pitchFamily="34" charset="-120"/>
+              </a:rPr>
+              <a:t>모든 CUDA 호출을 CUERR로 감싸기</a:t>
+            </a:r>
+            <a:endParaRPr lang="en-US" sz="1550" dirty="0"/>
+          </a:p>
+        </p:txBody>
+      </p:sp>
+      <p:sp>
+        <p:nvSpPr>
+          <p:cNvPr id="7" name="Shape 5"/>
+          <p:cNvSpPr/>
+          <p:nvPr/>
+        </p:nvSpPr>
+        <p:spPr>
+          <a:xfrm>
+            <a:off x="6263640" y="1600200"/>
+            <a:ext cx="5349240" cy="4114800"/>
+          </a:xfrm>
+          <a:prstGeom prst="roundRect">
+            <a:avLst>
+              <a:gd name="adj" fmla="val 1778"/>
+            </a:avLst>
+          </a:prstGeom>
+          <a:solidFill>
+            <a:srgbClr val="1E232C"/>
+          </a:solidFill>
+          <a:ln/>
+        </p:spPr>
+      </p:sp>
+      <p:sp>
+        <p:nvSpPr>
+          <p:cNvPr id="8" name="Text 6"/>
+          <p:cNvSpPr/>
+          <p:nvPr/>
+        </p:nvSpPr>
+        <p:spPr>
+          <a:xfrm>
+            <a:off x="6537960" y="1828800"/>
+            <a:ext cx="4800600" cy="457200"/>
+          </a:xfrm>
+          <a:prstGeom prst="rect">
+            <a:avLst/>
+          </a:prstGeom>
+          <a:noFill/>
+          <a:ln/>
+        </p:spPr>
+        <p:txBody>
+          <a:bodyPr wrap="square" lIns="0" tIns="0" rIns="0" bIns="0" rtlCol="0" anchor="ctr"/>
+          <a:lstStyle/>
+          <a:p>
+            <a:pPr indent="0" marL="0">
+              <a:buNone/>
+            </a:pPr>
+            <a:r>
+              <a:rPr lang="en-US" sz="2000" b="1" dirty="0">
+                <a:solidFill>
+                  <a:srgbClr val="E0A458"/>
+                </a:solidFill>
+                <a:latin typeface="Malgun Gothic" pitchFamily="34" charset="0"/>
+                <a:ea typeface="Malgun Gothic" pitchFamily="34" charset="-122"/>
+                <a:cs typeface="Malgun Gothic" pitchFamily="34" charset="-120"/>
+              </a:rPr>
+              <a:t>입문자 함정</a:t>
+            </a:r>
+            <a:endParaRPr lang="en-US" sz="2000" dirty="0"/>
+          </a:p>
+        </p:txBody>
+      </p:sp>
+      <p:sp>
+        <p:nvSpPr>
+          <p:cNvPr id="9" name="Text 7"/>
+          <p:cNvSpPr/>
+          <p:nvPr/>
+        </p:nvSpPr>
+        <p:spPr>
+          <a:xfrm>
+            <a:off x="6537960" y="2423160"/>
+            <a:ext cx="4800600" cy="3108960"/>
+          </a:xfrm>
+          <a:prstGeom prst="rect">
+            <a:avLst/>
+          </a:prstGeom>
+          <a:noFill/>
+          <a:ln/>
+        </p:spPr>
+        <p:txBody>
+          <a:bodyPr wrap="square" lIns="0" tIns="0" rIns="0" bIns="0" rtlCol="0" anchor="t"/>
+          <a:lstStyle/>
+          <a:p>
+            <a:pPr marL="342900" indent="-342900">
+              <a:spcAft>
+                <a:spcPts val="1200"/>
+              </a:spcAft>
+              <a:buSzPct val="100000"/>
+              <a:buChar char="✗"/>
+            </a:pPr>
+            <a:r>
+              <a:rPr lang="en-US" sz="1550" dirty="0">
+                <a:solidFill>
+                  <a:srgbClr val="E8EDF2"/>
+                </a:solidFill>
+                <a:latin typeface="Malgun Gothic" pitchFamily="34" charset="0"/>
+                <a:ea typeface="Malgun Gothic" pitchFamily="34" charset="-122"/>
+                <a:cs typeface="Malgun Gothic" pitchFamily="34" charset="-120"/>
+              </a:rPr>
+              <a:t>공유 변수에 그냥 ++ → 증가 유실(race)</a:t>
+            </a:r>
+            <a:endParaRPr lang="en-US" sz="1550" dirty="0"/>
+          </a:p>
+          <a:p>
+            <a:pPr marL="342900" indent="-342900">
+              <a:spcAft>
+                <a:spcPts val="1200"/>
+              </a:spcAft>
+              <a:buSzPct val="100000"/>
+              <a:buChar char="✗"/>
+            </a:pPr>
+            <a:r>
+              <a:rPr lang="en-US" sz="1550" dirty="0">
+                <a:solidFill>
+                  <a:srgbClr val="E8EDF2"/>
+                </a:solidFill>
+                <a:latin typeface="Malgun Gothic" pitchFamily="34" charset="0"/>
+                <a:ea typeface="Malgun Gothic" pitchFamily="34" charset="-122"/>
+                <a:cs typeface="Malgun Gothic" pitchFamily="34" charset="-120"/>
+              </a:rPr>
+              <a:t>커널 실행만 하고 동기화 없이 결과 신뢰</a:t>
+            </a:r>
+            <a:endParaRPr lang="en-US" sz="1550" dirty="0"/>
+          </a:p>
+          <a:p>
+            <a:pPr marL="342900" indent="-342900">
+              <a:spcAft>
+                <a:spcPts val="1200"/>
+              </a:spcAft>
+              <a:buSzPct val="100000"/>
+              <a:buChar char="✗"/>
+            </a:pPr>
+            <a:r>
+              <a:rPr lang="en-US" sz="1550" dirty="0">
+                <a:solidFill>
+                  <a:srgbClr val="E8EDF2"/>
+                </a:solidFill>
+                <a:latin typeface="Malgun Gothic" pitchFamily="34" charset="0"/>
+                <a:ea typeface="Malgun Gothic" pitchFamily="34" charset="-122"/>
+                <a:cs typeface="Malgun Gothic" pitchFamily="34" charset="-120"/>
+              </a:rPr>
+              <a:t>CUDA 호출 반환값을 확인 안 함 → 조용한 실패</a:t>
+            </a:r>
+            <a:endParaRPr lang="en-US" sz="1550" dirty="0"/>
+          </a:p>
+          <a:p>
+            <a:pPr marL="342900" indent="-342900">
+              <a:buSzPct val="100000"/>
+              <a:buChar char="✗"/>
+            </a:pPr>
+            <a:r>
+              <a:rPr lang="en-US" sz="1550" dirty="0">
+                <a:solidFill>
+                  <a:srgbClr val="E8EDF2"/>
+                </a:solidFill>
+                <a:latin typeface="Malgun Gothic" pitchFamily="34" charset="0"/>
+                <a:ea typeface="Malgun Gothic" pitchFamily="34" charset="-122"/>
+                <a:cs typeface="Malgun Gothic" pitchFamily="34" charset="-120"/>
+              </a:rPr>
+              <a:t>atomic 남용 → 과도하면 성능 저하(꼭 필요한 곳만)</a:t>
+            </a:r>
+            <a:endParaRPr lang="en-US" sz="1550" dirty="0"/>
+          </a:p>
+        </p:txBody>
+      </p:sp>
+    </p:spTree>
+  </p:cSld>
+  <p:clrMapOvr>
+    <a:masterClrMapping/>
+  </p:clrMapOvr>
+</p:sld>
+</file>
+
+<file path=ppt/slides/slide13.xml><?xml version="1.0" encoding="utf-8"?>
+<p:sld xmlns:a="http://schemas.openxmlformats.org/drawingml/2006/main" xmlns:r="http://schemas.openxmlformats.org/officeDocument/2006/relationships" xmlns:p="http://schemas.openxmlformats.org/presentationml/2006/main">
+  <p:cSld name="Slide 13">
+    <p:bg>
+      <p:bgPr>
+        <a:solidFill>
+          <a:srgbClr val="13161C"/>
+        </a:solidFill>
+      </p:bgPr>
+    </p:bg>
+    <p:spTree>
+      <p:nvGrpSpPr>
+        <p:cNvPr id="1" name=""/>
+        <p:cNvGrpSpPr/>
+        <p:nvPr/>
+      </p:nvGrpSpPr>
+      <p:grpSpPr>
+        <a:xfrm>
+          <a:off x="0" y="0"/>
+          <a:ext cx="0" cy="0"/>
+          <a:chOff x="0" y="0"/>
+          <a:chExt cx="0" cy="0"/>
+        </a:xfrm>
+      </p:grpSpPr>
+      <p:sp>
+        <p:nvSpPr>
+          <p:cNvPr id="2" name="Text 0"/>
+          <p:cNvSpPr/>
+          <p:nvPr/>
+        </p:nvSpPr>
+        <p:spPr>
+          <a:xfrm>
             <a:off x="548640" y="1463040"/>
             <a:ext cx="9144000" cy="457200"/>
           </a:xfrm>
@@ -6021,7 +6702,7 @@
                 <a:ea typeface="Courier New" pitchFamily="34" charset="-122"/>
                 <a:cs typeface="Courier New" pitchFamily="34" charset="-120"/>
               </a:rPr>
-              <a:t>4</a:t>
+              <a:t>3</a:t>
             </a:r>
             <a:endParaRPr lang="en-US" sz="2200" dirty="0"/>
           </a:p>
@@ -6060,7 +6741,7 @@
                 <a:ea typeface="Malgun Gothic" pitchFamily="34" charset="-122"/>
                 <a:cs typeface="Malgun Gothic" pitchFamily="34" charset="-120"/>
               </a:rPr>
-              <a:t>RECORD_ERR 매크로 해부</a:t>
+              <a:t>원자연산이 경쟁을 없애는 과정</a:t>
             </a:r>
             <a:endParaRPr lang="en-US" sz="3000" dirty="0"/>
           </a:p>
@@ -6068,18 +6749,123 @@
       </p:sp>
       <p:sp>
         <p:nvSpPr>
-          <p:cNvPr id="4" name="Shape 2"/>
-          <p:cNvSpPr/>
-          <p:nvPr/>
-        </p:nvSpPr>
-        <p:spPr>
-          <a:xfrm>
-            <a:off x="548640" y="1554480"/>
-            <a:ext cx="11064240" cy="3200400"/>
+          <p:cNvPr id="4" name="Text 2"/>
+          <p:cNvSpPr/>
+          <p:nvPr/>
+        </p:nvSpPr>
+        <p:spPr>
+          <a:xfrm>
+            <a:off x="548640" y="1371600"/>
+            <a:ext cx="11064240" cy="411480"/>
+          </a:xfrm>
+          <a:prstGeom prst="rect">
+            <a:avLst/>
+          </a:prstGeom>
+          <a:noFill/>
+          <a:ln/>
+        </p:spPr>
+        <p:txBody>
+          <a:bodyPr wrap="square" lIns="0" tIns="0" rIns="0" bIns="0" rtlCol="0" anchor="ctr"/>
+          <a:lstStyle/>
+          <a:p>
+            <a:pPr indent="0" marL="0">
+              <a:buNone/>
+            </a:pPr>
+            <a:r>
+              <a:rPr lang="en-US" sz="1500" dirty="0">
+                <a:solidFill>
+                  <a:srgbClr val="9AA6B2"/>
+                </a:solidFill>
+                <a:latin typeface="Malgun Gothic" pitchFamily="34" charset="0"/>
+                <a:ea typeface="Malgun Gothic" pitchFamily="34" charset="-122"/>
+                <a:cs typeface="Malgun Gothic" pitchFamily="34" charset="-120"/>
+              </a:rPr>
+              <a:t>같은 상황(err=5, 두 스레드가 +1)을 일반 증가와 atomicAdd로 비교합니다.</a:t>
+            </a:r>
+            <a:endParaRPr lang="en-US" sz="1500" dirty="0"/>
+          </a:p>
+        </p:txBody>
+      </p:sp>
+      <p:sp>
+        <p:nvSpPr>
+          <p:cNvPr id="5" name="Shape 3"/>
+          <p:cNvSpPr/>
+          <p:nvPr/>
+        </p:nvSpPr>
+        <p:spPr>
+          <a:xfrm>
+            <a:off x="548640" y="1874520"/>
+            <a:ext cx="5303520" cy="3977640"/>
           </a:xfrm>
           <a:prstGeom prst="roundRect">
             <a:avLst>
-              <a:gd name="adj" fmla="val 1714"/>
+              <a:gd name="adj" fmla="val 1609"/>
+            </a:avLst>
+          </a:prstGeom>
+          <a:solidFill>
+            <a:srgbClr val="1E232C"/>
+          </a:solidFill>
+          <a:ln w="19050">
+            <a:solidFill>
+              <a:srgbClr val="E0645B"/>
+            </a:solidFill>
+            <a:prstDash val="solid"/>
+          </a:ln>
+        </p:spPr>
+      </p:sp>
+      <p:sp>
+        <p:nvSpPr>
+          <p:cNvPr id="6" name="Text 4"/>
+          <p:cNvSpPr/>
+          <p:nvPr/>
+        </p:nvSpPr>
+        <p:spPr>
+          <a:xfrm>
+            <a:off x="777240" y="2011680"/>
+            <a:ext cx="4846320" cy="365760"/>
+          </a:xfrm>
+          <a:prstGeom prst="rect">
+            <a:avLst/>
+          </a:prstGeom>
+          <a:noFill/>
+          <a:ln/>
+        </p:spPr>
+        <p:txBody>
+          <a:bodyPr wrap="square" lIns="0" tIns="0" rIns="0" bIns="0" rtlCol="0" anchor="ctr"/>
+          <a:lstStyle/>
+          <a:p>
+            <a:pPr indent="0" marL="0">
+              <a:buNone/>
+            </a:pPr>
+            <a:r>
+              <a:rPr lang="en-US" sz="1600" b="1" dirty="0">
+                <a:solidFill>
+                  <a:srgbClr val="E0645B"/>
+                </a:solidFill>
+                <a:latin typeface="Malgun Gothic" pitchFamily="34" charset="0"/>
+                <a:ea typeface="Malgun Gothic" pitchFamily="34" charset="-122"/>
+                <a:cs typeface="Malgun Gothic" pitchFamily="34" charset="-120"/>
+              </a:rPr>
+              <a:t>① 일반 ++  (경쟁 조건)</a:t>
+            </a:r>
+            <a:endParaRPr lang="en-US" sz="1600" dirty="0"/>
+          </a:p>
+        </p:txBody>
+      </p:sp>
+      <p:sp>
+        <p:nvSpPr>
+          <p:cNvPr id="7" name="Shape 5"/>
+          <p:cNvSpPr/>
+          <p:nvPr/>
+        </p:nvSpPr>
+        <p:spPr>
+          <a:xfrm>
+            <a:off x="804672" y="2514600"/>
+            <a:ext cx="4791456" cy="502920"/>
+          </a:xfrm>
+          <a:prstGeom prst="roundRect">
+            <a:avLst>
+              <a:gd name="adj" fmla="val 7273"/>
             </a:avLst>
           </a:prstGeom>
           <a:solidFill>
@@ -6095,149 +6881,756 @@
       </p:sp>
       <p:sp>
         <p:nvSpPr>
-          <p:cNvPr id="5" name="Text 3"/>
-          <p:cNvSpPr/>
-          <p:nvPr/>
-        </p:nvSpPr>
-        <p:spPr>
-          <a:xfrm>
-            <a:off x="749808" y="1700784"/>
-            <a:ext cx="10661904" cy="2907792"/>
-          </a:xfrm>
-          <a:prstGeom prst="rect">
-            <a:avLst/>
-          </a:prstGeom>
-          <a:noFill/>
-          <a:ln/>
-        </p:spPr>
-        <p:txBody>
-          <a:bodyPr wrap="square" lIns="0" tIns="0" rIns="0" bIns="0" rtlCol="0" anchor="t"/>
-          <a:lstStyle/>
-          <a:p>
-            <a:pPr algn="l" indent="0" marL="0">
-              <a:lnSpc>
-                <a:spcPct val="108000"/>
-              </a:lnSpc>
-              <a:buNone/>
-            </a:pPr>
-            <a:r>
-              <a:rPr lang="en-US" sz="1300" dirty="0">
-                <a:solidFill>
-                  <a:srgbClr val="9AA6B2"/>
+          <p:cNvPr id="8" name="Text 6"/>
+          <p:cNvSpPr/>
+          <p:nvPr/>
+        </p:nvSpPr>
+        <p:spPr>
+          <a:xfrm>
+            <a:off x="914400" y="2514600"/>
+            <a:ext cx="548640" cy="502920"/>
+          </a:xfrm>
+          <a:prstGeom prst="rect">
+            <a:avLst/>
+          </a:prstGeom>
+          <a:noFill/>
+          <a:ln/>
+        </p:spPr>
+        <p:txBody>
+          <a:bodyPr wrap="square" lIns="0" tIns="0" rIns="0" bIns="0" rtlCol="0" anchor="ctr"/>
+          <a:lstStyle/>
+          <a:p>
+            <a:pPr algn="ctr" indent="0" marL="0">
+              <a:buNone/>
+            </a:pPr>
+            <a:r>
+              <a:rPr lang="en-US" sz="1200" b="1" dirty="0">
+                <a:solidFill>
+                  <a:srgbClr val="4FB0C6"/>
                 </a:solidFill>
                 <a:latin typeface="Courier New" pitchFamily="34" charset="0"/>
                 <a:ea typeface="Courier New" pitchFamily="34" charset="-122"/>
                 <a:cs typeface="Courier New" pitchFamily="34" charset="-120"/>
               </a:rPr>
-              <a:t>// tests.cpp:76</a:t>
+              <a:t>t1</a:t>
+            </a:r>
+            <a:endParaRPr lang="en-US" sz="1200" dirty="0"/>
+          </a:p>
+        </p:txBody>
+      </p:sp>
+      <p:sp>
+        <p:nvSpPr>
+          <p:cNvPr id="9" name="Text 7"/>
+          <p:cNvSpPr/>
+          <p:nvPr/>
+        </p:nvSpPr>
+        <p:spPr>
+          <a:xfrm>
+            <a:off x="1517904" y="2514600"/>
+            <a:ext cx="3968496" cy="502920"/>
+          </a:xfrm>
+          <a:prstGeom prst="rect">
+            <a:avLst/>
+          </a:prstGeom>
+          <a:noFill/>
+          <a:ln/>
+        </p:spPr>
+        <p:txBody>
+          <a:bodyPr wrap="square" lIns="0" tIns="0" rIns="0" bIns="0" rtlCol="0" anchor="ctr"/>
+          <a:lstStyle/>
+          <a:p>
+            <a:pPr indent="0" marL="0">
+              <a:buNone/>
+            </a:pPr>
+            <a:r>
+              <a:rPr lang="en-US" sz="1300" dirty="0">
+                <a:solidFill>
+                  <a:srgbClr val="E8EDF2"/>
+                </a:solidFill>
+                <a:latin typeface="Malgun Gothic" pitchFamily="34" charset="0"/>
+                <a:ea typeface="Malgun Gothic" pitchFamily="34" charset="-122"/>
+                <a:cs typeface="Malgun Gothic" pitchFamily="34" charset="-120"/>
+              </a:rPr>
+              <a:t>스레드 A : err 읽음 → 5</a:t>
             </a:r>
             <a:endParaRPr lang="en-US" sz="1300" dirty="0"/>
           </a:p>
-          <a:p>
-            <a:pPr algn="l" indent="0" marL="0">
-              <a:lnSpc>
-                <a:spcPct val="108000"/>
-              </a:lnSpc>
-              <a:buNone/>
-            </a:pPr>
-            <a:r>
-              <a:rPr lang="en-US" sz="1300" dirty="0">
-                <a:solidFill>
-                  <a:srgbClr val="E8EDF2"/>
+        </p:txBody>
+      </p:sp>
+      <p:sp>
+        <p:nvSpPr>
+          <p:cNvPr id="10" name="Shape 8"/>
+          <p:cNvSpPr/>
+          <p:nvPr/>
+        </p:nvSpPr>
+        <p:spPr>
+          <a:xfrm>
+            <a:off x="804672" y="3127248"/>
+            <a:ext cx="4791456" cy="502920"/>
+          </a:xfrm>
+          <a:prstGeom prst="roundRect">
+            <a:avLst>
+              <a:gd name="adj" fmla="val 7273"/>
+            </a:avLst>
+          </a:prstGeom>
+          <a:solidFill>
+            <a:srgbClr val="0E1116"/>
+          </a:solidFill>
+          <a:ln w="12700">
+            <a:solidFill>
+              <a:srgbClr val="2C3440"/>
+            </a:solidFill>
+            <a:prstDash val="solid"/>
+          </a:ln>
+        </p:spPr>
+      </p:sp>
+      <p:sp>
+        <p:nvSpPr>
+          <p:cNvPr id="11" name="Text 9"/>
+          <p:cNvSpPr/>
+          <p:nvPr/>
+        </p:nvSpPr>
+        <p:spPr>
+          <a:xfrm>
+            <a:off x="914400" y="3127248"/>
+            <a:ext cx="548640" cy="502920"/>
+          </a:xfrm>
+          <a:prstGeom prst="rect">
+            <a:avLst/>
+          </a:prstGeom>
+          <a:noFill/>
+          <a:ln/>
+        </p:spPr>
+        <p:txBody>
+          <a:bodyPr wrap="square" lIns="0" tIns="0" rIns="0" bIns="0" rtlCol="0" anchor="ctr"/>
+          <a:lstStyle/>
+          <a:p>
+            <a:pPr algn="ctr" indent="0" marL="0">
+              <a:buNone/>
+            </a:pPr>
+            <a:r>
+              <a:rPr lang="en-US" sz="1200" b="1" dirty="0">
+                <a:solidFill>
+                  <a:srgbClr val="E0A458"/>
                 </a:solidFill>
                 <a:latin typeface="Courier New" pitchFamily="34" charset="0"/>
                 <a:ea typeface="Courier New" pitchFamily="34" charset="-122"/>
                 <a:cs typeface="Courier New" pitchFamily="34" charset="-120"/>
               </a:rPr>
-              <a:t>#define RECORD_ERR(err, p, expect, current) do{           \</a:t>
+              <a:t>t2</a:t>
+            </a:r>
+            <a:endParaRPr lang="en-US" sz="1200" dirty="0"/>
+          </a:p>
+        </p:txBody>
+      </p:sp>
+      <p:sp>
+        <p:nvSpPr>
+          <p:cNvPr id="12" name="Text 10"/>
+          <p:cNvSpPr/>
+          <p:nvPr/>
+        </p:nvSpPr>
+        <p:spPr>
+          <a:xfrm>
+            <a:off x="1517904" y="3127248"/>
+            <a:ext cx="3968496" cy="502920"/>
+          </a:xfrm>
+          <a:prstGeom prst="rect">
+            <a:avLst/>
+          </a:prstGeom>
+          <a:noFill/>
+          <a:ln/>
+        </p:spPr>
+        <p:txBody>
+          <a:bodyPr wrap="square" lIns="0" tIns="0" rIns="0" bIns="0" rtlCol="0" anchor="ctr"/>
+          <a:lstStyle/>
+          <a:p>
+            <a:pPr indent="0" marL="0">
+              <a:buNone/>
+            </a:pPr>
+            <a:r>
+              <a:rPr lang="en-US" sz="1300" dirty="0">
+                <a:solidFill>
+                  <a:srgbClr val="E0A458"/>
+                </a:solidFill>
+                <a:latin typeface="Malgun Gothic" pitchFamily="34" charset="0"/>
+                <a:ea typeface="Malgun Gothic" pitchFamily="34" charset="-122"/>
+                <a:cs typeface="Malgun Gothic" pitchFamily="34" charset="-120"/>
+              </a:rPr>
+              <a:t>스레드 B : err 읽음 → 5  (끼어듦!)</a:t>
             </a:r>
             <a:endParaRPr lang="en-US" sz="1300" dirty="0"/>
           </a:p>
-          <a:p>
-            <a:pPr algn="l" indent="0" marL="0">
-              <a:lnSpc>
-                <a:spcPct val="108000"/>
-              </a:lnSpc>
-              <a:buNone/>
-            </a:pPr>
-            <a:r>
-              <a:rPr lang="en-US" sz="1300" dirty="0">
-                <a:solidFill>
-                  <a:srgbClr val="8CC63F"/>
+        </p:txBody>
+      </p:sp>
+      <p:sp>
+        <p:nvSpPr>
+          <p:cNvPr id="13" name="Shape 11"/>
+          <p:cNvSpPr/>
+          <p:nvPr/>
+        </p:nvSpPr>
+        <p:spPr>
+          <a:xfrm>
+            <a:off x="804672" y="3739896"/>
+            <a:ext cx="4791456" cy="502920"/>
+          </a:xfrm>
+          <a:prstGeom prst="roundRect">
+            <a:avLst>
+              <a:gd name="adj" fmla="val 7273"/>
+            </a:avLst>
+          </a:prstGeom>
+          <a:solidFill>
+            <a:srgbClr val="0E1116"/>
+          </a:solidFill>
+          <a:ln w="12700">
+            <a:solidFill>
+              <a:srgbClr val="2C3440"/>
+            </a:solidFill>
+            <a:prstDash val="solid"/>
+          </a:ln>
+        </p:spPr>
+      </p:sp>
+      <p:sp>
+        <p:nvSpPr>
+          <p:cNvPr id="14" name="Text 12"/>
+          <p:cNvSpPr/>
+          <p:nvPr/>
+        </p:nvSpPr>
+        <p:spPr>
+          <a:xfrm>
+            <a:off x="914400" y="3739896"/>
+            <a:ext cx="548640" cy="502920"/>
+          </a:xfrm>
+          <a:prstGeom prst="rect">
+            <a:avLst/>
+          </a:prstGeom>
+          <a:noFill/>
+          <a:ln/>
+        </p:spPr>
+        <p:txBody>
+          <a:bodyPr wrap="square" lIns="0" tIns="0" rIns="0" bIns="0" rtlCol="0" anchor="ctr"/>
+          <a:lstStyle/>
+          <a:p>
+            <a:pPr algn="ctr" indent="0" marL="0">
+              <a:buNone/>
+            </a:pPr>
+            <a:r>
+              <a:rPr lang="en-US" sz="1200" b="1" dirty="0">
+                <a:solidFill>
+                  <a:srgbClr val="4FB0C6"/>
                 </a:solidFill>
                 <a:latin typeface="Courier New" pitchFamily="34" charset="0"/>
                 <a:ea typeface="Courier New" pitchFamily="34" charset="-122"/>
                 <a:cs typeface="Courier New" pitchFamily="34" charset="-120"/>
               </a:rPr>
-              <a:t>    unsigned int idx = atomicAdd(err, 1);                 \</a:t>
+              <a:t>t3</a:t>
+            </a:r>
+            <a:endParaRPr lang="en-US" sz="1200" dirty="0"/>
+          </a:p>
+        </p:txBody>
+      </p:sp>
+      <p:sp>
+        <p:nvSpPr>
+          <p:cNvPr id="15" name="Text 13"/>
+          <p:cNvSpPr/>
+          <p:nvPr/>
+        </p:nvSpPr>
+        <p:spPr>
+          <a:xfrm>
+            <a:off x="1517904" y="3739896"/>
+            <a:ext cx="3968496" cy="502920"/>
+          </a:xfrm>
+          <a:prstGeom prst="rect">
+            <a:avLst/>
+          </a:prstGeom>
+          <a:noFill/>
+          <a:ln/>
+        </p:spPr>
+        <p:txBody>
+          <a:bodyPr wrap="square" lIns="0" tIns="0" rIns="0" bIns="0" rtlCol="0" anchor="ctr"/>
+          <a:lstStyle/>
+          <a:p>
+            <a:pPr indent="0" marL="0">
+              <a:buNone/>
+            </a:pPr>
+            <a:r>
+              <a:rPr lang="en-US" sz="1300" dirty="0">
+                <a:solidFill>
+                  <a:srgbClr val="E8EDF2"/>
+                </a:solidFill>
+                <a:latin typeface="Malgun Gothic" pitchFamily="34" charset="0"/>
+                <a:ea typeface="Malgun Gothic" pitchFamily="34" charset="-122"/>
+                <a:cs typeface="Malgun Gothic" pitchFamily="34" charset="-120"/>
+              </a:rPr>
+              <a:t>스레드 A : 5+1 = 6 저장</a:t>
             </a:r>
             <a:endParaRPr lang="en-US" sz="1300" dirty="0"/>
           </a:p>
-          <a:p>
-            <a:pPr algn="l" indent="0" marL="0">
-              <a:lnSpc>
-                <a:spcPct val="108000"/>
-              </a:lnSpc>
-              <a:buNone/>
-            </a:pPr>
-            <a:r>
-              <a:rPr lang="en-US" sz="1300" dirty="0">
-                <a:solidFill>
-                  <a:srgbClr val="4FB0C6"/>
+        </p:txBody>
+      </p:sp>
+      <p:sp>
+        <p:nvSpPr>
+          <p:cNvPr id="16" name="Shape 14"/>
+          <p:cNvSpPr/>
+          <p:nvPr/>
+        </p:nvSpPr>
+        <p:spPr>
+          <a:xfrm>
+            <a:off x="804672" y="4352544"/>
+            <a:ext cx="4791456" cy="502920"/>
+          </a:xfrm>
+          <a:prstGeom prst="roundRect">
+            <a:avLst>
+              <a:gd name="adj" fmla="val 7273"/>
+            </a:avLst>
+          </a:prstGeom>
+          <a:solidFill>
+            <a:srgbClr val="0E1116"/>
+          </a:solidFill>
+          <a:ln w="12700">
+            <a:solidFill>
+              <a:srgbClr val="2C3440"/>
+            </a:solidFill>
+            <a:prstDash val="solid"/>
+          </a:ln>
+        </p:spPr>
+      </p:sp>
+      <p:sp>
+        <p:nvSpPr>
+          <p:cNvPr id="17" name="Text 15"/>
+          <p:cNvSpPr/>
+          <p:nvPr/>
+        </p:nvSpPr>
+        <p:spPr>
+          <a:xfrm>
+            <a:off x="914400" y="4352544"/>
+            <a:ext cx="548640" cy="502920"/>
+          </a:xfrm>
+          <a:prstGeom prst="rect">
+            <a:avLst/>
+          </a:prstGeom>
+          <a:noFill/>
+          <a:ln/>
+        </p:spPr>
+        <p:txBody>
+          <a:bodyPr wrap="square" lIns="0" tIns="0" rIns="0" bIns="0" rtlCol="0" anchor="ctr"/>
+          <a:lstStyle/>
+          <a:p>
+            <a:pPr algn="ctr" indent="0" marL="0">
+              <a:buNone/>
+            </a:pPr>
+            <a:r>
+              <a:rPr lang="en-US" sz="1200" b="1" dirty="0">
+                <a:solidFill>
+                  <a:srgbClr val="E0A458"/>
                 </a:solidFill>
                 <a:latin typeface="Courier New" pitchFamily="34" charset="0"/>
                 <a:ea typeface="Courier New" pitchFamily="34" charset="-122"/>
                 <a:cs typeface="Courier New" pitchFamily="34" charset="-120"/>
               </a:rPr>
-              <a:t>    idx = idx % MAX_ERR_RECORD_COUNT;   // 최근 10개만 순환  \</a:t>
+              <a:t>t4</a:t>
+            </a:r>
+            <a:endParaRPr lang="en-US" sz="1200" dirty="0"/>
+          </a:p>
+        </p:txBody>
+      </p:sp>
+      <p:sp>
+        <p:nvSpPr>
+          <p:cNvPr id="18" name="Text 16"/>
+          <p:cNvSpPr/>
+          <p:nvPr/>
+        </p:nvSpPr>
+        <p:spPr>
+          <a:xfrm>
+            <a:off x="1517904" y="4352544"/>
+            <a:ext cx="3968496" cy="502920"/>
+          </a:xfrm>
+          <a:prstGeom prst="rect">
+            <a:avLst/>
+          </a:prstGeom>
+          <a:noFill/>
+          <a:ln/>
+        </p:spPr>
+        <p:txBody>
+          <a:bodyPr wrap="square" lIns="0" tIns="0" rIns="0" bIns="0" rtlCol="0" anchor="ctr"/>
+          <a:lstStyle/>
+          <a:p>
+            <a:pPr indent="0" marL="0">
+              <a:buNone/>
+            </a:pPr>
+            <a:r>
+              <a:rPr lang="en-US" sz="1300" dirty="0">
+                <a:solidFill>
+                  <a:srgbClr val="E8EDF2"/>
+                </a:solidFill>
+                <a:latin typeface="Malgun Gothic" pitchFamily="34" charset="0"/>
+                <a:ea typeface="Malgun Gothic" pitchFamily="34" charset="-122"/>
+                <a:cs typeface="Malgun Gothic" pitchFamily="34" charset="-120"/>
+              </a:rPr>
+              <a:t>스레드 B : 5+1 = 6 저장</a:t>
             </a:r>
             <a:endParaRPr lang="en-US" sz="1300" dirty="0"/>
           </a:p>
-          <a:p>
-            <a:pPr algn="l" indent="0" marL="0">
-              <a:lnSpc>
-                <a:spcPct val="108000"/>
-              </a:lnSpc>
-              <a:buNone/>
-            </a:pPr>
-            <a:r>
-              <a:rPr lang="en-US" sz="1300" dirty="0">
-                <a:solidFill>
-                  <a:srgbClr val="E8EDF2"/>
+        </p:txBody>
+      </p:sp>
+      <p:sp>
+        <p:nvSpPr>
+          <p:cNvPr id="19" name="Shape 17"/>
+          <p:cNvSpPr/>
+          <p:nvPr/>
+        </p:nvSpPr>
+        <p:spPr>
+          <a:xfrm>
+            <a:off x="804672" y="5038344"/>
+            <a:ext cx="4791456" cy="502920"/>
+          </a:xfrm>
+          <a:prstGeom prst="roundRect">
+            <a:avLst>
+              <a:gd name="adj" fmla="val 9091"/>
+            </a:avLst>
+          </a:prstGeom>
+          <a:solidFill>
+            <a:srgbClr val="2A1618"/>
+          </a:solidFill>
+          <a:ln w="12700">
+            <a:solidFill>
+              <a:srgbClr val="E0645B"/>
+            </a:solidFill>
+            <a:prstDash val="solid"/>
+          </a:ln>
+        </p:spPr>
+      </p:sp>
+      <p:sp>
+        <p:nvSpPr>
+          <p:cNvPr id="20" name="Text 18"/>
+          <p:cNvSpPr/>
+          <p:nvPr/>
+        </p:nvSpPr>
+        <p:spPr>
+          <a:xfrm>
+            <a:off x="804672" y="5038344"/>
+            <a:ext cx="4791456" cy="502920"/>
+          </a:xfrm>
+          <a:prstGeom prst="rect">
+            <a:avLst/>
+          </a:prstGeom>
+          <a:noFill/>
+          <a:ln/>
+        </p:spPr>
+        <p:txBody>
+          <a:bodyPr wrap="square" lIns="0" tIns="0" rIns="0" bIns="0" rtlCol="0" anchor="ctr"/>
+          <a:lstStyle/>
+          <a:p>
+            <a:pPr algn="ctr" indent="0" marL="0">
+              <a:buNone/>
+            </a:pPr>
+            <a:r>
+              <a:rPr lang="en-US" sz="1400" b="1" dirty="0">
+                <a:solidFill>
+                  <a:srgbClr val="E0645B"/>
+                </a:solidFill>
+                <a:latin typeface="Malgun Gothic" pitchFamily="34" charset="0"/>
+                <a:ea typeface="Malgun Gothic" pitchFamily="34" charset="-122"/>
+                <a:cs typeface="Malgun Gothic" pitchFamily="34" charset="-120"/>
+              </a:rPr>
+              <a:t>결과 err = 6  ·  증가 하나 유실 (틀림)</a:t>
+            </a:r>
+            <a:endParaRPr lang="en-US" sz="1400" dirty="0"/>
+          </a:p>
+        </p:txBody>
+      </p:sp>
+      <p:sp>
+        <p:nvSpPr>
+          <p:cNvPr id="21" name="Shape 19"/>
+          <p:cNvSpPr/>
+          <p:nvPr/>
+        </p:nvSpPr>
+        <p:spPr>
+          <a:xfrm>
+            <a:off x="6309360" y="1874520"/>
+            <a:ext cx="5303520" cy="3977640"/>
+          </a:xfrm>
+          <a:prstGeom prst="roundRect">
+            <a:avLst>
+              <a:gd name="adj" fmla="val 1609"/>
+            </a:avLst>
+          </a:prstGeom>
+          <a:solidFill>
+            <a:srgbClr val="1E232C"/>
+          </a:solidFill>
+          <a:ln w="19050">
+            <a:solidFill>
+              <a:srgbClr val="8CC63F"/>
+            </a:solidFill>
+            <a:prstDash val="solid"/>
+          </a:ln>
+        </p:spPr>
+      </p:sp>
+      <p:sp>
+        <p:nvSpPr>
+          <p:cNvPr id="22" name="Text 20"/>
+          <p:cNvSpPr/>
+          <p:nvPr/>
+        </p:nvSpPr>
+        <p:spPr>
+          <a:xfrm>
+            <a:off x="6537960" y="2011680"/>
+            <a:ext cx="4846320" cy="365760"/>
+          </a:xfrm>
+          <a:prstGeom prst="rect">
+            <a:avLst/>
+          </a:prstGeom>
+          <a:noFill/>
+          <a:ln/>
+        </p:spPr>
+        <p:txBody>
+          <a:bodyPr wrap="square" lIns="0" tIns="0" rIns="0" bIns="0" rtlCol="0" anchor="ctr"/>
+          <a:lstStyle/>
+          <a:p>
+            <a:pPr indent="0" marL="0">
+              <a:buNone/>
+            </a:pPr>
+            <a:r>
+              <a:rPr lang="en-US" sz="1600" b="1" dirty="0">
+                <a:solidFill>
+                  <a:srgbClr val="8CC63F"/>
+                </a:solidFill>
+                <a:latin typeface="Malgun Gothic" pitchFamily="34" charset="0"/>
+                <a:ea typeface="Malgun Gothic" pitchFamily="34" charset="-122"/>
+                <a:cs typeface="Malgun Gothic" pitchFamily="34" charset="-120"/>
+              </a:rPr>
+              <a:t>② atomicAdd  (원자적)</a:t>
+            </a:r>
+            <a:endParaRPr lang="en-US" sz="1600" dirty="0"/>
+          </a:p>
+        </p:txBody>
+      </p:sp>
+      <p:sp>
+        <p:nvSpPr>
+          <p:cNvPr id="23" name="Shape 21"/>
+          <p:cNvSpPr/>
+          <p:nvPr/>
+        </p:nvSpPr>
+        <p:spPr>
+          <a:xfrm>
+            <a:off x="6565392" y="2514600"/>
+            <a:ext cx="4791456" cy="822960"/>
+          </a:xfrm>
+          <a:prstGeom prst="roundRect">
+            <a:avLst>
+              <a:gd name="adj" fmla="val 4444"/>
+            </a:avLst>
+          </a:prstGeom>
+          <a:solidFill>
+            <a:srgbClr val="0E1116"/>
+          </a:solidFill>
+          <a:ln w="12700">
+            <a:solidFill>
+              <a:srgbClr val="2C3440"/>
+            </a:solidFill>
+            <a:prstDash val="solid"/>
+          </a:ln>
+        </p:spPr>
+      </p:sp>
+      <p:sp>
+        <p:nvSpPr>
+          <p:cNvPr id="24" name="Text 22"/>
+          <p:cNvSpPr/>
+          <p:nvPr/>
+        </p:nvSpPr>
+        <p:spPr>
+          <a:xfrm>
+            <a:off x="6675120" y="2514600"/>
+            <a:ext cx="548640" cy="822960"/>
+          </a:xfrm>
+          <a:prstGeom prst="rect">
+            <a:avLst/>
+          </a:prstGeom>
+          <a:noFill/>
+          <a:ln/>
+        </p:spPr>
+        <p:txBody>
+          <a:bodyPr wrap="square" lIns="0" tIns="0" rIns="0" bIns="0" rtlCol="0" anchor="ctr"/>
+          <a:lstStyle/>
+          <a:p>
+            <a:pPr algn="ctr" indent="0" marL="0">
+              <a:buNone/>
+            </a:pPr>
+            <a:r>
+              <a:rPr lang="en-US" sz="1200" b="1" dirty="0">
+                <a:solidFill>
+                  <a:srgbClr val="4FB0C6"/>
                 </a:solidFill>
                 <a:latin typeface="Courier New" pitchFamily="34" charset="0"/>
                 <a:ea typeface="Courier New" pitchFamily="34" charset="-122"/>
                 <a:cs typeface="Courier New" pitchFamily="34" charset="-120"/>
               </a:rPr>
-              <a:t>    err_addr[idx]        = (unsigned long)p;        // 오류 주소     \</a:t>
+              <a:t>t1</a:t>
+            </a:r>
+            <a:endParaRPr lang="en-US" sz="1200" dirty="0"/>
+          </a:p>
+        </p:txBody>
+      </p:sp>
+      <p:sp>
+        <p:nvSpPr>
+          <p:cNvPr id="25" name="Text 23"/>
+          <p:cNvSpPr/>
+          <p:nvPr/>
+        </p:nvSpPr>
+        <p:spPr>
+          <a:xfrm>
+            <a:off x="7278624" y="2514600"/>
+            <a:ext cx="3968496" cy="822960"/>
+          </a:xfrm>
+          <a:prstGeom prst="rect">
+            <a:avLst/>
+          </a:prstGeom>
+          <a:noFill/>
+          <a:ln/>
+        </p:spPr>
+        <p:txBody>
+          <a:bodyPr wrap="square" lIns="0" tIns="0" rIns="0" bIns="0" rtlCol="0" anchor="ctr"/>
+          <a:lstStyle/>
+          <a:p>
+            <a:pPr indent="0" marL="0">
+              <a:buNone/>
+            </a:pPr>
+            <a:r>
+              <a:rPr lang="en-US" sz="1300" dirty="0">
+                <a:solidFill>
+                  <a:srgbClr val="E8EDF2"/>
+                </a:solidFill>
+                <a:latin typeface="Malgun Gothic" pitchFamily="34" charset="0"/>
+                <a:ea typeface="Malgun Gothic" pitchFamily="34" charset="-122"/>
+                <a:cs typeface="Malgun Gothic" pitchFamily="34" charset="-120"/>
+              </a:rPr>
+              <a:t>A : atomicAdd → 5 읽고 6 저장</a:t>
             </a:r>
             <a:endParaRPr lang="en-US" sz="1300" dirty="0"/>
           </a:p>
           <a:p>
-            <a:pPr algn="l" indent="0" marL="0">
-              <a:lnSpc>
-                <a:spcPct val="108000"/>
-              </a:lnSpc>
+            <a:pPr indent="0" marL="0">
               <a:buNone/>
             </a:pPr>
             <a:r>
               <a:rPr lang="en-US" sz="1300" dirty="0">
                 <a:solidFill>
                   <a:srgbClr val="E8EDF2"/>
+                </a:solidFill>
+                <a:latin typeface="Malgun Gothic" pitchFamily="34" charset="0"/>
+                <a:ea typeface="Malgun Gothic" pitchFamily="34" charset="-122"/>
+                <a:cs typeface="Malgun Gothic" pitchFamily="34" charset="-120"/>
+              </a:rPr>
+              <a:t>     (읽기+쓰기가 한 덩어리)</a:t>
+            </a:r>
+            <a:endParaRPr lang="en-US" sz="1300" dirty="0"/>
+          </a:p>
+        </p:txBody>
+      </p:sp>
+      <p:sp>
+        <p:nvSpPr>
+          <p:cNvPr id="26" name="Shape 24"/>
+          <p:cNvSpPr/>
+          <p:nvPr/>
+        </p:nvSpPr>
+        <p:spPr>
+          <a:xfrm>
+            <a:off x="6565392" y="3447288"/>
+            <a:ext cx="4791456" cy="822960"/>
+          </a:xfrm>
+          <a:prstGeom prst="roundRect">
+            <a:avLst>
+              <a:gd name="adj" fmla="val 4444"/>
+            </a:avLst>
+          </a:prstGeom>
+          <a:solidFill>
+            <a:srgbClr val="0E1116"/>
+          </a:solidFill>
+          <a:ln w="12700">
+            <a:solidFill>
+              <a:srgbClr val="2C3440"/>
+            </a:solidFill>
+            <a:prstDash val="solid"/>
+          </a:ln>
+        </p:spPr>
+      </p:sp>
+      <p:sp>
+        <p:nvSpPr>
+          <p:cNvPr id="27" name="Text 25"/>
+          <p:cNvSpPr/>
+          <p:nvPr/>
+        </p:nvSpPr>
+        <p:spPr>
+          <a:xfrm>
+            <a:off x="6675120" y="3447288"/>
+            <a:ext cx="548640" cy="822960"/>
+          </a:xfrm>
+          <a:prstGeom prst="rect">
+            <a:avLst/>
+          </a:prstGeom>
+          <a:noFill/>
+          <a:ln/>
+        </p:spPr>
+        <p:txBody>
+          <a:bodyPr wrap="square" lIns="0" tIns="0" rIns="0" bIns="0" rtlCol="0" anchor="ctr"/>
+          <a:lstStyle/>
+          <a:p>
+            <a:pPr algn="ctr" indent="0" marL="0">
+              <a:buNone/>
+            </a:pPr>
+            <a:r>
+              <a:rPr lang="en-US" sz="1200" b="1" dirty="0">
+                <a:solidFill>
+                  <a:srgbClr val="8CC63F"/>
                 </a:solidFill>
                 <a:latin typeface="Courier New" pitchFamily="34" charset="0"/>
                 <a:ea typeface="Courier New" pitchFamily="34" charset="-122"/>
                 <a:cs typeface="Courier New" pitchFamily="34" charset="-120"/>
               </a:rPr>
-              <a:t>    err_expect[idx]      = (unsigned long)expect;   // 기대값       \</a:t>
+              <a:t>t2</a:t>
+            </a:r>
+            <a:endParaRPr lang="en-US" sz="1200" dirty="0"/>
+          </a:p>
+        </p:txBody>
+      </p:sp>
+      <p:sp>
+        <p:nvSpPr>
+          <p:cNvPr id="28" name="Text 26"/>
+          <p:cNvSpPr/>
+          <p:nvPr/>
+        </p:nvSpPr>
+        <p:spPr>
+          <a:xfrm>
+            <a:off x="7278624" y="3447288"/>
+            <a:ext cx="3968496" cy="822960"/>
+          </a:xfrm>
+          <a:prstGeom prst="rect">
+            <a:avLst/>
+          </a:prstGeom>
+          <a:noFill/>
+          <a:ln/>
+        </p:spPr>
+        <p:txBody>
+          <a:bodyPr wrap="square" lIns="0" tIns="0" rIns="0" bIns="0" rtlCol="0" anchor="ctr"/>
+          <a:lstStyle/>
+          <a:p>
+            <a:pPr indent="0" marL="0">
+              <a:buNone/>
+            </a:pPr>
+            <a:r>
+              <a:rPr lang="en-US" sz="1300" dirty="0">
+                <a:solidFill>
+                  <a:srgbClr val="E8EDF2"/>
+                </a:solidFill>
+                <a:latin typeface="Malgun Gothic" pitchFamily="34" charset="0"/>
+                <a:ea typeface="Malgun Gothic" pitchFamily="34" charset="-122"/>
+                <a:cs typeface="Malgun Gothic" pitchFamily="34" charset="-120"/>
+              </a:rPr>
+              <a:t>B : atomicAdd → 6 읽고 7 저장</a:t>
             </a:r>
             <a:endParaRPr lang="en-US" sz="1300" dirty="0"/>
           </a:p>
           <a:p>
-            <a:pPr algn="l" indent="0" marL="0">
-              <a:lnSpc>
-                <a:spcPct val="108000"/>
-              </a:lnSpc>
+            <a:pPr indent="0" marL="0">
               <a:buNone/>
             </a:pPr>
             <a:r>
@@ -6245,120 +7638,157 @@
                 <a:solidFill>
                   <a:srgbClr val="E8EDF2"/>
                 </a:solidFill>
-                <a:latin typeface="Courier New" pitchFamily="34" charset="0"/>
-                <a:ea typeface="Courier New" pitchFamily="34" charset="-122"/>
-                <a:cs typeface="Courier New" pitchFamily="34" charset="-120"/>
-              </a:rPr>
-              <a:t>    err_current[idx]     = (unsigned long)current;  // 실제 읽은 값  \</a:t>
+                <a:latin typeface="Malgun Gothic" pitchFamily="34" charset="0"/>
+                <a:ea typeface="Malgun Gothic" pitchFamily="34" charset="-122"/>
+                <a:cs typeface="Malgun Gothic" pitchFamily="34" charset="-120"/>
+              </a:rPr>
+              <a:t>     (A가 끝난 뒤 실행)</a:t>
             </a:r>
             <a:endParaRPr lang="en-US" sz="1300" dirty="0"/>
           </a:p>
-          <a:p>
-            <a:pPr algn="l" indent="0" marL="0">
-              <a:lnSpc>
-                <a:spcPct val="108000"/>
-              </a:lnSpc>
-              <a:buNone/>
-            </a:pPr>
-            <a:r>
-              <a:rPr lang="en-US" sz="1300" dirty="0">
-                <a:solidFill>
-                  <a:srgbClr val="E8EDF2"/>
-                </a:solidFill>
-                <a:latin typeface="Courier New" pitchFamily="34" charset="0"/>
-                <a:ea typeface="Courier New" pitchFamily="34" charset="-122"/>
-                <a:cs typeface="Courier New" pitchFamily="34" charset="-120"/>
-              </a:rPr>
-              <a:t>    err_second_read[idx] = (unsigned long)(*p);     // 다시 읽은 값  \</a:t>
+        </p:txBody>
+      </p:sp>
+      <p:sp>
+        <p:nvSpPr>
+          <p:cNvPr id="29" name="Text 27"/>
+          <p:cNvSpPr/>
+          <p:nvPr/>
+        </p:nvSpPr>
+        <p:spPr>
+          <a:xfrm>
+            <a:off x="6565392" y="4379976"/>
+            <a:ext cx="4791456" cy="365760"/>
+          </a:xfrm>
+          <a:prstGeom prst="rect">
+            <a:avLst/>
+          </a:prstGeom>
+          <a:noFill/>
+          <a:ln/>
+        </p:spPr>
+        <p:txBody>
+          <a:bodyPr wrap="square" lIns="0" tIns="0" rIns="0" bIns="0" rtlCol="0" anchor="ctr"/>
+          <a:lstStyle/>
+          <a:p>
+            <a:pPr indent="0" marL="0">
+              <a:buNone/>
+            </a:pPr>
+            <a:r>
+              <a:rPr lang="en-US" sz="1150" i="1" dirty="0">
+                <a:solidFill>
+                  <a:srgbClr val="9AA6B2"/>
+                </a:solidFill>
+                <a:latin typeface="Malgun Gothic" pitchFamily="34" charset="0"/>
+                <a:ea typeface="Malgun Gothic" pitchFamily="34" charset="-122"/>
+                <a:cs typeface="Malgun Gothic" pitchFamily="34" charset="-120"/>
+              </a:rPr>
+              <a:t>원자연산은 중간에 끼어들 수 없습니다 (쪼갤 수 없는 하나의 동작)</a:t>
+            </a:r>
+            <a:endParaRPr lang="en-US" sz="1150" dirty="0"/>
+          </a:p>
+        </p:txBody>
+      </p:sp>
+      <p:sp>
+        <p:nvSpPr>
+          <p:cNvPr id="30" name="Shape 28"/>
+          <p:cNvSpPr/>
+          <p:nvPr/>
+        </p:nvSpPr>
+        <p:spPr>
+          <a:xfrm>
+            <a:off x="6565392" y="4764024"/>
+            <a:ext cx="4791456" cy="502920"/>
+          </a:xfrm>
+          <a:prstGeom prst="roundRect">
+            <a:avLst>
+              <a:gd name="adj" fmla="val 9091"/>
+            </a:avLst>
+          </a:prstGeom>
+          <a:solidFill>
+            <a:srgbClr val="16240F"/>
+          </a:solidFill>
+          <a:ln w="12700">
+            <a:solidFill>
+              <a:srgbClr val="8CC63F"/>
+            </a:solidFill>
+            <a:prstDash val="solid"/>
+          </a:ln>
+        </p:spPr>
+      </p:sp>
+      <p:sp>
+        <p:nvSpPr>
+          <p:cNvPr id="31" name="Text 29"/>
+          <p:cNvSpPr/>
+          <p:nvPr/>
+        </p:nvSpPr>
+        <p:spPr>
+          <a:xfrm>
+            <a:off x="6565392" y="4764024"/>
+            <a:ext cx="4791456" cy="502920"/>
+          </a:xfrm>
+          <a:prstGeom prst="rect">
+            <a:avLst/>
+          </a:prstGeom>
+          <a:noFill/>
+          <a:ln/>
+        </p:spPr>
+        <p:txBody>
+          <a:bodyPr wrap="square" lIns="0" tIns="0" rIns="0" bIns="0" rtlCol="0" anchor="ctr"/>
+          <a:lstStyle/>
+          <a:p>
+            <a:pPr algn="ctr" indent="0" marL="0">
+              <a:buNone/>
+            </a:pPr>
+            <a:r>
+              <a:rPr lang="en-US" sz="1400" b="1" dirty="0">
+                <a:solidFill>
+                  <a:srgbClr val="8CC63F"/>
+                </a:solidFill>
+                <a:latin typeface="Malgun Gothic" pitchFamily="34" charset="0"/>
+                <a:ea typeface="Malgun Gothic" pitchFamily="34" charset="-122"/>
+                <a:cs typeface="Malgun Gothic" pitchFamily="34" charset="-120"/>
+              </a:rPr>
+              <a:t>결과 err = 7  ·  정확히 셈 (정확)</a:t>
+            </a:r>
+            <a:endParaRPr lang="en-US" sz="1400" dirty="0"/>
+          </a:p>
+        </p:txBody>
+      </p:sp>
+      <p:sp>
+        <p:nvSpPr>
+          <p:cNvPr id="32" name="Text 30"/>
+          <p:cNvSpPr/>
+          <p:nvPr/>
+        </p:nvSpPr>
+        <p:spPr>
+          <a:xfrm>
+            <a:off x="548640" y="5989320"/>
+            <a:ext cx="11064240" cy="365760"/>
+          </a:xfrm>
+          <a:prstGeom prst="rect">
+            <a:avLst/>
+          </a:prstGeom>
+          <a:noFill/>
+          <a:ln/>
+        </p:spPr>
+        <p:txBody>
+          <a:bodyPr wrap="square" lIns="0" tIns="0" rIns="0" bIns="0" rtlCol="0" anchor="ctr"/>
+          <a:lstStyle/>
+          <a:p>
+            <a:pPr algn="ctr" indent="0" marL="0">
+              <a:buNone/>
+            </a:pPr>
+            <a:r>
+              <a:rPr lang="en-US" sz="1300" i="1" dirty="0">
+                <a:solidFill>
+                  <a:srgbClr val="9AA6B2"/>
+                </a:solidFill>
+                <a:latin typeface="Malgun Gothic" pitchFamily="34" charset="0"/>
+                <a:ea typeface="Malgun Gothic" pitchFamily="34" charset="-122"/>
+                <a:cs typeface="Malgun Gothic" pitchFamily="34" charset="-120"/>
+              </a:rPr>
+              <a:t>210만 스레드가 동시에 오류를 세도, atomicAdd 덕분에 총 개수가 정확합니다. (RECORD_ERR, tests.cpp:76)</a:t>
             </a:r>
             <a:endParaRPr lang="en-US" sz="1300" dirty="0"/>
-          </a:p>
-          <a:p>
-            <a:pPr algn="l" indent="0" marL="0">
-              <a:lnSpc>
-                <a:spcPct val="108000"/>
-              </a:lnSpc>
-              <a:buNone/>
-            </a:pPr>
-            <a:r>
-              <a:rPr lang="en-US" sz="1300" dirty="0">
-                <a:solidFill>
-                  <a:srgbClr val="E8EDF2"/>
-                </a:solidFill>
-                <a:latin typeface="Courier New" pitchFamily="34" charset="0"/>
-                <a:ea typeface="Courier New" pitchFamily="34" charset="-122"/>
-                <a:cs typeface="Courier New" pitchFamily="34" charset="-120"/>
-              </a:rPr>
-              <a:t>}while(0)</a:t>
-            </a:r>
-            <a:endParaRPr lang="en-US" sz="1300" dirty="0"/>
-          </a:p>
-        </p:txBody>
-      </p:sp>
-      <p:sp>
-        <p:nvSpPr>
-          <p:cNvPr id="6" name="Text 4"/>
-          <p:cNvSpPr/>
-          <p:nvPr/>
-        </p:nvSpPr>
-        <p:spPr>
-          <a:xfrm>
-            <a:off x="548640" y="4892040"/>
-            <a:ext cx="11064240" cy="914400"/>
-          </a:xfrm>
-          <a:prstGeom prst="rect">
-            <a:avLst/>
-          </a:prstGeom>
-          <a:noFill/>
-          <a:ln/>
-        </p:spPr>
-        <p:txBody>
-          <a:bodyPr wrap="square" lIns="0" tIns="0" rIns="0" bIns="0" rtlCol="0" anchor="t"/>
-          <a:lstStyle/>
-          <a:p>
-            <a:pPr indent="0" marL="0">
-              <a:buNone/>
-            </a:pPr>
-            <a:r>
-              <a:rPr lang="en-US" sz="1600" dirty="0">
-                <a:solidFill>
-                  <a:srgbClr val="E8EDF2"/>
-                </a:solidFill>
-                <a:latin typeface="Malgun Gothic" pitchFamily="34" charset="0"/>
-                <a:ea typeface="Malgun Gothic" pitchFamily="34" charset="-122"/>
-                <a:cs typeface="Malgun Gothic" pitchFamily="34" charset="-120"/>
-              </a:rPr>
-              <a:t>오류가 난 스레드는 이 매크로로 </a:t>
-            </a:r>
-            <a:pPr indent="0" marL="0">
-              <a:buNone/>
-            </a:pPr>
-            <a:r>
-              <a:rPr lang="en-US" sz="1600" b="1" dirty="0">
-                <a:solidFill>
-                  <a:srgbClr val="8CC63F"/>
-                </a:solidFill>
-                <a:latin typeface="Malgun Gothic" pitchFamily="34" charset="0"/>
-                <a:ea typeface="Malgun Gothic" pitchFamily="34" charset="-122"/>
-                <a:cs typeface="Malgun Gothic" pitchFamily="34" charset="-120"/>
-              </a:rPr>
-              <a:t>주소·기대값·실제값·재읽기값</a:t>
-            </a:r>
-            <a:pPr indent="0" marL="0">
-              <a:buNone/>
-            </a:pPr>
-            <a:r>
-              <a:rPr lang="en-US" sz="1600" dirty="0">
-                <a:solidFill>
-                  <a:srgbClr val="E8EDF2"/>
-                </a:solidFill>
-                <a:latin typeface="Malgun Gothic" pitchFamily="34" charset="0"/>
-                <a:ea typeface="Malgun Gothic" pitchFamily="34" charset="-122"/>
-                <a:cs typeface="Malgun Gothic" pitchFamily="34" charset="-120"/>
-              </a:rPr>
-              <a:t>을 기록합니다. 재읽기값은 '다시 읽으면 값이 바뀌나?'(소프트 오류 판별)를 봅니다.</a:t>
-            </a:r>
-            <a:endParaRPr lang="en-US" sz="1600" dirty="0"/>
           </a:p>
         </p:txBody>
       </p:sp>
@@ -6431,7 +7861,7 @@
                 <a:ea typeface="Courier New" pitchFamily="34" charset="-122"/>
                 <a:cs typeface="Courier New" pitchFamily="34" charset="-120"/>
               </a:rPr>
-              <a:t>5</a:t>
+              <a:t>4</a:t>
             </a:r>
             <a:endParaRPr lang="en-US" sz="2200" dirty="0"/>
           </a:p>
@@ -6470,7 +7900,7 @@
                 <a:ea typeface="Malgun Gothic" pitchFamily="34" charset="-122"/>
                 <a:cs typeface="Malgun Gothic" pitchFamily="34" charset="-120"/>
               </a:rPr>
-              <a:t>반환값이 고유 슬롯 번호가 된다</a:t>
+              <a:t>RECORD_ERR 매크로 해부</a:t>
             </a:r>
             <a:endParaRPr lang="en-US" sz="3000" dirty="0"/>
           </a:p>
@@ -6478,474 +7908,18 @@
       </p:sp>
       <p:sp>
         <p:nvSpPr>
-          <p:cNvPr id="4" name="Text 2"/>
-          <p:cNvSpPr/>
-          <p:nvPr/>
-        </p:nvSpPr>
-        <p:spPr>
-          <a:xfrm>
-            <a:off x="548640" y="1463040"/>
-            <a:ext cx="11064240" cy="457200"/>
-          </a:xfrm>
-          <a:prstGeom prst="rect">
-            <a:avLst/>
-          </a:prstGeom>
-          <a:noFill/>
-          <a:ln/>
-        </p:spPr>
-        <p:txBody>
-          <a:bodyPr wrap="square" lIns="0" tIns="0" rIns="0" bIns="0" rtlCol="0" anchor="ctr"/>
-          <a:lstStyle/>
-          <a:p>
-            <a:pPr indent="0" marL="0">
-              <a:buNone/>
-            </a:pPr>
-            <a:r>
-              <a:rPr lang="en-US" sz="1600" dirty="0">
-                <a:solidFill>
-                  <a:srgbClr val="9AA6B2"/>
-                </a:solidFill>
-                <a:latin typeface="Malgun Gothic" pitchFamily="34" charset="0"/>
-                <a:ea typeface="Malgun Gothic" pitchFamily="34" charset="-122"/>
-                <a:cs typeface="Malgun Gothic" pitchFamily="34" charset="-120"/>
-              </a:rPr>
-              <a:t>세 스레드가 동시에 atomicAdd(err,1)을 호출해도, 반환값은 겹치지 않습니다.</a:t>
-            </a:r>
-            <a:endParaRPr lang="en-US" sz="1600" dirty="0"/>
-          </a:p>
-        </p:txBody>
-      </p:sp>
-      <p:sp>
-        <p:nvSpPr>
-          <p:cNvPr id="5" name="Shape 3"/>
-          <p:cNvSpPr/>
-          <p:nvPr/>
-        </p:nvSpPr>
-        <p:spPr>
-          <a:xfrm>
-            <a:off x="548640" y="2148840"/>
-            <a:ext cx="3444240" cy="1554480"/>
+          <p:cNvPr id="4" name="Shape 2"/>
+          <p:cNvSpPr/>
+          <p:nvPr/>
+        </p:nvSpPr>
+        <p:spPr>
+          <a:xfrm>
+            <a:off x="548640" y="1554480"/>
+            <a:ext cx="11064240" cy="3200400"/>
           </a:xfrm>
           <a:prstGeom prst="roundRect">
             <a:avLst>
-              <a:gd name="adj" fmla="val 4706"/>
-            </a:avLst>
-          </a:prstGeom>
-          <a:solidFill>
-            <a:srgbClr val="1E232C"/>
-          </a:solidFill>
-          <a:ln/>
-        </p:spPr>
-      </p:sp>
-      <p:sp>
-        <p:nvSpPr>
-          <p:cNvPr id="6" name="Text 4"/>
-          <p:cNvSpPr/>
-          <p:nvPr/>
-        </p:nvSpPr>
-        <p:spPr>
-          <a:xfrm>
-            <a:off x="777240" y="2331720"/>
-            <a:ext cx="2987040" cy="457200"/>
-          </a:xfrm>
-          <a:prstGeom prst="rect">
-            <a:avLst/>
-          </a:prstGeom>
-          <a:noFill/>
-          <a:ln/>
-        </p:spPr>
-        <p:txBody>
-          <a:bodyPr wrap="square" lIns="0" tIns="0" rIns="0" bIns="0" rtlCol="0" anchor="ctr"/>
-          <a:lstStyle/>
-          <a:p>
-            <a:pPr indent="0" marL="0">
-              <a:buNone/>
-            </a:pPr>
-            <a:r>
-              <a:rPr lang="en-US" sz="1700" b="1" dirty="0">
-                <a:solidFill>
-                  <a:srgbClr val="8CC63F"/>
-                </a:solidFill>
-                <a:latin typeface="Malgun Gothic" pitchFamily="34" charset="0"/>
-                <a:ea typeface="Malgun Gothic" pitchFamily="34" charset="-122"/>
-                <a:cs typeface="Malgun Gothic" pitchFamily="34" charset="-120"/>
-              </a:rPr>
-              <a:t>스레드 X</a:t>
-            </a:r>
-            <a:endParaRPr lang="en-US" sz="1700" dirty="0"/>
-          </a:p>
-        </p:txBody>
-      </p:sp>
-      <p:sp>
-        <p:nvSpPr>
-          <p:cNvPr id="7" name="Text 5"/>
-          <p:cNvSpPr/>
-          <p:nvPr/>
-        </p:nvSpPr>
-        <p:spPr>
-          <a:xfrm>
-            <a:off x="777240" y="2788920"/>
-            <a:ext cx="2987040" cy="411480"/>
-          </a:xfrm>
-          <a:prstGeom prst="rect">
-            <a:avLst/>
-          </a:prstGeom>
-          <a:noFill/>
-          <a:ln/>
-        </p:spPr>
-        <p:txBody>
-          <a:bodyPr wrap="square" lIns="0" tIns="0" rIns="0" bIns="0" rtlCol="0" anchor="ctr"/>
-          <a:lstStyle/>
-          <a:p>
-            <a:pPr indent="0" marL="0">
-              <a:buNone/>
-            </a:pPr>
-            <a:r>
-              <a:rPr lang="en-US" sz="1600" b="1" dirty="0">
-                <a:solidFill>
-                  <a:srgbClr val="E8EDF2"/>
-                </a:solidFill>
-                <a:latin typeface="Courier New" pitchFamily="34" charset="0"/>
-                <a:ea typeface="Courier New" pitchFamily="34" charset="-122"/>
-                <a:cs typeface="Courier New" pitchFamily="34" charset="-120"/>
-              </a:rPr>
-              <a:t>→ 반환 0</a:t>
-            </a:r>
-            <a:endParaRPr lang="en-US" sz="1600" dirty="0"/>
-          </a:p>
-        </p:txBody>
-      </p:sp>
-      <p:sp>
-        <p:nvSpPr>
-          <p:cNvPr id="8" name="Text 6"/>
-          <p:cNvSpPr/>
-          <p:nvPr/>
-        </p:nvSpPr>
-        <p:spPr>
-          <a:xfrm>
-            <a:off x="777240" y="3200400"/>
-            <a:ext cx="2987040" cy="411480"/>
-          </a:xfrm>
-          <a:prstGeom prst="rect">
-            <a:avLst/>
-          </a:prstGeom>
-          <a:noFill/>
-          <a:ln/>
-        </p:spPr>
-        <p:txBody>
-          <a:bodyPr wrap="square" lIns="0" tIns="0" rIns="0" bIns="0" rtlCol="0" anchor="ctr"/>
-          <a:lstStyle/>
-          <a:p>
-            <a:pPr indent="0" marL="0">
-              <a:buNone/>
-            </a:pPr>
-            <a:r>
-              <a:rPr lang="en-US" sz="1400" dirty="0">
-                <a:solidFill>
-                  <a:srgbClr val="9AA6B2"/>
-                </a:solidFill>
-                <a:latin typeface="Malgun Gothic" pitchFamily="34" charset="0"/>
-                <a:ea typeface="Malgun Gothic" pitchFamily="34" charset="-122"/>
-                <a:cs typeface="Malgun Gothic" pitchFamily="34" charset="-120"/>
-              </a:rPr>
-              <a:t>슬롯 0 에 기록</a:t>
-            </a:r>
-            <a:endParaRPr lang="en-US" sz="1400" dirty="0"/>
-          </a:p>
-        </p:txBody>
-      </p:sp>
-      <p:sp>
-        <p:nvSpPr>
-          <p:cNvPr id="9" name="Shape 7"/>
-          <p:cNvSpPr/>
-          <p:nvPr/>
-        </p:nvSpPr>
-        <p:spPr>
-          <a:xfrm>
-            <a:off x="4358640" y="2148840"/>
-            <a:ext cx="3444240" cy="1554480"/>
-          </a:xfrm>
-          <a:prstGeom prst="roundRect">
-            <a:avLst>
-              <a:gd name="adj" fmla="val 4706"/>
-            </a:avLst>
-          </a:prstGeom>
-          <a:solidFill>
-            <a:srgbClr val="1E232C"/>
-          </a:solidFill>
-          <a:ln/>
-        </p:spPr>
-      </p:sp>
-      <p:sp>
-        <p:nvSpPr>
-          <p:cNvPr id="10" name="Text 8"/>
-          <p:cNvSpPr/>
-          <p:nvPr/>
-        </p:nvSpPr>
-        <p:spPr>
-          <a:xfrm>
-            <a:off x="4587240" y="2331720"/>
-            <a:ext cx="2987040" cy="457200"/>
-          </a:xfrm>
-          <a:prstGeom prst="rect">
-            <a:avLst/>
-          </a:prstGeom>
-          <a:noFill/>
-          <a:ln/>
-        </p:spPr>
-        <p:txBody>
-          <a:bodyPr wrap="square" lIns="0" tIns="0" rIns="0" bIns="0" rtlCol="0" anchor="ctr"/>
-          <a:lstStyle/>
-          <a:p>
-            <a:pPr indent="0" marL="0">
-              <a:buNone/>
-            </a:pPr>
-            <a:r>
-              <a:rPr lang="en-US" sz="1700" b="1" dirty="0">
-                <a:solidFill>
-                  <a:srgbClr val="4FB0C6"/>
-                </a:solidFill>
-                <a:latin typeface="Malgun Gothic" pitchFamily="34" charset="0"/>
-                <a:ea typeface="Malgun Gothic" pitchFamily="34" charset="-122"/>
-                <a:cs typeface="Malgun Gothic" pitchFamily="34" charset="-120"/>
-              </a:rPr>
-              <a:t>스레드 Y</a:t>
-            </a:r>
-            <a:endParaRPr lang="en-US" sz="1700" dirty="0"/>
-          </a:p>
-        </p:txBody>
-      </p:sp>
-      <p:sp>
-        <p:nvSpPr>
-          <p:cNvPr id="11" name="Text 9"/>
-          <p:cNvSpPr/>
-          <p:nvPr/>
-        </p:nvSpPr>
-        <p:spPr>
-          <a:xfrm>
-            <a:off x="4587240" y="2788920"/>
-            <a:ext cx="2987040" cy="411480"/>
-          </a:xfrm>
-          <a:prstGeom prst="rect">
-            <a:avLst/>
-          </a:prstGeom>
-          <a:noFill/>
-          <a:ln/>
-        </p:spPr>
-        <p:txBody>
-          <a:bodyPr wrap="square" lIns="0" tIns="0" rIns="0" bIns="0" rtlCol="0" anchor="ctr"/>
-          <a:lstStyle/>
-          <a:p>
-            <a:pPr indent="0" marL="0">
-              <a:buNone/>
-            </a:pPr>
-            <a:r>
-              <a:rPr lang="en-US" sz="1600" b="1" dirty="0">
-                <a:solidFill>
-                  <a:srgbClr val="E8EDF2"/>
-                </a:solidFill>
-                <a:latin typeface="Courier New" pitchFamily="34" charset="0"/>
-                <a:ea typeface="Courier New" pitchFamily="34" charset="-122"/>
-                <a:cs typeface="Courier New" pitchFamily="34" charset="-120"/>
-              </a:rPr>
-              <a:t>→ 반환 1</a:t>
-            </a:r>
-            <a:endParaRPr lang="en-US" sz="1600" dirty="0"/>
-          </a:p>
-        </p:txBody>
-      </p:sp>
-      <p:sp>
-        <p:nvSpPr>
-          <p:cNvPr id="12" name="Text 10"/>
-          <p:cNvSpPr/>
-          <p:nvPr/>
-        </p:nvSpPr>
-        <p:spPr>
-          <a:xfrm>
-            <a:off x="4587240" y="3200400"/>
-            <a:ext cx="2987040" cy="411480"/>
-          </a:xfrm>
-          <a:prstGeom prst="rect">
-            <a:avLst/>
-          </a:prstGeom>
-          <a:noFill/>
-          <a:ln/>
-        </p:spPr>
-        <p:txBody>
-          <a:bodyPr wrap="square" lIns="0" tIns="0" rIns="0" bIns="0" rtlCol="0" anchor="ctr"/>
-          <a:lstStyle/>
-          <a:p>
-            <a:pPr indent="0" marL="0">
-              <a:buNone/>
-            </a:pPr>
-            <a:r>
-              <a:rPr lang="en-US" sz="1400" dirty="0">
-                <a:solidFill>
-                  <a:srgbClr val="9AA6B2"/>
-                </a:solidFill>
-                <a:latin typeface="Malgun Gothic" pitchFamily="34" charset="0"/>
-                <a:ea typeface="Malgun Gothic" pitchFamily="34" charset="-122"/>
-                <a:cs typeface="Malgun Gothic" pitchFamily="34" charset="-120"/>
-              </a:rPr>
-              <a:t>슬롯 1 에 기록</a:t>
-            </a:r>
-            <a:endParaRPr lang="en-US" sz="1400" dirty="0"/>
-          </a:p>
-        </p:txBody>
-      </p:sp>
-      <p:sp>
-        <p:nvSpPr>
-          <p:cNvPr id="13" name="Shape 11"/>
-          <p:cNvSpPr/>
-          <p:nvPr/>
-        </p:nvSpPr>
-        <p:spPr>
-          <a:xfrm>
-            <a:off x="8168640" y="2148840"/>
-            <a:ext cx="3444240" cy="1554480"/>
-          </a:xfrm>
-          <a:prstGeom prst="roundRect">
-            <a:avLst>
-              <a:gd name="adj" fmla="val 4706"/>
-            </a:avLst>
-          </a:prstGeom>
-          <a:solidFill>
-            <a:srgbClr val="1E232C"/>
-          </a:solidFill>
-          <a:ln/>
-        </p:spPr>
-      </p:sp>
-      <p:sp>
-        <p:nvSpPr>
-          <p:cNvPr id="14" name="Text 12"/>
-          <p:cNvSpPr/>
-          <p:nvPr/>
-        </p:nvSpPr>
-        <p:spPr>
-          <a:xfrm>
-            <a:off x="8397240" y="2331720"/>
-            <a:ext cx="2987040" cy="457200"/>
-          </a:xfrm>
-          <a:prstGeom prst="rect">
-            <a:avLst/>
-          </a:prstGeom>
-          <a:noFill/>
-          <a:ln/>
-        </p:spPr>
-        <p:txBody>
-          <a:bodyPr wrap="square" lIns="0" tIns="0" rIns="0" bIns="0" rtlCol="0" anchor="ctr"/>
-          <a:lstStyle/>
-          <a:p>
-            <a:pPr indent="0" marL="0">
-              <a:buNone/>
-            </a:pPr>
-            <a:r>
-              <a:rPr lang="en-US" sz="1700" b="1" dirty="0">
-                <a:solidFill>
-                  <a:srgbClr val="E0A458"/>
-                </a:solidFill>
-                <a:latin typeface="Malgun Gothic" pitchFamily="34" charset="0"/>
-                <a:ea typeface="Malgun Gothic" pitchFamily="34" charset="-122"/>
-                <a:cs typeface="Malgun Gothic" pitchFamily="34" charset="-120"/>
-              </a:rPr>
-              <a:t>스레드 Z</a:t>
-            </a:r>
-            <a:endParaRPr lang="en-US" sz="1700" dirty="0"/>
-          </a:p>
-        </p:txBody>
-      </p:sp>
-      <p:sp>
-        <p:nvSpPr>
-          <p:cNvPr id="15" name="Text 13"/>
-          <p:cNvSpPr/>
-          <p:nvPr/>
-        </p:nvSpPr>
-        <p:spPr>
-          <a:xfrm>
-            <a:off x="8397240" y="2788920"/>
-            <a:ext cx="2987040" cy="411480"/>
-          </a:xfrm>
-          <a:prstGeom prst="rect">
-            <a:avLst/>
-          </a:prstGeom>
-          <a:noFill/>
-          <a:ln/>
-        </p:spPr>
-        <p:txBody>
-          <a:bodyPr wrap="square" lIns="0" tIns="0" rIns="0" bIns="0" rtlCol="0" anchor="ctr"/>
-          <a:lstStyle/>
-          <a:p>
-            <a:pPr indent="0" marL="0">
-              <a:buNone/>
-            </a:pPr>
-            <a:r>
-              <a:rPr lang="en-US" sz="1600" b="1" dirty="0">
-                <a:solidFill>
-                  <a:srgbClr val="E8EDF2"/>
-                </a:solidFill>
-                <a:latin typeface="Courier New" pitchFamily="34" charset="0"/>
-                <a:ea typeface="Courier New" pitchFamily="34" charset="-122"/>
-                <a:cs typeface="Courier New" pitchFamily="34" charset="-120"/>
-              </a:rPr>
-              <a:t>→ 반환 2</a:t>
-            </a:r>
-            <a:endParaRPr lang="en-US" sz="1600" dirty="0"/>
-          </a:p>
-        </p:txBody>
-      </p:sp>
-      <p:sp>
-        <p:nvSpPr>
-          <p:cNvPr id="16" name="Text 14"/>
-          <p:cNvSpPr/>
-          <p:nvPr/>
-        </p:nvSpPr>
-        <p:spPr>
-          <a:xfrm>
-            <a:off x="8397240" y="3200400"/>
-            <a:ext cx="2987040" cy="411480"/>
-          </a:xfrm>
-          <a:prstGeom prst="rect">
-            <a:avLst/>
-          </a:prstGeom>
-          <a:noFill/>
-          <a:ln/>
-        </p:spPr>
-        <p:txBody>
-          <a:bodyPr wrap="square" lIns="0" tIns="0" rIns="0" bIns="0" rtlCol="0" anchor="ctr"/>
-          <a:lstStyle/>
-          <a:p>
-            <a:pPr indent="0" marL="0">
-              <a:buNone/>
-            </a:pPr>
-            <a:r>
-              <a:rPr lang="en-US" sz="1400" dirty="0">
-                <a:solidFill>
-                  <a:srgbClr val="9AA6B2"/>
-                </a:solidFill>
-                <a:latin typeface="Malgun Gothic" pitchFamily="34" charset="0"/>
-                <a:ea typeface="Malgun Gothic" pitchFamily="34" charset="-122"/>
-                <a:cs typeface="Malgun Gothic" pitchFamily="34" charset="-120"/>
-              </a:rPr>
-              <a:t>슬롯 2 에 기록</a:t>
-            </a:r>
-            <a:endParaRPr lang="en-US" sz="1400" dirty="0"/>
-          </a:p>
-        </p:txBody>
-      </p:sp>
-      <p:sp>
-        <p:nvSpPr>
-          <p:cNvPr id="17" name="Shape 15"/>
-          <p:cNvSpPr/>
-          <p:nvPr/>
-        </p:nvSpPr>
-        <p:spPr>
-          <a:xfrm>
-            <a:off x="548640" y="3977640"/>
-            <a:ext cx="11064240" cy="1051560"/>
-          </a:xfrm>
-          <a:prstGeom prst="roundRect">
-            <a:avLst>
-              <a:gd name="adj" fmla="val 5217"/>
+              <a:gd name="adj" fmla="val 1714"/>
             </a:avLst>
           </a:prstGeom>
           <a:solidFill>
@@ -6961,14 +7935,14 @@
       </p:sp>
       <p:sp>
         <p:nvSpPr>
-          <p:cNvPr id="18" name="Text 16"/>
-          <p:cNvSpPr/>
-          <p:nvPr/>
-        </p:nvSpPr>
-        <p:spPr>
-          <a:xfrm>
-            <a:off x="749808" y="4123944"/>
-            <a:ext cx="10661904" cy="758952"/>
+          <p:cNvPr id="5" name="Text 3"/>
+          <p:cNvSpPr/>
+          <p:nvPr/>
+        </p:nvSpPr>
+        <p:spPr>
+          <a:xfrm>
+            <a:off x="749808" y="1700784"/>
+            <a:ext cx="10661904" cy="2907792"/>
           </a:xfrm>
           <a:prstGeom prst="rect">
             <a:avLst/>
@@ -6989,13 +7963,13 @@
             <a:r>
               <a:rPr lang="en-US" sz="1300" dirty="0">
                 <a:solidFill>
-                  <a:srgbClr val="8CC63F"/>
+                  <a:srgbClr val="9AA6B2"/>
                 </a:solidFill>
                 <a:latin typeface="Courier New" pitchFamily="34" charset="0"/>
                 <a:ea typeface="Courier New" pitchFamily="34" charset="-122"/>
                 <a:cs typeface="Courier New" pitchFamily="34" charset="-120"/>
               </a:rPr>
-              <a:t>idx = atomicAdd(err, 1);   // X→0, Y→1, Z→2  (순서는 달라도 값은 유일)</a:t>
+              <a:t>// tests.cpp:76</a:t>
             </a:r>
             <a:endParaRPr lang="en-US" sz="1300" dirty="0"/>
           </a:p>
@@ -7009,54 +7983,222 @@
             <a:r>
               <a:rPr lang="en-US" sz="1300" dirty="0">
                 <a:solidFill>
-                  <a:srgbClr val="4FB0C6"/>
+                  <a:srgbClr val="E8EDF2"/>
                 </a:solidFill>
                 <a:latin typeface="Courier New" pitchFamily="34" charset="0"/>
                 <a:ea typeface="Courier New" pitchFamily="34" charset="-122"/>
                 <a:cs typeface="Courier New" pitchFamily="34" charset="-120"/>
               </a:rPr>
-              <a:t>idx = idx % 10;            // 배열 10칸을 순환하며 최근 오류만 보관</a:t>
+              <a:t>#define RECORD_ERR(err, p, expect, current) do{           \</a:t>
             </a:r>
             <a:endParaRPr lang="en-US" sz="1300" dirty="0"/>
           </a:p>
-        </p:txBody>
-      </p:sp>
-      <p:sp>
-        <p:nvSpPr>
-          <p:cNvPr id="19" name="Text 17"/>
-          <p:cNvSpPr/>
-          <p:nvPr/>
-        </p:nvSpPr>
-        <p:spPr>
-          <a:xfrm>
-            <a:off x="548640" y="5212080"/>
-            <a:ext cx="11064240" cy="457200"/>
-          </a:xfrm>
-          <a:prstGeom prst="rect">
-            <a:avLst/>
-          </a:prstGeom>
-          <a:noFill/>
-          <a:ln/>
-        </p:spPr>
-        <p:txBody>
-          <a:bodyPr wrap="square" lIns="0" tIns="0" rIns="0" bIns="0" rtlCol="0" anchor="ctr"/>
-          <a:lstStyle/>
-          <a:p>
-            <a:pPr indent="0" marL="0">
-              <a:buNone/>
-            </a:pPr>
-            <a:r>
-              <a:rPr lang="en-US" sz="1400" i="1" dirty="0">
-                <a:solidFill>
-                  <a:srgbClr val="9AA6B2"/>
-                </a:solidFill>
-                <a:latin typeface="Malgun Gothic" pitchFamily="34" charset="0"/>
-                <a:ea typeface="Malgun Gothic" pitchFamily="34" charset="-122"/>
-                <a:cs typeface="Malgun Gothic" pitchFamily="34" charset="-120"/>
-              </a:rPr>
-              <a:t>MAX_ERR_RECORD_COUNT = 10 (tests.cpp:67). 오류가 100만 개여도 배열은 10칸 — 최근 것만 남깁니다.</a:t>
-            </a:r>
-            <a:endParaRPr lang="en-US" sz="1400" dirty="0"/>
+          <a:p>
+            <a:pPr algn="l" indent="0" marL="0">
+              <a:lnSpc>
+                <a:spcPct val="108000"/>
+              </a:lnSpc>
+              <a:buNone/>
+            </a:pPr>
+            <a:r>
+              <a:rPr lang="en-US" sz="1300" dirty="0">
+                <a:solidFill>
+                  <a:srgbClr val="8CC63F"/>
+                </a:solidFill>
+                <a:latin typeface="Courier New" pitchFamily="34" charset="0"/>
+                <a:ea typeface="Courier New" pitchFamily="34" charset="-122"/>
+                <a:cs typeface="Courier New" pitchFamily="34" charset="-120"/>
+              </a:rPr>
+              <a:t>    unsigned int idx = atomicAdd(err, 1);                 \</a:t>
+            </a:r>
+            <a:endParaRPr lang="en-US" sz="1300" dirty="0"/>
+          </a:p>
+          <a:p>
+            <a:pPr algn="l" indent="0" marL="0">
+              <a:lnSpc>
+                <a:spcPct val="108000"/>
+              </a:lnSpc>
+              <a:buNone/>
+            </a:pPr>
+            <a:r>
+              <a:rPr lang="en-US" sz="1300" dirty="0">
+                <a:solidFill>
+                  <a:srgbClr val="4FB0C6"/>
+                </a:solidFill>
+                <a:latin typeface="Courier New" pitchFamily="34" charset="0"/>
+                <a:ea typeface="Courier New" pitchFamily="34" charset="-122"/>
+                <a:cs typeface="Courier New" pitchFamily="34" charset="-120"/>
+              </a:rPr>
+              <a:t>    idx = idx % MAX_ERR_RECORD_COUNT;   // 최근 10개만 순환  \</a:t>
+            </a:r>
+            <a:endParaRPr lang="en-US" sz="1300" dirty="0"/>
+          </a:p>
+          <a:p>
+            <a:pPr algn="l" indent="0" marL="0">
+              <a:lnSpc>
+                <a:spcPct val="108000"/>
+              </a:lnSpc>
+              <a:buNone/>
+            </a:pPr>
+            <a:r>
+              <a:rPr lang="en-US" sz="1300" dirty="0">
+                <a:solidFill>
+                  <a:srgbClr val="E8EDF2"/>
+                </a:solidFill>
+                <a:latin typeface="Courier New" pitchFamily="34" charset="0"/>
+                <a:ea typeface="Courier New" pitchFamily="34" charset="-122"/>
+                <a:cs typeface="Courier New" pitchFamily="34" charset="-120"/>
+              </a:rPr>
+              <a:t>    err_addr[idx]        = (unsigned long)p;        // 오류 주소     \</a:t>
+            </a:r>
+            <a:endParaRPr lang="en-US" sz="1300" dirty="0"/>
+          </a:p>
+          <a:p>
+            <a:pPr algn="l" indent="0" marL="0">
+              <a:lnSpc>
+                <a:spcPct val="108000"/>
+              </a:lnSpc>
+              <a:buNone/>
+            </a:pPr>
+            <a:r>
+              <a:rPr lang="en-US" sz="1300" dirty="0">
+                <a:solidFill>
+                  <a:srgbClr val="E8EDF2"/>
+                </a:solidFill>
+                <a:latin typeface="Courier New" pitchFamily="34" charset="0"/>
+                <a:ea typeface="Courier New" pitchFamily="34" charset="-122"/>
+                <a:cs typeface="Courier New" pitchFamily="34" charset="-120"/>
+              </a:rPr>
+              <a:t>    err_expect[idx]      = (unsigned long)expect;   // 기대값       \</a:t>
+            </a:r>
+            <a:endParaRPr lang="en-US" sz="1300" dirty="0"/>
+          </a:p>
+          <a:p>
+            <a:pPr algn="l" indent="0" marL="0">
+              <a:lnSpc>
+                <a:spcPct val="108000"/>
+              </a:lnSpc>
+              <a:buNone/>
+            </a:pPr>
+            <a:r>
+              <a:rPr lang="en-US" sz="1300" dirty="0">
+                <a:solidFill>
+                  <a:srgbClr val="E8EDF2"/>
+                </a:solidFill>
+                <a:latin typeface="Courier New" pitchFamily="34" charset="0"/>
+                <a:ea typeface="Courier New" pitchFamily="34" charset="-122"/>
+                <a:cs typeface="Courier New" pitchFamily="34" charset="-120"/>
+              </a:rPr>
+              <a:t>    err_current[idx]     = (unsigned long)current;  // 실제 읽은 값  \</a:t>
+            </a:r>
+            <a:endParaRPr lang="en-US" sz="1300" dirty="0"/>
+          </a:p>
+          <a:p>
+            <a:pPr algn="l" indent="0" marL="0">
+              <a:lnSpc>
+                <a:spcPct val="108000"/>
+              </a:lnSpc>
+              <a:buNone/>
+            </a:pPr>
+            <a:r>
+              <a:rPr lang="en-US" sz="1300" dirty="0">
+                <a:solidFill>
+                  <a:srgbClr val="E8EDF2"/>
+                </a:solidFill>
+                <a:latin typeface="Courier New" pitchFamily="34" charset="0"/>
+                <a:ea typeface="Courier New" pitchFamily="34" charset="-122"/>
+                <a:cs typeface="Courier New" pitchFamily="34" charset="-120"/>
+              </a:rPr>
+              <a:t>    err_second_read[idx] = (unsigned long)(*p);     // 다시 읽은 값  \</a:t>
+            </a:r>
+            <a:endParaRPr lang="en-US" sz="1300" dirty="0"/>
+          </a:p>
+          <a:p>
+            <a:pPr algn="l" indent="0" marL="0">
+              <a:lnSpc>
+                <a:spcPct val="108000"/>
+              </a:lnSpc>
+              <a:buNone/>
+            </a:pPr>
+            <a:r>
+              <a:rPr lang="en-US" sz="1300" dirty="0">
+                <a:solidFill>
+                  <a:srgbClr val="E8EDF2"/>
+                </a:solidFill>
+                <a:latin typeface="Courier New" pitchFamily="34" charset="0"/>
+                <a:ea typeface="Courier New" pitchFamily="34" charset="-122"/>
+                <a:cs typeface="Courier New" pitchFamily="34" charset="-120"/>
+              </a:rPr>
+              <a:t>}while(0)</a:t>
+            </a:r>
+            <a:endParaRPr lang="en-US" sz="1300" dirty="0"/>
+          </a:p>
+        </p:txBody>
+      </p:sp>
+      <p:sp>
+        <p:nvSpPr>
+          <p:cNvPr id="6" name="Text 4"/>
+          <p:cNvSpPr/>
+          <p:nvPr/>
+        </p:nvSpPr>
+        <p:spPr>
+          <a:xfrm>
+            <a:off x="548640" y="4892040"/>
+            <a:ext cx="11064240" cy="914400"/>
+          </a:xfrm>
+          <a:prstGeom prst="rect">
+            <a:avLst/>
+          </a:prstGeom>
+          <a:noFill/>
+          <a:ln/>
+        </p:spPr>
+        <p:txBody>
+          <a:bodyPr wrap="square" lIns="0" tIns="0" rIns="0" bIns="0" rtlCol="0" anchor="t"/>
+          <a:lstStyle/>
+          <a:p>
+            <a:pPr indent="0" marL="0">
+              <a:buNone/>
+            </a:pPr>
+            <a:r>
+              <a:rPr lang="en-US" sz="1600" dirty="0">
+                <a:solidFill>
+                  <a:srgbClr val="E8EDF2"/>
+                </a:solidFill>
+                <a:latin typeface="Malgun Gothic" pitchFamily="34" charset="0"/>
+                <a:ea typeface="Malgun Gothic" pitchFamily="34" charset="-122"/>
+                <a:cs typeface="Malgun Gothic" pitchFamily="34" charset="-120"/>
+              </a:rPr>
+              <a:t>오류가 난 스레드는 이 매크로로 </a:t>
+            </a:r>
+            <a:pPr indent="0" marL="0">
+              <a:buNone/>
+            </a:pPr>
+            <a:r>
+              <a:rPr lang="en-US" sz="1600" b="1" dirty="0">
+                <a:solidFill>
+                  <a:srgbClr val="8CC63F"/>
+                </a:solidFill>
+                <a:latin typeface="Malgun Gothic" pitchFamily="34" charset="0"/>
+                <a:ea typeface="Malgun Gothic" pitchFamily="34" charset="-122"/>
+                <a:cs typeface="Malgun Gothic" pitchFamily="34" charset="-120"/>
+              </a:rPr>
+              <a:t>주소·기대값·실제값·재읽기값</a:t>
+            </a:r>
+            <a:pPr indent="0" marL="0">
+              <a:buNone/>
+            </a:pPr>
+            <a:r>
+              <a:rPr lang="en-US" sz="1600" dirty="0">
+                <a:solidFill>
+                  <a:srgbClr val="E8EDF2"/>
+                </a:solidFill>
+                <a:latin typeface="Malgun Gothic" pitchFamily="34" charset="0"/>
+                <a:ea typeface="Malgun Gothic" pitchFamily="34" charset="-122"/>
+                <a:cs typeface="Malgun Gothic" pitchFamily="34" charset="-120"/>
+              </a:rPr>
+              <a:t>을 기록합니다. 재읽기값은 '다시 읽으면 값이 바뀌나?'(소프트 오류 판별)를 봅니다.</a:t>
+            </a:r>
+            <a:endParaRPr lang="en-US" sz="1600" dirty="0"/>
           </a:p>
         </p:txBody>
       </p:sp>
@@ -7109,7 +8251,7 @@
             </a:avLst>
           </a:prstGeom>
           <a:solidFill>
-            <a:srgbClr val="E0A458"/>
+            <a:srgbClr val="8CC63F"/>
           </a:solidFill>
           <a:ln/>
         </p:spPr>
@@ -7129,7 +8271,7 @@
                 <a:ea typeface="Courier New" pitchFamily="34" charset="-122"/>
                 <a:cs typeface="Courier New" pitchFamily="34" charset="-120"/>
               </a:rPr>
-              <a:t>6</a:t>
+              <a:t>5</a:t>
             </a:r>
             <a:endParaRPr lang="en-US" sz="2200" dirty="0"/>
           </a:p>
@@ -7168,7 +8310,7 @@
                 <a:ea typeface="Malgun Gothic" pitchFamily="34" charset="-122"/>
                 <a:cs typeface="Malgun Gothic" pitchFamily="34" charset="-120"/>
               </a:rPr>
-              <a:t>함정 · 커널은 비동기(asynchronous)</a:t>
+              <a:t>반환값이 고유 슬롯 번호가 된다</a:t>
             </a:r>
             <a:endParaRPr lang="en-US" sz="3000" dirty="0"/>
           </a:p>
@@ -7207,7 +8349,7 @@
                 <a:ea typeface="Malgun Gothic" pitchFamily="34" charset="-122"/>
                 <a:cs typeface="Malgun Gothic" pitchFamily="34" charset="-120"/>
               </a:rPr>
-              <a:t>커널 실행 &lt;&lt;&lt;&gt;&gt;&gt;은 오류를 반환하지 않습니다. CPU는 커널을 던지고 바로 다음 줄로 갑니다.</a:t>
+              <a:t>세 스레드가 동시에 atomicAdd(err,1)을 호출해도, 반환값은 겹치지 않습니다.</a:t>
             </a:r>
             <a:endParaRPr lang="en-US" sz="1600" dirty="0"/>
           </a:p>
@@ -7222,11 +8364,11 @@
         <p:spPr>
           <a:xfrm>
             <a:off x="548640" y="2148840"/>
-            <a:ext cx="3346704" cy="2011680"/>
+            <a:ext cx="3444240" cy="1554480"/>
           </a:xfrm>
           <a:prstGeom prst="roundRect">
             <a:avLst>
-              <a:gd name="adj" fmla="val 3636"/>
+              <a:gd name="adj" fmla="val 4706"/>
             </a:avLst>
           </a:prstGeom>
           <a:solidFill>
@@ -7243,8 +8385,8 @@
         </p:nvSpPr>
         <p:spPr>
           <a:xfrm>
-            <a:off x="777240" y="2350008"/>
-            <a:ext cx="2889504" cy="457200"/>
+            <a:off x="777240" y="2331720"/>
+            <a:ext cx="2987040" cy="457200"/>
           </a:xfrm>
           <a:prstGeom prst="rect">
             <a:avLst/>
@@ -7262,13 +8404,13 @@
             <a:r>
               <a:rPr lang="en-US" sz="1700" b="1" dirty="0">
                 <a:solidFill>
-                  <a:srgbClr val="4FB0C6"/>
-                </a:solidFill>
-                <a:latin typeface="Malgun Gothic" pitchFamily="34" charset="0"/>
-                <a:ea typeface="Malgun Gothic" pitchFamily="34" charset="-122"/>
-                <a:cs typeface="Malgun Gothic" pitchFamily="34" charset="-120"/>
-              </a:rPr>
-              <a:t>① 커널 실행</a:t>
+                  <a:srgbClr val="8CC63F"/>
+                </a:solidFill>
+                <a:latin typeface="Malgun Gothic" pitchFamily="34" charset="0"/>
+                <a:ea typeface="Malgun Gothic" pitchFamily="34" charset="-122"/>
+                <a:cs typeface="Malgun Gothic" pitchFamily="34" charset="-120"/>
+              </a:rPr>
+              <a:t>스레드 X</a:t>
             </a:r>
             <a:endParaRPr lang="en-US" sz="1700" dirty="0"/>
           </a:p>
@@ -7282,8 +8424,8 @@
         </p:nvSpPr>
         <p:spPr>
           <a:xfrm>
-            <a:off x="777240" y="2880360"/>
-            <a:ext cx="2889504" cy="548640"/>
+            <a:off x="777240" y="2788920"/>
+            <a:ext cx="2987040" cy="411480"/>
           </a:xfrm>
           <a:prstGeom prst="rect">
             <a:avLst/>
@@ -7299,7 +8441,7 @@
               <a:buNone/>
             </a:pPr>
             <a:r>
-              <a:rPr lang="en-US" sz="1200" dirty="0">
+              <a:rPr lang="en-US" sz="1600" b="1" dirty="0">
                 <a:solidFill>
                   <a:srgbClr val="E8EDF2"/>
                 </a:solidFill>
@@ -7307,9 +8449,9 @@
                 <a:ea typeface="Courier New" pitchFamily="34" charset="-122"/>
                 <a:cs typeface="Courier New" pitchFamily="34" charset="-120"/>
               </a:rPr>
-              <a:t>kernel&lt;&lt;&lt;...&gt;&gt;&gt;(...)</a:t>
-            </a:r>
-            <a:endParaRPr lang="en-US" sz="1200" dirty="0"/>
+              <a:t>→ 반환 0</a:t>
+            </a:r>
+            <a:endParaRPr lang="en-US" sz="1600" dirty="0"/>
           </a:p>
         </p:txBody>
       </p:sp>
@@ -7321,27 +8463,24 @@
         </p:nvSpPr>
         <p:spPr>
           <a:xfrm>
-            <a:off x="777240" y="3383280"/>
-            <a:ext cx="2889504" cy="685800"/>
-          </a:xfrm>
-          <a:prstGeom prst="rect">
-            <a:avLst/>
-          </a:prstGeom>
-          <a:noFill/>
-          <a:ln/>
-        </p:spPr>
-        <p:txBody>
-          <a:bodyPr wrap="square" lIns="0" tIns="0" rIns="0" bIns="0" rtlCol="0" anchor="t"/>
-          <a:lstStyle/>
-          <a:p>
-            <a:pPr indent="0" marL="0">
-              <a:lnSpc>
-                <a:spcPct val="110000"/>
-              </a:lnSpc>
-              <a:buNone/>
-            </a:pPr>
-            <a:r>
-              <a:rPr lang="en-US" sz="1350" dirty="0">
+            <a:off x="777240" y="3200400"/>
+            <a:ext cx="2987040" cy="411480"/>
+          </a:xfrm>
+          <a:prstGeom prst="rect">
+            <a:avLst/>
+          </a:prstGeom>
+          <a:noFill/>
+          <a:ln/>
+        </p:spPr>
+        <p:txBody>
+          <a:bodyPr wrap="square" lIns="0" tIns="0" rIns="0" bIns="0" rtlCol="0" anchor="ctr"/>
+          <a:lstStyle/>
+          <a:p>
+            <a:pPr indent="0" marL="0">
+              <a:buNone/>
+            </a:pPr>
+            <a:r>
+              <a:rPr lang="en-US" sz="1400" dirty="0">
                 <a:solidFill>
                   <a:srgbClr val="9AA6B2"/>
                 </a:solidFill>
@@ -7349,22 +8488,44 @@
                 <a:ea typeface="Malgun Gothic" pitchFamily="34" charset="-122"/>
                 <a:cs typeface="Malgun Gothic" pitchFamily="34" charset="-120"/>
               </a:rPr>
-              <a:t>CPU는 던지고 즉시 리턴 (오류 모름)</a:t>
-            </a:r>
-            <a:endParaRPr lang="en-US" sz="1350" dirty="0"/>
-          </a:p>
-        </p:txBody>
-      </p:sp>
-      <p:sp>
-        <p:nvSpPr>
-          <p:cNvPr id="9" name="Text 7"/>
-          <p:cNvSpPr/>
-          <p:nvPr/>
-        </p:nvSpPr>
-        <p:spPr>
-          <a:xfrm>
-            <a:off x="3913632" y="2834640"/>
-            <a:ext cx="466344" cy="640080"/>
+              <a:t>슬롯 0 에 기록</a:t>
+            </a:r>
+            <a:endParaRPr lang="en-US" sz="1400" dirty="0"/>
+          </a:p>
+        </p:txBody>
+      </p:sp>
+      <p:sp>
+        <p:nvSpPr>
+          <p:cNvPr id="9" name="Shape 7"/>
+          <p:cNvSpPr/>
+          <p:nvPr/>
+        </p:nvSpPr>
+        <p:spPr>
+          <a:xfrm>
+            <a:off x="4358640" y="2148840"/>
+            <a:ext cx="3444240" cy="1554480"/>
+          </a:xfrm>
+          <a:prstGeom prst="roundRect">
+            <a:avLst>
+              <a:gd name="adj" fmla="val 4706"/>
+            </a:avLst>
+          </a:prstGeom>
+          <a:solidFill>
+            <a:srgbClr val="1E232C"/>
+          </a:solidFill>
+          <a:ln/>
+        </p:spPr>
+      </p:sp>
+      <p:sp>
+        <p:nvSpPr>
+          <p:cNvPr id="10" name="Text 8"/>
+          <p:cNvSpPr/>
+          <p:nvPr/>
+        </p:nvSpPr>
+        <p:spPr>
+          <a:xfrm>
+            <a:off x="4587240" y="2331720"/>
+            <a:ext cx="2987040" cy="457200"/>
           </a:xfrm>
           <a:prstGeom prst="rect">
             <a:avLst/>
@@ -7376,38 +8537,116 @@
           <a:bodyPr wrap="square" lIns="0" tIns="0" rIns="0" bIns="0" rtlCol="0" anchor="ctr"/>
           <a:lstStyle/>
           <a:p>
-            <a:pPr algn="ctr" indent="0" marL="0">
-              <a:buNone/>
-            </a:pPr>
-            <a:r>
-              <a:rPr lang="en-US" sz="2600" b="1" dirty="0">
-                <a:solidFill>
-                  <a:srgbClr val="9AA6B2"/>
+            <a:pPr indent="0" marL="0">
+              <a:buNone/>
+            </a:pPr>
+            <a:r>
+              <a:rPr lang="en-US" sz="1700" b="1" dirty="0">
+                <a:solidFill>
+                  <a:srgbClr val="4FB0C6"/>
+                </a:solidFill>
+                <a:latin typeface="Malgun Gothic" pitchFamily="34" charset="0"/>
+                <a:ea typeface="Malgun Gothic" pitchFamily="34" charset="-122"/>
+                <a:cs typeface="Malgun Gothic" pitchFamily="34" charset="-120"/>
+              </a:rPr>
+              <a:t>스레드 Y</a:t>
+            </a:r>
+            <a:endParaRPr lang="en-US" sz="1700" dirty="0"/>
+          </a:p>
+        </p:txBody>
+      </p:sp>
+      <p:sp>
+        <p:nvSpPr>
+          <p:cNvPr id="11" name="Text 9"/>
+          <p:cNvSpPr/>
+          <p:nvPr/>
+        </p:nvSpPr>
+        <p:spPr>
+          <a:xfrm>
+            <a:off x="4587240" y="2788920"/>
+            <a:ext cx="2987040" cy="411480"/>
+          </a:xfrm>
+          <a:prstGeom prst="rect">
+            <a:avLst/>
+          </a:prstGeom>
+          <a:noFill/>
+          <a:ln/>
+        </p:spPr>
+        <p:txBody>
+          <a:bodyPr wrap="square" lIns="0" tIns="0" rIns="0" bIns="0" rtlCol="0" anchor="ctr"/>
+          <a:lstStyle/>
+          <a:p>
+            <a:pPr indent="0" marL="0">
+              <a:buNone/>
+            </a:pPr>
+            <a:r>
+              <a:rPr lang="en-US" sz="1600" b="1" dirty="0">
+                <a:solidFill>
+                  <a:srgbClr val="E8EDF2"/>
                 </a:solidFill>
                 <a:latin typeface="Courier New" pitchFamily="34" charset="0"/>
                 <a:ea typeface="Courier New" pitchFamily="34" charset="-122"/>
                 <a:cs typeface="Courier New" pitchFamily="34" charset="-120"/>
               </a:rPr>
-              <a:t>→</a:t>
-            </a:r>
-            <a:endParaRPr lang="en-US" sz="2600" dirty="0"/>
-          </a:p>
-        </p:txBody>
-      </p:sp>
-      <p:sp>
-        <p:nvSpPr>
-          <p:cNvPr id="10" name="Shape 8"/>
-          <p:cNvSpPr/>
-          <p:nvPr/>
-        </p:nvSpPr>
-        <p:spPr>
-          <a:xfrm>
-            <a:off x="4398264" y="2148840"/>
-            <a:ext cx="3346704" cy="2011680"/>
+              <a:t>→ 반환 1</a:t>
+            </a:r>
+            <a:endParaRPr lang="en-US" sz="1600" dirty="0"/>
+          </a:p>
+        </p:txBody>
+      </p:sp>
+      <p:sp>
+        <p:nvSpPr>
+          <p:cNvPr id="12" name="Text 10"/>
+          <p:cNvSpPr/>
+          <p:nvPr/>
+        </p:nvSpPr>
+        <p:spPr>
+          <a:xfrm>
+            <a:off x="4587240" y="3200400"/>
+            <a:ext cx="2987040" cy="411480"/>
+          </a:xfrm>
+          <a:prstGeom prst="rect">
+            <a:avLst/>
+          </a:prstGeom>
+          <a:noFill/>
+          <a:ln/>
+        </p:spPr>
+        <p:txBody>
+          <a:bodyPr wrap="square" lIns="0" tIns="0" rIns="0" bIns="0" rtlCol="0" anchor="ctr"/>
+          <a:lstStyle/>
+          <a:p>
+            <a:pPr indent="0" marL="0">
+              <a:buNone/>
+            </a:pPr>
+            <a:r>
+              <a:rPr lang="en-US" sz="1400" dirty="0">
+                <a:solidFill>
+                  <a:srgbClr val="9AA6B2"/>
+                </a:solidFill>
+                <a:latin typeface="Malgun Gothic" pitchFamily="34" charset="0"/>
+                <a:ea typeface="Malgun Gothic" pitchFamily="34" charset="-122"/>
+                <a:cs typeface="Malgun Gothic" pitchFamily="34" charset="-120"/>
+              </a:rPr>
+              <a:t>슬롯 1 에 기록</a:t>
+            </a:r>
+            <a:endParaRPr lang="en-US" sz="1400" dirty="0"/>
+          </a:p>
+        </p:txBody>
+      </p:sp>
+      <p:sp>
+        <p:nvSpPr>
+          <p:cNvPr id="13" name="Shape 11"/>
+          <p:cNvSpPr/>
+          <p:nvPr/>
+        </p:nvSpPr>
+        <p:spPr>
+          <a:xfrm>
+            <a:off x="8168640" y="2148840"/>
+            <a:ext cx="3444240" cy="1554480"/>
           </a:xfrm>
           <a:prstGeom prst="roundRect">
             <a:avLst>
-              <a:gd name="adj" fmla="val 3636"/>
+              <a:gd name="adj" fmla="val 4706"/>
             </a:avLst>
           </a:prstGeom>
           <a:solidFill>
@@ -7418,14 +8657,14 @@
       </p:sp>
       <p:sp>
         <p:nvSpPr>
-          <p:cNvPr id="11" name="Text 9"/>
-          <p:cNvSpPr/>
-          <p:nvPr/>
-        </p:nvSpPr>
-        <p:spPr>
-          <a:xfrm>
-            <a:off x="4626864" y="2350008"/>
-            <a:ext cx="2889504" cy="457200"/>
+          <p:cNvPr id="14" name="Text 12"/>
+          <p:cNvSpPr/>
+          <p:nvPr/>
+        </p:nvSpPr>
+        <p:spPr>
+          <a:xfrm>
+            <a:off x="8397240" y="2331720"/>
+            <a:ext cx="2987040" cy="457200"/>
           </a:xfrm>
           <a:prstGeom prst="rect">
             <a:avLst/>
@@ -7443,13 +8682,13 @@
             <a:r>
               <a:rPr lang="en-US" sz="1700" b="1" dirty="0">
                 <a:solidFill>
-                  <a:srgbClr val="8CC63F"/>
-                </a:solidFill>
-                <a:latin typeface="Malgun Gothic" pitchFamily="34" charset="0"/>
-                <a:ea typeface="Malgun Gothic" pitchFamily="34" charset="-122"/>
-                <a:cs typeface="Malgun Gothic" pitchFamily="34" charset="-120"/>
-              </a:rPr>
-              <a:t>② 동기화</a:t>
+                  <a:srgbClr val="E0A458"/>
+                </a:solidFill>
+                <a:latin typeface="Malgun Gothic" pitchFamily="34" charset="0"/>
+                <a:ea typeface="Malgun Gothic" pitchFamily="34" charset="-122"/>
+                <a:cs typeface="Malgun Gothic" pitchFamily="34" charset="-120"/>
+              </a:rPr>
+              <a:t>스레드 Z</a:t>
             </a:r>
             <a:endParaRPr lang="en-US" sz="1700" dirty="0"/>
           </a:p>
@@ -7457,14 +8696,14 @@
       </p:sp>
       <p:sp>
         <p:nvSpPr>
-          <p:cNvPr id="12" name="Text 10"/>
-          <p:cNvSpPr/>
-          <p:nvPr/>
-        </p:nvSpPr>
-        <p:spPr>
-          <a:xfrm>
-            <a:off x="4626864" y="2880360"/>
-            <a:ext cx="2889504" cy="548640"/>
+          <p:cNvPr id="15" name="Text 13"/>
+          <p:cNvSpPr/>
+          <p:nvPr/>
+        </p:nvSpPr>
+        <p:spPr>
+          <a:xfrm>
+            <a:off x="8397240" y="2788920"/>
+            <a:ext cx="2987040" cy="411480"/>
           </a:xfrm>
           <a:prstGeom prst="rect">
             <a:avLst/>
@@ -7480,7 +8719,7 @@
               <a:buNone/>
             </a:pPr>
             <a:r>
-              <a:rPr lang="en-US" sz="1200" dirty="0">
+              <a:rPr lang="en-US" sz="1600" b="1" dirty="0">
                 <a:solidFill>
                   <a:srgbClr val="E8EDF2"/>
                 </a:solidFill>
@@ -7488,22 +8727,88 @@
                 <a:ea typeface="Courier New" pitchFamily="34" charset="-122"/>
                 <a:cs typeface="Courier New" pitchFamily="34" charset="-120"/>
               </a:rPr>
-              <a:t>cudaDeviceSynchronize()</a:t>
-            </a:r>
-            <a:endParaRPr lang="en-US" sz="1200" dirty="0"/>
-          </a:p>
-        </p:txBody>
-      </p:sp>
-      <p:sp>
-        <p:nvSpPr>
-          <p:cNvPr id="13" name="Text 11"/>
-          <p:cNvSpPr/>
-          <p:nvPr/>
-        </p:nvSpPr>
-        <p:spPr>
-          <a:xfrm>
-            <a:off x="4626864" y="3383280"/>
-            <a:ext cx="2889504" cy="685800"/>
+              <a:t>→ 반환 2</a:t>
+            </a:r>
+            <a:endParaRPr lang="en-US" sz="1600" dirty="0"/>
+          </a:p>
+        </p:txBody>
+      </p:sp>
+      <p:sp>
+        <p:nvSpPr>
+          <p:cNvPr id="16" name="Text 14"/>
+          <p:cNvSpPr/>
+          <p:nvPr/>
+        </p:nvSpPr>
+        <p:spPr>
+          <a:xfrm>
+            <a:off x="8397240" y="3200400"/>
+            <a:ext cx="2987040" cy="411480"/>
+          </a:xfrm>
+          <a:prstGeom prst="rect">
+            <a:avLst/>
+          </a:prstGeom>
+          <a:noFill/>
+          <a:ln/>
+        </p:spPr>
+        <p:txBody>
+          <a:bodyPr wrap="square" lIns="0" tIns="0" rIns="0" bIns="0" rtlCol="0" anchor="ctr"/>
+          <a:lstStyle/>
+          <a:p>
+            <a:pPr indent="0" marL="0">
+              <a:buNone/>
+            </a:pPr>
+            <a:r>
+              <a:rPr lang="en-US" sz="1400" dirty="0">
+                <a:solidFill>
+                  <a:srgbClr val="9AA6B2"/>
+                </a:solidFill>
+                <a:latin typeface="Malgun Gothic" pitchFamily="34" charset="0"/>
+                <a:ea typeface="Malgun Gothic" pitchFamily="34" charset="-122"/>
+                <a:cs typeface="Malgun Gothic" pitchFamily="34" charset="-120"/>
+              </a:rPr>
+              <a:t>슬롯 2 에 기록</a:t>
+            </a:r>
+            <a:endParaRPr lang="en-US" sz="1400" dirty="0"/>
+          </a:p>
+        </p:txBody>
+      </p:sp>
+      <p:sp>
+        <p:nvSpPr>
+          <p:cNvPr id="17" name="Shape 15"/>
+          <p:cNvSpPr/>
+          <p:nvPr/>
+        </p:nvSpPr>
+        <p:spPr>
+          <a:xfrm>
+            <a:off x="548640" y="3977640"/>
+            <a:ext cx="11064240" cy="1051560"/>
+          </a:xfrm>
+          <a:prstGeom prst="roundRect">
+            <a:avLst>
+              <a:gd name="adj" fmla="val 5217"/>
+            </a:avLst>
+          </a:prstGeom>
+          <a:solidFill>
+            <a:srgbClr val="0E1116"/>
+          </a:solidFill>
+          <a:ln w="12700">
+            <a:solidFill>
+              <a:srgbClr val="2C3440"/>
+            </a:solidFill>
+            <a:prstDash val="solid"/>
+          </a:ln>
+        </p:spPr>
+      </p:sp>
+      <p:sp>
+        <p:nvSpPr>
+          <p:cNvPr id="18" name="Text 16"/>
+          <p:cNvSpPr/>
+          <p:nvPr/>
+        </p:nvSpPr>
+        <p:spPr>
+          <a:xfrm>
+            <a:off x="749808" y="4123944"/>
+            <a:ext cx="10661904" cy="758952"/>
           </a:xfrm>
           <a:prstGeom prst="rect">
             <a:avLst/>
@@ -7515,195 +8820,73 @@
           <a:bodyPr wrap="square" lIns="0" tIns="0" rIns="0" bIns="0" rtlCol="0" anchor="t"/>
           <a:lstStyle/>
           <a:p>
-            <a:pPr indent="0" marL="0">
+            <a:pPr algn="l" indent="0" marL="0">
               <a:lnSpc>
-                <a:spcPct val="110000"/>
+                <a:spcPct val="108000"/>
               </a:lnSpc>
               <a:buNone/>
             </a:pPr>
             <a:r>
-              <a:rPr lang="en-US" sz="1350" dirty="0">
-                <a:solidFill>
-                  <a:srgbClr val="9AA6B2"/>
-                </a:solidFill>
-                <a:latin typeface="Malgun Gothic" pitchFamily="34" charset="0"/>
-                <a:ea typeface="Malgun Gothic" pitchFamily="34" charset="-122"/>
-                <a:cs typeface="Malgun Gothic" pitchFamily="34" charset="-120"/>
-              </a:rPr>
-              <a:t>GPU가 끝날 때까지 대기</a:t>
-            </a:r>
-            <a:endParaRPr lang="en-US" sz="1350" dirty="0"/>
-          </a:p>
-        </p:txBody>
-      </p:sp>
-      <p:sp>
-        <p:nvSpPr>
-          <p:cNvPr id="14" name="Text 12"/>
-          <p:cNvSpPr/>
-          <p:nvPr/>
-        </p:nvSpPr>
-        <p:spPr>
-          <a:xfrm>
-            <a:off x="7763256" y="2834640"/>
-            <a:ext cx="466344" cy="640080"/>
-          </a:xfrm>
-          <a:prstGeom prst="rect">
-            <a:avLst/>
-          </a:prstGeom>
-          <a:noFill/>
-          <a:ln/>
-        </p:spPr>
-        <p:txBody>
-          <a:bodyPr wrap="square" lIns="0" tIns="0" rIns="0" bIns="0" rtlCol="0" anchor="ctr"/>
-          <a:lstStyle/>
-          <a:p>
-            <a:pPr algn="ctr" indent="0" marL="0">
-              <a:buNone/>
-            </a:pPr>
-            <a:r>
-              <a:rPr lang="en-US" sz="2600" b="1" dirty="0">
-                <a:solidFill>
-                  <a:srgbClr val="9AA6B2"/>
+              <a:rPr lang="en-US" sz="1300" dirty="0">
+                <a:solidFill>
+                  <a:srgbClr val="8CC63F"/>
                 </a:solidFill>
                 <a:latin typeface="Courier New" pitchFamily="34" charset="0"/>
                 <a:ea typeface="Courier New" pitchFamily="34" charset="-122"/>
                 <a:cs typeface="Courier New" pitchFamily="34" charset="-120"/>
               </a:rPr>
-              <a:t>→</a:t>
-            </a:r>
-            <a:endParaRPr lang="en-US" sz="2600" dirty="0"/>
-          </a:p>
-        </p:txBody>
-      </p:sp>
-      <p:sp>
-        <p:nvSpPr>
-          <p:cNvPr id="15" name="Shape 13"/>
-          <p:cNvSpPr/>
-          <p:nvPr/>
-        </p:nvSpPr>
-        <p:spPr>
-          <a:xfrm>
-            <a:off x="8247888" y="2148840"/>
-            <a:ext cx="3346704" cy="2011680"/>
-          </a:xfrm>
-          <a:prstGeom prst="roundRect">
-            <a:avLst>
-              <a:gd name="adj" fmla="val 3636"/>
-            </a:avLst>
-          </a:prstGeom>
-          <a:solidFill>
-            <a:srgbClr val="1E232C"/>
-          </a:solidFill>
-          <a:ln/>
-        </p:spPr>
-      </p:sp>
-      <p:sp>
-        <p:nvSpPr>
-          <p:cNvPr id="16" name="Text 14"/>
-          <p:cNvSpPr/>
-          <p:nvPr/>
-        </p:nvSpPr>
-        <p:spPr>
-          <a:xfrm>
-            <a:off x="8476488" y="2350008"/>
-            <a:ext cx="2889504" cy="457200"/>
-          </a:xfrm>
-          <a:prstGeom prst="rect">
-            <a:avLst/>
-          </a:prstGeom>
-          <a:noFill/>
-          <a:ln/>
-        </p:spPr>
-        <p:txBody>
-          <a:bodyPr wrap="square" lIns="0" tIns="0" rIns="0" bIns="0" rtlCol="0" anchor="ctr"/>
-          <a:lstStyle/>
-          <a:p>
-            <a:pPr indent="0" marL="0">
-              <a:buNone/>
-            </a:pPr>
-            <a:r>
-              <a:rPr lang="en-US" sz="1700" b="1" dirty="0">
-                <a:solidFill>
-                  <a:srgbClr val="E0A458"/>
-                </a:solidFill>
-                <a:latin typeface="Malgun Gothic" pitchFamily="34" charset="0"/>
-                <a:ea typeface="Malgun Gothic" pitchFamily="34" charset="-122"/>
-                <a:cs typeface="Malgun Gothic" pitchFamily="34" charset="-120"/>
-              </a:rPr>
-              <a:t>③ 오류 검사</a:t>
-            </a:r>
-            <a:endParaRPr lang="en-US" sz="1700" dirty="0"/>
-          </a:p>
-        </p:txBody>
-      </p:sp>
-      <p:sp>
-        <p:nvSpPr>
-          <p:cNvPr id="17" name="Text 15"/>
-          <p:cNvSpPr/>
-          <p:nvPr/>
-        </p:nvSpPr>
-        <p:spPr>
-          <a:xfrm>
-            <a:off x="8476488" y="2880360"/>
-            <a:ext cx="2889504" cy="548640"/>
-          </a:xfrm>
-          <a:prstGeom prst="rect">
-            <a:avLst/>
-          </a:prstGeom>
-          <a:noFill/>
-          <a:ln/>
-        </p:spPr>
-        <p:txBody>
-          <a:bodyPr wrap="square" lIns="0" tIns="0" rIns="0" bIns="0" rtlCol="0" anchor="ctr"/>
-          <a:lstStyle/>
-          <a:p>
-            <a:pPr indent="0" marL="0">
-              <a:buNone/>
-            </a:pPr>
-            <a:r>
-              <a:rPr lang="en-US" sz="1200" dirty="0">
-                <a:solidFill>
-                  <a:srgbClr val="E8EDF2"/>
+              <a:t>idx = atomicAdd(err, 1);   // X→0, Y→1, Z→2  (순서는 달라도 값은 유일)</a:t>
+            </a:r>
+            <a:endParaRPr lang="en-US" sz="1300" dirty="0"/>
+          </a:p>
+          <a:p>
+            <a:pPr algn="l" indent="0" marL="0">
+              <a:lnSpc>
+                <a:spcPct val="108000"/>
+              </a:lnSpc>
+              <a:buNone/>
+            </a:pPr>
+            <a:r>
+              <a:rPr lang="en-US" sz="1300" dirty="0">
+                <a:solidFill>
+                  <a:srgbClr val="4FB0C6"/>
                 </a:solidFill>
                 <a:latin typeface="Courier New" pitchFamily="34" charset="0"/>
                 <a:ea typeface="Courier New" pitchFamily="34" charset="-122"/>
                 <a:cs typeface="Courier New" pitchFamily="34" charset="-120"/>
               </a:rPr>
-              <a:t>if (err != cudaSuccess)</a:t>
-            </a:r>
-            <a:endParaRPr lang="en-US" sz="1200" dirty="0"/>
-          </a:p>
-        </p:txBody>
-      </p:sp>
-      <p:sp>
-        <p:nvSpPr>
-          <p:cNvPr id="18" name="Text 16"/>
-          <p:cNvSpPr/>
-          <p:nvPr/>
-        </p:nvSpPr>
-        <p:spPr>
-          <a:xfrm>
-            <a:off x="8476488" y="3383280"/>
-            <a:ext cx="2889504" cy="685800"/>
-          </a:xfrm>
-          <a:prstGeom prst="rect">
-            <a:avLst/>
-          </a:prstGeom>
-          <a:noFill/>
-          <a:ln/>
-        </p:spPr>
-        <p:txBody>
-          <a:bodyPr wrap="square" lIns="0" tIns="0" rIns="0" bIns="0" rtlCol="0" anchor="t"/>
-          <a:lstStyle/>
-          <a:p>
-            <a:pPr indent="0" marL="0">
-              <a:lnSpc>
-                <a:spcPct val="110000"/>
-              </a:lnSpc>
-              <a:buNone/>
-            </a:pPr>
-            <a:r>
-              <a:rPr lang="en-US" sz="1350" dirty="0">
+              <a:t>idx = idx % 10;            // 배열 10칸을 순환하며 최근 오류만 보관</a:t>
+            </a:r>
+            <a:endParaRPr lang="en-US" sz="1300" dirty="0"/>
+          </a:p>
+        </p:txBody>
+      </p:sp>
+      <p:sp>
+        <p:nvSpPr>
+          <p:cNvPr id="19" name="Text 17"/>
+          <p:cNvSpPr/>
+          <p:nvPr/>
+        </p:nvSpPr>
+        <p:spPr>
+          <a:xfrm>
+            <a:off x="548640" y="5212080"/>
+            <a:ext cx="11064240" cy="457200"/>
+          </a:xfrm>
+          <a:prstGeom prst="rect">
+            <a:avLst/>
+          </a:prstGeom>
+          <a:noFill/>
+          <a:ln/>
+        </p:spPr>
+        <p:txBody>
+          <a:bodyPr wrap="square" lIns="0" tIns="0" rIns="0" bIns="0" rtlCol="0" anchor="ctr"/>
+          <a:lstStyle/>
+          <a:p>
+            <a:pPr indent="0" marL="0">
+              <a:buNone/>
+            </a:pPr>
+            <a:r>
+              <a:rPr lang="en-US" sz="1400" i="1" dirty="0">
                 <a:solidFill>
                   <a:srgbClr val="9AA6B2"/>
                 </a:solidFill>
@@ -7711,62 +8894,9 @@
                 <a:ea typeface="Malgun Gothic" pitchFamily="34" charset="-122"/>
                 <a:cs typeface="Malgun Gothic" pitchFamily="34" charset="-120"/>
               </a:rPr>
-              <a:t>이제서야 커널 오류를 알 수 있음</a:t>
-            </a:r>
-            <a:endParaRPr lang="en-US" sz="1350" dirty="0"/>
-          </a:p>
-        </p:txBody>
-      </p:sp>
-      <p:sp>
-        <p:nvSpPr>
-          <p:cNvPr id="19" name="Text 17"/>
-          <p:cNvSpPr/>
-          <p:nvPr/>
-        </p:nvSpPr>
-        <p:spPr>
-          <a:xfrm>
-            <a:off x="548640" y="4480560"/>
-            <a:ext cx="11064240" cy="914400"/>
-          </a:xfrm>
-          <a:prstGeom prst="rect">
-            <a:avLst/>
-          </a:prstGeom>
-          <a:noFill/>
-          <a:ln/>
-        </p:spPr>
-        <p:txBody>
-          <a:bodyPr wrap="square" lIns="0" tIns="0" rIns="0" bIns="0" rtlCol="0" anchor="t"/>
-          <a:lstStyle/>
-          <a:p>
-            <a:pPr indent="0" marL="0">
-              <a:buNone/>
-            </a:pPr>
-            <a:r>
-              <a:rPr lang="en-US" sz="1600" b="1" dirty="0">
-                <a:solidFill>
-                  <a:srgbClr val="E0A458"/>
-                </a:solidFill>
-                <a:latin typeface="Malgun Gothic" pitchFamily="34" charset="0"/>
-                <a:ea typeface="Malgun Gothic" pitchFamily="34" charset="-122"/>
-                <a:cs typeface="Malgun Gothic" pitchFamily="34" charset="-120"/>
-              </a:rPr>
-              <a:t>동기화를 건너뛰면</a:t>
-            </a:r>
-            <a:pPr indent="0" marL="0">
-              <a:buNone/>
-            </a:pPr>
-            <a:r>
-              <a:rPr lang="en-US" sz="1600" dirty="0">
-                <a:solidFill>
-                  <a:srgbClr val="E8EDF2"/>
-                </a:solidFill>
-                <a:latin typeface="Malgun Gothic" pitchFamily="34" charset="0"/>
-                <a:ea typeface="Malgun Gothic" pitchFamily="34" charset="-122"/>
-                <a:cs typeface="Malgun Gothic" pitchFamily="34" charset="-120"/>
-              </a:rPr>
-              <a:t> 커널이 잘못된 메모리를 건드려도 CPU는 모른 채 계속 진행합니다. 그래서 SYNC_CUERR_KERNEL이 필요합니다.</a:t>
-            </a:r>
-            <a:endParaRPr lang="en-US" sz="1600" dirty="0"/>
+              <a:t>MAX_ERR_RECORD_COUNT = 10 (tests.cpp:67). 오류가 100만 개여도 배열은 10칸 — 최근 것만 남깁니다.</a:t>
+            </a:r>
+            <a:endParaRPr lang="en-US" sz="1400" dirty="0"/>
           </a:p>
         </p:txBody>
       </p:sp>
@@ -7819,7 +8949,7 @@
             </a:avLst>
           </a:prstGeom>
           <a:solidFill>
-            <a:srgbClr val="8CC63F"/>
+            <a:srgbClr val="E0A458"/>
           </a:solidFill>
           <a:ln/>
         </p:spPr>
@@ -7839,7 +8969,7 @@
                 <a:ea typeface="Courier New" pitchFamily="34" charset="-122"/>
                 <a:cs typeface="Courier New" pitchFamily="34" charset="-120"/>
               </a:rPr>
-              <a:t>7</a:t>
+              <a:t>6</a:t>
             </a:r>
             <a:endParaRPr lang="en-US" sz="2200" dirty="0"/>
           </a:p>
@@ -7878,7 +9008,7 @@
                 <a:ea typeface="Malgun Gothic" pitchFamily="34" charset="-122"/>
                 <a:cs typeface="Malgun Gothic" pitchFamily="34" charset="-120"/>
               </a:rPr>
-              <a:t>방어적 매크로 · CUERR / SYNC_CUERR_KERNEL</a:t>
+              <a:t>함정 · 커널은 비동기(asynchronous)</a:t>
             </a:r>
             <a:endParaRPr lang="en-US" sz="3000" dirty="0"/>
           </a:p>
@@ -7886,310 +9016,595 @@
       </p:sp>
       <p:sp>
         <p:nvSpPr>
-          <p:cNvPr id="4" name="Shape 2"/>
-          <p:cNvSpPr/>
-          <p:nvPr/>
-        </p:nvSpPr>
-        <p:spPr>
-          <a:xfrm>
-            <a:off x="548640" y="1554480"/>
-            <a:ext cx="11064240" cy="3291840"/>
+          <p:cNvPr id="4" name="Text 2"/>
+          <p:cNvSpPr/>
+          <p:nvPr/>
+        </p:nvSpPr>
+        <p:spPr>
+          <a:xfrm>
+            <a:off x="548640" y="1463040"/>
+            <a:ext cx="11064240" cy="457200"/>
+          </a:xfrm>
+          <a:prstGeom prst="rect">
+            <a:avLst/>
+          </a:prstGeom>
+          <a:noFill/>
+          <a:ln/>
+        </p:spPr>
+        <p:txBody>
+          <a:bodyPr wrap="square" lIns="0" tIns="0" rIns="0" bIns="0" rtlCol="0" anchor="ctr"/>
+          <a:lstStyle/>
+          <a:p>
+            <a:pPr indent="0" marL="0">
+              <a:buNone/>
+            </a:pPr>
+            <a:r>
+              <a:rPr lang="en-US" sz="1600" dirty="0">
+                <a:solidFill>
+                  <a:srgbClr val="9AA6B2"/>
+                </a:solidFill>
+                <a:latin typeface="Malgun Gothic" pitchFamily="34" charset="0"/>
+                <a:ea typeface="Malgun Gothic" pitchFamily="34" charset="-122"/>
+                <a:cs typeface="Malgun Gothic" pitchFamily="34" charset="-120"/>
+              </a:rPr>
+              <a:t>커널 실행 &lt;&lt;&lt;&gt;&gt;&gt;은 오류를 반환하지 않습니다. CPU는 커널을 던지고 바로 다음 줄로 갑니다.</a:t>
+            </a:r>
+            <a:endParaRPr lang="en-US" sz="1600" dirty="0"/>
+          </a:p>
+        </p:txBody>
+      </p:sp>
+      <p:sp>
+        <p:nvSpPr>
+          <p:cNvPr id="5" name="Shape 3"/>
+          <p:cNvSpPr/>
+          <p:nvPr/>
+        </p:nvSpPr>
+        <p:spPr>
+          <a:xfrm>
+            <a:off x="548640" y="2148840"/>
+            <a:ext cx="3346704" cy="2011680"/>
           </a:xfrm>
           <a:prstGeom prst="roundRect">
             <a:avLst>
-              <a:gd name="adj" fmla="val 1667"/>
+              <a:gd name="adj" fmla="val 3636"/>
             </a:avLst>
           </a:prstGeom>
           <a:solidFill>
-            <a:srgbClr val="0E1116"/>
+            <a:srgbClr val="1E232C"/>
           </a:solidFill>
-          <a:ln w="12700">
-            <a:solidFill>
-              <a:srgbClr val="2C3440"/>
-            </a:solidFill>
-            <a:prstDash val="solid"/>
-          </a:ln>
-        </p:spPr>
-      </p:sp>
-      <p:sp>
-        <p:nvSpPr>
-          <p:cNvPr id="5" name="Text 3"/>
-          <p:cNvSpPr/>
-          <p:nvPr/>
-        </p:nvSpPr>
-        <p:spPr>
-          <a:xfrm>
-            <a:off x="749808" y="1700784"/>
-            <a:ext cx="10661904" cy="2999232"/>
-          </a:xfrm>
-          <a:prstGeom prst="rect">
-            <a:avLst/>
-          </a:prstGeom>
-          <a:noFill/>
-          <a:ln/>
-        </p:spPr>
-        <p:txBody>
-          <a:bodyPr wrap="square" lIns="0" tIns="0" rIns="0" bIns="0" rtlCol="0" anchor="t"/>
-          <a:lstStyle/>
-          <a:p>
-            <a:pPr algn="l" indent="0" marL="0">
-              <a:lnSpc>
-                <a:spcPct val="108000"/>
-              </a:lnSpc>
-              <a:buNone/>
-            </a:pPr>
-            <a:r>
-              <a:rPr lang="en-US" sz="1250" dirty="0">
-                <a:solidFill>
-                  <a:srgbClr val="9AA6B2"/>
+          <a:ln/>
+        </p:spPr>
+      </p:sp>
+      <p:sp>
+        <p:nvSpPr>
+          <p:cNvPr id="6" name="Text 4"/>
+          <p:cNvSpPr/>
+          <p:nvPr/>
+        </p:nvSpPr>
+        <p:spPr>
+          <a:xfrm>
+            <a:off x="777240" y="2350008"/>
+            <a:ext cx="2889504" cy="457200"/>
+          </a:xfrm>
+          <a:prstGeom prst="rect">
+            <a:avLst/>
+          </a:prstGeom>
+          <a:noFill/>
+          <a:ln/>
+        </p:spPr>
+        <p:txBody>
+          <a:bodyPr wrap="square" lIns="0" tIns="0" rIns="0" bIns="0" rtlCol="0" anchor="ctr"/>
+          <a:lstStyle/>
+          <a:p>
+            <a:pPr indent="0" marL="0">
+              <a:buNone/>
+            </a:pPr>
+            <a:r>
+              <a:rPr lang="en-US" sz="1700" b="1" dirty="0">
+                <a:solidFill>
+                  <a:srgbClr val="4FB0C6"/>
+                </a:solidFill>
+                <a:latin typeface="Malgun Gothic" pitchFamily="34" charset="0"/>
+                <a:ea typeface="Malgun Gothic" pitchFamily="34" charset="-122"/>
+                <a:cs typeface="Malgun Gothic" pitchFamily="34" charset="-120"/>
+              </a:rPr>
+              <a:t>① 커널 실행</a:t>
+            </a:r>
+            <a:endParaRPr lang="en-US" sz="1700" dirty="0"/>
+          </a:p>
+        </p:txBody>
+      </p:sp>
+      <p:sp>
+        <p:nvSpPr>
+          <p:cNvPr id="7" name="Text 5"/>
+          <p:cNvSpPr/>
+          <p:nvPr/>
+        </p:nvSpPr>
+        <p:spPr>
+          <a:xfrm>
+            <a:off x="777240" y="2880360"/>
+            <a:ext cx="2889504" cy="548640"/>
+          </a:xfrm>
+          <a:prstGeom prst="rect">
+            <a:avLst/>
+          </a:prstGeom>
+          <a:noFill/>
+          <a:ln/>
+        </p:spPr>
+        <p:txBody>
+          <a:bodyPr wrap="square" lIns="0" tIns="0" rIns="0" bIns="0" rtlCol="0" anchor="ctr"/>
+          <a:lstStyle/>
+          <a:p>
+            <a:pPr indent="0" marL="0">
+              <a:buNone/>
+            </a:pPr>
+            <a:r>
+              <a:rPr lang="en-US" sz="1200" dirty="0">
+                <a:solidFill>
+                  <a:srgbClr val="E8EDF2"/>
                 </a:solidFill>
                 <a:latin typeface="Courier New" pitchFamily="34" charset="0"/>
                 <a:ea typeface="Courier New" pitchFamily="34" charset="-122"/>
                 <a:cs typeface="Courier New" pitchFamily="34" charset="-120"/>
               </a:rPr>
-              <a:t>// CUERR — 모든 CUDA 호출을 감싼다   cuda_memtest.h:132</a:t>
-            </a:r>
-            <a:endParaRPr lang="en-US" sz="1250" dirty="0"/>
-          </a:p>
-          <a:p>
-            <a:pPr algn="l" indent="0" marL="0">
+              <a:t>kernel&lt;&lt;&lt;...&gt;&gt;&gt;(...)</a:t>
+            </a:r>
+            <a:endParaRPr lang="en-US" sz="1200" dirty="0"/>
+          </a:p>
+        </p:txBody>
+      </p:sp>
+      <p:sp>
+        <p:nvSpPr>
+          <p:cNvPr id="8" name="Text 6"/>
+          <p:cNvSpPr/>
+          <p:nvPr/>
+        </p:nvSpPr>
+        <p:spPr>
+          <a:xfrm>
+            <a:off x="777240" y="3383280"/>
+            <a:ext cx="2889504" cy="685800"/>
+          </a:xfrm>
+          <a:prstGeom prst="rect">
+            <a:avLst/>
+          </a:prstGeom>
+          <a:noFill/>
+          <a:ln/>
+        </p:spPr>
+        <p:txBody>
+          <a:bodyPr wrap="square" lIns="0" tIns="0" rIns="0" bIns="0" rtlCol="0" anchor="t"/>
+          <a:lstStyle/>
+          <a:p>
+            <a:pPr indent="0" marL="0">
               <a:lnSpc>
-                <a:spcPct val="108000"/>
+                <a:spcPct val="110000"/>
               </a:lnSpc>
               <a:buNone/>
             </a:pPr>
             <a:r>
-              <a:rPr lang="en-US" sz="1250" dirty="0">
-                <a:solidFill>
-                  <a:srgbClr val="E8EDF2"/>
+              <a:rPr lang="en-US" sz="1350" dirty="0">
+                <a:solidFill>
+                  <a:srgbClr val="9AA6B2"/>
+                </a:solidFill>
+                <a:latin typeface="Malgun Gothic" pitchFamily="34" charset="0"/>
+                <a:ea typeface="Malgun Gothic" pitchFamily="34" charset="-122"/>
+                <a:cs typeface="Malgun Gothic" pitchFamily="34" charset="-120"/>
+              </a:rPr>
+              <a:t>CPU는 던지고 즉시 리턴 (오류 모름)</a:t>
+            </a:r>
+            <a:endParaRPr lang="en-US" sz="1350" dirty="0"/>
+          </a:p>
+        </p:txBody>
+      </p:sp>
+      <p:sp>
+        <p:nvSpPr>
+          <p:cNvPr id="9" name="Text 7"/>
+          <p:cNvSpPr/>
+          <p:nvPr/>
+        </p:nvSpPr>
+        <p:spPr>
+          <a:xfrm>
+            <a:off x="3913632" y="2834640"/>
+            <a:ext cx="466344" cy="640080"/>
+          </a:xfrm>
+          <a:prstGeom prst="rect">
+            <a:avLst/>
+          </a:prstGeom>
+          <a:noFill/>
+          <a:ln/>
+        </p:spPr>
+        <p:txBody>
+          <a:bodyPr wrap="square" lIns="0" tIns="0" rIns="0" bIns="0" rtlCol="0" anchor="ctr"/>
+          <a:lstStyle/>
+          <a:p>
+            <a:pPr algn="ctr" indent="0" marL="0">
+              <a:buNone/>
+            </a:pPr>
+            <a:r>
+              <a:rPr lang="en-US" sz="2600" b="1" dirty="0">
+                <a:solidFill>
+                  <a:srgbClr val="9AA6B2"/>
                 </a:solidFill>
                 <a:latin typeface="Courier New" pitchFamily="34" charset="0"/>
                 <a:ea typeface="Courier New" pitchFamily="34" charset="-122"/>
                 <a:cs typeface="Courier New" pitchFamily="34" charset="-120"/>
               </a:rPr>
-              <a:t>#define CUERR(...) do{ apiError_t e;                             \</a:t>
-            </a:r>
-            <a:endParaRPr lang="en-US" sz="1250" dirty="0"/>
-          </a:p>
-          <a:p>
-            <a:pPr algn="l" indent="0" marL="0">
-              <a:lnSpc>
-                <a:spcPct val="108000"/>
-              </a:lnSpc>
-              <a:buNone/>
-            </a:pPr>
-            <a:r>
-              <a:rPr lang="en-US" sz="1250" dirty="0">
+              <a:t>→</a:t>
+            </a:r>
+            <a:endParaRPr lang="en-US" sz="2600" dirty="0"/>
+          </a:p>
+        </p:txBody>
+      </p:sp>
+      <p:sp>
+        <p:nvSpPr>
+          <p:cNvPr id="10" name="Shape 8"/>
+          <p:cNvSpPr/>
+          <p:nvPr/>
+        </p:nvSpPr>
+        <p:spPr>
+          <a:xfrm>
+            <a:off x="4398264" y="2148840"/>
+            <a:ext cx="3346704" cy="2011680"/>
+          </a:xfrm>
+          <a:prstGeom prst="roundRect">
+            <a:avLst>
+              <a:gd name="adj" fmla="val 3636"/>
+            </a:avLst>
+          </a:prstGeom>
+          <a:solidFill>
+            <a:srgbClr val="1E232C"/>
+          </a:solidFill>
+          <a:ln/>
+        </p:spPr>
+      </p:sp>
+      <p:sp>
+        <p:nvSpPr>
+          <p:cNvPr id="11" name="Text 9"/>
+          <p:cNvSpPr/>
+          <p:nvPr/>
+        </p:nvSpPr>
+        <p:spPr>
+          <a:xfrm>
+            <a:off x="4626864" y="2350008"/>
+            <a:ext cx="2889504" cy="457200"/>
+          </a:xfrm>
+          <a:prstGeom prst="rect">
+            <a:avLst/>
+          </a:prstGeom>
+          <a:noFill/>
+          <a:ln/>
+        </p:spPr>
+        <p:txBody>
+          <a:bodyPr wrap="square" lIns="0" tIns="0" rIns="0" bIns="0" rtlCol="0" anchor="ctr"/>
+          <a:lstStyle/>
+          <a:p>
+            <a:pPr indent="0" marL="0">
+              <a:buNone/>
+            </a:pPr>
+            <a:r>
+              <a:rPr lang="en-US" sz="1700" b="1" dirty="0">
                 <a:solidFill>
                   <a:srgbClr val="8CC63F"/>
+                </a:solidFill>
+                <a:latin typeface="Malgun Gothic" pitchFamily="34" charset="0"/>
+                <a:ea typeface="Malgun Gothic" pitchFamily="34" charset="-122"/>
+                <a:cs typeface="Malgun Gothic" pitchFamily="34" charset="-120"/>
+              </a:rPr>
+              <a:t>② 동기화</a:t>
+            </a:r>
+            <a:endParaRPr lang="en-US" sz="1700" dirty="0"/>
+          </a:p>
+        </p:txBody>
+      </p:sp>
+      <p:sp>
+        <p:nvSpPr>
+          <p:cNvPr id="12" name="Text 10"/>
+          <p:cNvSpPr/>
+          <p:nvPr/>
+        </p:nvSpPr>
+        <p:spPr>
+          <a:xfrm>
+            <a:off x="4626864" y="2880360"/>
+            <a:ext cx="2889504" cy="548640"/>
+          </a:xfrm>
+          <a:prstGeom prst="rect">
+            <a:avLst/>
+          </a:prstGeom>
+          <a:noFill/>
+          <a:ln/>
+        </p:spPr>
+        <p:txBody>
+          <a:bodyPr wrap="square" lIns="0" tIns="0" rIns="0" bIns="0" rtlCol="0" anchor="ctr"/>
+          <a:lstStyle/>
+          <a:p>
+            <a:pPr indent="0" marL="0">
+              <a:buNone/>
+            </a:pPr>
+            <a:r>
+              <a:rPr lang="en-US" sz="1200" dirty="0">
+                <a:solidFill>
+                  <a:srgbClr val="E8EDF2"/>
                 </a:solidFill>
                 <a:latin typeface="Courier New" pitchFamily="34" charset="0"/>
                 <a:ea typeface="Courier New" pitchFamily="34" charset="-122"/>
                 <a:cs typeface="Courier New" pitchFamily="34" charset="-120"/>
               </a:rPr>
-              <a:t>    if ((e = __VA_ARGS__) != cudaSuccess) {                     \</a:t>
-            </a:r>
-            <a:endParaRPr lang="en-US" sz="1250" dirty="0"/>
-          </a:p>
-          <a:p>
-            <a:pPr algn="l" indent="0" marL="0">
+              <a:t>cudaDeviceSynchronize()</a:t>
+            </a:r>
+            <a:endParaRPr lang="en-US" sz="1200" dirty="0"/>
+          </a:p>
+        </p:txBody>
+      </p:sp>
+      <p:sp>
+        <p:nvSpPr>
+          <p:cNvPr id="13" name="Text 11"/>
+          <p:cNvSpPr/>
+          <p:nvPr/>
+        </p:nvSpPr>
+        <p:spPr>
+          <a:xfrm>
+            <a:off x="4626864" y="3383280"/>
+            <a:ext cx="2889504" cy="685800"/>
+          </a:xfrm>
+          <a:prstGeom prst="rect">
+            <a:avLst/>
+          </a:prstGeom>
+          <a:noFill/>
+          <a:ln/>
+        </p:spPr>
+        <p:txBody>
+          <a:bodyPr wrap="square" lIns="0" tIns="0" rIns="0" bIns="0" rtlCol="0" anchor="t"/>
+          <a:lstStyle/>
+          <a:p>
+            <a:pPr indent="0" marL="0">
               <a:lnSpc>
-                <a:spcPct val="108000"/>
+                <a:spcPct val="110000"/>
               </a:lnSpc>
               <a:buNone/>
             </a:pPr>
             <a:r>
-              <a:rPr lang="en-US" sz="1250" dirty="0">
-                <a:solidFill>
-                  <a:srgbClr val="E8EDF2"/>
+              <a:rPr lang="en-US" sz="1350" dirty="0">
+                <a:solidFill>
+                  <a:srgbClr val="9AA6B2"/>
+                </a:solidFill>
+                <a:latin typeface="Malgun Gothic" pitchFamily="34" charset="0"/>
+                <a:ea typeface="Malgun Gothic" pitchFamily="34" charset="-122"/>
+                <a:cs typeface="Malgun Gothic" pitchFamily="34" charset="-120"/>
+              </a:rPr>
+              <a:t>GPU가 끝날 때까지 대기</a:t>
+            </a:r>
+            <a:endParaRPr lang="en-US" sz="1350" dirty="0"/>
+          </a:p>
+        </p:txBody>
+      </p:sp>
+      <p:sp>
+        <p:nvSpPr>
+          <p:cNvPr id="14" name="Text 12"/>
+          <p:cNvSpPr/>
+          <p:nvPr/>
+        </p:nvSpPr>
+        <p:spPr>
+          <a:xfrm>
+            <a:off x="7763256" y="2834640"/>
+            <a:ext cx="466344" cy="640080"/>
+          </a:xfrm>
+          <a:prstGeom prst="rect">
+            <a:avLst/>
+          </a:prstGeom>
+          <a:noFill/>
+          <a:ln/>
+        </p:spPr>
+        <p:txBody>
+          <a:bodyPr wrap="square" lIns="0" tIns="0" rIns="0" bIns="0" rtlCol="0" anchor="ctr"/>
+          <a:lstStyle/>
+          <a:p>
+            <a:pPr algn="ctr" indent="0" marL="0">
+              <a:buNone/>
+            </a:pPr>
+            <a:r>
+              <a:rPr lang="en-US" sz="2600" b="1" dirty="0">
+                <a:solidFill>
+                  <a:srgbClr val="9AA6B2"/>
                 </a:solidFill>
                 <a:latin typeface="Courier New" pitchFamily="34" charset="0"/>
                 <a:ea typeface="Courier New" pitchFamily="34" charset="-122"/>
                 <a:cs typeface="Courier New" pitchFamily="34" charset="-120"/>
               </a:rPr>
-              <a:t>        FPRINTF("ERROR: CUDA error: %s, line %d, file %s\n",     \</a:t>
-            </a:r>
-            <a:endParaRPr lang="en-US" sz="1250" dirty="0"/>
-          </a:p>
-          <a:p>
-            <a:pPr algn="l" indent="0" marL="0">
-              <a:lnSpc>
-                <a:spcPct val="108000"/>
-              </a:lnSpc>
-              <a:buNone/>
-            </a:pPr>
-            <a:r>
-              <a:rPr lang="en-US" sz="1250" dirty="0">
-                <a:solidFill>
-                  <a:srgbClr val="4FB0C6"/>
+              <a:t>→</a:t>
+            </a:r>
+            <a:endParaRPr lang="en-US" sz="2600" dirty="0"/>
+          </a:p>
+        </p:txBody>
+      </p:sp>
+      <p:sp>
+        <p:nvSpPr>
+          <p:cNvPr id="15" name="Shape 13"/>
+          <p:cNvSpPr/>
+          <p:nvPr/>
+        </p:nvSpPr>
+        <p:spPr>
+          <a:xfrm>
+            <a:off x="8247888" y="2148840"/>
+            <a:ext cx="3346704" cy="2011680"/>
+          </a:xfrm>
+          <a:prstGeom prst="roundRect">
+            <a:avLst>
+              <a:gd name="adj" fmla="val 3636"/>
+            </a:avLst>
+          </a:prstGeom>
+          <a:solidFill>
+            <a:srgbClr val="1E232C"/>
+          </a:solidFill>
+          <a:ln/>
+        </p:spPr>
+      </p:sp>
+      <p:sp>
+        <p:nvSpPr>
+          <p:cNvPr id="16" name="Text 14"/>
+          <p:cNvSpPr/>
+          <p:nvPr/>
+        </p:nvSpPr>
+        <p:spPr>
+          <a:xfrm>
+            <a:off x="8476488" y="2350008"/>
+            <a:ext cx="2889504" cy="457200"/>
+          </a:xfrm>
+          <a:prstGeom prst="rect">
+            <a:avLst/>
+          </a:prstGeom>
+          <a:noFill/>
+          <a:ln/>
+        </p:spPr>
+        <p:txBody>
+          <a:bodyPr wrap="square" lIns="0" tIns="0" rIns="0" bIns="0" rtlCol="0" anchor="ctr"/>
+          <a:lstStyle/>
+          <a:p>
+            <a:pPr indent="0" marL="0">
+              <a:buNone/>
+            </a:pPr>
+            <a:r>
+              <a:rPr lang="en-US" sz="1700" b="1" dirty="0">
+                <a:solidFill>
+                  <a:srgbClr val="E0A458"/>
+                </a:solidFill>
+                <a:latin typeface="Malgun Gothic" pitchFamily="34" charset="0"/>
+                <a:ea typeface="Malgun Gothic" pitchFamily="34" charset="-122"/>
+                <a:cs typeface="Malgun Gothic" pitchFamily="34" charset="-120"/>
+              </a:rPr>
+              <a:t>③ 오류 검사</a:t>
+            </a:r>
+            <a:endParaRPr lang="en-US" sz="1700" dirty="0"/>
+          </a:p>
+        </p:txBody>
+      </p:sp>
+      <p:sp>
+        <p:nvSpPr>
+          <p:cNvPr id="17" name="Text 15"/>
+          <p:cNvSpPr/>
+          <p:nvPr/>
+        </p:nvSpPr>
+        <p:spPr>
+          <a:xfrm>
+            <a:off x="8476488" y="2880360"/>
+            <a:ext cx="2889504" cy="548640"/>
+          </a:xfrm>
+          <a:prstGeom prst="rect">
+            <a:avLst/>
+          </a:prstGeom>
+          <a:noFill/>
+          <a:ln/>
+        </p:spPr>
+        <p:txBody>
+          <a:bodyPr wrap="square" lIns="0" tIns="0" rIns="0" bIns="0" rtlCol="0" anchor="ctr"/>
+          <a:lstStyle/>
+          <a:p>
+            <a:pPr indent="0" marL="0">
+              <a:buNone/>
+            </a:pPr>
+            <a:r>
+              <a:rPr lang="en-US" sz="1200" dirty="0">
+                <a:solidFill>
+                  <a:srgbClr val="E8EDF2"/>
                 </a:solidFill>
                 <a:latin typeface="Courier New" pitchFamily="34" charset="0"/>
                 <a:ea typeface="Courier New" pitchFamily="34" charset="-122"/>
                 <a:cs typeface="Courier New" pitchFamily="34" charset="-120"/>
               </a:rPr>
-              <a:t>                cudaGetErrorString(e), __LINE__, __FILE__);     \</a:t>
-            </a:r>
-            <a:endParaRPr lang="en-US" sz="1250" dirty="0"/>
-          </a:p>
-          <a:p>
-            <a:pPr algn="l" indent="0" marL="0">
+              <a:t>if (err != cudaSuccess)</a:t>
+            </a:r>
+            <a:endParaRPr lang="en-US" sz="1200" dirty="0"/>
+          </a:p>
+        </p:txBody>
+      </p:sp>
+      <p:sp>
+        <p:nvSpPr>
+          <p:cNvPr id="18" name="Text 16"/>
+          <p:cNvSpPr/>
+          <p:nvPr/>
+        </p:nvSpPr>
+        <p:spPr>
+          <a:xfrm>
+            <a:off x="8476488" y="3383280"/>
+            <a:ext cx="2889504" cy="685800"/>
+          </a:xfrm>
+          <a:prstGeom prst="rect">
+            <a:avLst/>
+          </a:prstGeom>
+          <a:noFill/>
+          <a:ln/>
+        </p:spPr>
+        <p:txBody>
+          <a:bodyPr wrap="square" lIns="0" tIns="0" rIns="0" bIns="0" rtlCol="0" anchor="t"/>
+          <a:lstStyle/>
+          <a:p>
+            <a:pPr indent="0" marL="0">
               <a:lnSpc>
-                <a:spcPct val="108000"/>
+                <a:spcPct val="110000"/>
               </a:lnSpc>
               <a:buNone/>
             </a:pPr>
             <a:r>
-              <a:rPr lang="en-US" sz="1250" dirty="0">
+              <a:rPr lang="en-US" sz="1350" dirty="0">
+                <a:solidFill>
+                  <a:srgbClr val="9AA6B2"/>
+                </a:solidFill>
+                <a:latin typeface="Malgun Gothic" pitchFamily="34" charset="0"/>
+                <a:ea typeface="Malgun Gothic" pitchFamily="34" charset="-122"/>
+                <a:cs typeface="Malgun Gothic" pitchFamily="34" charset="-120"/>
+              </a:rPr>
+              <a:t>이제서야 커널 오류를 알 수 있음</a:t>
+            </a:r>
+            <a:endParaRPr lang="en-US" sz="1350" dirty="0"/>
+          </a:p>
+        </p:txBody>
+      </p:sp>
+      <p:sp>
+        <p:nvSpPr>
+          <p:cNvPr id="19" name="Text 17"/>
+          <p:cNvSpPr/>
+          <p:nvPr/>
+        </p:nvSpPr>
+        <p:spPr>
+          <a:xfrm>
+            <a:off x="548640" y="4480560"/>
+            <a:ext cx="11064240" cy="914400"/>
+          </a:xfrm>
+          <a:prstGeom prst="rect">
+            <a:avLst/>
+          </a:prstGeom>
+          <a:noFill/>
+          <a:ln/>
+        </p:spPr>
+        <p:txBody>
+          <a:bodyPr wrap="square" lIns="0" tIns="0" rIns="0" bIns="0" rtlCol="0" anchor="t"/>
+          <a:lstStyle/>
+          <a:p>
+            <a:pPr indent="0" marL="0">
+              <a:buNone/>
+            </a:pPr>
+            <a:r>
+              <a:rPr lang="en-US" sz="1600" b="1" dirty="0">
+                <a:solidFill>
+                  <a:srgbClr val="E0A458"/>
+                </a:solidFill>
+                <a:latin typeface="Malgun Gothic" pitchFamily="34" charset="0"/>
+                <a:ea typeface="Malgun Gothic" pitchFamily="34" charset="-122"/>
+                <a:cs typeface="Malgun Gothic" pitchFamily="34" charset="-120"/>
+              </a:rPr>
+              <a:t>동기화를 건너뛰면</a:t>
+            </a:r>
+            <a:pPr indent="0" marL="0">
+              <a:buNone/>
+            </a:pPr>
+            <a:r>
+              <a:rPr lang="en-US" sz="1600" dirty="0">
                 <a:solidFill>
                   <a:srgbClr val="E8EDF2"/>
                 </a:solidFill>
-                <a:latin typeface="Courier New" pitchFamily="34" charset="0"/>
-                <a:ea typeface="Courier New" pitchFamily="34" charset="-122"/>
-                <a:cs typeface="Courier New" pitchFamily="34" charset="-120"/>
-              </a:rPr>
-              <a:t>        exit(e); }}while(0)</a:t>
-            </a:r>
-            <a:endParaRPr lang="en-US" sz="1250" dirty="0"/>
-          </a:p>
-          <a:p>
-            <a:pPr algn="l" indent="0" marL="0">
-              <a:lnSpc>
-                <a:spcPct val="108000"/>
-              </a:lnSpc>
-              <a:buNone/>
-            </a:pPr>
-            <a:endParaRPr lang="en-US" sz="1250" dirty="0"/>
-          </a:p>
-          <a:p>
-            <a:pPr algn="l" indent="0" marL="0">
-              <a:lnSpc>
-                <a:spcPct val="108000"/>
-              </a:lnSpc>
-              <a:buNone/>
-            </a:pPr>
-            <a:r>
-              <a:rPr lang="en-US" sz="1250" dirty="0">
-                <a:solidFill>
-                  <a:srgbClr val="9AA6B2"/>
-                </a:solidFill>
-                <a:latin typeface="Courier New" pitchFamily="34" charset="0"/>
-                <a:ea typeface="Courier New" pitchFamily="34" charset="-122"/>
-                <a:cs typeface="Courier New" pitchFamily="34" charset="-120"/>
-              </a:rPr>
-              <a:t>// SYNC_CUERR_KERNEL — 커널 실행 + 동기화 + 검사   cuda_memtest.h:138</a:t>
-            </a:r>
-            <a:endParaRPr lang="en-US" sz="1250" dirty="0"/>
-          </a:p>
-          <a:p>
-            <a:pPr algn="l" indent="0" marL="0">
-              <a:lnSpc>
-                <a:spcPct val="108000"/>
-              </a:lnSpc>
-              <a:buNone/>
-            </a:pPr>
-            <a:r>
-              <a:rPr lang="en-US" sz="1250" dirty="0">
-                <a:solidFill>
-                  <a:srgbClr val="8CC63F"/>
-                </a:solidFill>
-                <a:latin typeface="Courier New" pitchFamily="34" charset="0"/>
-                <a:ea typeface="Courier New" pitchFamily="34" charset="-122"/>
-                <a:cs typeface="Courier New" pitchFamily="34" charset="-120"/>
-              </a:rPr>
-              <a:t>#define SYNC_CUERR_KERNEL(...) do{ __VA_ARGS__;                  \</a:t>
-            </a:r>
-            <a:endParaRPr lang="en-US" sz="1250" dirty="0"/>
-          </a:p>
-          <a:p>
-            <a:pPr algn="l" indent="0" marL="0">
-              <a:lnSpc>
-                <a:spcPct val="108000"/>
-              </a:lnSpc>
-              <a:buNone/>
-            </a:pPr>
-            <a:r>
-              <a:rPr lang="en-US" sz="1250" dirty="0">
-                <a:solidFill>
-                  <a:srgbClr val="E0A458"/>
-                </a:solidFill>
-                <a:latin typeface="Courier New" pitchFamily="34" charset="0"/>
-                <a:ea typeface="Courier New" pitchFamily="34" charset="-122"/>
-                <a:cs typeface="Courier New" pitchFamily="34" charset="-120"/>
-              </a:rPr>
-              <a:t>    e = cudaDeviceSynchronize();  /* GPU 완료 대기 후 검사 */      \</a:t>
-            </a:r>
-            <a:endParaRPr lang="en-US" sz="1250" dirty="0"/>
-          </a:p>
-          <a:p>
-            <a:pPr algn="l" indent="0" marL="0">
-              <a:lnSpc>
-                <a:spcPct val="108000"/>
-              </a:lnSpc>
-              <a:buNone/>
-            </a:pPr>
-            <a:r>
-              <a:rPr lang="en-US" sz="1250" dirty="0">
-                <a:solidFill>
-                  <a:srgbClr val="E8EDF2"/>
-                </a:solidFill>
-                <a:latin typeface="Courier New" pitchFamily="34" charset="0"/>
-                <a:ea typeface="Courier New" pitchFamily="34" charset="-122"/>
-                <a:cs typeface="Courier New" pitchFamily="34" charset="-120"/>
-              </a:rPr>
-              <a:t>    if (e != cudaSuccess){ ... exit(e); } }while(0)</a:t>
-            </a:r>
-            <a:endParaRPr lang="en-US" sz="1250" dirty="0"/>
-          </a:p>
-        </p:txBody>
-      </p:sp>
-      <p:sp>
-        <p:nvSpPr>
-          <p:cNvPr id="6" name="Text 4"/>
-          <p:cNvSpPr/>
-          <p:nvPr/>
-        </p:nvSpPr>
-        <p:spPr>
-          <a:xfrm>
-            <a:off x="548640" y="4983480"/>
-            <a:ext cx="11064240" cy="822960"/>
-          </a:xfrm>
-          <a:prstGeom prst="rect">
-            <a:avLst/>
-          </a:prstGeom>
-          <a:noFill/>
-          <a:ln/>
-        </p:spPr>
-        <p:txBody>
-          <a:bodyPr wrap="square" lIns="0" tIns="0" rIns="0" bIns="0" rtlCol="0" anchor="t"/>
-          <a:lstStyle/>
-          <a:p>
-            <a:pPr indent="0" marL="0">
-              <a:buNone/>
-            </a:pPr>
-            <a:r>
-              <a:rPr lang="en-US" sz="1600" b="1" dirty="0">
-                <a:solidFill>
-                  <a:srgbClr val="4FB0C6"/>
-                </a:solidFill>
-                <a:latin typeface="Malgun Gothic" pitchFamily="34" charset="0"/>
-                <a:ea typeface="Malgun Gothic" pitchFamily="34" charset="-122"/>
-                <a:cs typeface="Malgun Gothic" pitchFamily="34" charset="-120"/>
-              </a:rPr>
-              <a:t>__FILE__ · __LINE__</a:t>
-            </a:r>
-            <a:pPr indent="0" marL="0">
-              <a:buNone/>
-            </a:pPr>
-            <a:r>
-              <a:rPr lang="en-US" sz="1600" dirty="0">
-                <a:solidFill>
-                  <a:srgbClr val="E8EDF2"/>
-                </a:solidFill>
-                <a:latin typeface="Malgun Gothic" pitchFamily="34" charset="0"/>
-                <a:ea typeface="Malgun Gothic" pitchFamily="34" charset="-122"/>
-                <a:cs typeface="Malgun Gothic" pitchFamily="34" charset="-120"/>
-              </a:rPr>
-              <a:t> 덕분에 오류가 '어느 파일 몇 번째 줄'에서 났는지 즉시 압니다. 디버깅의 필수 습관입니다.</a:t>
+                <a:latin typeface="Malgun Gothic" pitchFamily="34" charset="0"/>
+                <a:ea typeface="Malgun Gothic" pitchFamily="34" charset="-122"/>
+                <a:cs typeface="Malgun Gothic" pitchFamily="34" charset="-120"/>
+              </a:rPr>
+              <a:t> 커널이 잘못된 메모리를 건드려도 CPU는 모른 채 계속 진행합니다. 그래서 SYNC_CUERR_KERNEL이 필요합니다.</a:t>
             </a:r>
             <a:endParaRPr lang="en-US" sz="1600" dirty="0"/>
           </a:p>
@@ -8264,7 +9679,7 @@
                 <a:ea typeface="Courier New" pitchFamily="34" charset="-122"/>
                 <a:cs typeface="Courier New" pitchFamily="34" charset="-120"/>
               </a:rPr>
-              <a:t>8</a:t>
+              <a:t>7</a:t>
             </a:r>
             <a:endParaRPr lang="en-US" sz="2200" dirty="0"/>
           </a:p>
@@ -8303,7 +9718,7 @@
                 <a:ea typeface="Malgun Gothic" pitchFamily="34" charset="-122"/>
                 <a:cs typeface="Malgun Gothic" pitchFamily="34" charset="-120"/>
               </a:rPr>
-              <a:t>오류를 우아하게 · error_checking</a:t>
+              <a:t>방어적 매크로 · CUERR / SYNC_CUERR_KERNEL</a:t>
             </a:r>
             <a:endParaRPr lang="en-US" sz="3000" dirty="0"/>
           </a:p>
@@ -8311,64 +9726,261 @@
       </p:sp>
       <p:sp>
         <p:nvSpPr>
-          <p:cNvPr id="4" name="Text 2"/>
-          <p:cNvSpPr/>
-          <p:nvPr/>
-        </p:nvSpPr>
-        <p:spPr>
-          <a:xfrm>
-            <a:off x="548640" y="1463040"/>
-            <a:ext cx="11064240" cy="457200"/>
-          </a:xfrm>
-          <a:prstGeom prst="rect">
-            <a:avLst/>
-          </a:prstGeom>
-          <a:noFill/>
-          <a:ln/>
-        </p:spPr>
-        <p:txBody>
-          <a:bodyPr wrap="square" lIns="0" tIns="0" rIns="0" bIns="0" rtlCol="0" anchor="ctr"/>
-          <a:lstStyle/>
-          <a:p>
-            <a:pPr indent="0" marL="0">
-              <a:buNone/>
-            </a:pPr>
-            <a:r>
-              <a:rPr lang="en-US" sz="1600" dirty="0">
-                <a:solidFill>
-                  <a:srgbClr val="9AA6B2"/>
-                </a:solidFill>
-                <a:latin typeface="Malgun Gothic" pitchFamily="34" charset="0"/>
-                <a:ea typeface="Malgun Gothic" pitchFamily="34" charset="-122"/>
-                <a:cs typeface="Malgun Gothic" pitchFamily="34" charset="-120"/>
-              </a:rPr>
-              <a:t>오류가 발견되면 단순히 종료하지 않고, 정보를 기록하고 상태를 정리합니다.</a:t>
-            </a:r>
-            <a:endParaRPr lang="en-US" sz="1600" dirty="0"/>
-          </a:p>
-        </p:txBody>
-      </p:sp>
-      <p:sp>
-        <p:nvSpPr>
-          <p:cNvPr id="5" name="Shape 3"/>
-          <p:cNvSpPr/>
-          <p:nvPr/>
-        </p:nvSpPr>
-        <p:spPr>
-          <a:xfrm>
-            <a:off x="548640" y="2103120"/>
-            <a:ext cx="11064240" cy="868680"/>
+          <p:cNvPr id="4" name="Shape 2"/>
+          <p:cNvSpPr/>
+          <p:nvPr/>
+        </p:nvSpPr>
+        <p:spPr>
+          <a:xfrm>
+            <a:off x="548640" y="1554480"/>
+            <a:ext cx="11064240" cy="3291840"/>
           </a:xfrm>
           <a:prstGeom prst="roundRect">
             <a:avLst>
-              <a:gd name="adj" fmla="val 7368"/>
+              <a:gd name="adj" fmla="val 1667"/>
             </a:avLst>
           </a:prstGeom>
           <a:solidFill>
-            <a:srgbClr val="1E232C"/>
+            <a:srgbClr val="0E1116"/>
           </a:solidFill>
-          <a:ln/>
-        </p:spPr>
+          <a:ln w="12700">
+            <a:solidFill>
+              <a:srgbClr val="2C3440"/>
+            </a:solidFill>
+            <a:prstDash val="solid"/>
+          </a:ln>
+        </p:spPr>
+      </p:sp>
+      <p:sp>
+        <p:nvSpPr>
+          <p:cNvPr id="5" name="Text 3"/>
+          <p:cNvSpPr/>
+          <p:nvPr/>
+        </p:nvSpPr>
+        <p:spPr>
+          <a:xfrm>
+            <a:off x="749808" y="1700784"/>
+            <a:ext cx="10661904" cy="2999232"/>
+          </a:xfrm>
+          <a:prstGeom prst="rect">
+            <a:avLst/>
+          </a:prstGeom>
+          <a:noFill/>
+          <a:ln/>
+        </p:spPr>
+        <p:txBody>
+          <a:bodyPr wrap="square" lIns="0" tIns="0" rIns="0" bIns="0" rtlCol="0" anchor="t"/>
+          <a:lstStyle/>
+          <a:p>
+            <a:pPr algn="l" indent="0" marL="0">
+              <a:lnSpc>
+                <a:spcPct val="108000"/>
+              </a:lnSpc>
+              <a:buNone/>
+            </a:pPr>
+            <a:r>
+              <a:rPr lang="en-US" sz="1250" dirty="0">
+                <a:solidFill>
+                  <a:srgbClr val="9AA6B2"/>
+                </a:solidFill>
+                <a:latin typeface="Courier New" pitchFamily="34" charset="0"/>
+                <a:ea typeface="Courier New" pitchFamily="34" charset="-122"/>
+                <a:cs typeface="Courier New" pitchFamily="34" charset="-120"/>
+              </a:rPr>
+              <a:t>// CUERR — 모든 CUDA 호출을 감싼다   cuda_memtest.h:132</a:t>
+            </a:r>
+            <a:endParaRPr lang="en-US" sz="1250" dirty="0"/>
+          </a:p>
+          <a:p>
+            <a:pPr algn="l" indent="0" marL="0">
+              <a:lnSpc>
+                <a:spcPct val="108000"/>
+              </a:lnSpc>
+              <a:buNone/>
+            </a:pPr>
+            <a:r>
+              <a:rPr lang="en-US" sz="1250" dirty="0">
+                <a:solidFill>
+                  <a:srgbClr val="E8EDF2"/>
+                </a:solidFill>
+                <a:latin typeface="Courier New" pitchFamily="34" charset="0"/>
+                <a:ea typeface="Courier New" pitchFamily="34" charset="-122"/>
+                <a:cs typeface="Courier New" pitchFamily="34" charset="-120"/>
+              </a:rPr>
+              <a:t>#define CUERR(...) do{ apiError_t e;                             \</a:t>
+            </a:r>
+            <a:endParaRPr lang="en-US" sz="1250" dirty="0"/>
+          </a:p>
+          <a:p>
+            <a:pPr algn="l" indent="0" marL="0">
+              <a:lnSpc>
+                <a:spcPct val="108000"/>
+              </a:lnSpc>
+              <a:buNone/>
+            </a:pPr>
+            <a:r>
+              <a:rPr lang="en-US" sz="1250" dirty="0">
+                <a:solidFill>
+                  <a:srgbClr val="8CC63F"/>
+                </a:solidFill>
+                <a:latin typeface="Courier New" pitchFamily="34" charset="0"/>
+                <a:ea typeface="Courier New" pitchFamily="34" charset="-122"/>
+                <a:cs typeface="Courier New" pitchFamily="34" charset="-120"/>
+              </a:rPr>
+              <a:t>    if ((e = __VA_ARGS__) != cudaSuccess) {                     \</a:t>
+            </a:r>
+            <a:endParaRPr lang="en-US" sz="1250" dirty="0"/>
+          </a:p>
+          <a:p>
+            <a:pPr algn="l" indent="0" marL="0">
+              <a:lnSpc>
+                <a:spcPct val="108000"/>
+              </a:lnSpc>
+              <a:buNone/>
+            </a:pPr>
+            <a:r>
+              <a:rPr lang="en-US" sz="1250" dirty="0">
+                <a:solidFill>
+                  <a:srgbClr val="E8EDF2"/>
+                </a:solidFill>
+                <a:latin typeface="Courier New" pitchFamily="34" charset="0"/>
+                <a:ea typeface="Courier New" pitchFamily="34" charset="-122"/>
+                <a:cs typeface="Courier New" pitchFamily="34" charset="-120"/>
+              </a:rPr>
+              <a:t>        FPRINTF("ERROR: CUDA error: %s, line %d, file %s\n",     \</a:t>
+            </a:r>
+            <a:endParaRPr lang="en-US" sz="1250" dirty="0"/>
+          </a:p>
+          <a:p>
+            <a:pPr algn="l" indent="0" marL="0">
+              <a:lnSpc>
+                <a:spcPct val="108000"/>
+              </a:lnSpc>
+              <a:buNone/>
+            </a:pPr>
+            <a:r>
+              <a:rPr lang="en-US" sz="1250" dirty="0">
+                <a:solidFill>
+                  <a:srgbClr val="4FB0C6"/>
+                </a:solidFill>
+                <a:latin typeface="Courier New" pitchFamily="34" charset="0"/>
+                <a:ea typeface="Courier New" pitchFamily="34" charset="-122"/>
+                <a:cs typeface="Courier New" pitchFamily="34" charset="-120"/>
+              </a:rPr>
+              <a:t>                cudaGetErrorString(e), __LINE__, __FILE__);     \</a:t>
+            </a:r>
+            <a:endParaRPr lang="en-US" sz="1250" dirty="0"/>
+          </a:p>
+          <a:p>
+            <a:pPr algn="l" indent="0" marL="0">
+              <a:lnSpc>
+                <a:spcPct val="108000"/>
+              </a:lnSpc>
+              <a:buNone/>
+            </a:pPr>
+            <a:r>
+              <a:rPr lang="en-US" sz="1250" dirty="0">
+                <a:solidFill>
+                  <a:srgbClr val="E8EDF2"/>
+                </a:solidFill>
+                <a:latin typeface="Courier New" pitchFamily="34" charset="0"/>
+                <a:ea typeface="Courier New" pitchFamily="34" charset="-122"/>
+                <a:cs typeface="Courier New" pitchFamily="34" charset="-120"/>
+              </a:rPr>
+              <a:t>        exit(e); }}while(0)</a:t>
+            </a:r>
+            <a:endParaRPr lang="en-US" sz="1250" dirty="0"/>
+          </a:p>
+          <a:p>
+            <a:pPr algn="l" indent="0" marL="0">
+              <a:lnSpc>
+                <a:spcPct val="108000"/>
+              </a:lnSpc>
+              <a:buNone/>
+            </a:pPr>
+            <a:endParaRPr lang="en-US" sz="1250" dirty="0"/>
+          </a:p>
+          <a:p>
+            <a:pPr algn="l" indent="0" marL="0">
+              <a:lnSpc>
+                <a:spcPct val="108000"/>
+              </a:lnSpc>
+              <a:buNone/>
+            </a:pPr>
+            <a:r>
+              <a:rPr lang="en-US" sz="1250" dirty="0">
+                <a:solidFill>
+                  <a:srgbClr val="9AA6B2"/>
+                </a:solidFill>
+                <a:latin typeface="Courier New" pitchFamily="34" charset="0"/>
+                <a:ea typeface="Courier New" pitchFamily="34" charset="-122"/>
+                <a:cs typeface="Courier New" pitchFamily="34" charset="-120"/>
+              </a:rPr>
+              <a:t>// SYNC_CUERR_KERNEL — 커널 실행 + 동기화 + 검사   cuda_memtest.h:138</a:t>
+            </a:r>
+            <a:endParaRPr lang="en-US" sz="1250" dirty="0"/>
+          </a:p>
+          <a:p>
+            <a:pPr algn="l" indent="0" marL="0">
+              <a:lnSpc>
+                <a:spcPct val="108000"/>
+              </a:lnSpc>
+              <a:buNone/>
+            </a:pPr>
+            <a:r>
+              <a:rPr lang="en-US" sz="1250" dirty="0">
+                <a:solidFill>
+                  <a:srgbClr val="8CC63F"/>
+                </a:solidFill>
+                <a:latin typeface="Courier New" pitchFamily="34" charset="0"/>
+                <a:ea typeface="Courier New" pitchFamily="34" charset="-122"/>
+                <a:cs typeface="Courier New" pitchFamily="34" charset="-120"/>
+              </a:rPr>
+              <a:t>#define SYNC_CUERR_KERNEL(...) do{ __VA_ARGS__;                  \</a:t>
+            </a:r>
+            <a:endParaRPr lang="en-US" sz="1250" dirty="0"/>
+          </a:p>
+          <a:p>
+            <a:pPr algn="l" indent="0" marL="0">
+              <a:lnSpc>
+                <a:spcPct val="108000"/>
+              </a:lnSpc>
+              <a:buNone/>
+            </a:pPr>
+            <a:r>
+              <a:rPr lang="en-US" sz="1250" dirty="0">
+                <a:solidFill>
+                  <a:srgbClr val="E0A458"/>
+                </a:solidFill>
+                <a:latin typeface="Courier New" pitchFamily="34" charset="0"/>
+                <a:ea typeface="Courier New" pitchFamily="34" charset="-122"/>
+                <a:cs typeface="Courier New" pitchFamily="34" charset="-120"/>
+              </a:rPr>
+              <a:t>    e = cudaDeviceSynchronize();  /* GPU 완료 대기 후 검사 */      \</a:t>
+            </a:r>
+            <a:endParaRPr lang="en-US" sz="1250" dirty="0"/>
+          </a:p>
+          <a:p>
+            <a:pPr algn="l" indent="0" marL="0">
+              <a:lnSpc>
+                <a:spcPct val="108000"/>
+              </a:lnSpc>
+              <a:buNone/>
+            </a:pPr>
+            <a:r>
+              <a:rPr lang="en-US" sz="1250" dirty="0">
+                <a:solidFill>
+                  <a:srgbClr val="E8EDF2"/>
+                </a:solidFill>
+                <a:latin typeface="Courier New" pitchFamily="34" charset="0"/>
+                <a:ea typeface="Courier New" pitchFamily="34" charset="-122"/>
+                <a:cs typeface="Courier New" pitchFamily="34" charset="-120"/>
+              </a:rPr>
+              <a:t>    if (e != cudaSuccess){ ... exit(e); } }while(0)</a:t>
+            </a:r>
+            <a:endParaRPr lang="en-US" sz="1250" dirty="0"/>
+          </a:p>
+        </p:txBody>
       </p:sp>
       <p:sp>
         <p:nvSpPr>
@@ -8378,24 +9990,24 @@
         </p:nvSpPr>
         <p:spPr>
           <a:xfrm>
-            <a:off x="822960" y="2212848"/>
-            <a:ext cx="3108960" cy="640080"/>
-          </a:xfrm>
-          <a:prstGeom prst="rect">
-            <a:avLst/>
-          </a:prstGeom>
-          <a:noFill/>
-          <a:ln/>
-        </p:spPr>
-        <p:txBody>
-          <a:bodyPr wrap="square" lIns="0" tIns="0" rIns="0" bIns="0" rtlCol="0" anchor="ctr"/>
-          <a:lstStyle/>
-          <a:p>
-            <a:pPr indent="0" marL="0">
-              <a:buNone/>
-            </a:pPr>
-            <a:r>
-              <a:rPr lang="en-US" sz="1700" b="1" dirty="0">
+            <a:off x="548640" y="4983480"/>
+            <a:ext cx="11064240" cy="822960"/>
+          </a:xfrm>
+          <a:prstGeom prst="rect">
+            <a:avLst/>
+          </a:prstGeom>
+          <a:noFill/>
+          <a:ln/>
+        </p:spPr>
+        <p:txBody>
+          <a:bodyPr wrap="square" lIns="0" tIns="0" rIns="0" bIns="0" rtlCol="0" anchor="t"/>
+          <a:lstStyle/>
+          <a:p>
+            <a:pPr indent="0" marL="0">
+              <a:buNone/>
+            </a:pPr>
+            <a:r>
+              <a:rPr lang="en-US" sz="1600" b="1" dirty="0">
                 <a:solidFill>
                   <a:srgbClr val="4FB0C6"/>
                 </a:solidFill>
@@ -8403,38 +10015,13 @@
                 <a:ea typeface="Malgun Gothic" pitchFamily="34" charset="-122"/>
                 <a:cs typeface="Malgun Gothic" pitchFamily="34" charset="-120"/>
               </a:rPr>
-              <a:t>오류 정보 복사</a:t>
-            </a:r>
-            <a:endParaRPr lang="en-US" sz="1700" dirty="0"/>
-          </a:p>
-        </p:txBody>
-      </p:sp>
-      <p:sp>
-        <p:nvSpPr>
-          <p:cNvPr id="7" name="Text 5"/>
-          <p:cNvSpPr/>
-          <p:nvPr/>
-        </p:nvSpPr>
-        <p:spPr>
-          <a:xfrm>
-            <a:off x="4114800" y="2212848"/>
-            <a:ext cx="7223760" cy="640080"/>
-          </a:xfrm>
-          <a:prstGeom prst="rect">
-            <a:avLst/>
-          </a:prstGeom>
-          <a:noFill/>
-          <a:ln/>
-        </p:spPr>
-        <p:txBody>
-          <a:bodyPr wrap="square" lIns="0" tIns="0" rIns="0" bIns="0" rtlCol="0" anchor="ctr"/>
-          <a:lstStyle/>
-          <a:p>
-            <a:pPr indent="0" marL="0">
-              <a:buNone/>
-            </a:pPr>
-            <a:r>
-              <a:rPr lang="en-US" sz="1500" dirty="0">
+              <a:t>__FILE__ · __LINE__</a:t>
+            </a:r>
+            <a:pPr indent="0" marL="0">
+              <a:buNone/>
+            </a:pPr>
+            <a:r>
+              <a:rPr lang="en-US" sz="1600" dirty="0">
                 <a:solidFill>
                   <a:srgbClr val="E8EDF2"/>
                 </a:solidFill>
@@ -8442,348 +10029,9 @@
                 <a:ea typeface="Malgun Gothic" pitchFamily="34" charset="-122"/>
                 <a:cs typeface="Malgun Gothic" pitchFamily="34" charset="-120"/>
               </a:rPr>
-              <a:t>cudaMemcpy로 err_count·주소·값을 CPU로 (tests.cpp:117)</a:t>
-            </a:r>
-            <a:endParaRPr lang="en-US" sz="1500" dirty="0"/>
-          </a:p>
-        </p:txBody>
-      </p:sp>
-      <p:sp>
-        <p:nvSpPr>
-          <p:cNvPr id="8" name="Shape 6"/>
-          <p:cNvSpPr/>
-          <p:nvPr/>
-        </p:nvSpPr>
-        <p:spPr>
-          <a:xfrm>
-            <a:off x="548640" y="3099816"/>
-            <a:ext cx="11064240" cy="868680"/>
-          </a:xfrm>
-          <a:prstGeom prst="roundRect">
-            <a:avLst>
-              <a:gd name="adj" fmla="val 7368"/>
-            </a:avLst>
-          </a:prstGeom>
-          <a:solidFill>
-            <a:srgbClr val="1E232C"/>
-          </a:solidFill>
-          <a:ln/>
-        </p:spPr>
-      </p:sp>
-      <p:sp>
-        <p:nvSpPr>
-          <p:cNvPr id="9" name="Text 7"/>
-          <p:cNvSpPr/>
-          <p:nvPr/>
-        </p:nvSpPr>
-        <p:spPr>
-          <a:xfrm>
-            <a:off x="822960" y="3209544"/>
-            <a:ext cx="3108960" cy="640080"/>
-          </a:xfrm>
-          <a:prstGeom prst="rect">
-            <a:avLst/>
-          </a:prstGeom>
-          <a:noFill/>
-          <a:ln/>
-        </p:spPr>
-        <p:txBody>
-          <a:bodyPr wrap="square" lIns="0" tIns="0" rIns="0" bIns="0" rtlCol="0" anchor="ctr"/>
-          <a:lstStyle/>
-          <a:p>
-            <a:pPr indent="0" marL="0">
-              <a:buNone/>
-            </a:pPr>
-            <a:r>
-              <a:rPr lang="en-US" sz="1700" b="1" dirty="0">
-                <a:solidFill>
-                  <a:srgbClr val="8CC63F"/>
-                </a:solidFill>
-                <a:latin typeface="Malgun Gothic" pitchFamily="34" charset="0"/>
-                <a:ea typeface="Malgun Gothic" pitchFamily="34" charset="-122"/>
-                <a:cs typeface="Malgun Gothic" pitchFamily="34" charset="-120"/>
-              </a:rPr>
-              <a:t>보고 &amp; 로그</a:t>
-            </a:r>
-            <a:endParaRPr lang="en-US" sz="1700" dirty="0"/>
-          </a:p>
-        </p:txBody>
-      </p:sp>
-      <p:sp>
-        <p:nvSpPr>
-          <p:cNvPr id="10" name="Text 8"/>
-          <p:cNvSpPr/>
-          <p:nvPr/>
-        </p:nvSpPr>
-        <p:spPr>
-          <a:xfrm>
-            <a:off x="4114800" y="3209544"/>
-            <a:ext cx="7223760" cy="640080"/>
-          </a:xfrm>
-          <a:prstGeom prst="rect">
-            <a:avLst/>
-          </a:prstGeom>
-          <a:noFill/>
-          <a:ln/>
-        </p:spPr>
-        <p:txBody>
-          <a:bodyPr wrap="square" lIns="0" tIns="0" rIns="0" bIns="0" rtlCol="0" anchor="ctr"/>
-          <a:lstStyle/>
-          <a:p>
-            <a:pPr indent="0" marL="0">
-              <a:buNone/>
-            </a:pPr>
-            <a:r>
-              <a:rPr lang="en-US" sz="1500" dirty="0">
-                <a:solidFill>
-                  <a:srgbClr val="E8EDF2"/>
-                </a:solidFill>
-                <a:latin typeface="Malgun Gothic" pitchFamily="34" charset="0"/>
-                <a:ea typeface="Malgun Gothic" pitchFamily="34" charset="-122"/>
-                <a:cs typeface="Malgun Gothic" pitchFamily="34" charset="-120"/>
-              </a:rPr>
-              <a:t>오류 주소·기대값·실제값·diff 출력, 필요시 이메일 알림</a:t>
-            </a:r>
-            <a:endParaRPr lang="en-US" sz="1500" dirty="0"/>
-          </a:p>
-        </p:txBody>
-      </p:sp>
-      <p:sp>
-        <p:nvSpPr>
-          <p:cNvPr id="11" name="Shape 9"/>
-          <p:cNvSpPr/>
-          <p:nvPr/>
-        </p:nvSpPr>
-        <p:spPr>
-          <a:xfrm>
-            <a:off x="548640" y="4096512"/>
-            <a:ext cx="11064240" cy="868680"/>
-          </a:xfrm>
-          <a:prstGeom prst="roundRect">
-            <a:avLst>
-              <a:gd name="adj" fmla="val 7368"/>
-            </a:avLst>
-          </a:prstGeom>
-          <a:solidFill>
-            <a:srgbClr val="1E232C"/>
-          </a:solidFill>
-          <a:ln/>
-        </p:spPr>
-      </p:sp>
-      <p:sp>
-        <p:nvSpPr>
-          <p:cNvPr id="12" name="Text 10"/>
-          <p:cNvSpPr/>
-          <p:nvPr/>
-        </p:nvSpPr>
-        <p:spPr>
-          <a:xfrm>
-            <a:off x="822960" y="4206240"/>
-            <a:ext cx="3108960" cy="640080"/>
-          </a:xfrm>
-          <a:prstGeom prst="rect">
-            <a:avLst/>
-          </a:prstGeom>
-          <a:noFill/>
-          <a:ln/>
-        </p:spPr>
-        <p:txBody>
-          <a:bodyPr wrap="square" lIns="0" tIns="0" rIns="0" bIns="0" rtlCol="0" anchor="ctr"/>
-          <a:lstStyle/>
-          <a:p>
-            <a:pPr indent="0" marL="0">
-              <a:buNone/>
-            </a:pPr>
-            <a:r>
-              <a:rPr lang="en-US" sz="1700" b="1" dirty="0">
-                <a:solidFill>
-                  <a:srgbClr val="E0A458"/>
-                </a:solidFill>
-                <a:latin typeface="Malgun Gothic" pitchFamily="34" charset="0"/>
-                <a:ea typeface="Malgun Gothic" pitchFamily="34" charset="-122"/>
-                <a:cs typeface="Malgun Gothic" pitchFamily="34" charset="-120"/>
-              </a:rPr>
-              <a:t>카운터 재초기화</a:t>
-            </a:r>
-            <a:endParaRPr lang="en-US" sz="1700" dirty="0"/>
-          </a:p>
-        </p:txBody>
-      </p:sp>
-      <p:sp>
-        <p:nvSpPr>
-          <p:cNvPr id="13" name="Text 11"/>
-          <p:cNvSpPr/>
-          <p:nvPr/>
-        </p:nvSpPr>
-        <p:spPr>
-          <a:xfrm>
-            <a:off x="4114800" y="4206240"/>
-            <a:ext cx="7223760" cy="640080"/>
-          </a:xfrm>
-          <a:prstGeom prst="rect">
-            <a:avLst/>
-          </a:prstGeom>
-          <a:noFill/>
-          <a:ln/>
-        </p:spPr>
-        <p:txBody>
-          <a:bodyPr wrap="square" lIns="0" tIns="0" rIns="0" bIns="0" rtlCol="0" anchor="ctr"/>
-          <a:lstStyle/>
-          <a:p>
-            <a:pPr indent="0" marL="0">
-              <a:buNone/>
-            </a:pPr>
-            <a:r>
-              <a:rPr lang="en-US" sz="1500" dirty="0">
-                <a:solidFill>
-                  <a:srgbClr val="E8EDF2"/>
-                </a:solidFill>
-                <a:latin typeface="Malgun Gothic" pitchFamily="34" charset="0"/>
-                <a:ea typeface="Malgun Gothic" pitchFamily="34" charset="-122"/>
-                <a:cs typeface="Malgun Gothic" pitchFamily="34" charset="-120"/>
-              </a:rPr>
-              <a:t>cudaMemset으로 err_count 등을 0으로 (다음 검사 준비)</a:t>
-            </a:r>
-            <a:endParaRPr lang="en-US" sz="1500" dirty="0"/>
-          </a:p>
-        </p:txBody>
-      </p:sp>
-      <p:sp>
-        <p:nvSpPr>
-          <p:cNvPr id="14" name="Shape 12"/>
-          <p:cNvSpPr/>
-          <p:nvPr/>
-        </p:nvSpPr>
-        <p:spPr>
-          <a:xfrm>
-            <a:off x="548640" y="5093208"/>
-            <a:ext cx="11064240" cy="868680"/>
-          </a:xfrm>
-          <a:prstGeom prst="roundRect">
-            <a:avLst>
-              <a:gd name="adj" fmla="val 7368"/>
-            </a:avLst>
-          </a:prstGeom>
-          <a:solidFill>
-            <a:srgbClr val="1E232C"/>
-          </a:solidFill>
-          <a:ln/>
-        </p:spPr>
-      </p:sp>
-      <p:sp>
-        <p:nvSpPr>
-          <p:cNvPr id="15" name="Text 13"/>
-          <p:cNvSpPr/>
-          <p:nvPr/>
-        </p:nvSpPr>
-        <p:spPr>
-          <a:xfrm>
-            <a:off x="822960" y="5202936"/>
-            <a:ext cx="3108960" cy="640080"/>
-          </a:xfrm>
-          <a:prstGeom prst="rect">
-            <a:avLst/>
-          </a:prstGeom>
-          <a:noFill/>
-          <a:ln/>
-        </p:spPr>
-        <p:txBody>
-          <a:bodyPr wrap="square" lIns="0" tIns="0" rIns="0" bIns="0" rtlCol="0" anchor="ctr"/>
-          <a:lstStyle/>
-          <a:p>
-            <a:pPr indent="0" marL="0">
-              <a:buNone/>
-            </a:pPr>
-            <a:r>
-              <a:rPr lang="en-US" sz="1700" b="1" dirty="0">
-                <a:solidFill>
-                  <a:srgbClr val="E0645B"/>
-                </a:solidFill>
-                <a:latin typeface="Malgun Gothic" pitchFamily="34" charset="0"/>
-                <a:ea typeface="Malgun Gothic" pitchFamily="34" charset="-122"/>
-                <a:cs typeface="Malgun Gothic" pitchFamily="34" charset="-120"/>
-              </a:rPr>
-              <a:t>필요시 안전 종료</a:t>
-            </a:r>
-            <a:endParaRPr lang="en-US" sz="1700" dirty="0"/>
-          </a:p>
-        </p:txBody>
-      </p:sp>
-      <p:sp>
-        <p:nvSpPr>
-          <p:cNvPr id="16" name="Text 14"/>
-          <p:cNvSpPr/>
-          <p:nvPr/>
-        </p:nvSpPr>
-        <p:spPr>
-          <a:xfrm>
-            <a:off x="4114800" y="5202936"/>
-            <a:ext cx="7223760" cy="640080"/>
-          </a:xfrm>
-          <a:prstGeom prst="rect">
-            <a:avLst/>
-          </a:prstGeom>
-          <a:noFill/>
-          <a:ln/>
-        </p:spPr>
-        <p:txBody>
-          <a:bodyPr wrap="square" lIns="0" tIns="0" rIns="0" bIns="0" rtlCol="0" anchor="ctr"/>
-          <a:lstStyle/>
-          <a:p>
-            <a:pPr indent="0" marL="0">
-              <a:buNone/>
-            </a:pPr>
-            <a:r>
-              <a:rPr lang="en-US" sz="1500" dirty="0">
-                <a:solidFill>
-                  <a:srgbClr val="E8EDF2"/>
-                </a:solidFill>
-                <a:latin typeface="Malgun Gothic" pitchFamily="34" charset="0"/>
-                <a:ea typeface="Malgun Gothic" pitchFamily="34" charset="-122"/>
-                <a:cs typeface="Malgun Gothic" pitchFamily="34" charset="-120"/>
-              </a:rPr>
-              <a:t>exit_on_error면 cudaDeviceReset 후 종료 (tests.cpp:196)</a:t>
-            </a:r>
-            <a:endParaRPr lang="en-US" sz="1500" dirty="0"/>
-          </a:p>
-        </p:txBody>
-      </p:sp>
-      <p:sp>
-        <p:nvSpPr>
-          <p:cNvPr id="17" name="Text 15"/>
-          <p:cNvSpPr/>
-          <p:nvPr/>
-        </p:nvSpPr>
-        <p:spPr>
-          <a:xfrm>
-            <a:off x="548640" y="6172200"/>
-            <a:ext cx="11064240" cy="365760"/>
-          </a:xfrm>
-          <a:prstGeom prst="rect">
-            <a:avLst/>
-          </a:prstGeom>
-          <a:noFill/>
-          <a:ln/>
-        </p:spPr>
-        <p:txBody>
-          <a:bodyPr wrap="square" lIns="0" tIns="0" rIns="0" bIns="0" rtlCol="0" anchor="ctr"/>
-          <a:lstStyle/>
-          <a:p>
-            <a:pPr indent="0" marL="0">
-              <a:buNone/>
-            </a:pPr>
-            <a:r>
-              <a:rPr lang="en-US" sz="1300" i="1" dirty="0">
-                <a:solidFill>
-                  <a:srgbClr val="9AA6B2"/>
-                </a:solidFill>
-                <a:latin typeface="Malgun Gothic" pitchFamily="34" charset="0"/>
-                <a:ea typeface="Malgun Gothic" pitchFamily="34" charset="-122"/>
-                <a:cs typeface="Malgun Gothic" pitchFamily="34" charset="-120"/>
-              </a:rPr>
-              <a:t>장난감 예제와 프로덕션 코드의 차이 — 오류를 만나도 무너지지 않고 다음 노드·다음 검사를 준비합니다.</a:t>
-            </a:r>
-            <a:endParaRPr lang="en-US" sz="1300" dirty="0"/>
+              <a:t> 덕분에 오류가 '어느 파일 몇 번째 줄'에서 났는지 즉시 압니다. 디버깅의 필수 습관입니다.</a:t>
+            </a:r>
+            <a:endParaRPr lang="en-US" sz="1600" dirty="0"/>
           </a:p>
         </p:txBody>
       </p:sp>

--- a/seminar/slides/세션4_원자연산과_에러핸들링.pptx
+++ b/seminar/slides/세션4_원자연산과_에러핸들링.pptx
@@ -18,9 +18,10 @@
     <p:sldId id="266" r:id="rId12"/>
     <p:sldId id="267" r:id="rId13"/>
     <p:sldId id="268" r:id="rId14"/>
+    <p:sldId id="269" r:id="rId15"/>
   </p:sldIdLst>
   <p:notesMasterIdLst>
-    <p:notesMasterId r:id="rId15"/>
+    <p:notesMasterId r:id="rId16"/>
   </p:notesMasterIdLst>
   <p:sldSz cx="12192000" cy="6858000"/>
   <p:notesSz cx="6858000" cy="12192000"/>
@@ -602,7 +603,7 @@
           <a:p>
             <a:r>
               <a:rPr lang="en-US" dirty="0"/>
-              <a:t>cudaDeviceReset은 GPU 상태를 깨끗이 되돌립니다. 멀티노드 검사에서 한 노드 오류가 전체를 멈추지 않게.</a:t>
+              <a:t>CUERR은 동기 API 호출용, SYNC_CUERR_KERNEL은 커널 실행용. 둘 다 실패 시 위치를 찍고 종료.</a:t>
             </a:r>
             <a:endParaRPr lang="en-US" dirty="0"/>
           </a:p>
@@ -690,7 +691,7 @@
           <a:p>
             <a:r>
               <a:rPr lang="en-US" dirty="0"/>
-              <a:t>모든 Ex는 원복이 중요. 특히 Ex 3/4는 오류를 일부러 유발하므로 반드시 되돌리도록.</a:t>
+              <a:t>cudaDeviceReset은 GPU 상태를 깨끗이 되돌립니다. 멀티노드 검사에서 한 노드 오류가 전체를 멈추지 않게.</a:t>
             </a:r>
             <a:endParaRPr lang="en-US" dirty="0"/>
           </a:p>
@@ -778,7 +779,7 @@
           <a:p>
             <a:r>
               <a:rPr lang="en-US" dirty="0"/>
-              <a:t>네 가지 목표(슬라이드 2)로 돌아가 자가 점검을 유도하세요.</a:t>
+              <a:t>모든 Ex는 원복이 중요. 특히 Ex 3/4는 오류를 일부러 유발하므로 반드시 되돌리도록.</a:t>
             </a:r>
             <a:endParaRPr lang="en-US" dirty="0"/>
           </a:p>
@@ -866,7 +867,7 @@
           <a:p>
             <a:r>
               <a:rPr lang="en-US" dirty="0"/>
-              <a:t>세션 5는 종합 회차. 멀티 GPU 스레딩, 이식성, 그리고 캡스톤 프로젝트로 마무리.</a:t>
+              <a:t>네 가지 목표(슬라이드 2)로 돌아가 자가 점검을 유도하세요.</a:t>
             </a:r>
             <a:endParaRPr lang="en-US" dirty="0"/>
           </a:p>
@@ -890,6 +891,94 @@
             <a:fld id="{F7021451-1387-4CA6-816F-3879F97B5CBC}" type="slidenum">
               <a:rPr lang="en-US"/>
               <a:t>13</a:t>
+            </a:fld>
+            <a:endParaRPr lang="en-US"/>
+          </a:p>
+        </p:txBody>
+      </p:sp>
+    </p:spTree>
+    <p:extLst>
+      <p:ext uri="{BB962C8B-B14F-4D97-AF65-F5344CB8AC3E}">
+        <p14:creationId xmlns:p14="http://schemas.microsoft.com/office/powerpoint/2010/main" val="1024086991"/>
+      </p:ext>
+    </p:extLst>
+  </p:cSld>
+  <p:clrMapOvr>
+    <a:masterClrMapping/>
+  </p:clrMapOvr>
+</p:notes>
+</file>
+
+<file path=ppt/notesSlides/notesSlide14.xml><?xml version="1.0" encoding="utf-8"?>
+<p:notes xmlns:a="http://schemas.openxmlformats.org/drawingml/2006/main" xmlns:r="http://schemas.openxmlformats.org/officeDocument/2006/relationships" xmlns:p="http://schemas.openxmlformats.org/presentationml/2006/main">
+  <p:cSld>
+    <p:spTree>
+      <p:nvGrpSpPr>
+        <p:cNvPr id="1" name=""/>
+        <p:cNvGrpSpPr/>
+        <p:nvPr/>
+      </p:nvGrpSpPr>
+      <p:grpSpPr>
+        <a:xfrm>
+          <a:off x="0" y="0"/>
+          <a:ext cx="0" cy="0"/>
+          <a:chOff x="0" y="0"/>
+          <a:chExt cx="0" cy="0"/>
+        </a:xfrm>
+      </p:grpSpPr>
+      <p:sp>
+        <p:nvSpPr>
+          <p:cNvPr id="2" name="Slide Image Placeholder 1"/>
+          <p:cNvSpPr>
+            <a:spLocks noGrp="1" noRot="1" noChangeAspect="1"/>
+          </p:cNvSpPr>
+          <p:nvPr>
+            <p:ph type="sldImg"/>
+          </p:nvPr>
+        </p:nvSpPr>
+        <p:spPr/>
+      </p:sp>
+      <p:sp>
+        <p:nvSpPr>
+          <p:cNvPr id="3" name="Notes Placeholder 2"/>
+          <p:cNvSpPr>
+            <a:spLocks noGrp="1"/>
+          </p:cNvSpPr>
+          <p:nvPr>
+            <p:ph type="body" idx="1"/>
+          </p:nvPr>
+        </p:nvSpPr>
+        <p:spPr/>
+        <p:txBody>
+          <a:bodyPr/>
+          <a:lstStyle/>
+          <a:p>
+            <a:r>
+              <a:rPr lang="en-US" dirty="0"/>
+              <a:t>세션 5는 종합 회차. 멀티 GPU 스레딩, 이식성, 그리고 캡스톤 프로젝트로 마무리.</a:t>
+            </a:r>
+            <a:endParaRPr lang="en-US" dirty="0"/>
+          </a:p>
+        </p:txBody>
+      </p:sp>
+      <p:sp>
+        <p:nvSpPr>
+          <p:cNvPr id="4" name="Slide Number Placeholder 3"/>
+          <p:cNvSpPr>
+            <a:spLocks noGrp="1"/>
+          </p:cNvSpPr>
+          <p:nvPr>
+            <p:ph type="sldNum" sz="quarter" idx="10"/>
+          </p:nvPr>
+        </p:nvSpPr>
+        <p:spPr/>
+        <p:txBody>
+          <a:bodyPr/>
+          <a:lstStyle/>
+          <a:p>
+            <a:fld id="{F7021451-1387-4CA6-816F-3879F97B5CBC}" type="slidenum">
+              <a:rPr lang="en-US"/>
+              <a:t>14</a:t>
             </a:fld>
             <a:endParaRPr lang="en-US"/>
           </a:p>
@@ -1482,7 +1571,7 @@
           <a:p>
             <a:r>
               <a:rPr lang="en-US" dirty="0"/>
-              <a:t>세션 3의 '커널은 비동기'와 직접 연결. 동기화 없이는 커널 오류를 잡을 수 없다는 점이 핵심.</a:t>
+              <a:t>이 저장소가 쓰는 atomicAdd와 대안인 트리 리덕션 대조. 오류가 드물면 atomic, 대량 집계면 reduction.</a:t>
             </a:r>
             <a:endParaRPr lang="en-US" dirty="0"/>
           </a:p>
@@ -1570,7 +1659,7 @@
           <a:p>
             <a:r>
               <a:rPr lang="en-US" dirty="0"/>
-              <a:t>CUERR은 동기 API 호출용, SYNC_CUERR_KERNEL은 커널 실행용. 둘 다 실패 시 위치를 찍고 종료.</a:t>
+              <a:t>세션 3의 '커널은 비동기'와 직접 연결. 동기화 없이는 커널 오류를 잡을 수 없다는 점이 핵심.</a:t>
             </a:r>
             <a:endParaRPr lang="en-US" dirty="0"/>
           </a:p>
@@ -2280,7 +2369,7 @@
                 <a:ea typeface="Courier New" pitchFamily="34" charset="-122"/>
                 <a:cs typeface="Courier New" pitchFamily="34" charset="-120"/>
               </a:rPr>
-              <a:t>8</a:t>
+              <a:t>7</a:t>
             </a:r>
             <a:endParaRPr lang="en-US" sz="2200" dirty="0"/>
           </a:p>
@@ -2319,7 +2408,7 @@
                 <a:ea typeface="Malgun Gothic" pitchFamily="34" charset="-122"/>
                 <a:cs typeface="Malgun Gothic" pitchFamily="34" charset="-120"/>
               </a:rPr>
-              <a:t>오류를 우아하게 · error_checking</a:t>
+              <a:t>방어적 매크로 · CUERR / SYNC_CUERR_KERNEL</a:t>
             </a:r>
             <a:endParaRPr lang="en-US" sz="3000" dirty="0"/>
           </a:p>
@@ -2327,64 +2416,261 @@
       </p:sp>
       <p:sp>
         <p:nvSpPr>
-          <p:cNvPr id="4" name="Text 2"/>
-          <p:cNvSpPr/>
-          <p:nvPr/>
-        </p:nvSpPr>
-        <p:spPr>
-          <a:xfrm>
-            <a:off x="548640" y="1463040"/>
-            <a:ext cx="11064240" cy="457200"/>
-          </a:xfrm>
-          <a:prstGeom prst="rect">
-            <a:avLst/>
-          </a:prstGeom>
-          <a:noFill/>
-          <a:ln/>
-        </p:spPr>
-        <p:txBody>
-          <a:bodyPr wrap="square" lIns="0" tIns="0" rIns="0" bIns="0" rtlCol="0" anchor="ctr"/>
-          <a:lstStyle/>
-          <a:p>
-            <a:pPr indent="0" marL="0">
-              <a:buNone/>
-            </a:pPr>
-            <a:r>
-              <a:rPr lang="en-US" sz="1600" dirty="0">
-                <a:solidFill>
-                  <a:srgbClr val="9AA6B2"/>
-                </a:solidFill>
-                <a:latin typeface="Malgun Gothic" pitchFamily="34" charset="0"/>
-                <a:ea typeface="Malgun Gothic" pitchFamily="34" charset="-122"/>
-                <a:cs typeface="Malgun Gothic" pitchFamily="34" charset="-120"/>
-              </a:rPr>
-              <a:t>오류가 발견되면 단순히 종료하지 않고, 정보를 기록하고 상태를 정리합니다.</a:t>
-            </a:r>
-            <a:endParaRPr lang="en-US" sz="1600" dirty="0"/>
-          </a:p>
-        </p:txBody>
-      </p:sp>
-      <p:sp>
-        <p:nvSpPr>
-          <p:cNvPr id="5" name="Shape 3"/>
-          <p:cNvSpPr/>
-          <p:nvPr/>
-        </p:nvSpPr>
-        <p:spPr>
-          <a:xfrm>
-            <a:off x="548640" y="2103120"/>
-            <a:ext cx="11064240" cy="868680"/>
+          <p:cNvPr id="4" name="Shape 2"/>
+          <p:cNvSpPr/>
+          <p:nvPr/>
+        </p:nvSpPr>
+        <p:spPr>
+          <a:xfrm>
+            <a:off x="548640" y="1554480"/>
+            <a:ext cx="11064240" cy="3291840"/>
           </a:xfrm>
           <a:prstGeom prst="roundRect">
             <a:avLst>
-              <a:gd name="adj" fmla="val 7368"/>
+              <a:gd name="adj" fmla="val 1667"/>
             </a:avLst>
           </a:prstGeom>
           <a:solidFill>
-            <a:srgbClr val="1E232C"/>
+            <a:srgbClr val="0E1116"/>
           </a:solidFill>
-          <a:ln/>
-        </p:spPr>
+          <a:ln w="12700">
+            <a:solidFill>
+              <a:srgbClr val="2C3440"/>
+            </a:solidFill>
+            <a:prstDash val="solid"/>
+          </a:ln>
+        </p:spPr>
+      </p:sp>
+      <p:sp>
+        <p:nvSpPr>
+          <p:cNvPr id="5" name="Text 3"/>
+          <p:cNvSpPr/>
+          <p:nvPr/>
+        </p:nvSpPr>
+        <p:spPr>
+          <a:xfrm>
+            <a:off x="749808" y="1700784"/>
+            <a:ext cx="10661904" cy="2999232"/>
+          </a:xfrm>
+          <a:prstGeom prst="rect">
+            <a:avLst/>
+          </a:prstGeom>
+          <a:noFill/>
+          <a:ln/>
+        </p:spPr>
+        <p:txBody>
+          <a:bodyPr wrap="square" lIns="0" tIns="0" rIns="0" bIns="0" rtlCol="0" anchor="t"/>
+          <a:lstStyle/>
+          <a:p>
+            <a:pPr algn="l" indent="0" marL="0">
+              <a:lnSpc>
+                <a:spcPct val="108000"/>
+              </a:lnSpc>
+              <a:buNone/>
+            </a:pPr>
+            <a:r>
+              <a:rPr lang="en-US" sz="1250" dirty="0">
+                <a:solidFill>
+                  <a:srgbClr val="9AA6B2"/>
+                </a:solidFill>
+                <a:latin typeface="Courier New" pitchFamily="34" charset="0"/>
+                <a:ea typeface="Courier New" pitchFamily="34" charset="-122"/>
+                <a:cs typeface="Courier New" pitchFamily="34" charset="-120"/>
+              </a:rPr>
+              <a:t>// CUERR — 모든 CUDA 호출을 감싼다   cuda_memtest.h:132</a:t>
+            </a:r>
+            <a:endParaRPr lang="en-US" sz="1250" dirty="0"/>
+          </a:p>
+          <a:p>
+            <a:pPr algn="l" indent="0" marL="0">
+              <a:lnSpc>
+                <a:spcPct val="108000"/>
+              </a:lnSpc>
+              <a:buNone/>
+            </a:pPr>
+            <a:r>
+              <a:rPr lang="en-US" sz="1250" dirty="0">
+                <a:solidFill>
+                  <a:srgbClr val="E8EDF2"/>
+                </a:solidFill>
+                <a:latin typeface="Courier New" pitchFamily="34" charset="0"/>
+                <a:ea typeface="Courier New" pitchFamily="34" charset="-122"/>
+                <a:cs typeface="Courier New" pitchFamily="34" charset="-120"/>
+              </a:rPr>
+              <a:t>#define CUERR(...) do{ apiError_t e;                             \</a:t>
+            </a:r>
+            <a:endParaRPr lang="en-US" sz="1250" dirty="0"/>
+          </a:p>
+          <a:p>
+            <a:pPr algn="l" indent="0" marL="0">
+              <a:lnSpc>
+                <a:spcPct val="108000"/>
+              </a:lnSpc>
+              <a:buNone/>
+            </a:pPr>
+            <a:r>
+              <a:rPr lang="en-US" sz="1250" dirty="0">
+                <a:solidFill>
+                  <a:srgbClr val="8CC63F"/>
+                </a:solidFill>
+                <a:latin typeface="Courier New" pitchFamily="34" charset="0"/>
+                <a:ea typeface="Courier New" pitchFamily="34" charset="-122"/>
+                <a:cs typeface="Courier New" pitchFamily="34" charset="-120"/>
+              </a:rPr>
+              <a:t>    if ((e = __VA_ARGS__) != cudaSuccess) {                     \</a:t>
+            </a:r>
+            <a:endParaRPr lang="en-US" sz="1250" dirty="0"/>
+          </a:p>
+          <a:p>
+            <a:pPr algn="l" indent="0" marL="0">
+              <a:lnSpc>
+                <a:spcPct val="108000"/>
+              </a:lnSpc>
+              <a:buNone/>
+            </a:pPr>
+            <a:r>
+              <a:rPr lang="en-US" sz="1250" dirty="0">
+                <a:solidFill>
+                  <a:srgbClr val="E8EDF2"/>
+                </a:solidFill>
+                <a:latin typeface="Courier New" pitchFamily="34" charset="0"/>
+                <a:ea typeface="Courier New" pitchFamily="34" charset="-122"/>
+                <a:cs typeface="Courier New" pitchFamily="34" charset="-120"/>
+              </a:rPr>
+              <a:t>        FPRINTF("ERROR: CUDA error: %s, line %d, file %s\n",     \</a:t>
+            </a:r>
+            <a:endParaRPr lang="en-US" sz="1250" dirty="0"/>
+          </a:p>
+          <a:p>
+            <a:pPr algn="l" indent="0" marL="0">
+              <a:lnSpc>
+                <a:spcPct val="108000"/>
+              </a:lnSpc>
+              <a:buNone/>
+            </a:pPr>
+            <a:r>
+              <a:rPr lang="en-US" sz="1250" dirty="0">
+                <a:solidFill>
+                  <a:srgbClr val="4FB0C6"/>
+                </a:solidFill>
+                <a:latin typeface="Courier New" pitchFamily="34" charset="0"/>
+                <a:ea typeface="Courier New" pitchFamily="34" charset="-122"/>
+                <a:cs typeface="Courier New" pitchFamily="34" charset="-120"/>
+              </a:rPr>
+              <a:t>                cudaGetErrorString(e), __LINE__, __FILE__);     \</a:t>
+            </a:r>
+            <a:endParaRPr lang="en-US" sz="1250" dirty="0"/>
+          </a:p>
+          <a:p>
+            <a:pPr algn="l" indent="0" marL="0">
+              <a:lnSpc>
+                <a:spcPct val="108000"/>
+              </a:lnSpc>
+              <a:buNone/>
+            </a:pPr>
+            <a:r>
+              <a:rPr lang="en-US" sz="1250" dirty="0">
+                <a:solidFill>
+                  <a:srgbClr val="E8EDF2"/>
+                </a:solidFill>
+                <a:latin typeface="Courier New" pitchFamily="34" charset="0"/>
+                <a:ea typeface="Courier New" pitchFamily="34" charset="-122"/>
+                <a:cs typeface="Courier New" pitchFamily="34" charset="-120"/>
+              </a:rPr>
+              <a:t>        exit(e); }}while(0)</a:t>
+            </a:r>
+            <a:endParaRPr lang="en-US" sz="1250" dirty="0"/>
+          </a:p>
+          <a:p>
+            <a:pPr algn="l" indent="0" marL="0">
+              <a:lnSpc>
+                <a:spcPct val="108000"/>
+              </a:lnSpc>
+              <a:buNone/>
+            </a:pPr>
+            <a:endParaRPr lang="en-US" sz="1250" dirty="0"/>
+          </a:p>
+          <a:p>
+            <a:pPr algn="l" indent="0" marL="0">
+              <a:lnSpc>
+                <a:spcPct val="108000"/>
+              </a:lnSpc>
+              <a:buNone/>
+            </a:pPr>
+            <a:r>
+              <a:rPr lang="en-US" sz="1250" dirty="0">
+                <a:solidFill>
+                  <a:srgbClr val="9AA6B2"/>
+                </a:solidFill>
+                <a:latin typeface="Courier New" pitchFamily="34" charset="0"/>
+                <a:ea typeface="Courier New" pitchFamily="34" charset="-122"/>
+                <a:cs typeface="Courier New" pitchFamily="34" charset="-120"/>
+              </a:rPr>
+              <a:t>// SYNC_CUERR_KERNEL — 커널 실행 + 동기화 + 검사   cuda_memtest.h:138</a:t>
+            </a:r>
+            <a:endParaRPr lang="en-US" sz="1250" dirty="0"/>
+          </a:p>
+          <a:p>
+            <a:pPr algn="l" indent="0" marL="0">
+              <a:lnSpc>
+                <a:spcPct val="108000"/>
+              </a:lnSpc>
+              <a:buNone/>
+            </a:pPr>
+            <a:r>
+              <a:rPr lang="en-US" sz="1250" dirty="0">
+                <a:solidFill>
+                  <a:srgbClr val="8CC63F"/>
+                </a:solidFill>
+                <a:latin typeface="Courier New" pitchFamily="34" charset="0"/>
+                <a:ea typeface="Courier New" pitchFamily="34" charset="-122"/>
+                <a:cs typeface="Courier New" pitchFamily="34" charset="-120"/>
+              </a:rPr>
+              <a:t>#define SYNC_CUERR_KERNEL(...) do{ __VA_ARGS__;                  \</a:t>
+            </a:r>
+            <a:endParaRPr lang="en-US" sz="1250" dirty="0"/>
+          </a:p>
+          <a:p>
+            <a:pPr algn="l" indent="0" marL="0">
+              <a:lnSpc>
+                <a:spcPct val="108000"/>
+              </a:lnSpc>
+              <a:buNone/>
+            </a:pPr>
+            <a:r>
+              <a:rPr lang="en-US" sz="1250" dirty="0">
+                <a:solidFill>
+                  <a:srgbClr val="E0A458"/>
+                </a:solidFill>
+                <a:latin typeface="Courier New" pitchFamily="34" charset="0"/>
+                <a:ea typeface="Courier New" pitchFamily="34" charset="-122"/>
+                <a:cs typeface="Courier New" pitchFamily="34" charset="-120"/>
+              </a:rPr>
+              <a:t>    e = cudaDeviceSynchronize();  /* GPU 완료 대기 후 검사 */      \</a:t>
+            </a:r>
+            <a:endParaRPr lang="en-US" sz="1250" dirty="0"/>
+          </a:p>
+          <a:p>
+            <a:pPr algn="l" indent="0" marL="0">
+              <a:lnSpc>
+                <a:spcPct val="108000"/>
+              </a:lnSpc>
+              <a:buNone/>
+            </a:pPr>
+            <a:r>
+              <a:rPr lang="en-US" sz="1250" dirty="0">
+                <a:solidFill>
+                  <a:srgbClr val="E8EDF2"/>
+                </a:solidFill>
+                <a:latin typeface="Courier New" pitchFamily="34" charset="0"/>
+                <a:ea typeface="Courier New" pitchFamily="34" charset="-122"/>
+                <a:cs typeface="Courier New" pitchFamily="34" charset="-120"/>
+              </a:rPr>
+              <a:t>    if (e != cudaSuccess){ ... exit(e); } }while(0)</a:t>
+            </a:r>
+            <a:endParaRPr lang="en-US" sz="1250" dirty="0"/>
+          </a:p>
+        </p:txBody>
       </p:sp>
       <p:sp>
         <p:nvSpPr>
@@ -2394,24 +2680,24 @@
         </p:nvSpPr>
         <p:spPr>
           <a:xfrm>
-            <a:off x="822960" y="2212848"/>
-            <a:ext cx="3108960" cy="640080"/>
-          </a:xfrm>
-          <a:prstGeom prst="rect">
-            <a:avLst/>
-          </a:prstGeom>
-          <a:noFill/>
-          <a:ln/>
-        </p:spPr>
-        <p:txBody>
-          <a:bodyPr wrap="square" lIns="0" tIns="0" rIns="0" bIns="0" rtlCol="0" anchor="ctr"/>
+            <a:off x="548640" y="4983480"/>
+            <a:ext cx="11064240" cy="822960"/>
+          </a:xfrm>
+          <a:prstGeom prst="rect">
+            <a:avLst/>
+          </a:prstGeom>
+          <a:noFill/>
+          <a:ln/>
+        </p:spPr>
+        <p:txBody>
+          <a:bodyPr wrap="square" lIns="0" tIns="0" rIns="0" bIns="0" rtlCol="0" anchor="t"/>
           <a:lstStyle/>
           <a:p>
             <a:pPr indent="0" marL="0">
               <a:buNone/>
             </a:pPr>
             <a:r>
-              <a:rPr lang="en-US" sz="1700" b="1" dirty="0">
+              <a:rPr lang="en-US" sz="1600" b="1" dirty="0">
                 <a:solidFill>
                   <a:srgbClr val="4FB0C6"/>
                 </a:solidFill>
@@ -2419,38 +2705,13 @@
                 <a:ea typeface="Malgun Gothic" pitchFamily="34" charset="-122"/>
                 <a:cs typeface="Malgun Gothic" pitchFamily="34" charset="-120"/>
               </a:rPr>
-              <a:t>오류 정보 복사</a:t>
-            </a:r>
-            <a:endParaRPr lang="en-US" sz="1700" dirty="0"/>
-          </a:p>
-        </p:txBody>
-      </p:sp>
-      <p:sp>
-        <p:nvSpPr>
-          <p:cNvPr id="7" name="Text 5"/>
-          <p:cNvSpPr/>
-          <p:nvPr/>
-        </p:nvSpPr>
-        <p:spPr>
-          <a:xfrm>
-            <a:off x="4114800" y="2212848"/>
-            <a:ext cx="7223760" cy="640080"/>
-          </a:xfrm>
-          <a:prstGeom prst="rect">
-            <a:avLst/>
-          </a:prstGeom>
-          <a:noFill/>
-          <a:ln/>
-        </p:spPr>
-        <p:txBody>
-          <a:bodyPr wrap="square" lIns="0" tIns="0" rIns="0" bIns="0" rtlCol="0" anchor="ctr"/>
-          <a:lstStyle/>
-          <a:p>
+              <a:t>__FILE__ · __LINE__</a:t>
+            </a:r>
             <a:pPr indent="0" marL="0">
               <a:buNone/>
             </a:pPr>
             <a:r>
-              <a:rPr lang="en-US" sz="1500" dirty="0">
+              <a:rPr lang="en-US" sz="1600" dirty="0">
                 <a:solidFill>
                   <a:srgbClr val="E8EDF2"/>
                 </a:solidFill>
@@ -2458,348 +2719,9 @@
                 <a:ea typeface="Malgun Gothic" pitchFamily="34" charset="-122"/>
                 <a:cs typeface="Malgun Gothic" pitchFamily="34" charset="-120"/>
               </a:rPr>
-              <a:t>cudaMemcpy로 err_count·주소·값을 CPU로 (tests.cpp:117)</a:t>
-            </a:r>
-            <a:endParaRPr lang="en-US" sz="1500" dirty="0"/>
-          </a:p>
-        </p:txBody>
-      </p:sp>
-      <p:sp>
-        <p:nvSpPr>
-          <p:cNvPr id="8" name="Shape 6"/>
-          <p:cNvSpPr/>
-          <p:nvPr/>
-        </p:nvSpPr>
-        <p:spPr>
-          <a:xfrm>
-            <a:off x="548640" y="3099816"/>
-            <a:ext cx="11064240" cy="868680"/>
-          </a:xfrm>
-          <a:prstGeom prst="roundRect">
-            <a:avLst>
-              <a:gd name="adj" fmla="val 7368"/>
-            </a:avLst>
-          </a:prstGeom>
-          <a:solidFill>
-            <a:srgbClr val="1E232C"/>
-          </a:solidFill>
-          <a:ln/>
-        </p:spPr>
-      </p:sp>
-      <p:sp>
-        <p:nvSpPr>
-          <p:cNvPr id="9" name="Text 7"/>
-          <p:cNvSpPr/>
-          <p:nvPr/>
-        </p:nvSpPr>
-        <p:spPr>
-          <a:xfrm>
-            <a:off x="822960" y="3209544"/>
-            <a:ext cx="3108960" cy="640080"/>
-          </a:xfrm>
-          <a:prstGeom prst="rect">
-            <a:avLst/>
-          </a:prstGeom>
-          <a:noFill/>
-          <a:ln/>
-        </p:spPr>
-        <p:txBody>
-          <a:bodyPr wrap="square" lIns="0" tIns="0" rIns="0" bIns="0" rtlCol="0" anchor="ctr"/>
-          <a:lstStyle/>
-          <a:p>
-            <a:pPr indent="0" marL="0">
-              <a:buNone/>
-            </a:pPr>
-            <a:r>
-              <a:rPr lang="en-US" sz="1700" b="1" dirty="0">
-                <a:solidFill>
-                  <a:srgbClr val="8CC63F"/>
-                </a:solidFill>
-                <a:latin typeface="Malgun Gothic" pitchFamily="34" charset="0"/>
-                <a:ea typeface="Malgun Gothic" pitchFamily="34" charset="-122"/>
-                <a:cs typeface="Malgun Gothic" pitchFamily="34" charset="-120"/>
-              </a:rPr>
-              <a:t>보고 &amp; 로그</a:t>
-            </a:r>
-            <a:endParaRPr lang="en-US" sz="1700" dirty="0"/>
-          </a:p>
-        </p:txBody>
-      </p:sp>
-      <p:sp>
-        <p:nvSpPr>
-          <p:cNvPr id="10" name="Text 8"/>
-          <p:cNvSpPr/>
-          <p:nvPr/>
-        </p:nvSpPr>
-        <p:spPr>
-          <a:xfrm>
-            <a:off x="4114800" y="3209544"/>
-            <a:ext cx="7223760" cy="640080"/>
-          </a:xfrm>
-          <a:prstGeom prst="rect">
-            <a:avLst/>
-          </a:prstGeom>
-          <a:noFill/>
-          <a:ln/>
-        </p:spPr>
-        <p:txBody>
-          <a:bodyPr wrap="square" lIns="0" tIns="0" rIns="0" bIns="0" rtlCol="0" anchor="ctr"/>
-          <a:lstStyle/>
-          <a:p>
-            <a:pPr indent="0" marL="0">
-              <a:buNone/>
-            </a:pPr>
-            <a:r>
-              <a:rPr lang="en-US" sz="1500" dirty="0">
-                <a:solidFill>
-                  <a:srgbClr val="E8EDF2"/>
-                </a:solidFill>
-                <a:latin typeface="Malgun Gothic" pitchFamily="34" charset="0"/>
-                <a:ea typeface="Malgun Gothic" pitchFamily="34" charset="-122"/>
-                <a:cs typeface="Malgun Gothic" pitchFamily="34" charset="-120"/>
-              </a:rPr>
-              <a:t>오류 주소·기대값·실제값·diff 출력, 필요시 이메일 알림</a:t>
-            </a:r>
-            <a:endParaRPr lang="en-US" sz="1500" dirty="0"/>
-          </a:p>
-        </p:txBody>
-      </p:sp>
-      <p:sp>
-        <p:nvSpPr>
-          <p:cNvPr id="11" name="Shape 9"/>
-          <p:cNvSpPr/>
-          <p:nvPr/>
-        </p:nvSpPr>
-        <p:spPr>
-          <a:xfrm>
-            <a:off x="548640" y="4096512"/>
-            <a:ext cx="11064240" cy="868680"/>
-          </a:xfrm>
-          <a:prstGeom prst="roundRect">
-            <a:avLst>
-              <a:gd name="adj" fmla="val 7368"/>
-            </a:avLst>
-          </a:prstGeom>
-          <a:solidFill>
-            <a:srgbClr val="1E232C"/>
-          </a:solidFill>
-          <a:ln/>
-        </p:spPr>
-      </p:sp>
-      <p:sp>
-        <p:nvSpPr>
-          <p:cNvPr id="12" name="Text 10"/>
-          <p:cNvSpPr/>
-          <p:nvPr/>
-        </p:nvSpPr>
-        <p:spPr>
-          <a:xfrm>
-            <a:off x="822960" y="4206240"/>
-            <a:ext cx="3108960" cy="640080"/>
-          </a:xfrm>
-          <a:prstGeom prst="rect">
-            <a:avLst/>
-          </a:prstGeom>
-          <a:noFill/>
-          <a:ln/>
-        </p:spPr>
-        <p:txBody>
-          <a:bodyPr wrap="square" lIns="0" tIns="0" rIns="0" bIns="0" rtlCol="0" anchor="ctr"/>
-          <a:lstStyle/>
-          <a:p>
-            <a:pPr indent="0" marL="0">
-              <a:buNone/>
-            </a:pPr>
-            <a:r>
-              <a:rPr lang="en-US" sz="1700" b="1" dirty="0">
-                <a:solidFill>
-                  <a:srgbClr val="E0A458"/>
-                </a:solidFill>
-                <a:latin typeface="Malgun Gothic" pitchFamily="34" charset="0"/>
-                <a:ea typeface="Malgun Gothic" pitchFamily="34" charset="-122"/>
-                <a:cs typeface="Malgun Gothic" pitchFamily="34" charset="-120"/>
-              </a:rPr>
-              <a:t>카운터 재초기화</a:t>
-            </a:r>
-            <a:endParaRPr lang="en-US" sz="1700" dirty="0"/>
-          </a:p>
-        </p:txBody>
-      </p:sp>
-      <p:sp>
-        <p:nvSpPr>
-          <p:cNvPr id="13" name="Text 11"/>
-          <p:cNvSpPr/>
-          <p:nvPr/>
-        </p:nvSpPr>
-        <p:spPr>
-          <a:xfrm>
-            <a:off x="4114800" y="4206240"/>
-            <a:ext cx="7223760" cy="640080"/>
-          </a:xfrm>
-          <a:prstGeom prst="rect">
-            <a:avLst/>
-          </a:prstGeom>
-          <a:noFill/>
-          <a:ln/>
-        </p:spPr>
-        <p:txBody>
-          <a:bodyPr wrap="square" lIns="0" tIns="0" rIns="0" bIns="0" rtlCol="0" anchor="ctr"/>
-          <a:lstStyle/>
-          <a:p>
-            <a:pPr indent="0" marL="0">
-              <a:buNone/>
-            </a:pPr>
-            <a:r>
-              <a:rPr lang="en-US" sz="1500" dirty="0">
-                <a:solidFill>
-                  <a:srgbClr val="E8EDF2"/>
-                </a:solidFill>
-                <a:latin typeface="Malgun Gothic" pitchFamily="34" charset="0"/>
-                <a:ea typeface="Malgun Gothic" pitchFamily="34" charset="-122"/>
-                <a:cs typeface="Malgun Gothic" pitchFamily="34" charset="-120"/>
-              </a:rPr>
-              <a:t>cudaMemset으로 err_count 등을 0으로 (다음 검사 준비)</a:t>
-            </a:r>
-            <a:endParaRPr lang="en-US" sz="1500" dirty="0"/>
-          </a:p>
-        </p:txBody>
-      </p:sp>
-      <p:sp>
-        <p:nvSpPr>
-          <p:cNvPr id="14" name="Shape 12"/>
-          <p:cNvSpPr/>
-          <p:nvPr/>
-        </p:nvSpPr>
-        <p:spPr>
-          <a:xfrm>
-            <a:off x="548640" y="5093208"/>
-            <a:ext cx="11064240" cy="868680"/>
-          </a:xfrm>
-          <a:prstGeom prst="roundRect">
-            <a:avLst>
-              <a:gd name="adj" fmla="val 7368"/>
-            </a:avLst>
-          </a:prstGeom>
-          <a:solidFill>
-            <a:srgbClr val="1E232C"/>
-          </a:solidFill>
-          <a:ln/>
-        </p:spPr>
-      </p:sp>
-      <p:sp>
-        <p:nvSpPr>
-          <p:cNvPr id="15" name="Text 13"/>
-          <p:cNvSpPr/>
-          <p:nvPr/>
-        </p:nvSpPr>
-        <p:spPr>
-          <a:xfrm>
-            <a:off x="822960" y="5202936"/>
-            <a:ext cx="3108960" cy="640080"/>
-          </a:xfrm>
-          <a:prstGeom prst="rect">
-            <a:avLst/>
-          </a:prstGeom>
-          <a:noFill/>
-          <a:ln/>
-        </p:spPr>
-        <p:txBody>
-          <a:bodyPr wrap="square" lIns="0" tIns="0" rIns="0" bIns="0" rtlCol="0" anchor="ctr"/>
-          <a:lstStyle/>
-          <a:p>
-            <a:pPr indent="0" marL="0">
-              <a:buNone/>
-            </a:pPr>
-            <a:r>
-              <a:rPr lang="en-US" sz="1700" b="1" dirty="0">
-                <a:solidFill>
-                  <a:srgbClr val="E0645B"/>
-                </a:solidFill>
-                <a:latin typeface="Malgun Gothic" pitchFamily="34" charset="0"/>
-                <a:ea typeface="Malgun Gothic" pitchFamily="34" charset="-122"/>
-                <a:cs typeface="Malgun Gothic" pitchFamily="34" charset="-120"/>
-              </a:rPr>
-              <a:t>필요시 안전 종료</a:t>
-            </a:r>
-            <a:endParaRPr lang="en-US" sz="1700" dirty="0"/>
-          </a:p>
-        </p:txBody>
-      </p:sp>
-      <p:sp>
-        <p:nvSpPr>
-          <p:cNvPr id="16" name="Text 14"/>
-          <p:cNvSpPr/>
-          <p:nvPr/>
-        </p:nvSpPr>
-        <p:spPr>
-          <a:xfrm>
-            <a:off x="4114800" y="5202936"/>
-            <a:ext cx="7223760" cy="640080"/>
-          </a:xfrm>
-          <a:prstGeom prst="rect">
-            <a:avLst/>
-          </a:prstGeom>
-          <a:noFill/>
-          <a:ln/>
-        </p:spPr>
-        <p:txBody>
-          <a:bodyPr wrap="square" lIns="0" tIns="0" rIns="0" bIns="0" rtlCol="0" anchor="ctr"/>
-          <a:lstStyle/>
-          <a:p>
-            <a:pPr indent="0" marL="0">
-              <a:buNone/>
-            </a:pPr>
-            <a:r>
-              <a:rPr lang="en-US" sz="1500" dirty="0">
-                <a:solidFill>
-                  <a:srgbClr val="E8EDF2"/>
-                </a:solidFill>
-                <a:latin typeface="Malgun Gothic" pitchFamily="34" charset="0"/>
-                <a:ea typeface="Malgun Gothic" pitchFamily="34" charset="-122"/>
-                <a:cs typeface="Malgun Gothic" pitchFamily="34" charset="-120"/>
-              </a:rPr>
-              <a:t>exit_on_error면 cudaDeviceReset 후 종료 (tests.cpp:196)</a:t>
-            </a:r>
-            <a:endParaRPr lang="en-US" sz="1500" dirty="0"/>
-          </a:p>
-        </p:txBody>
-      </p:sp>
-      <p:sp>
-        <p:nvSpPr>
-          <p:cNvPr id="17" name="Text 15"/>
-          <p:cNvSpPr/>
-          <p:nvPr/>
-        </p:nvSpPr>
-        <p:spPr>
-          <a:xfrm>
-            <a:off x="548640" y="6172200"/>
-            <a:ext cx="11064240" cy="365760"/>
-          </a:xfrm>
-          <a:prstGeom prst="rect">
-            <a:avLst/>
-          </a:prstGeom>
-          <a:noFill/>
-          <a:ln/>
-        </p:spPr>
-        <p:txBody>
-          <a:bodyPr wrap="square" lIns="0" tIns="0" rIns="0" bIns="0" rtlCol="0" anchor="ctr"/>
-          <a:lstStyle/>
-          <a:p>
-            <a:pPr indent="0" marL="0">
-              <a:buNone/>
-            </a:pPr>
-            <a:r>
-              <a:rPr lang="en-US" sz="1300" i="1" dirty="0">
-                <a:solidFill>
-                  <a:srgbClr val="9AA6B2"/>
-                </a:solidFill>
-                <a:latin typeface="Malgun Gothic" pitchFamily="34" charset="0"/>
-                <a:ea typeface="Malgun Gothic" pitchFamily="34" charset="-122"/>
-                <a:cs typeface="Malgun Gothic" pitchFamily="34" charset="-120"/>
-              </a:rPr>
-              <a:t>장난감 예제와 프로덕션 코드의 차이 — 오류를 만나도 무너지지 않고 다음 노드·다음 검사를 준비합니다.</a:t>
-            </a:r>
-            <a:endParaRPr lang="en-US" sz="1300" dirty="0"/>
+              <a:t> 덕분에 오류가 '어느 파일 몇 번째 줄'에서 났는지 즉시 압니다. 디버깅의 필수 습관입니다.</a:t>
+            </a:r>
+            <a:endParaRPr lang="en-US" sz="1600" dirty="0"/>
           </a:p>
         </p:txBody>
       </p:sp>
@@ -2872,7 +2794,7 @@
                 <a:ea typeface="Courier New" pitchFamily="34" charset="-122"/>
                 <a:cs typeface="Courier New" pitchFamily="34" charset="-120"/>
               </a:rPr>
-              <a:t>9</a:t>
+              <a:t>8</a:t>
             </a:r>
             <a:endParaRPr lang="en-US" sz="2200" dirty="0"/>
           </a:p>
@@ -2911,7 +2833,7 @@
                 <a:ea typeface="Malgun Gothic" pitchFamily="34" charset="-122"/>
                 <a:cs typeface="Malgun Gothic" pitchFamily="34" charset="-120"/>
               </a:rPr>
-              <a:t>실습 미리보기 · Lab 4</a:t>
+              <a:t>오류를 우아하게 · error_checking</a:t>
             </a:r>
             <a:endParaRPr lang="en-US" sz="3000" dirty="0"/>
           </a:p>
@@ -2919,18 +2841,57 @@
       </p:sp>
       <p:sp>
         <p:nvSpPr>
-          <p:cNvPr id="4" name="Shape 2"/>
-          <p:cNvSpPr/>
-          <p:nvPr/>
-        </p:nvSpPr>
-        <p:spPr>
-          <a:xfrm>
-            <a:off x="548640" y="1554480"/>
-            <a:ext cx="5303520" cy="1965960"/>
+          <p:cNvPr id="4" name="Text 2"/>
+          <p:cNvSpPr/>
+          <p:nvPr/>
+        </p:nvSpPr>
+        <p:spPr>
+          <a:xfrm>
+            <a:off x="548640" y="1463040"/>
+            <a:ext cx="11064240" cy="457200"/>
+          </a:xfrm>
+          <a:prstGeom prst="rect">
+            <a:avLst/>
+          </a:prstGeom>
+          <a:noFill/>
+          <a:ln/>
+        </p:spPr>
+        <p:txBody>
+          <a:bodyPr wrap="square" lIns="0" tIns="0" rIns="0" bIns="0" rtlCol="0" anchor="ctr"/>
+          <a:lstStyle/>
+          <a:p>
+            <a:pPr indent="0" marL="0">
+              <a:buNone/>
+            </a:pPr>
+            <a:r>
+              <a:rPr lang="en-US" sz="1600" dirty="0">
+                <a:solidFill>
+                  <a:srgbClr val="9AA6B2"/>
+                </a:solidFill>
+                <a:latin typeface="Malgun Gothic" pitchFamily="34" charset="0"/>
+                <a:ea typeface="Malgun Gothic" pitchFamily="34" charset="-122"/>
+                <a:cs typeface="Malgun Gothic" pitchFamily="34" charset="-120"/>
+              </a:rPr>
+              <a:t>오류가 발견되면 단순히 종료하지 않고, 정보를 기록하고 상태를 정리합니다.</a:t>
+            </a:r>
+            <a:endParaRPr lang="en-US" sz="1600" dirty="0"/>
+          </a:p>
+        </p:txBody>
+      </p:sp>
+      <p:sp>
+        <p:nvSpPr>
+          <p:cNvPr id="5" name="Shape 3"/>
+          <p:cNvSpPr/>
+          <p:nvPr/>
+        </p:nvSpPr>
+        <p:spPr>
+          <a:xfrm>
+            <a:off x="548640" y="2103120"/>
+            <a:ext cx="11064240" cy="868680"/>
           </a:xfrm>
           <a:prstGeom prst="roundRect">
             <a:avLst>
-              <a:gd name="adj" fmla="val 3721"/>
+              <a:gd name="adj" fmla="val 7368"/>
             </a:avLst>
           </a:prstGeom>
           <a:solidFill>
@@ -2941,142 +2902,96 @@
       </p:sp>
       <p:sp>
         <p:nvSpPr>
-          <p:cNvPr id="5" name="Text 3"/>
-          <p:cNvSpPr/>
-          <p:nvPr/>
-        </p:nvSpPr>
-        <p:spPr>
-          <a:xfrm>
-            <a:off x="804672" y="1755648"/>
-            <a:ext cx="1188720" cy="502920"/>
+          <p:cNvPr id="6" name="Text 4"/>
+          <p:cNvSpPr/>
+          <p:nvPr/>
+        </p:nvSpPr>
+        <p:spPr>
+          <a:xfrm>
+            <a:off x="822960" y="2212848"/>
+            <a:ext cx="3108960" cy="640080"/>
+          </a:xfrm>
+          <a:prstGeom prst="rect">
+            <a:avLst/>
+          </a:prstGeom>
+          <a:noFill/>
+          <a:ln/>
+        </p:spPr>
+        <p:txBody>
+          <a:bodyPr wrap="square" lIns="0" tIns="0" rIns="0" bIns="0" rtlCol="0" anchor="ctr"/>
+          <a:lstStyle/>
+          <a:p>
+            <a:pPr indent="0" marL="0">
+              <a:buNone/>
+            </a:pPr>
+            <a:r>
+              <a:rPr lang="en-US" sz="1700" b="1" dirty="0">
+                <a:solidFill>
+                  <a:srgbClr val="4FB0C6"/>
+                </a:solidFill>
+                <a:latin typeface="Malgun Gothic" pitchFamily="34" charset="0"/>
+                <a:ea typeface="Malgun Gothic" pitchFamily="34" charset="-122"/>
+                <a:cs typeface="Malgun Gothic" pitchFamily="34" charset="-120"/>
+              </a:rPr>
+              <a:t>오류 정보 복사</a:t>
+            </a:r>
+            <a:endParaRPr lang="en-US" sz="1700" dirty="0"/>
+          </a:p>
+        </p:txBody>
+      </p:sp>
+      <p:sp>
+        <p:nvSpPr>
+          <p:cNvPr id="7" name="Text 5"/>
+          <p:cNvSpPr/>
+          <p:nvPr/>
+        </p:nvSpPr>
+        <p:spPr>
+          <a:xfrm>
+            <a:off x="4114800" y="2212848"/>
+            <a:ext cx="7223760" cy="640080"/>
+          </a:xfrm>
+          <a:prstGeom prst="rect">
+            <a:avLst/>
+          </a:prstGeom>
+          <a:noFill/>
+          <a:ln/>
+        </p:spPr>
+        <p:txBody>
+          <a:bodyPr wrap="square" lIns="0" tIns="0" rIns="0" bIns="0" rtlCol="0" anchor="ctr"/>
+          <a:lstStyle/>
+          <a:p>
+            <a:pPr indent="0" marL="0">
+              <a:buNone/>
+            </a:pPr>
+            <a:r>
+              <a:rPr lang="en-US" sz="1500" dirty="0">
+                <a:solidFill>
+                  <a:srgbClr val="E8EDF2"/>
+                </a:solidFill>
+                <a:latin typeface="Malgun Gothic" pitchFamily="34" charset="0"/>
+                <a:ea typeface="Malgun Gothic" pitchFamily="34" charset="-122"/>
+                <a:cs typeface="Malgun Gothic" pitchFamily="34" charset="-120"/>
+              </a:rPr>
+              <a:t>cudaMemcpy로 err_count·주소·값을 CPU로 (tests.cpp:117)</a:t>
+            </a:r>
+            <a:endParaRPr lang="en-US" sz="1500" dirty="0"/>
+          </a:p>
+        </p:txBody>
+      </p:sp>
+      <p:sp>
+        <p:nvSpPr>
+          <p:cNvPr id="8" name="Shape 6"/>
+          <p:cNvSpPr/>
+          <p:nvPr/>
+        </p:nvSpPr>
+        <p:spPr>
+          <a:xfrm>
+            <a:off x="548640" y="3099816"/>
+            <a:ext cx="11064240" cy="868680"/>
           </a:xfrm>
           <a:prstGeom prst="roundRect">
             <a:avLst>
-              <a:gd name="adj" fmla="val 14545"/>
-            </a:avLst>
-          </a:prstGeom>
-          <a:solidFill>
-            <a:srgbClr val="E0645B"/>
-          </a:solidFill>
-          <a:ln/>
-        </p:spPr>
-        <p:txBody>
-          <a:bodyPr wrap="square" rtlCol="0" anchor="ctr"/>
-          <a:lstStyle/>
-          <a:p>
-            <a:pPr algn="ctr" indent="0" marL="0">
-              <a:buNone/>
-            </a:pPr>
-            <a:r>
-              <a:rPr lang="en-US" sz="1700" b="1" dirty="0">
-                <a:solidFill>
-                  <a:srgbClr val="13161C"/>
-                </a:solidFill>
-                <a:latin typeface="Courier New" pitchFamily="34" charset="0"/>
-                <a:ea typeface="Courier New" pitchFamily="34" charset="-122"/>
-                <a:cs typeface="Courier New" pitchFamily="34" charset="-120"/>
-              </a:rPr>
-              <a:t>Ex 1</a:t>
-            </a:r>
-            <a:endParaRPr lang="en-US" sz="1700" dirty="0"/>
-          </a:p>
-        </p:txBody>
-      </p:sp>
-      <p:sp>
-        <p:nvSpPr>
-          <p:cNvPr id="6" name="Text 4"/>
-          <p:cNvSpPr/>
-          <p:nvPr/>
-        </p:nvSpPr>
-        <p:spPr>
-          <a:xfrm>
-            <a:off x="2148840" y="1773936"/>
-            <a:ext cx="3474720" cy="822960"/>
-          </a:xfrm>
-          <a:prstGeom prst="rect">
-            <a:avLst/>
-          </a:prstGeom>
-          <a:noFill/>
-          <a:ln/>
-        </p:spPr>
-        <p:txBody>
-          <a:bodyPr wrap="square" lIns="0" tIns="0" rIns="0" bIns="0" rtlCol="0" anchor="t"/>
-          <a:lstStyle/>
-          <a:p>
-            <a:pPr indent="0" marL="0">
-              <a:buNone/>
-            </a:pPr>
-            <a:r>
-              <a:rPr lang="en-US" sz="1700" b="1" dirty="0">
-                <a:solidFill>
-                  <a:srgbClr val="E8EDF2"/>
-                </a:solidFill>
-                <a:latin typeface="Malgun Gothic" pitchFamily="34" charset="0"/>
-                <a:ea typeface="Malgun Gothic" pitchFamily="34" charset="-122"/>
-                <a:cs typeface="Malgun Gothic" pitchFamily="34" charset="-120"/>
-              </a:rPr>
-              <a:t>경쟁 조건 재현</a:t>
-            </a:r>
-            <a:endParaRPr lang="en-US" sz="1700" dirty="0"/>
-          </a:p>
-        </p:txBody>
-      </p:sp>
-      <p:sp>
-        <p:nvSpPr>
-          <p:cNvPr id="7" name="Text 5"/>
-          <p:cNvSpPr/>
-          <p:nvPr/>
-        </p:nvSpPr>
-        <p:spPr>
-          <a:xfrm>
-            <a:off x="804672" y="2651760"/>
-            <a:ext cx="4791456" cy="731520"/>
-          </a:xfrm>
-          <a:prstGeom prst="rect">
-            <a:avLst/>
-          </a:prstGeom>
-          <a:noFill/>
-          <a:ln/>
-        </p:spPr>
-        <p:txBody>
-          <a:bodyPr wrap="square" lIns="0" tIns="0" rIns="0" bIns="0" rtlCol="0" anchor="t"/>
-          <a:lstStyle/>
-          <a:p>
-            <a:pPr indent="0" marL="0">
-              <a:lnSpc>
-                <a:spcPct val="110000"/>
-              </a:lnSpc>
-              <a:buNone/>
-            </a:pPr>
-            <a:r>
-              <a:rPr lang="en-US" sz="1400" dirty="0">
-                <a:solidFill>
-                  <a:srgbClr val="9AA6B2"/>
-                </a:solidFill>
-                <a:latin typeface="Malgun Gothic" pitchFamily="34" charset="0"/>
-                <a:ea typeface="Malgun Gothic" pitchFamily="34" charset="-122"/>
-                <a:cs typeface="Malgun Gothic" pitchFamily="34" charset="-120"/>
-              </a:rPr>
-              <a:t>atomicAdd를 일반 덧셈으로 바꿔 카운트가 틀어짐 확인</a:t>
-            </a:r>
-            <a:endParaRPr lang="en-US" sz="1400" dirty="0"/>
-          </a:p>
-        </p:txBody>
-      </p:sp>
-      <p:sp>
-        <p:nvSpPr>
-          <p:cNvPr id="8" name="Shape 6"/>
-          <p:cNvSpPr/>
-          <p:nvPr/>
-        </p:nvSpPr>
-        <p:spPr>
-          <a:xfrm>
-            <a:off x="6309360" y="1554480"/>
-            <a:ext cx="5303520" cy="1965960"/>
-          </a:xfrm>
-          <a:prstGeom prst="roundRect">
-            <a:avLst>
-              <a:gd name="adj" fmla="val 3721"/>
+              <a:gd name="adj" fmla="val 7368"/>
             </a:avLst>
           </a:prstGeom>
           <a:solidFill>
@@ -3093,136 +3008,90 @@
         </p:nvSpPr>
         <p:spPr>
           <a:xfrm>
-            <a:off x="6565392" y="1755648"/>
-            <a:ext cx="1188720" cy="502920"/>
+            <a:off x="822960" y="3209544"/>
+            <a:ext cx="3108960" cy="640080"/>
+          </a:xfrm>
+          <a:prstGeom prst="rect">
+            <a:avLst/>
+          </a:prstGeom>
+          <a:noFill/>
+          <a:ln/>
+        </p:spPr>
+        <p:txBody>
+          <a:bodyPr wrap="square" lIns="0" tIns="0" rIns="0" bIns="0" rtlCol="0" anchor="ctr"/>
+          <a:lstStyle/>
+          <a:p>
+            <a:pPr indent="0" marL="0">
+              <a:buNone/>
+            </a:pPr>
+            <a:r>
+              <a:rPr lang="en-US" sz="1700" b="1" dirty="0">
+                <a:solidFill>
+                  <a:srgbClr val="8CC63F"/>
+                </a:solidFill>
+                <a:latin typeface="Malgun Gothic" pitchFamily="34" charset="0"/>
+                <a:ea typeface="Malgun Gothic" pitchFamily="34" charset="-122"/>
+                <a:cs typeface="Malgun Gothic" pitchFamily="34" charset="-120"/>
+              </a:rPr>
+              <a:t>보고 &amp; 로그</a:t>
+            </a:r>
+            <a:endParaRPr lang="en-US" sz="1700" dirty="0"/>
+          </a:p>
+        </p:txBody>
+      </p:sp>
+      <p:sp>
+        <p:nvSpPr>
+          <p:cNvPr id="10" name="Text 8"/>
+          <p:cNvSpPr/>
+          <p:nvPr/>
+        </p:nvSpPr>
+        <p:spPr>
+          <a:xfrm>
+            <a:off x="4114800" y="3209544"/>
+            <a:ext cx="7223760" cy="640080"/>
+          </a:xfrm>
+          <a:prstGeom prst="rect">
+            <a:avLst/>
+          </a:prstGeom>
+          <a:noFill/>
+          <a:ln/>
+        </p:spPr>
+        <p:txBody>
+          <a:bodyPr wrap="square" lIns="0" tIns="0" rIns="0" bIns="0" rtlCol="0" anchor="ctr"/>
+          <a:lstStyle/>
+          <a:p>
+            <a:pPr indent="0" marL="0">
+              <a:buNone/>
+            </a:pPr>
+            <a:r>
+              <a:rPr lang="en-US" sz="1500" dirty="0">
+                <a:solidFill>
+                  <a:srgbClr val="E8EDF2"/>
+                </a:solidFill>
+                <a:latin typeface="Malgun Gothic" pitchFamily="34" charset="0"/>
+                <a:ea typeface="Malgun Gothic" pitchFamily="34" charset="-122"/>
+                <a:cs typeface="Malgun Gothic" pitchFamily="34" charset="-120"/>
+              </a:rPr>
+              <a:t>오류 주소·기대값·실제값·diff 출력, 필요시 이메일 알림</a:t>
+            </a:r>
+            <a:endParaRPr lang="en-US" sz="1500" dirty="0"/>
+          </a:p>
+        </p:txBody>
+      </p:sp>
+      <p:sp>
+        <p:nvSpPr>
+          <p:cNvPr id="11" name="Shape 9"/>
+          <p:cNvSpPr/>
+          <p:nvPr/>
+        </p:nvSpPr>
+        <p:spPr>
+          <a:xfrm>
+            <a:off x="548640" y="4096512"/>
+            <a:ext cx="11064240" cy="868680"/>
           </a:xfrm>
           <a:prstGeom prst="roundRect">
             <a:avLst>
-              <a:gd name="adj" fmla="val 14545"/>
-            </a:avLst>
-          </a:prstGeom>
-          <a:solidFill>
-            <a:srgbClr val="4FB0C6"/>
-          </a:solidFill>
-          <a:ln/>
-        </p:spPr>
-        <p:txBody>
-          <a:bodyPr wrap="square" rtlCol="0" anchor="ctr"/>
-          <a:lstStyle/>
-          <a:p>
-            <a:pPr algn="ctr" indent="0" marL="0">
-              <a:buNone/>
-            </a:pPr>
-            <a:r>
-              <a:rPr lang="en-US" sz="1700" b="1" dirty="0">
-                <a:solidFill>
-                  <a:srgbClr val="13161C"/>
-                </a:solidFill>
-                <a:latin typeface="Courier New" pitchFamily="34" charset="0"/>
-                <a:ea typeface="Courier New" pitchFamily="34" charset="-122"/>
-                <a:cs typeface="Courier New" pitchFamily="34" charset="-120"/>
-              </a:rPr>
-              <a:t>Ex 2</a:t>
-            </a:r>
-            <a:endParaRPr lang="en-US" sz="1700" dirty="0"/>
-          </a:p>
-        </p:txBody>
-      </p:sp>
-      <p:sp>
-        <p:nvSpPr>
-          <p:cNvPr id="10" name="Text 8"/>
-          <p:cNvSpPr/>
-          <p:nvPr/>
-        </p:nvSpPr>
-        <p:spPr>
-          <a:xfrm>
-            <a:off x="7909560" y="1773936"/>
-            <a:ext cx="3474720" cy="822960"/>
-          </a:xfrm>
-          <a:prstGeom prst="rect">
-            <a:avLst/>
-          </a:prstGeom>
-          <a:noFill/>
-          <a:ln/>
-        </p:spPr>
-        <p:txBody>
-          <a:bodyPr wrap="square" lIns="0" tIns="0" rIns="0" bIns="0" rtlCol="0" anchor="t"/>
-          <a:lstStyle/>
-          <a:p>
-            <a:pPr indent="0" marL="0">
-              <a:buNone/>
-            </a:pPr>
-            <a:r>
-              <a:rPr lang="en-US" sz="1700" b="1" dirty="0">
-                <a:solidFill>
-                  <a:srgbClr val="E8EDF2"/>
-                </a:solidFill>
-                <a:latin typeface="Malgun Gothic" pitchFamily="34" charset="0"/>
-                <a:ea typeface="Malgun Gothic" pitchFamily="34" charset="-122"/>
-                <a:cs typeface="Malgun Gothic" pitchFamily="34" charset="-120"/>
-              </a:rPr>
-              <a:t>반환값 = 고유 인덱스</a:t>
-            </a:r>
-            <a:endParaRPr lang="en-US" sz="1700" dirty="0"/>
-          </a:p>
-        </p:txBody>
-      </p:sp>
-      <p:sp>
-        <p:nvSpPr>
-          <p:cNvPr id="11" name="Text 9"/>
-          <p:cNvSpPr/>
-          <p:nvPr/>
-        </p:nvSpPr>
-        <p:spPr>
-          <a:xfrm>
-            <a:off x="6565392" y="2651760"/>
-            <a:ext cx="4791456" cy="731520"/>
-          </a:xfrm>
-          <a:prstGeom prst="rect">
-            <a:avLst/>
-          </a:prstGeom>
-          <a:noFill/>
-          <a:ln/>
-        </p:spPr>
-        <p:txBody>
-          <a:bodyPr wrap="square" lIns="0" tIns="0" rIns="0" bIns="0" rtlCol="0" anchor="t"/>
-          <a:lstStyle/>
-          <a:p>
-            <a:pPr indent="0" marL="0">
-              <a:lnSpc>
-                <a:spcPct val="110000"/>
-              </a:lnSpc>
-              <a:buNone/>
-            </a:pPr>
-            <a:r>
-              <a:rPr lang="en-US" sz="1400" dirty="0">
-                <a:solidFill>
-                  <a:srgbClr val="9AA6B2"/>
-                </a:solidFill>
-                <a:latin typeface="Malgun Gothic" pitchFamily="34" charset="0"/>
-                <a:ea typeface="Malgun Gothic" pitchFamily="34" charset="-122"/>
-                <a:cs typeface="Malgun Gothic" pitchFamily="34" charset="-120"/>
-              </a:rPr>
-              <a:t>atomicAdd 반환 idx를 출력해 겹치지 않음 확인</a:t>
-            </a:r>
-            <a:endParaRPr lang="en-US" sz="1400" dirty="0"/>
-          </a:p>
-        </p:txBody>
-      </p:sp>
-      <p:sp>
-        <p:nvSpPr>
-          <p:cNvPr id="12" name="Shape 10"/>
-          <p:cNvSpPr/>
-          <p:nvPr/>
-        </p:nvSpPr>
-        <p:spPr>
-          <a:xfrm>
-            <a:off x="548640" y="3840480"/>
-            <a:ext cx="5303520" cy="1965960"/>
-          </a:xfrm>
-          <a:prstGeom prst="roundRect">
-            <a:avLst>
-              <a:gd name="adj" fmla="val 3721"/>
+              <a:gd name="adj" fmla="val 7368"/>
             </a:avLst>
           </a:prstGeom>
           <a:solidFill>
@@ -3233,142 +3102,96 @@
       </p:sp>
       <p:sp>
         <p:nvSpPr>
+          <p:cNvPr id="12" name="Text 10"/>
+          <p:cNvSpPr/>
+          <p:nvPr/>
+        </p:nvSpPr>
+        <p:spPr>
+          <a:xfrm>
+            <a:off x="822960" y="4206240"/>
+            <a:ext cx="3108960" cy="640080"/>
+          </a:xfrm>
+          <a:prstGeom prst="rect">
+            <a:avLst/>
+          </a:prstGeom>
+          <a:noFill/>
+          <a:ln/>
+        </p:spPr>
+        <p:txBody>
+          <a:bodyPr wrap="square" lIns="0" tIns="0" rIns="0" bIns="0" rtlCol="0" anchor="ctr"/>
+          <a:lstStyle/>
+          <a:p>
+            <a:pPr indent="0" marL="0">
+              <a:buNone/>
+            </a:pPr>
+            <a:r>
+              <a:rPr lang="en-US" sz="1700" b="1" dirty="0">
+                <a:solidFill>
+                  <a:srgbClr val="E0A458"/>
+                </a:solidFill>
+                <a:latin typeface="Malgun Gothic" pitchFamily="34" charset="0"/>
+                <a:ea typeface="Malgun Gothic" pitchFamily="34" charset="-122"/>
+                <a:cs typeface="Malgun Gothic" pitchFamily="34" charset="-120"/>
+              </a:rPr>
+              <a:t>카운터 재초기화</a:t>
+            </a:r>
+            <a:endParaRPr lang="en-US" sz="1700" dirty="0"/>
+          </a:p>
+        </p:txBody>
+      </p:sp>
+      <p:sp>
+        <p:nvSpPr>
           <p:cNvPr id="13" name="Text 11"/>
           <p:cNvSpPr/>
           <p:nvPr/>
         </p:nvSpPr>
         <p:spPr>
           <a:xfrm>
-            <a:off x="804672" y="4041648"/>
-            <a:ext cx="1188720" cy="502920"/>
+            <a:off x="4114800" y="4206240"/>
+            <a:ext cx="7223760" cy="640080"/>
+          </a:xfrm>
+          <a:prstGeom prst="rect">
+            <a:avLst/>
+          </a:prstGeom>
+          <a:noFill/>
+          <a:ln/>
+        </p:spPr>
+        <p:txBody>
+          <a:bodyPr wrap="square" lIns="0" tIns="0" rIns="0" bIns="0" rtlCol="0" anchor="ctr"/>
+          <a:lstStyle/>
+          <a:p>
+            <a:pPr indent="0" marL="0">
+              <a:buNone/>
+            </a:pPr>
+            <a:r>
+              <a:rPr lang="en-US" sz="1500" dirty="0">
+                <a:solidFill>
+                  <a:srgbClr val="E8EDF2"/>
+                </a:solidFill>
+                <a:latin typeface="Malgun Gothic" pitchFamily="34" charset="0"/>
+                <a:ea typeface="Malgun Gothic" pitchFamily="34" charset="-122"/>
+                <a:cs typeface="Malgun Gothic" pitchFamily="34" charset="-120"/>
+              </a:rPr>
+              <a:t>cudaMemset으로 err_count 등을 0으로 (다음 검사 준비)</a:t>
+            </a:r>
+            <a:endParaRPr lang="en-US" sz="1500" dirty="0"/>
+          </a:p>
+        </p:txBody>
+      </p:sp>
+      <p:sp>
+        <p:nvSpPr>
+          <p:cNvPr id="14" name="Shape 12"/>
+          <p:cNvSpPr/>
+          <p:nvPr/>
+        </p:nvSpPr>
+        <p:spPr>
+          <a:xfrm>
+            <a:off x="548640" y="5093208"/>
+            <a:ext cx="11064240" cy="868680"/>
           </a:xfrm>
           <a:prstGeom prst="roundRect">
             <a:avLst>
-              <a:gd name="adj" fmla="val 14545"/>
-            </a:avLst>
-          </a:prstGeom>
-          <a:solidFill>
-            <a:srgbClr val="E0A458"/>
-          </a:solidFill>
-          <a:ln/>
-        </p:spPr>
-        <p:txBody>
-          <a:bodyPr wrap="square" rtlCol="0" anchor="ctr"/>
-          <a:lstStyle/>
-          <a:p>
-            <a:pPr algn="ctr" indent="0" marL="0">
-              <a:buNone/>
-            </a:pPr>
-            <a:r>
-              <a:rPr lang="en-US" sz="1700" b="1" dirty="0">
-                <a:solidFill>
-                  <a:srgbClr val="13161C"/>
-                </a:solidFill>
-                <a:latin typeface="Courier New" pitchFamily="34" charset="0"/>
-                <a:ea typeface="Courier New" pitchFamily="34" charset="-122"/>
-                <a:cs typeface="Courier New" pitchFamily="34" charset="-120"/>
-              </a:rPr>
-              <a:t>Ex 3</a:t>
-            </a:r>
-            <a:endParaRPr lang="en-US" sz="1700" dirty="0"/>
-          </a:p>
-        </p:txBody>
-      </p:sp>
-      <p:sp>
-        <p:nvSpPr>
-          <p:cNvPr id="14" name="Text 12"/>
-          <p:cNvSpPr/>
-          <p:nvPr/>
-        </p:nvSpPr>
-        <p:spPr>
-          <a:xfrm>
-            <a:off x="2148840" y="4059936"/>
-            <a:ext cx="3474720" cy="822960"/>
-          </a:xfrm>
-          <a:prstGeom prst="rect">
-            <a:avLst/>
-          </a:prstGeom>
-          <a:noFill/>
-          <a:ln/>
-        </p:spPr>
-        <p:txBody>
-          <a:bodyPr wrap="square" lIns="0" tIns="0" rIns="0" bIns="0" rtlCol="0" anchor="t"/>
-          <a:lstStyle/>
-          <a:p>
-            <a:pPr indent="0" marL="0">
-              <a:buNone/>
-            </a:pPr>
-            <a:r>
-              <a:rPr lang="en-US" sz="1700" b="1" dirty="0">
-                <a:solidFill>
-                  <a:srgbClr val="E8EDF2"/>
-                </a:solidFill>
-                <a:latin typeface="Malgun Gothic" pitchFamily="34" charset="0"/>
-                <a:ea typeface="Malgun Gothic" pitchFamily="34" charset="-122"/>
-                <a:cs typeface="Malgun Gothic" pitchFamily="34" charset="-120"/>
-              </a:rPr>
-              <a:t>CUERR가 잡는 순간</a:t>
-            </a:r>
-            <a:endParaRPr lang="en-US" sz="1700" dirty="0"/>
-          </a:p>
-        </p:txBody>
-      </p:sp>
-      <p:sp>
-        <p:nvSpPr>
-          <p:cNvPr id="15" name="Text 13"/>
-          <p:cNvSpPr/>
-          <p:nvPr/>
-        </p:nvSpPr>
-        <p:spPr>
-          <a:xfrm>
-            <a:off x="804672" y="4937760"/>
-            <a:ext cx="4791456" cy="731520"/>
-          </a:xfrm>
-          <a:prstGeom prst="rect">
-            <a:avLst/>
-          </a:prstGeom>
-          <a:noFill/>
-          <a:ln/>
-        </p:spPr>
-        <p:txBody>
-          <a:bodyPr wrap="square" lIns="0" tIns="0" rIns="0" bIns="0" rtlCol="0" anchor="t"/>
-          <a:lstStyle/>
-          <a:p>
-            <a:pPr indent="0" marL="0">
-              <a:lnSpc>
-                <a:spcPct val="110000"/>
-              </a:lnSpc>
-              <a:buNone/>
-            </a:pPr>
-            <a:r>
-              <a:rPr lang="en-US" sz="1400" dirty="0">
-                <a:solidFill>
-                  <a:srgbClr val="9AA6B2"/>
-                </a:solidFill>
-                <a:latin typeface="Malgun Gothic" pitchFamily="34" charset="0"/>
-                <a:ea typeface="Malgun Gothic" pitchFamily="34" charset="-122"/>
-                <a:cs typeface="Malgun Gothic" pitchFamily="34" charset="-120"/>
-              </a:rPr>
-              <a:t>cudaMemcpy 크기를 틀리게 해 오류 메시지 유발</a:t>
-            </a:r>
-            <a:endParaRPr lang="en-US" sz="1400" dirty="0"/>
-          </a:p>
-        </p:txBody>
-      </p:sp>
-      <p:sp>
-        <p:nvSpPr>
-          <p:cNvPr id="16" name="Shape 14"/>
-          <p:cNvSpPr/>
-          <p:nvPr/>
-        </p:nvSpPr>
-        <p:spPr>
-          <a:xfrm>
-            <a:off x="6309360" y="3840480"/>
-            <a:ext cx="5303520" cy="1965960"/>
-          </a:xfrm>
-          <a:prstGeom prst="roundRect">
-            <a:avLst>
-              <a:gd name="adj" fmla="val 3721"/>
+              <a:gd name="adj" fmla="val 7368"/>
             </a:avLst>
           </a:prstGeom>
           <a:solidFill>
@@ -3379,115 +3202,108 @@
       </p:sp>
       <p:sp>
         <p:nvSpPr>
+          <p:cNvPr id="15" name="Text 13"/>
+          <p:cNvSpPr/>
+          <p:nvPr/>
+        </p:nvSpPr>
+        <p:spPr>
+          <a:xfrm>
+            <a:off x="822960" y="5202936"/>
+            <a:ext cx="3108960" cy="640080"/>
+          </a:xfrm>
+          <a:prstGeom prst="rect">
+            <a:avLst/>
+          </a:prstGeom>
+          <a:noFill/>
+          <a:ln/>
+        </p:spPr>
+        <p:txBody>
+          <a:bodyPr wrap="square" lIns="0" tIns="0" rIns="0" bIns="0" rtlCol="0" anchor="ctr"/>
+          <a:lstStyle/>
+          <a:p>
+            <a:pPr indent="0" marL="0">
+              <a:buNone/>
+            </a:pPr>
+            <a:r>
+              <a:rPr lang="en-US" sz="1700" b="1" dirty="0">
+                <a:solidFill>
+                  <a:srgbClr val="E0645B"/>
+                </a:solidFill>
+                <a:latin typeface="Malgun Gothic" pitchFamily="34" charset="0"/>
+                <a:ea typeface="Malgun Gothic" pitchFamily="34" charset="-122"/>
+                <a:cs typeface="Malgun Gothic" pitchFamily="34" charset="-120"/>
+              </a:rPr>
+              <a:t>필요시 안전 종료</a:t>
+            </a:r>
+            <a:endParaRPr lang="en-US" sz="1700" dirty="0"/>
+          </a:p>
+        </p:txBody>
+      </p:sp>
+      <p:sp>
+        <p:nvSpPr>
+          <p:cNvPr id="16" name="Text 14"/>
+          <p:cNvSpPr/>
+          <p:nvPr/>
+        </p:nvSpPr>
+        <p:spPr>
+          <a:xfrm>
+            <a:off x="4114800" y="5202936"/>
+            <a:ext cx="7223760" cy="640080"/>
+          </a:xfrm>
+          <a:prstGeom prst="rect">
+            <a:avLst/>
+          </a:prstGeom>
+          <a:noFill/>
+          <a:ln/>
+        </p:spPr>
+        <p:txBody>
+          <a:bodyPr wrap="square" lIns="0" tIns="0" rIns="0" bIns="0" rtlCol="0" anchor="ctr"/>
+          <a:lstStyle/>
+          <a:p>
+            <a:pPr indent="0" marL="0">
+              <a:buNone/>
+            </a:pPr>
+            <a:r>
+              <a:rPr lang="en-US" sz="1500" dirty="0">
+                <a:solidFill>
+                  <a:srgbClr val="E8EDF2"/>
+                </a:solidFill>
+                <a:latin typeface="Malgun Gothic" pitchFamily="34" charset="0"/>
+                <a:ea typeface="Malgun Gothic" pitchFamily="34" charset="-122"/>
+                <a:cs typeface="Malgun Gothic" pitchFamily="34" charset="-120"/>
+              </a:rPr>
+              <a:t>exit_on_error면 cudaDeviceReset 후 종료 (tests.cpp:196)</a:t>
+            </a:r>
+            <a:endParaRPr lang="en-US" sz="1500" dirty="0"/>
+          </a:p>
+        </p:txBody>
+      </p:sp>
+      <p:sp>
+        <p:nvSpPr>
           <p:cNvPr id="17" name="Text 15"/>
           <p:cNvSpPr/>
           <p:nvPr/>
         </p:nvSpPr>
         <p:spPr>
           <a:xfrm>
-            <a:off x="6565392" y="4041648"/>
-            <a:ext cx="1188720" cy="502920"/>
-          </a:xfrm>
-          <a:prstGeom prst="roundRect">
-            <a:avLst>
-              <a:gd name="adj" fmla="val 14545"/>
-            </a:avLst>
-          </a:prstGeom>
-          <a:solidFill>
-            <a:srgbClr val="8CC63F"/>
-          </a:solidFill>
-          <a:ln/>
-        </p:spPr>
-        <p:txBody>
-          <a:bodyPr wrap="square" rtlCol="0" anchor="ctr"/>
-          <a:lstStyle/>
-          <a:p>
-            <a:pPr algn="ctr" indent="0" marL="0">
-              <a:buNone/>
-            </a:pPr>
-            <a:r>
-              <a:rPr lang="en-US" sz="1700" b="1" dirty="0">
-                <a:solidFill>
-                  <a:srgbClr val="13161C"/>
-                </a:solidFill>
-                <a:latin typeface="Courier New" pitchFamily="34" charset="0"/>
-                <a:ea typeface="Courier New" pitchFamily="34" charset="-122"/>
-                <a:cs typeface="Courier New" pitchFamily="34" charset="-120"/>
-              </a:rPr>
-              <a:t>Ex 4</a:t>
-            </a:r>
-            <a:endParaRPr lang="en-US" sz="1700" dirty="0"/>
-          </a:p>
-        </p:txBody>
-      </p:sp>
-      <p:sp>
-        <p:nvSpPr>
-          <p:cNvPr id="18" name="Text 16"/>
-          <p:cNvSpPr/>
-          <p:nvPr/>
-        </p:nvSpPr>
-        <p:spPr>
-          <a:xfrm>
-            <a:off x="7909560" y="4059936"/>
-            <a:ext cx="3474720" cy="822960"/>
-          </a:xfrm>
-          <a:prstGeom prst="rect">
-            <a:avLst/>
-          </a:prstGeom>
-          <a:noFill/>
-          <a:ln/>
-        </p:spPr>
-        <p:txBody>
-          <a:bodyPr wrap="square" lIns="0" tIns="0" rIns="0" bIns="0" rtlCol="0" anchor="t"/>
+            <a:off x="548640" y="6172200"/>
+            <a:ext cx="11064240" cy="365760"/>
+          </a:xfrm>
+          <a:prstGeom prst="rect">
+            <a:avLst/>
+          </a:prstGeom>
+          <a:noFill/>
+          <a:ln/>
+        </p:spPr>
+        <p:txBody>
+          <a:bodyPr wrap="square" lIns="0" tIns="0" rIns="0" bIns="0" rtlCol="0" anchor="ctr"/>
           <a:lstStyle/>
           <a:p>
             <a:pPr indent="0" marL="0">
               <a:buNone/>
             </a:pPr>
             <a:r>
-              <a:rPr lang="en-US" sz="1700" b="1" dirty="0">
-                <a:solidFill>
-                  <a:srgbClr val="E8EDF2"/>
-                </a:solidFill>
-                <a:latin typeface="Malgun Gothic" pitchFamily="34" charset="0"/>
-                <a:ea typeface="Malgun Gothic" pitchFamily="34" charset="-122"/>
-                <a:cs typeface="Malgun Gothic" pitchFamily="34" charset="-120"/>
-              </a:rPr>
-              <a:t>비동기 오류 &amp; 동기화</a:t>
-            </a:r>
-            <a:endParaRPr lang="en-US" sz="1700" dirty="0"/>
-          </a:p>
-        </p:txBody>
-      </p:sp>
-      <p:sp>
-        <p:nvSpPr>
-          <p:cNvPr id="19" name="Text 17"/>
-          <p:cNvSpPr/>
-          <p:nvPr/>
-        </p:nvSpPr>
-        <p:spPr>
-          <a:xfrm>
-            <a:off x="6565392" y="4937760"/>
-            <a:ext cx="4791456" cy="731520"/>
-          </a:xfrm>
-          <a:prstGeom prst="rect">
-            <a:avLst/>
-          </a:prstGeom>
-          <a:noFill/>
-          <a:ln/>
-        </p:spPr>
-        <p:txBody>
-          <a:bodyPr wrap="square" lIns="0" tIns="0" rIns="0" bIns="0" rtlCol="0" anchor="t"/>
-          <a:lstStyle/>
-          <a:p>
-            <a:pPr indent="0" marL="0">
-              <a:lnSpc>
-                <a:spcPct val="110000"/>
-              </a:lnSpc>
-              <a:buNone/>
-            </a:pPr>
-            <a:r>
-              <a:rPr lang="en-US" sz="1400" dirty="0">
+              <a:rPr lang="en-US" sz="1300" i="1" dirty="0">
                 <a:solidFill>
                   <a:srgbClr val="9AA6B2"/>
                 </a:solidFill>
@@ -3495,46 +3311,7 @@
                 <a:ea typeface="Malgun Gothic" pitchFamily="34" charset="-122"/>
                 <a:cs typeface="Malgun Gothic" pitchFamily="34" charset="-120"/>
               </a:rPr>
-              <a:t>커널 guard 제거 → SYNC_CUERR_KERNEL이 잡음</a:t>
-            </a:r>
-            <a:endParaRPr lang="en-US" sz="1400" dirty="0"/>
-          </a:p>
-        </p:txBody>
-      </p:sp>
-      <p:sp>
-        <p:nvSpPr>
-          <p:cNvPr id="20" name="Text 18"/>
-          <p:cNvSpPr/>
-          <p:nvPr/>
-        </p:nvSpPr>
-        <p:spPr>
-          <a:xfrm>
-            <a:off x="548640" y="5943600"/>
-            <a:ext cx="11064240" cy="365760"/>
-          </a:xfrm>
-          <a:prstGeom prst="rect">
-            <a:avLst/>
-          </a:prstGeom>
-          <a:noFill/>
-          <a:ln/>
-        </p:spPr>
-        <p:txBody>
-          <a:bodyPr wrap="square" lIns="0" tIns="0" rIns="0" bIns="0" rtlCol="0" anchor="ctr"/>
-          <a:lstStyle/>
-          <a:p>
-            <a:pPr algn="ctr" indent="0" marL="0">
-              <a:buNone/>
-            </a:pPr>
-            <a:r>
-              <a:rPr lang="en-US" sz="1300" i="1" dirty="0">
-                <a:solidFill>
-                  <a:srgbClr val="9AA6B2"/>
-                </a:solidFill>
-                <a:latin typeface="Malgun Gothic" pitchFamily="34" charset="0"/>
-                <a:ea typeface="Malgun Gothic" pitchFamily="34" charset="-122"/>
-                <a:cs typeface="Malgun Gothic" pitchFamily="34" charset="-120"/>
-              </a:rPr>
-              <a:t>Ex 1은 실행마다 결과가 달라집니다 — 그 자체가 경쟁 조건의 증거입니다.</a:t>
+              <a:t>장난감 예제와 프로덕션 코드의 차이 — 오류를 만나도 무너지지 않고 다음 노드·다음 검사를 준비합니다.</a:t>
             </a:r>
             <a:endParaRPr lang="en-US" sz="1300" dirty="0"/>
           </a:p>
@@ -3609,7 +3386,7 @@
                 <a:ea typeface="Courier New" pitchFamily="34" charset="-122"/>
                 <a:cs typeface="Courier New" pitchFamily="34" charset="-120"/>
               </a:rPr>
-              <a:t>10</a:t>
+              <a:t>9</a:t>
             </a:r>
             <a:endParaRPr lang="en-US" sz="2200" dirty="0"/>
           </a:p>
@@ -3648,7 +3425,7 @@
                 <a:ea typeface="Malgun Gothic" pitchFamily="34" charset="-122"/>
                 <a:cs typeface="Malgun Gothic" pitchFamily="34" charset="-120"/>
               </a:rPr>
-              <a:t>핵심 정리 &amp; 자주 하는 실수</a:t>
+              <a:t>실습 미리보기 · Lab 4</a:t>
             </a:r>
             <a:endParaRPr lang="en-US" sz="3000" dirty="0"/>
           </a:p>
@@ -3662,12 +3439,12 @@
         </p:nvSpPr>
         <p:spPr>
           <a:xfrm>
-            <a:off x="548640" y="1600200"/>
-            <a:ext cx="5349240" cy="4114800"/>
+            <a:off x="548640" y="1554480"/>
+            <a:ext cx="5303520" cy="1965960"/>
           </a:xfrm>
           <a:prstGeom prst="roundRect">
             <a:avLst>
-              <a:gd name="adj" fmla="val 1778"/>
+              <a:gd name="adj" fmla="val 3721"/>
             </a:avLst>
           </a:prstGeom>
           <a:solidFill>
@@ -3684,154 +3461,136 @@
         </p:nvSpPr>
         <p:spPr>
           <a:xfrm>
-            <a:off x="822960" y="1828800"/>
-            <a:ext cx="4800600" cy="457200"/>
-          </a:xfrm>
-          <a:prstGeom prst="rect">
-            <a:avLst/>
-          </a:prstGeom>
-          <a:noFill/>
-          <a:ln/>
-        </p:spPr>
-        <p:txBody>
-          <a:bodyPr wrap="square" lIns="0" tIns="0" rIns="0" bIns="0" rtlCol="0" anchor="ctr"/>
-          <a:lstStyle/>
-          <a:p>
-            <a:pPr indent="0" marL="0">
-              <a:buNone/>
-            </a:pPr>
-            <a:r>
-              <a:rPr lang="en-US" sz="2000" b="1" dirty="0">
-                <a:solidFill>
-                  <a:srgbClr val="8CC63F"/>
-                </a:solidFill>
-                <a:latin typeface="Malgun Gothic" pitchFamily="34" charset="0"/>
-                <a:ea typeface="Malgun Gothic" pitchFamily="34" charset="-122"/>
-                <a:cs typeface="Malgun Gothic" pitchFamily="34" charset="-120"/>
-              </a:rPr>
-              <a:t>기억할 것</a:t>
-            </a:r>
-            <a:endParaRPr lang="en-US" sz="2000" dirty="0"/>
-          </a:p>
-        </p:txBody>
-      </p:sp>
-      <p:sp>
-        <p:nvSpPr>
-          <p:cNvPr id="6" name="Text 4"/>
-          <p:cNvSpPr/>
-          <p:nvPr/>
-        </p:nvSpPr>
-        <p:spPr>
-          <a:xfrm>
-            <a:off x="822960" y="2423160"/>
-            <a:ext cx="4800600" cy="3108960"/>
-          </a:xfrm>
-          <a:prstGeom prst="rect">
-            <a:avLst/>
-          </a:prstGeom>
-          <a:noFill/>
-          <a:ln/>
-        </p:spPr>
-        <p:txBody>
-          <a:bodyPr wrap="square" lIns="0" tIns="0" rIns="0" bIns="0" rtlCol="0" anchor="t"/>
-          <a:lstStyle/>
-          <a:p>
-            <a:pPr marL="342900" indent="-342900">
-              <a:spcAft>
-                <a:spcPts val="1200"/>
-              </a:spcAft>
-              <a:buSzPct val="100000"/>
-              <a:buChar char="✓"/>
-            </a:pPr>
-            <a:r>
-              <a:rPr lang="en-US" sz="1550" dirty="0">
-                <a:solidFill>
-                  <a:srgbClr val="E8EDF2"/>
-                </a:solidFill>
-                <a:latin typeface="Malgun Gothic" pitchFamily="34" charset="0"/>
-                <a:ea typeface="Malgun Gothic" pitchFamily="34" charset="-122"/>
-                <a:cs typeface="Malgun Gothic" pitchFamily="34" charset="-120"/>
-              </a:rPr>
-              <a:t>동시 접근 카운트엔 atomicAdd</a:t>
-            </a:r>
-            <a:endParaRPr lang="en-US" sz="1550" dirty="0"/>
-          </a:p>
-          <a:p>
-            <a:pPr marL="342900" indent="-342900">
-              <a:spcAft>
-                <a:spcPts val="1200"/>
-              </a:spcAft>
-              <a:buSzPct val="100000"/>
-              <a:buChar char="✓"/>
-            </a:pPr>
-            <a:r>
-              <a:rPr lang="en-US" sz="1550" dirty="0">
-                <a:solidFill>
-                  <a:srgbClr val="E8EDF2"/>
-                </a:solidFill>
-                <a:latin typeface="Malgun Gothic" pitchFamily="34" charset="0"/>
-                <a:ea typeface="Malgun Gothic" pitchFamily="34" charset="-122"/>
-                <a:cs typeface="Malgun Gothic" pitchFamily="34" charset="-120"/>
-              </a:rPr>
-              <a:t>atomicAdd 반환값 = 고유 인덱스</a:t>
-            </a:r>
-            <a:endParaRPr lang="en-US" sz="1550" dirty="0"/>
-          </a:p>
-          <a:p>
-            <a:pPr marL="342900" indent="-342900">
-              <a:spcAft>
-                <a:spcPts val="1200"/>
-              </a:spcAft>
-              <a:buSzPct val="100000"/>
-              <a:buChar char="✓"/>
-            </a:pPr>
-            <a:r>
-              <a:rPr lang="en-US" sz="1550" dirty="0">
-                <a:solidFill>
-                  <a:srgbClr val="E8EDF2"/>
-                </a:solidFill>
-                <a:latin typeface="Malgun Gothic" pitchFamily="34" charset="0"/>
-                <a:ea typeface="Malgun Gothic" pitchFamily="34" charset="-122"/>
-                <a:cs typeface="Malgun Gothic" pitchFamily="34" charset="-120"/>
-              </a:rPr>
-              <a:t>커널 오류는 동기화 후에만 잡힌다</a:t>
-            </a:r>
-            <a:endParaRPr lang="en-US" sz="1550" dirty="0"/>
-          </a:p>
-          <a:p>
-            <a:pPr marL="342900" indent="-342900">
-              <a:buSzPct val="100000"/>
-              <a:buChar char="✓"/>
-            </a:pPr>
-            <a:r>
-              <a:rPr lang="en-US" sz="1550" dirty="0">
-                <a:solidFill>
-                  <a:srgbClr val="E8EDF2"/>
-                </a:solidFill>
-                <a:latin typeface="Malgun Gothic" pitchFamily="34" charset="0"/>
-                <a:ea typeface="Malgun Gothic" pitchFamily="34" charset="-122"/>
-                <a:cs typeface="Malgun Gothic" pitchFamily="34" charset="-120"/>
-              </a:rPr>
-              <a:t>모든 CUDA 호출을 CUERR로 감싸기</a:t>
-            </a:r>
-            <a:endParaRPr lang="en-US" sz="1550" dirty="0"/>
-          </a:p>
-        </p:txBody>
-      </p:sp>
-      <p:sp>
-        <p:nvSpPr>
-          <p:cNvPr id="7" name="Shape 5"/>
-          <p:cNvSpPr/>
-          <p:nvPr/>
-        </p:nvSpPr>
-        <p:spPr>
-          <a:xfrm>
-            <a:off x="6263640" y="1600200"/>
-            <a:ext cx="5349240" cy="4114800"/>
+            <a:off x="804672" y="1755648"/>
+            <a:ext cx="1188720" cy="502920"/>
           </a:xfrm>
           <a:prstGeom prst="roundRect">
             <a:avLst>
-              <a:gd name="adj" fmla="val 1778"/>
+              <a:gd name="adj" fmla="val 14545"/>
+            </a:avLst>
+          </a:prstGeom>
+          <a:solidFill>
+            <a:srgbClr val="E0645B"/>
+          </a:solidFill>
+          <a:ln/>
+        </p:spPr>
+        <p:txBody>
+          <a:bodyPr wrap="square" rtlCol="0" anchor="ctr"/>
+          <a:lstStyle/>
+          <a:p>
+            <a:pPr algn="ctr" indent="0" marL="0">
+              <a:buNone/>
+            </a:pPr>
+            <a:r>
+              <a:rPr lang="en-US" sz="1700" b="1" dirty="0">
+                <a:solidFill>
+                  <a:srgbClr val="13161C"/>
+                </a:solidFill>
+                <a:latin typeface="Courier New" pitchFamily="34" charset="0"/>
+                <a:ea typeface="Courier New" pitchFamily="34" charset="-122"/>
+                <a:cs typeface="Courier New" pitchFamily="34" charset="-120"/>
+              </a:rPr>
+              <a:t>Ex 1</a:t>
+            </a:r>
+            <a:endParaRPr lang="en-US" sz="1700" dirty="0"/>
+          </a:p>
+        </p:txBody>
+      </p:sp>
+      <p:sp>
+        <p:nvSpPr>
+          <p:cNvPr id="6" name="Text 4"/>
+          <p:cNvSpPr/>
+          <p:nvPr/>
+        </p:nvSpPr>
+        <p:spPr>
+          <a:xfrm>
+            <a:off x="2148840" y="1773936"/>
+            <a:ext cx="3474720" cy="822960"/>
+          </a:xfrm>
+          <a:prstGeom prst="rect">
+            <a:avLst/>
+          </a:prstGeom>
+          <a:noFill/>
+          <a:ln/>
+        </p:spPr>
+        <p:txBody>
+          <a:bodyPr wrap="square" lIns="0" tIns="0" rIns="0" bIns="0" rtlCol="0" anchor="t"/>
+          <a:lstStyle/>
+          <a:p>
+            <a:pPr indent="0" marL="0">
+              <a:buNone/>
+            </a:pPr>
+            <a:r>
+              <a:rPr lang="en-US" sz="1700" b="1" dirty="0">
+                <a:solidFill>
+                  <a:srgbClr val="E8EDF2"/>
+                </a:solidFill>
+                <a:latin typeface="Malgun Gothic" pitchFamily="34" charset="0"/>
+                <a:ea typeface="Malgun Gothic" pitchFamily="34" charset="-122"/>
+                <a:cs typeface="Malgun Gothic" pitchFamily="34" charset="-120"/>
+              </a:rPr>
+              <a:t>경쟁 조건 재현</a:t>
+            </a:r>
+            <a:endParaRPr lang="en-US" sz="1700" dirty="0"/>
+          </a:p>
+        </p:txBody>
+      </p:sp>
+      <p:sp>
+        <p:nvSpPr>
+          <p:cNvPr id="7" name="Text 5"/>
+          <p:cNvSpPr/>
+          <p:nvPr/>
+        </p:nvSpPr>
+        <p:spPr>
+          <a:xfrm>
+            <a:off x="804672" y="2651760"/>
+            <a:ext cx="4791456" cy="731520"/>
+          </a:xfrm>
+          <a:prstGeom prst="rect">
+            <a:avLst/>
+          </a:prstGeom>
+          <a:noFill/>
+          <a:ln/>
+        </p:spPr>
+        <p:txBody>
+          <a:bodyPr wrap="square" lIns="0" tIns="0" rIns="0" bIns="0" rtlCol="0" anchor="t"/>
+          <a:lstStyle/>
+          <a:p>
+            <a:pPr indent="0" marL="0">
+              <a:lnSpc>
+                <a:spcPct val="110000"/>
+              </a:lnSpc>
+              <a:buNone/>
+            </a:pPr>
+            <a:r>
+              <a:rPr lang="en-US" sz="1400" dirty="0">
+                <a:solidFill>
+                  <a:srgbClr val="9AA6B2"/>
+                </a:solidFill>
+                <a:latin typeface="Malgun Gothic" pitchFamily="34" charset="0"/>
+                <a:ea typeface="Malgun Gothic" pitchFamily="34" charset="-122"/>
+                <a:cs typeface="Malgun Gothic" pitchFamily="34" charset="-120"/>
+              </a:rPr>
+              <a:t>atomicAdd를 일반 덧셈으로 바꿔 카운트가 틀어짐 확인</a:t>
+            </a:r>
+            <a:endParaRPr lang="en-US" sz="1400" dirty="0"/>
+          </a:p>
+        </p:txBody>
+      </p:sp>
+      <p:sp>
+        <p:nvSpPr>
+          <p:cNvPr id="8" name="Shape 6"/>
+          <p:cNvSpPr/>
+          <p:nvPr/>
+        </p:nvSpPr>
+        <p:spPr>
+          <a:xfrm>
+            <a:off x="6309360" y="1554480"/>
+            <a:ext cx="5303520" cy="1965960"/>
+          </a:xfrm>
+          <a:prstGeom prst="roundRect">
+            <a:avLst>
+              <a:gd name="adj" fmla="val 3721"/>
             </a:avLst>
           </a:prstGeom>
           <a:solidFill>
@@ -3842,14 +3601,430 @@
       </p:sp>
       <p:sp>
         <p:nvSpPr>
-          <p:cNvPr id="8" name="Text 6"/>
-          <p:cNvSpPr/>
-          <p:nvPr/>
-        </p:nvSpPr>
-        <p:spPr>
-          <a:xfrm>
-            <a:off x="6537960" y="1828800"/>
-            <a:ext cx="4800600" cy="457200"/>
+          <p:cNvPr id="9" name="Text 7"/>
+          <p:cNvSpPr/>
+          <p:nvPr/>
+        </p:nvSpPr>
+        <p:spPr>
+          <a:xfrm>
+            <a:off x="6565392" y="1755648"/>
+            <a:ext cx="1188720" cy="502920"/>
+          </a:xfrm>
+          <a:prstGeom prst="roundRect">
+            <a:avLst>
+              <a:gd name="adj" fmla="val 14545"/>
+            </a:avLst>
+          </a:prstGeom>
+          <a:solidFill>
+            <a:srgbClr val="4FB0C6"/>
+          </a:solidFill>
+          <a:ln/>
+        </p:spPr>
+        <p:txBody>
+          <a:bodyPr wrap="square" rtlCol="0" anchor="ctr"/>
+          <a:lstStyle/>
+          <a:p>
+            <a:pPr algn="ctr" indent="0" marL="0">
+              <a:buNone/>
+            </a:pPr>
+            <a:r>
+              <a:rPr lang="en-US" sz="1700" b="1" dirty="0">
+                <a:solidFill>
+                  <a:srgbClr val="13161C"/>
+                </a:solidFill>
+                <a:latin typeface="Courier New" pitchFamily="34" charset="0"/>
+                <a:ea typeface="Courier New" pitchFamily="34" charset="-122"/>
+                <a:cs typeface="Courier New" pitchFamily="34" charset="-120"/>
+              </a:rPr>
+              <a:t>Ex 2</a:t>
+            </a:r>
+            <a:endParaRPr lang="en-US" sz="1700" dirty="0"/>
+          </a:p>
+        </p:txBody>
+      </p:sp>
+      <p:sp>
+        <p:nvSpPr>
+          <p:cNvPr id="10" name="Text 8"/>
+          <p:cNvSpPr/>
+          <p:nvPr/>
+        </p:nvSpPr>
+        <p:spPr>
+          <a:xfrm>
+            <a:off x="7909560" y="1773936"/>
+            <a:ext cx="3474720" cy="822960"/>
+          </a:xfrm>
+          <a:prstGeom prst="rect">
+            <a:avLst/>
+          </a:prstGeom>
+          <a:noFill/>
+          <a:ln/>
+        </p:spPr>
+        <p:txBody>
+          <a:bodyPr wrap="square" lIns="0" tIns="0" rIns="0" bIns="0" rtlCol="0" anchor="t"/>
+          <a:lstStyle/>
+          <a:p>
+            <a:pPr indent="0" marL="0">
+              <a:buNone/>
+            </a:pPr>
+            <a:r>
+              <a:rPr lang="en-US" sz="1700" b="1" dirty="0">
+                <a:solidFill>
+                  <a:srgbClr val="E8EDF2"/>
+                </a:solidFill>
+                <a:latin typeface="Malgun Gothic" pitchFamily="34" charset="0"/>
+                <a:ea typeface="Malgun Gothic" pitchFamily="34" charset="-122"/>
+                <a:cs typeface="Malgun Gothic" pitchFamily="34" charset="-120"/>
+              </a:rPr>
+              <a:t>반환값 = 고유 인덱스</a:t>
+            </a:r>
+            <a:endParaRPr lang="en-US" sz="1700" dirty="0"/>
+          </a:p>
+        </p:txBody>
+      </p:sp>
+      <p:sp>
+        <p:nvSpPr>
+          <p:cNvPr id="11" name="Text 9"/>
+          <p:cNvSpPr/>
+          <p:nvPr/>
+        </p:nvSpPr>
+        <p:spPr>
+          <a:xfrm>
+            <a:off x="6565392" y="2651760"/>
+            <a:ext cx="4791456" cy="731520"/>
+          </a:xfrm>
+          <a:prstGeom prst="rect">
+            <a:avLst/>
+          </a:prstGeom>
+          <a:noFill/>
+          <a:ln/>
+        </p:spPr>
+        <p:txBody>
+          <a:bodyPr wrap="square" lIns="0" tIns="0" rIns="0" bIns="0" rtlCol="0" anchor="t"/>
+          <a:lstStyle/>
+          <a:p>
+            <a:pPr indent="0" marL="0">
+              <a:lnSpc>
+                <a:spcPct val="110000"/>
+              </a:lnSpc>
+              <a:buNone/>
+            </a:pPr>
+            <a:r>
+              <a:rPr lang="en-US" sz="1400" dirty="0">
+                <a:solidFill>
+                  <a:srgbClr val="9AA6B2"/>
+                </a:solidFill>
+                <a:latin typeface="Malgun Gothic" pitchFamily="34" charset="0"/>
+                <a:ea typeface="Malgun Gothic" pitchFamily="34" charset="-122"/>
+                <a:cs typeface="Malgun Gothic" pitchFamily="34" charset="-120"/>
+              </a:rPr>
+              <a:t>atomicAdd 반환 idx를 출력해 겹치지 않음 확인</a:t>
+            </a:r>
+            <a:endParaRPr lang="en-US" sz="1400" dirty="0"/>
+          </a:p>
+        </p:txBody>
+      </p:sp>
+      <p:sp>
+        <p:nvSpPr>
+          <p:cNvPr id="12" name="Shape 10"/>
+          <p:cNvSpPr/>
+          <p:nvPr/>
+        </p:nvSpPr>
+        <p:spPr>
+          <a:xfrm>
+            <a:off x="548640" y="3840480"/>
+            <a:ext cx="5303520" cy="1965960"/>
+          </a:xfrm>
+          <a:prstGeom prst="roundRect">
+            <a:avLst>
+              <a:gd name="adj" fmla="val 3721"/>
+            </a:avLst>
+          </a:prstGeom>
+          <a:solidFill>
+            <a:srgbClr val="1E232C"/>
+          </a:solidFill>
+          <a:ln/>
+        </p:spPr>
+      </p:sp>
+      <p:sp>
+        <p:nvSpPr>
+          <p:cNvPr id="13" name="Text 11"/>
+          <p:cNvSpPr/>
+          <p:nvPr/>
+        </p:nvSpPr>
+        <p:spPr>
+          <a:xfrm>
+            <a:off x="804672" y="4041648"/>
+            <a:ext cx="1188720" cy="502920"/>
+          </a:xfrm>
+          <a:prstGeom prst="roundRect">
+            <a:avLst>
+              <a:gd name="adj" fmla="val 14545"/>
+            </a:avLst>
+          </a:prstGeom>
+          <a:solidFill>
+            <a:srgbClr val="E0A458"/>
+          </a:solidFill>
+          <a:ln/>
+        </p:spPr>
+        <p:txBody>
+          <a:bodyPr wrap="square" rtlCol="0" anchor="ctr"/>
+          <a:lstStyle/>
+          <a:p>
+            <a:pPr algn="ctr" indent="0" marL="0">
+              <a:buNone/>
+            </a:pPr>
+            <a:r>
+              <a:rPr lang="en-US" sz="1700" b="1" dirty="0">
+                <a:solidFill>
+                  <a:srgbClr val="13161C"/>
+                </a:solidFill>
+                <a:latin typeface="Courier New" pitchFamily="34" charset="0"/>
+                <a:ea typeface="Courier New" pitchFamily="34" charset="-122"/>
+                <a:cs typeface="Courier New" pitchFamily="34" charset="-120"/>
+              </a:rPr>
+              <a:t>Ex 3</a:t>
+            </a:r>
+            <a:endParaRPr lang="en-US" sz="1700" dirty="0"/>
+          </a:p>
+        </p:txBody>
+      </p:sp>
+      <p:sp>
+        <p:nvSpPr>
+          <p:cNvPr id="14" name="Text 12"/>
+          <p:cNvSpPr/>
+          <p:nvPr/>
+        </p:nvSpPr>
+        <p:spPr>
+          <a:xfrm>
+            <a:off x="2148840" y="4059936"/>
+            <a:ext cx="3474720" cy="822960"/>
+          </a:xfrm>
+          <a:prstGeom prst="rect">
+            <a:avLst/>
+          </a:prstGeom>
+          <a:noFill/>
+          <a:ln/>
+        </p:spPr>
+        <p:txBody>
+          <a:bodyPr wrap="square" lIns="0" tIns="0" rIns="0" bIns="0" rtlCol="0" anchor="t"/>
+          <a:lstStyle/>
+          <a:p>
+            <a:pPr indent="0" marL="0">
+              <a:buNone/>
+            </a:pPr>
+            <a:r>
+              <a:rPr lang="en-US" sz="1700" b="1" dirty="0">
+                <a:solidFill>
+                  <a:srgbClr val="E8EDF2"/>
+                </a:solidFill>
+                <a:latin typeface="Malgun Gothic" pitchFamily="34" charset="0"/>
+                <a:ea typeface="Malgun Gothic" pitchFamily="34" charset="-122"/>
+                <a:cs typeface="Malgun Gothic" pitchFamily="34" charset="-120"/>
+              </a:rPr>
+              <a:t>CUERR가 잡는 순간</a:t>
+            </a:r>
+            <a:endParaRPr lang="en-US" sz="1700" dirty="0"/>
+          </a:p>
+        </p:txBody>
+      </p:sp>
+      <p:sp>
+        <p:nvSpPr>
+          <p:cNvPr id="15" name="Text 13"/>
+          <p:cNvSpPr/>
+          <p:nvPr/>
+        </p:nvSpPr>
+        <p:spPr>
+          <a:xfrm>
+            <a:off x="804672" y="4937760"/>
+            <a:ext cx="4791456" cy="731520"/>
+          </a:xfrm>
+          <a:prstGeom prst="rect">
+            <a:avLst/>
+          </a:prstGeom>
+          <a:noFill/>
+          <a:ln/>
+        </p:spPr>
+        <p:txBody>
+          <a:bodyPr wrap="square" lIns="0" tIns="0" rIns="0" bIns="0" rtlCol="0" anchor="t"/>
+          <a:lstStyle/>
+          <a:p>
+            <a:pPr indent="0" marL="0">
+              <a:lnSpc>
+                <a:spcPct val="110000"/>
+              </a:lnSpc>
+              <a:buNone/>
+            </a:pPr>
+            <a:r>
+              <a:rPr lang="en-US" sz="1400" dirty="0">
+                <a:solidFill>
+                  <a:srgbClr val="9AA6B2"/>
+                </a:solidFill>
+                <a:latin typeface="Malgun Gothic" pitchFamily="34" charset="0"/>
+                <a:ea typeface="Malgun Gothic" pitchFamily="34" charset="-122"/>
+                <a:cs typeface="Malgun Gothic" pitchFamily="34" charset="-120"/>
+              </a:rPr>
+              <a:t>cudaMemcpy 크기를 틀리게 해 오류 메시지 유발</a:t>
+            </a:r>
+            <a:endParaRPr lang="en-US" sz="1400" dirty="0"/>
+          </a:p>
+        </p:txBody>
+      </p:sp>
+      <p:sp>
+        <p:nvSpPr>
+          <p:cNvPr id="16" name="Shape 14"/>
+          <p:cNvSpPr/>
+          <p:nvPr/>
+        </p:nvSpPr>
+        <p:spPr>
+          <a:xfrm>
+            <a:off x="6309360" y="3840480"/>
+            <a:ext cx="5303520" cy="1965960"/>
+          </a:xfrm>
+          <a:prstGeom prst="roundRect">
+            <a:avLst>
+              <a:gd name="adj" fmla="val 3721"/>
+            </a:avLst>
+          </a:prstGeom>
+          <a:solidFill>
+            <a:srgbClr val="1E232C"/>
+          </a:solidFill>
+          <a:ln/>
+        </p:spPr>
+      </p:sp>
+      <p:sp>
+        <p:nvSpPr>
+          <p:cNvPr id="17" name="Text 15"/>
+          <p:cNvSpPr/>
+          <p:nvPr/>
+        </p:nvSpPr>
+        <p:spPr>
+          <a:xfrm>
+            <a:off x="6565392" y="4041648"/>
+            <a:ext cx="1188720" cy="502920"/>
+          </a:xfrm>
+          <a:prstGeom prst="roundRect">
+            <a:avLst>
+              <a:gd name="adj" fmla="val 14545"/>
+            </a:avLst>
+          </a:prstGeom>
+          <a:solidFill>
+            <a:srgbClr val="8CC63F"/>
+          </a:solidFill>
+          <a:ln/>
+        </p:spPr>
+        <p:txBody>
+          <a:bodyPr wrap="square" rtlCol="0" anchor="ctr"/>
+          <a:lstStyle/>
+          <a:p>
+            <a:pPr algn="ctr" indent="0" marL="0">
+              <a:buNone/>
+            </a:pPr>
+            <a:r>
+              <a:rPr lang="en-US" sz="1700" b="1" dirty="0">
+                <a:solidFill>
+                  <a:srgbClr val="13161C"/>
+                </a:solidFill>
+                <a:latin typeface="Courier New" pitchFamily="34" charset="0"/>
+                <a:ea typeface="Courier New" pitchFamily="34" charset="-122"/>
+                <a:cs typeface="Courier New" pitchFamily="34" charset="-120"/>
+              </a:rPr>
+              <a:t>Ex 4</a:t>
+            </a:r>
+            <a:endParaRPr lang="en-US" sz="1700" dirty="0"/>
+          </a:p>
+        </p:txBody>
+      </p:sp>
+      <p:sp>
+        <p:nvSpPr>
+          <p:cNvPr id="18" name="Text 16"/>
+          <p:cNvSpPr/>
+          <p:nvPr/>
+        </p:nvSpPr>
+        <p:spPr>
+          <a:xfrm>
+            <a:off x="7909560" y="4059936"/>
+            <a:ext cx="3474720" cy="822960"/>
+          </a:xfrm>
+          <a:prstGeom prst="rect">
+            <a:avLst/>
+          </a:prstGeom>
+          <a:noFill/>
+          <a:ln/>
+        </p:spPr>
+        <p:txBody>
+          <a:bodyPr wrap="square" lIns="0" tIns="0" rIns="0" bIns="0" rtlCol="0" anchor="t"/>
+          <a:lstStyle/>
+          <a:p>
+            <a:pPr indent="0" marL="0">
+              <a:buNone/>
+            </a:pPr>
+            <a:r>
+              <a:rPr lang="en-US" sz="1700" b="1" dirty="0">
+                <a:solidFill>
+                  <a:srgbClr val="E8EDF2"/>
+                </a:solidFill>
+                <a:latin typeface="Malgun Gothic" pitchFamily="34" charset="0"/>
+                <a:ea typeface="Malgun Gothic" pitchFamily="34" charset="-122"/>
+                <a:cs typeface="Malgun Gothic" pitchFamily="34" charset="-120"/>
+              </a:rPr>
+              <a:t>비동기 오류 &amp; 동기화</a:t>
+            </a:r>
+            <a:endParaRPr lang="en-US" sz="1700" dirty="0"/>
+          </a:p>
+        </p:txBody>
+      </p:sp>
+      <p:sp>
+        <p:nvSpPr>
+          <p:cNvPr id="19" name="Text 17"/>
+          <p:cNvSpPr/>
+          <p:nvPr/>
+        </p:nvSpPr>
+        <p:spPr>
+          <a:xfrm>
+            <a:off x="6565392" y="4937760"/>
+            <a:ext cx="4791456" cy="731520"/>
+          </a:xfrm>
+          <a:prstGeom prst="rect">
+            <a:avLst/>
+          </a:prstGeom>
+          <a:noFill/>
+          <a:ln/>
+        </p:spPr>
+        <p:txBody>
+          <a:bodyPr wrap="square" lIns="0" tIns="0" rIns="0" bIns="0" rtlCol="0" anchor="t"/>
+          <a:lstStyle/>
+          <a:p>
+            <a:pPr indent="0" marL="0">
+              <a:lnSpc>
+                <a:spcPct val="110000"/>
+              </a:lnSpc>
+              <a:buNone/>
+            </a:pPr>
+            <a:r>
+              <a:rPr lang="en-US" sz="1400" dirty="0">
+                <a:solidFill>
+                  <a:srgbClr val="9AA6B2"/>
+                </a:solidFill>
+                <a:latin typeface="Malgun Gothic" pitchFamily="34" charset="0"/>
+                <a:ea typeface="Malgun Gothic" pitchFamily="34" charset="-122"/>
+                <a:cs typeface="Malgun Gothic" pitchFamily="34" charset="-120"/>
+              </a:rPr>
+              <a:t>커널 guard 제거 → SYNC_CUERR_KERNEL이 잡음</a:t>
+            </a:r>
+            <a:endParaRPr lang="en-US" sz="1400" dirty="0"/>
+          </a:p>
+        </p:txBody>
+      </p:sp>
+      <p:sp>
+        <p:nvSpPr>
+          <p:cNvPr id="20" name="Text 18"/>
+          <p:cNvSpPr/>
+          <p:nvPr/>
+        </p:nvSpPr>
+        <p:spPr>
+          <a:xfrm>
+            <a:off x="548640" y="5943600"/>
+            <a:ext cx="11064240" cy="365760"/>
           </a:xfrm>
           <a:prstGeom prst="rect">
             <a:avLst/>
@@ -3861,124 +4036,21 @@
           <a:bodyPr wrap="square" lIns="0" tIns="0" rIns="0" bIns="0" rtlCol="0" anchor="ctr"/>
           <a:lstStyle/>
           <a:p>
-            <a:pPr indent="0" marL="0">
-              <a:buNone/>
-            </a:pPr>
-            <a:r>
-              <a:rPr lang="en-US" sz="2000" b="1" dirty="0">
-                <a:solidFill>
-                  <a:srgbClr val="E0A458"/>
-                </a:solidFill>
-                <a:latin typeface="Malgun Gothic" pitchFamily="34" charset="0"/>
-                <a:ea typeface="Malgun Gothic" pitchFamily="34" charset="-122"/>
-                <a:cs typeface="Malgun Gothic" pitchFamily="34" charset="-120"/>
-              </a:rPr>
-              <a:t>입문자 함정</a:t>
-            </a:r>
-            <a:endParaRPr lang="en-US" sz="2000" dirty="0"/>
-          </a:p>
-        </p:txBody>
-      </p:sp>
-      <p:sp>
-        <p:nvSpPr>
-          <p:cNvPr id="9" name="Text 7"/>
-          <p:cNvSpPr/>
-          <p:nvPr/>
-        </p:nvSpPr>
-        <p:spPr>
-          <a:xfrm>
-            <a:off x="6537960" y="2423160"/>
-            <a:ext cx="4800600" cy="3108960"/>
-          </a:xfrm>
-          <a:prstGeom prst="rect">
-            <a:avLst/>
-          </a:prstGeom>
-          <a:noFill/>
-          <a:ln/>
-        </p:spPr>
-        <p:txBody>
-          <a:bodyPr wrap="square" lIns="0" tIns="0" rIns="0" bIns="0" rtlCol="0" anchor="t"/>
-          <a:lstStyle/>
-          <a:p>
-            <a:pPr marL="342900" indent="-342900">
-              <a:spcAft>
-                <a:spcPts val="1200"/>
-              </a:spcAft>
-              <a:buSzPct val="100000"/>
-              <a:buChar char="✗"/>
-            </a:pPr>
-            <a:r>
-              <a:rPr lang="en-US" sz="1550" dirty="0">
-                <a:solidFill>
-                  <a:srgbClr val="E8EDF2"/>
-                </a:solidFill>
-                <a:latin typeface="Malgun Gothic" pitchFamily="34" charset="0"/>
-                <a:ea typeface="Malgun Gothic" pitchFamily="34" charset="-122"/>
-                <a:cs typeface="Malgun Gothic" pitchFamily="34" charset="-120"/>
-              </a:rPr>
-              <a:t>공유 변수에 그냥 ++ → 증가 유실(race)</a:t>
-            </a:r>
-            <a:endParaRPr lang="en-US" sz="1550" dirty="0"/>
-          </a:p>
-          <a:p>
-            <a:pPr marL="342900" indent="-342900">
-              <a:spcAft>
-                <a:spcPts val="1200"/>
-              </a:spcAft>
-              <a:buSzPct val="100000"/>
-              <a:buChar char="✗"/>
-            </a:pPr>
-            <a:r>
-              <a:rPr lang="en-US" sz="1550" dirty="0">
-                <a:solidFill>
-                  <a:srgbClr val="E8EDF2"/>
-                </a:solidFill>
-                <a:latin typeface="Malgun Gothic" pitchFamily="34" charset="0"/>
-                <a:ea typeface="Malgun Gothic" pitchFamily="34" charset="-122"/>
-                <a:cs typeface="Malgun Gothic" pitchFamily="34" charset="-120"/>
-              </a:rPr>
-              <a:t>커널 실행만 하고 동기화 없이 결과 신뢰</a:t>
-            </a:r>
-            <a:endParaRPr lang="en-US" sz="1550" dirty="0"/>
-          </a:p>
-          <a:p>
-            <a:pPr marL="342900" indent="-342900">
-              <a:spcAft>
-                <a:spcPts val="1200"/>
-              </a:spcAft>
-              <a:buSzPct val="100000"/>
-              <a:buChar char="✗"/>
-            </a:pPr>
-            <a:r>
-              <a:rPr lang="en-US" sz="1550" dirty="0">
-                <a:solidFill>
-                  <a:srgbClr val="E8EDF2"/>
-                </a:solidFill>
-                <a:latin typeface="Malgun Gothic" pitchFamily="34" charset="0"/>
-                <a:ea typeface="Malgun Gothic" pitchFamily="34" charset="-122"/>
-                <a:cs typeface="Malgun Gothic" pitchFamily="34" charset="-120"/>
-              </a:rPr>
-              <a:t>CUDA 호출 반환값을 확인 안 함 → 조용한 실패</a:t>
-            </a:r>
-            <a:endParaRPr lang="en-US" sz="1550" dirty="0"/>
-          </a:p>
-          <a:p>
-            <a:pPr marL="342900" indent="-342900">
-              <a:buSzPct val="100000"/>
-              <a:buChar char="✗"/>
-            </a:pPr>
-            <a:r>
-              <a:rPr lang="en-US" sz="1550" dirty="0">
-                <a:solidFill>
-                  <a:srgbClr val="E8EDF2"/>
-                </a:solidFill>
-                <a:latin typeface="Malgun Gothic" pitchFamily="34" charset="0"/>
-                <a:ea typeface="Malgun Gothic" pitchFamily="34" charset="-122"/>
-                <a:cs typeface="Malgun Gothic" pitchFamily="34" charset="-120"/>
-              </a:rPr>
-              <a:t>atomic 남용 → 과도하면 성능 저하(꼭 필요한 곳만)</a:t>
-            </a:r>
-            <a:endParaRPr lang="en-US" sz="1550" dirty="0"/>
+            <a:pPr algn="ctr" indent="0" marL="0">
+              <a:buNone/>
+            </a:pPr>
+            <a:r>
+              <a:rPr lang="en-US" sz="1300" i="1" dirty="0">
+                <a:solidFill>
+                  <a:srgbClr val="9AA6B2"/>
+                </a:solidFill>
+                <a:latin typeface="Malgun Gothic" pitchFamily="34" charset="0"/>
+                <a:ea typeface="Malgun Gothic" pitchFamily="34" charset="-122"/>
+                <a:cs typeface="Malgun Gothic" pitchFamily="34" charset="-120"/>
+              </a:rPr>
+              <a:t>Ex 1은 실행마다 결과가 달라집니다 — 그 자체가 경쟁 조건의 증거입니다.</a:t>
+            </a:r>
+            <a:endParaRPr lang="en-US" sz="1300" dirty="0"/>
           </a:p>
         </p:txBody>
       </p:sp>
@@ -4022,6 +4094,448 @@
         </p:nvSpPr>
         <p:spPr>
           <a:xfrm>
+            <a:off x="548640" y="411480"/>
+            <a:ext cx="640080" cy="640080"/>
+          </a:xfrm>
+          <a:prstGeom prst="roundRect">
+            <a:avLst>
+              <a:gd name="adj" fmla="val 12857"/>
+            </a:avLst>
+          </a:prstGeom>
+          <a:solidFill>
+            <a:srgbClr val="8CC63F"/>
+          </a:solidFill>
+          <a:ln/>
+        </p:spPr>
+        <p:txBody>
+          <a:bodyPr wrap="square" rtlCol="0" anchor="ctr"/>
+          <a:lstStyle/>
+          <a:p>
+            <a:pPr algn="ctr" indent="0" marL="0">
+              <a:buNone/>
+            </a:pPr>
+            <a:r>
+              <a:rPr lang="en-US" sz="2200" b="1" dirty="0">
+                <a:solidFill>
+                  <a:srgbClr val="13161C"/>
+                </a:solidFill>
+                <a:latin typeface="Courier New" pitchFamily="34" charset="0"/>
+                <a:ea typeface="Courier New" pitchFamily="34" charset="-122"/>
+                <a:cs typeface="Courier New" pitchFamily="34" charset="-120"/>
+              </a:rPr>
+              <a:t>10</a:t>
+            </a:r>
+            <a:endParaRPr lang="en-US" sz="2200" dirty="0"/>
+          </a:p>
+        </p:txBody>
+      </p:sp>
+      <p:sp>
+        <p:nvSpPr>
+          <p:cNvPr id="3" name="Text 1"/>
+          <p:cNvSpPr/>
+          <p:nvPr/>
+        </p:nvSpPr>
+        <p:spPr>
+          <a:xfrm>
+            <a:off x="1325880" y="384048"/>
+            <a:ext cx="10287000" cy="694944"/>
+          </a:xfrm>
+          <a:prstGeom prst="rect">
+            <a:avLst/>
+          </a:prstGeom>
+          <a:noFill/>
+          <a:ln/>
+        </p:spPr>
+        <p:txBody>
+          <a:bodyPr wrap="square" lIns="0" tIns="0" rIns="0" bIns="0" rtlCol="0" anchor="ctr"/>
+          <a:lstStyle/>
+          <a:p>
+            <a:pPr algn="l" indent="0" marL="0">
+              <a:buNone/>
+            </a:pPr>
+            <a:r>
+              <a:rPr lang="en-US" sz="3000" b="1" dirty="0">
+                <a:solidFill>
+                  <a:srgbClr val="E8EDF2"/>
+                </a:solidFill>
+                <a:latin typeface="Malgun Gothic" pitchFamily="34" charset="0"/>
+                <a:ea typeface="Malgun Gothic" pitchFamily="34" charset="-122"/>
+                <a:cs typeface="Malgun Gothic" pitchFamily="34" charset="-120"/>
+              </a:rPr>
+              <a:t>핵심 정리 &amp; 자주 하는 실수</a:t>
+            </a:r>
+            <a:endParaRPr lang="en-US" sz="3000" dirty="0"/>
+          </a:p>
+        </p:txBody>
+      </p:sp>
+      <p:sp>
+        <p:nvSpPr>
+          <p:cNvPr id="4" name="Shape 2"/>
+          <p:cNvSpPr/>
+          <p:nvPr/>
+        </p:nvSpPr>
+        <p:spPr>
+          <a:xfrm>
+            <a:off x="548640" y="1600200"/>
+            <a:ext cx="5349240" cy="4114800"/>
+          </a:xfrm>
+          <a:prstGeom prst="roundRect">
+            <a:avLst>
+              <a:gd name="adj" fmla="val 1778"/>
+            </a:avLst>
+          </a:prstGeom>
+          <a:solidFill>
+            <a:srgbClr val="1E232C"/>
+          </a:solidFill>
+          <a:ln/>
+        </p:spPr>
+      </p:sp>
+      <p:sp>
+        <p:nvSpPr>
+          <p:cNvPr id="5" name="Text 3"/>
+          <p:cNvSpPr/>
+          <p:nvPr/>
+        </p:nvSpPr>
+        <p:spPr>
+          <a:xfrm>
+            <a:off x="822960" y="1828800"/>
+            <a:ext cx="4800600" cy="457200"/>
+          </a:xfrm>
+          <a:prstGeom prst="rect">
+            <a:avLst/>
+          </a:prstGeom>
+          <a:noFill/>
+          <a:ln/>
+        </p:spPr>
+        <p:txBody>
+          <a:bodyPr wrap="square" lIns="0" tIns="0" rIns="0" bIns="0" rtlCol="0" anchor="ctr"/>
+          <a:lstStyle/>
+          <a:p>
+            <a:pPr indent="0" marL="0">
+              <a:buNone/>
+            </a:pPr>
+            <a:r>
+              <a:rPr lang="en-US" sz="2000" b="1" dirty="0">
+                <a:solidFill>
+                  <a:srgbClr val="8CC63F"/>
+                </a:solidFill>
+                <a:latin typeface="Malgun Gothic" pitchFamily="34" charset="0"/>
+                <a:ea typeface="Malgun Gothic" pitchFamily="34" charset="-122"/>
+                <a:cs typeface="Malgun Gothic" pitchFamily="34" charset="-120"/>
+              </a:rPr>
+              <a:t>기억할 것</a:t>
+            </a:r>
+            <a:endParaRPr lang="en-US" sz="2000" dirty="0"/>
+          </a:p>
+        </p:txBody>
+      </p:sp>
+      <p:sp>
+        <p:nvSpPr>
+          <p:cNvPr id="6" name="Text 4"/>
+          <p:cNvSpPr/>
+          <p:nvPr/>
+        </p:nvSpPr>
+        <p:spPr>
+          <a:xfrm>
+            <a:off x="822960" y="2423160"/>
+            <a:ext cx="4800600" cy="3108960"/>
+          </a:xfrm>
+          <a:prstGeom prst="rect">
+            <a:avLst/>
+          </a:prstGeom>
+          <a:noFill/>
+          <a:ln/>
+        </p:spPr>
+        <p:txBody>
+          <a:bodyPr wrap="square" lIns="0" tIns="0" rIns="0" bIns="0" rtlCol="0" anchor="t"/>
+          <a:lstStyle/>
+          <a:p>
+            <a:pPr marL="342900" indent="-342900">
+              <a:spcAft>
+                <a:spcPts val="1200"/>
+              </a:spcAft>
+              <a:buSzPct val="100000"/>
+              <a:buChar char="✓"/>
+            </a:pPr>
+            <a:r>
+              <a:rPr lang="en-US" sz="1550" dirty="0">
+                <a:solidFill>
+                  <a:srgbClr val="E8EDF2"/>
+                </a:solidFill>
+                <a:latin typeface="Malgun Gothic" pitchFamily="34" charset="0"/>
+                <a:ea typeface="Malgun Gothic" pitchFamily="34" charset="-122"/>
+                <a:cs typeface="Malgun Gothic" pitchFamily="34" charset="-120"/>
+              </a:rPr>
+              <a:t>동시 접근 카운트엔 atomicAdd</a:t>
+            </a:r>
+            <a:endParaRPr lang="en-US" sz="1550" dirty="0"/>
+          </a:p>
+          <a:p>
+            <a:pPr marL="342900" indent="-342900">
+              <a:spcAft>
+                <a:spcPts val="1200"/>
+              </a:spcAft>
+              <a:buSzPct val="100000"/>
+              <a:buChar char="✓"/>
+            </a:pPr>
+            <a:r>
+              <a:rPr lang="en-US" sz="1550" dirty="0">
+                <a:solidFill>
+                  <a:srgbClr val="E8EDF2"/>
+                </a:solidFill>
+                <a:latin typeface="Malgun Gothic" pitchFamily="34" charset="0"/>
+                <a:ea typeface="Malgun Gothic" pitchFamily="34" charset="-122"/>
+                <a:cs typeface="Malgun Gothic" pitchFamily="34" charset="-120"/>
+              </a:rPr>
+              <a:t>atomicAdd 반환값 = 고유 인덱스</a:t>
+            </a:r>
+            <a:endParaRPr lang="en-US" sz="1550" dirty="0"/>
+          </a:p>
+          <a:p>
+            <a:pPr marL="342900" indent="-342900">
+              <a:spcAft>
+                <a:spcPts val="1200"/>
+              </a:spcAft>
+              <a:buSzPct val="100000"/>
+              <a:buChar char="✓"/>
+            </a:pPr>
+            <a:r>
+              <a:rPr lang="en-US" sz="1550" dirty="0">
+                <a:solidFill>
+                  <a:srgbClr val="E8EDF2"/>
+                </a:solidFill>
+                <a:latin typeface="Malgun Gothic" pitchFamily="34" charset="0"/>
+                <a:ea typeface="Malgun Gothic" pitchFamily="34" charset="-122"/>
+                <a:cs typeface="Malgun Gothic" pitchFamily="34" charset="-120"/>
+              </a:rPr>
+              <a:t>커널 오류는 동기화 후에만 잡힌다</a:t>
+            </a:r>
+            <a:endParaRPr lang="en-US" sz="1550" dirty="0"/>
+          </a:p>
+          <a:p>
+            <a:pPr marL="342900" indent="-342900">
+              <a:buSzPct val="100000"/>
+              <a:buChar char="✓"/>
+            </a:pPr>
+            <a:r>
+              <a:rPr lang="en-US" sz="1550" dirty="0">
+                <a:solidFill>
+                  <a:srgbClr val="E8EDF2"/>
+                </a:solidFill>
+                <a:latin typeface="Malgun Gothic" pitchFamily="34" charset="0"/>
+                <a:ea typeface="Malgun Gothic" pitchFamily="34" charset="-122"/>
+                <a:cs typeface="Malgun Gothic" pitchFamily="34" charset="-120"/>
+              </a:rPr>
+              <a:t>모든 CUDA 호출을 CUERR로 감싸기</a:t>
+            </a:r>
+            <a:endParaRPr lang="en-US" sz="1550" dirty="0"/>
+          </a:p>
+        </p:txBody>
+      </p:sp>
+      <p:sp>
+        <p:nvSpPr>
+          <p:cNvPr id="7" name="Shape 5"/>
+          <p:cNvSpPr/>
+          <p:nvPr/>
+        </p:nvSpPr>
+        <p:spPr>
+          <a:xfrm>
+            <a:off x="6263640" y="1600200"/>
+            <a:ext cx="5349240" cy="4114800"/>
+          </a:xfrm>
+          <a:prstGeom prst="roundRect">
+            <a:avLst>
+              <a:gd name="adj" fmla="val 1778"/>
+            </a:avLst>
+          </a:prstGeom>
+          <a:solidFill>
+            <a:srgbClr val="1E232C"/>
+          </a:solidFill>
+          <a:ln/>
+        </p:spPr>
+      </p:sp>
+      <p:sp>
+        <p:nvSpPr>
+          <p:cNvPr id="8" name="Text 6"/>
+          <p:cNvSpPr/>
+          <p:nvPr/>
+        </p:nvSpPr>
+        <p:spPr>
+          <a:xfrm>
+            <a:off x="6537960" y="1828800"/>
+            <a:ext cx="4800600" cy="457200"/>
+          </a:xfrm>
+          <a:prstGeom prst="rect">
+            <a:avLst/>
+          </a:prstGeom>
+          <a:noFill/>
+          <a:ln/>
+        </p:spPr>
+        <p:txBody>
+          <a:bodyPr wrap="square" lIns="0" tIns="0" rIns="0" bIns="0" rtlCol="0" anchor="ctr"/>
+          <a:lstStyle/>
+          <a:p>
+            <a:pPr indent="0" marL="0">
+              <a:buNone/>
+            </a:pPr>
+            <a:r>
+              <a:rPr lang="en-US" sz="2000" b="1" dirty="0">
+                <a:solidFill>
+                  <a:srgbClr val="E0A458"/>
+                </a:solidFill>
+                <a:latin typeface="Malgun Gothic" pitchFamily="34" charset="0"/>
+                <a:ea typeface="Malgun Gothic" pitchFamily="34" charset="-122"/>
+                <a:cs typeface="Malgun Gothic" pitchFamily="34" charset="-120"/>
+              </a:rPr>
+              <a:t>입문자 함정</a:t>
+            </a:r>
+            <a:endParaRPr lang="en-US" sz="2000" dirty="0"/>
+          </a:p>
+        </p:txBody>
+      </p:sp>
+      <p:sp>
+        <p:nvSpPr>
+          <p:cNvPr id="9" name="Text 7"/>
+          <p:cNvSpPr/>
+          <p:nvPr/>
+        </p:nvSpPr>
+        <p:spPr>
+          <a:xfrm>
+            <a:off x="6537960" y="2423160"/>
+            <a:ext cx="4800600" cy="3108960"/>
+          </a:xfrm>
+          <a:prstGeom prst="rect">
+            <a:avLst/>
+          </a:prstGeom>
+          <a:noFill/>
+          <a:ln/>
+        </p:spPr>
+        <p:txBody>
+          <a:bodyPr wrap="square" lIns="0" tIns="0" rIns="0" bIns="0" rtlCol="0" anchor="t"/>
+          <a:lstStyle/>
+          <a:p>
+            <a:pPr marL="342900" indent="-342900">
+              <a:spcAft>
+                <a:spcPts val="1200"/>
+              </a:spcAft>
+              <a:buSzPct val="100000"/>
+              <a:buChar char="✗"/>
+            </a:pPr>
+            <a:r>
+              <a:rPr lang="en-US" sz="1550" dirty="0">
+                <a:solidFill>
+                  <a:srgbClr val="E8EDF2"/>
+                </a:solidFill>
+                <a:latin typeface="Malgun Gothic" pitchFamily="34" charset="0"/>
+                <a:ea typeface="Malgun Gothic" pitchFamily="34" charset="-122"/>
+                <a:cs typeface="Malgun Gothic" pitchFamily="34" charset="-120"/>
+              </a:rPr>
+              <a:t>공유 변수에 그냥 ++ → 증가 유실(race)</a:t>
+            </a:r>
+            <a:endParaRPr lang="en-US" sz="1550" dirty="0"/>
+          </a:p>
+          <a:p>
+            <a:pPr marL="342900" indent="-342900">
+              <a:spcAft>
+                <a:spcPts val="1200"/>
+              </a:spcAft>
+              <a:buSzPct val="100000"/>
+              <a:buChar char="✗"/>
+            </a:pPr>
+            <a:r>
+              <a:rPr lang="en-US" sz="1550" dirty="0">
+                <a:solidFill>
+                  <a:srgbClr val="E8EDF2"/>
+                </a:solidFill>
+                <a:latin typeface="Malgun Gothic" pitchFamily="34" charset="0"/>
+                <a:ea typeface="Malgun Gothic" pitchFamily="34" charset="-122"/>
+                <a:cs typeface="Malgun Gothic" pitchFamily="34" charset="-120"/>
+              </a:rPr>
+              <a:t>커널 실행만 하고 동기화 없이 결과 신뢰</a:t>
+            </a:r>
+            <a:endParaRPr lang="en-US" sz="1550" dirty="0"/>
+          </a:p>
+          <a:p>
+            <a:pPr marL="342900" indent="-342900">
+              <a:spcAft>
+                <a:spcPts val="1200"/>
+              </a:spcAft>
+              <a:buSzPct val="100000"/>
+              <a:buChar char="✗"/>
+            </a:pPr>
+            <a:r>
+              <a:rPr lang="en-US" sz="1550" dirty="0">
+                <a:solidFill>
+                  <a:srgbClr val="E8EDF2"/>
+                </a:solidFill>
+                <a:latin typeface="Malgun Gothic" pitchFamily="34" charset="0"/>
+                <a:ea typeface="Malgun Gothic" pitchFamily="34" charset="-122"/>
+                <a:cs typeface="Malgun Gothic" pitchFamily="34" charset="-120"/>
+              </a:rPr>
+              <a:t>CUDA 호출 반환값을 확인 안 함 → 조용한 실패</a:t>
+            </a:r>
+            <a:endParaRPr lang="en-US" sz="1550" dirty="0"/>
+          </a:p>
+          <a:p>
+            <a:pPr marL="342900" indent="-342900">
+              <a:buSzPct val="100000"/>
+              <a:buChar char="✗"/>
+            </a:pPr>
+            <a:r>
+              <a:rPr lang="en-US" sz="1550" dirty="0">
+                <a:solidFill>
+                  <a:srgbClr val="E8EDF2"/>
+                </a:solidFill>
+                <a:latin typeface="Malgun Gothic" pitchFamily="34" charset="0"/>
+                <a:ea typeface="Malgun Gothic" pitchFamily="34" charset="-122"/>
+                <a:cs typeface="Malgun Gothic" pitchFamily="34" charset="-120"/>
+              </a:rPr>
+              <a:t>atomic 남용 → 과도하면 성능 저하(꼭 필요한 곳만)</a:t>
+            </a:r>
+            <a:endParaRPr lang="en-US" sz="1550" dirty="0"/>
+          </a:p>
+        </p:txBody>
+      </p:sp>
+    </p:spTree>
+  </p:cSld>
+  <p:clrMapOvr>
+    <a:masterClrMapping/>
+  </p:clrMapOvr>
+</p:sld>
+</file>
+
+<file path=ppt/slides/slide14.xml><?xml version="1.0" encoding="utf-8"?>
+<p:sld xmlns:a="http://schemas.openxmlformats.org/drawingml/2006/main" xmlns:r="http://schemas.openxmlformats.org/officeDocument/2006/relationships" xmlns:p="http://schemas.openxmlformats.org/presentationml/2006/main">
+  <p:cSld name="Slide 14">
+    <p:bg>
+      <p:bgPr>
+        <a:solidFill>
+          <a:srgbClr val="13161C"/>
+        </a:solidFill>
+      </p:bgPr>
+    </p:bg>
+    <p:spTree>
+      <p:nvGrpSpPr>
+        <p:cNvPr id="1" name=""/>
+        <p:cNvGrpSpPr/>
+        <p:nvPr/>
+      </p:nvGrpSpPr>
+      <p:grpSpPr>
+        <a:xfrm>
+          <a:off x="0" y="0"/>
+          <a:ext cx="0" cy="0"/>
+          <a:chOff x="0" y="0"/>
+          <a:chExt cx="0" cy="0"/>
+        </a:xfrm>
+      </p:grpSpPr>
+      <p:sp>
+        <p:nvSpPr>
+          <p:cNvPr id="2" name="Text 0"/>
+          <p:cNvSpPr/>
+          <p:nvPr/>
+        </p:nvSpPr>
+        <p:spPr>
+          <a:xfrm>
             <a:off x="548640" y="1463040"/>
             <a:ext cx="9144000" cy="457200"/>
           </a:xfrm>
@@ -8949,7 +9463,7 @@
             </a:avLst>
           </a:prstGeom>
           <a:solidFill>
-            <a:srgbClr val="E0A458"/>
+            <a:srgbClr val="8CC63F"/>
           </a:solidFill>
           <a:ln/>
         </p:spPr>
@@ -8969,7 +9483,7 @@
                 <a:ea typeface="Courier New" pitchFamily="34" charset="-122"/>
                 <a:cs typeface="Courier New" pitchFamily="34" charset="-120"/>
               </a:rPr>
-              <a:t>6</a:t>
+              <a:t>5</a:t>
             </a:r>
             <a:endParaRPr lang="en-US" sz="2200" dirty="0"/>
           </a:p>
@@ -9008,7 +9522,7 @@
                 <a:ea typeface="Malgun Gothic" pitchFamily="34" charset="-122"/>
                 <a:cs typeface="Malgun Gothic" pitchFamily="34" charset="-120"/>
               </a:rPr>
-              <a:t>함정 · 커널은 비동기(asynchronous)</a:t>
+              <a:t>집계하는 두 방법 · atomicAdd vs 리덕션</a:t>
             </a:r>
             <a:endParaRPr lang="en-US" sz="3000" dirty="0"/>
           </a:p>
@@ -9022,8 +9536,8 @@
         </p:nvSpPr>
         <p:spPr>
           <a:xfrm>
-            <a:off x="548640" y="1463040"/>
-            <a:ext cx="11064240" cy="457200"/>
+            <a:off x="548640" y="1371600"/>
+            <a:ext cx="11064240" cy="411480"/>
           </a:xfrm>
           <a:prstGeom prst="rect">
             <a:avLst/>
@@ -9039,7 +9553,7 @@
               <a:buNone/>
             </a:pPr>
             <a:r>
-              <a:rPr lang="en-US" sz="1600" dirty="0">
+              <a:rPr lang="en-US" sz="1500" dirty="0">
                 <a:solidFill>
                   <a:srgbClr val="9AA6B2"/>
                 </a:solidFill>
@@ -9047,9 +9561,9 @@
                 <a:ea typeface="Malgun Gothic" pitchFamily="34" charset="-122"/>
                 <a:cs typeface="Malgun Gothic" pitchFamily="34" charset="-120"/>
               </a:rPr>
-              <a:t>커널 실행 &lt;&lt;&lt;&gt;&gt;&gt;은 오류를 반환하지 않습니다. CPU는 커널을 던지고 바로 다음 줄로 갑니다.</a:t>
-            </a:r>
-            <a:endParaRPr lang="en-US" sz="1600" dirty="0"/>
+              <a:t>여러 스레드의 값을 하나로 모으는 방법은 둘입니다. 이 저장소는 왼쪽(atomicAdd)을 씁니다.</a:t>
+            </a:r>
+            <a:endParaRPr lang="en-US" sz="1500" dirty="0"/>
           </a:p>
         </p:txBody>
       </p:sp>
@@ -9061,18 +9575,23 @@
         </p:nvSpPr>
         <p:spPr>
           <a:xfrm>
-            <a:off x="548640" y="2148840"/>
-            <a:ext cx="3346704" cy="2011680"/>
+            <a:off x="548640" y="1874520"/>
+            <a:ext cx="5349240" cy="3291840"/>
           </a:xfrm>
           <a:prstGeom prst="roundRect">
             <a:avLst>
-              <a:gd name="adj" fmla="val 3636"/>
+              <a:gd name="adj" fmla="val 1944"/>
             </a:avLst>
           </a:prstGeom>
           <a:solidFill>
             <a:srgbClr val="1E232C"/>
           </a:solidFill>
-          <a:ln/>
+          <a:ln w="19050">
+            <a:solidFill>
+              <a:srgbClr val="8CC63F"/>
+            </a:solidFill>
+            <a:prstDash val="solid"/>
+          </a:ln>
         </p:spPr>
       </p:sp>
       <p:sp>
@@ -9083,8 +9602,8 @@
         </p:nvSpPr>
         <p:spPr>
           <a:xfrm>
-            <a:off x="777240" y="2350008"/>
-            <a:ext cx="2889504" cy="457200"/>
+            <a:off x="777240" y="2011680"/>
+            <a:ext cx="4892040" cy="365760"/>
           </a:xfrm>
           <a:prstGeom prst="rect">
             <a:avLst/>
@@ -9100,30 +9619,57 @@
               <a:buNone/>
             </a:pPr>
             <a:r>
-              <a:rPr lang="en-US" sz="1700" b="1" dirty="0">
-                <a:solidFill>
-                  <a:srgbClr val="4FB0C6"/>
-                </a:solidFill>
-                <a:latin typeface="Malgun Gothic" pitchFamily="34" charset="0"/>
-                <a:ea typeface="Malgun Gothic" pitchFamily="34" charset="-122"/>
-                <a:cs typeface="Malgun Gothic" pitchFamily="34" charset="-120"/>
-              </a:rPr>
-              <a:t>① 커널 실행</a:t>
-            </a:r>
-            <a:endParaRPr lang="en-US" sz="1700" dirty="0"/>
-          </a:p>
-        </p:txBody>
-      </p:sp>
-      <p:sp>
-        <p:nvSpPr>
-          <p:cNvPr id="7" name="Text 5"/>
-          <p:cNvSpPr/>
-          <p:nvPr/>
-        </p:nvSpPr>
-        <p:spPr>
-          <a:xfrm>
-            <a:off x="777240" y="2880360"/>
-            <a:ext cx="2889504" cy="548640"/>
+              <a:rPr lang="en-US" sz="1500" b="1" dirty="0">
+                <a:solidFill>
+                  <a:srgbClr val="8CC63F"/>
+                </a:solidFill>
+                <a:latin typeface="Malgun Gothic" pitchFamily="34" charset="0"/>
+                <a:ea typeface="Malgun Gothic" pitchFamily="34" charset="-122"/>
+                <a:cs typeface="Malgun Gothic" pitchFamily="34" charset="-120"/>
+              </a:rPr>
+              <a:t>① atomicAdd  (이 저장소 방식)</a:t>
+            </a:r>
+            <a:endParaRPr lang="en-US" sz="1500" dirty="0"/>
+          </a:p>
+        </p:txBody>
+      </p:sp>
+      <p:sp>
+        <p:nvSpPr>
+          <p:cNvPr id="7" name="Shape 5"/>
+          <p:cNvSpPr/>
+          <p:nvPr/>
+        </p:nvSpPr>
+        <p:spPr>
+          <a:xfrm>
+            <a:off x="1051560" y="2606040"/>
+            <a:ext cx="868680" cy="457200"/>
+          </a:xfrm>
+          <a:prstGeom prst="roundRect">
+            <a:avLst>
+              <a:gd name="adj" fmla="val 10000"/>
+            </a:avLst>
+          </a:prstGeom>
+          <a:solidFill>
+            <a:srgbClr val="0E1116"/>
+          </a:solidFill>
+          <a:ln w="12700">
+            <a:solidFill>
+              <a:srgbClr val="2C3440"/>
+            </a:solidFill>
+            <a:prstDash val="solid"/>
+          </a:ln>
+        </p:spPr>
+      </p:sp>
+      <p:sp>
+        <p:nvSpPr>
+          <p:cNvPr id="8" name="Text 6"/>
+          <p:cNvSpPr/>
+          <p:nvPr/>
+        </p:nvSpPr>
+        <p:spPr>
+          <a:xfrm>
+            <a:off x="1051560" y="2606040"/>
+            <a:ext cx="868680" cy="457200"/>
           </a:xfrm>
           <a:prstGeom prst="rect">
             <a:avLst/>
@@ -9135,11 +9681,11 @@
           <a:bodyPr wrap="square" lIns="0" tIns="0" rIns="0" bIns="0" rtlCol="0" anchor="ctr"/>
           <a:lstStyle/>
           <a:p>
-            <a:pPr indent="0" marL="0">
-              <a:buNone/>
-            </a:pPr>
-            <a:r>
-              <a:rPr lang="en-US" sz="1200" dirty="0">
+            <a:pPr algn="ctr" indent="0" marL="0">
+              <a:buNone/>
+            </a:pPr>
+            <a:r>
+              <a:rPr lang="en-US" sz="1200" b="1" dirty="0">
                 <a:solidFill>
                   <a:srgbClr val="E8EDF2"/>
                 </a:solidFill>
@@ -9147,7 +9693,7 @@
                 <a:ea typeface="Courier New" pitchFamily="34" charset="-122"/>
                 <a:cs typeface="Courier New" pitchFamily="34" charset="-120"/>
               </a:rPr>
-              <a:t>kernel&lt;&lt;&lt;...&gt;&gt;&gt;(...)</a:t>
+              <a:t>T0</a:t>
             </a:r>
             <a:endParaRPr lang="en-US" sz="1200" dirty="0"/>
           </a:p>
@@ -9155,56 +9701,64 @@
       </p:sp>
       <p:sp>
         <p:nvSpPr>
-          <p:cNvPr id="8" name="Text 6"/>
-          <p:cNvSpPr/>
-          <p:nvPr/>
-        </p:nvSpPr>
-        <p:spPr>
-          <a:xfrm>
-            <a:off x="777240" y="3383280"/>
-            <a:ext cx="2889504" cy="685800"/>
-          </a:xfrm>
-          <a:prstGeom prst="rect">
-            <a:avLst/>
-          </a:prstGeom>
-          <a:noFill/>
-          <a:ln/>
-        </p:spPr>
-        <p:txBody>
-          <a:bodyPr wrap="square" lIns="0" tIns="0" rIns="0" bIns="0" rtlCol="0" anchor="t"/>
-          <a:lstStyle/>
-          <a:p>
-            <a:pPr indent="0" marL="0">
-              <a:lnSpc>
-                <a:spcPct val="110000"/>
-              </a:lnSpc>
-              <a:buNone/>
-            </a:pPr>
-            <a:r>
-              <a:rPr lang="en-US" sz="1350" dirty="0">
-                <a:solidFill>
-                  <a:srgbClr val="9AA6B2"/>
-                </a:solidFill>
-                <a:latin typeface="Malgun Gothic" pitchFamily="34" charset="0"/>
-                <a:ea typeface="Malgun Gothic" pitchFamily="34" charset="-122"/>
-                <a:cs typeface="Malgun Gothic" pitchFamily="34" charset="-120"/>
-              </a:rPr>
-              <a:t>CPU는 던지고 즉시 리턴 (오류 모름)</a:t>
-            </a:r>
-            <a:endParaRPr lang="en-US" sz="1350" dirty="0"/>
-          </a:p>
-        </p:txBody>
-      </p:sp>
-      <p:sp>
-        <p:nvSpPr>
-          <p:cNvPr id="9" name="Text 7"/>
-          <p:cNvSpPr/>
-          <p:nvPr/>
-        </p:nvSpPr>
-        <p:spPr>
-          <a:xfrm>
-            <a:off x="3913632" y="2834640"/>
-            <a:ext cx="466344" cy="640080"/>
+          <p:cNvPr id="9" name="Shape 7"/>
+          <p:cNvSpPr/>
+          <p:nvPr/>
+        </p:nvSpPr>
+        <p:spPr>
+          <a:xfrm>
+            <a:off x="1485900" y="3063240"/>
+            <a:ext cx="1737360" cy="960120"/>
+          </a:xfrm>
+          <a:prstGeom prst="line">
+            <a:avLst/>
+          </a:prstGeom>
+          <a:noFill/>
+          <a:ln w="16510">
+            <a:solidFill>
+              <a:srgbClr val="9AA6B2"/>
+            </a:solidFill>
+            <a:prstDash val="solid"/>
+          </a:ln>
+        </p:spPr>
+      </p:sp>
+      <p:sp>
+        <p:nvSpPr>
+          <p:cNvPr id="10" name="Shape 8"/>
+          <p:cNvSpPr/>
+          <p:nvPr/>
+        </p:nvSpPr>
+        <p:spPr>
+          <a:xfrm>
+            <a:off x="2194560" y="2606040"/>
+            <a:ext cx="868680" cy="457200"/>
+          </a:xfrm>
+          <a:prstGeom prst="roundRect">
+            <a:avLst>
+              <a:gd name="adj" fmla="val 10000"/>
+            </a:avLst>
+          </a:prstGeom>
+          <a:solidFill>
+            <a:srgbClr val="0E1116"/>
+          </a:solidFill>
+          <a:ln w="12700">
+            <a:solidFill>
+              <a:srgbClr val="2C3440"/>
+            </a:solidFill>
+            <a:prstDash val="solid"/>
+          </a:ln>
+        </p:spPr>
+      </p:sp>
+      <p:sp>
+        <p:nvSpPr>
+          <p:cNvPr id="11" name="Text 9"/>
+          <p:cNvSpPr/>
+          <p:nvPr/>
+        </p:nvSpPr>
+        <p:spPr>
+          <a:xfrm>
+            <a:off x="2194560" y="2606040"/>
+            <a:ext cx="868680" cy="457200"/>
           </a:xfrm>
           <a:prstGeom prst="rect">
             <a:avLst/>
@@ -9220,52 +9774,363 @@
               <a:buNone/>
             </a:pPr>
             <a:r>
-              <a:rPr lang="en-US" sz="2600" b="1" dirty="0">
-                <a:solidFill>
-                  <a:srgbClr val="9AA6B2"/>
+              <a:rPr lang="en-US" sz="1200" b="1" dirty="0">
+                <a:solidFill>
+                  <a:srgbClr val="E8EDF2"/>
                 </a:solidFill>
                 <a:latin typeface="Courier New" pitchFamily="34" charset="0"/>
                 <a:ea typeface="Courier New" pitchFamily="34" charset="-122"/>
                 <a:cs typeface="Courier New" pitchFamily="34" charset="-120"/>
               </a:rPr>
-              <a:t>→</a:t>
-            </a:r>
-            <a:endParaRPr lang="en-US" sz="2600" dirty="0"/>
-          </a:p>
-        </p:txBody>
-      </p:sp>
-      <p:sp>
-        <p:nvSpPr>
-          <p:cNvPr id="10" name="Shape 8"/>
-          <p:cNvSpPr/>
-          <p:nvPr/>
-        </p:nvSpPr>
-        <p:spPr>
-          <a:xfrm>
-            <a:off x="4398264" y="2148840"/>
-            <a:ext cx="3346704" cy="2011680"/>
+              <a:t>T1</a:t>
+            </a:r>
+            <a:endParaRPr lang="en-US" sz="1200" dirty="0"/>
+          </a:p>
+        </p:txBody>
+      </p:sp>
+      <p:sp>
+        <p:nvSpPr>
+          <p:cNvPr id="12" name="Shape 10"/>
+          <p:cNvSpPr/>
+          <p:nvPr/>
+        </p:nvSpPr>
+        <p:spPr>
+          <a:xfrm>
+            <a:off x="2628900" y="3063240"/>
+            <a:ext cx="594360" cy="960120"/>
+          </a:xfrm>
+          <a:prstGeom prst="line">
+            <a:avLst/>
+          </a:prstGeom>
+          <a:noFill/>
+          <a:ln w="16510">
+            <a:solidFill>
+              <a:srgbClr val="9AA6B2"/>
+            </a:solidFill>
+            <a:prstDash val="solid"/>
+          </a:ln>
+        </p:spPr>
+      </p:sp>
+      <p:sp>
+        <p:nvSpPr>
+          <p:cNvPr id="13" name="Shape 11"/>
+          <p:cNvSpPr/>
+          <p:nvPr/>
+        </p:nvSpPr>
+        <p:spPr>
+          <a:xfrm>
+            <a:off x="3337560" y="2606040"/>
+            <a:ext cx="868680" cy="457200"/>
           </a:xfrm>
           <a:prstGeom prst="roundRect">
             <a:avLst>
-              <a:gd name="adj" fmla="val 3636"/>
+              <a:gd name="adj" fmla="val 10000"/>
+            </a:avLst>
+          </a:prstGeom>
+          <a:solidFill>
+            <a:srgbClr val="0E1116"/>
+          </a:solidFill>
+          <a:ln w="12700">
+            <a:solidFill>
+              <a:srgbClr val="2C3440"/>
+            </a:solidFill>
+            <a:prstDash val="solid"/>
+          </a:ln>
+        </p:spPr>
+      </p:sp>
+      <p:sp>
+        <p:nvSpPr>
+          <p:cNvPr id="14" name="Text 12"/>
+          <p:cNvSpPr/>
+          <p:nvPr/>
+        </p:nvSpPr>
+        <p:spPr>
+          <a:xfrm>
+            <a:off x="3337560" y="2606040"/>
+            <a:ext cx="868680" cy="457200"/>
+          </a:xfrm>
+          <a:prstGeom prst="rect">
+            <a:avLst/>
+          </a:prstGeom>
+          <a:noFill/>
+          <a:ln/>
+        </p:spPr>
+        <p:txBody>
+          <a:bodyPr wrap="square" lIns="0" tIns="0" rIns="0" bIns="0" rtlCol="0" anchor="ctr"/>
+          <a:lstStyle/>
+          <a:p>
+            <a:pPr algn="ctr" indent="0" marL="0">
+              <a:buNone/>
+            </a:pPr>
+            <a:r>
+              <a:rPr lang="en-US" sz="1200" b="1" dirty="0">
+                <a:solidFill>
+                  <a:srgbClr val="E8EDF2"/>
+                </a:solidFill>
+                <a:latin typeface="Courier New" pitchFamily="34" charset="0"/>
+                <a:ea typeface="Courier New" pitchFamily="34" charset="-122"/>
+                <a:cs typeface="Courier New" pitchFamily="34" charset="-120"/>
+              </a:rPr>
+              <a:t>T2</a:t>
+            </a:r>
+            <a:endParaRPr lang="en-US" sz="1200" dirty="0"/>
+          </a:p>
+        </p:txBody>
+      </p:sp>
+      <p:sp>
+        <p:nvSpPr>
+          <p:cNvPr id="15" name="Shape 13"/>
+          <p:cNvSpPr/>
+          <p:nvPr/>
+        </p:nvSpPr>
+        <p:spPr>
+          <a:xfrm flipH="1">
+            <a:off x="3223260" y="3063240"/>
+            <a:ext cx="548640" cy="960120"/>
+          </a:xfrm>
+          <a:prstGeom prst="line">
+            <a:avLst/>
+          </a:prstGeom>
+          <a:noFill/>
+          <a:ln w="16510">
+            <a:solidFill>
+              <a:srgbClr val="9AA6B2"/>
+            </a:solidFill>
+            <a:prstDash val="solid"/>
+          </a:ln>
+        </p:spPr>
+      </p:sp>
+      <p:sp>
+        <p:nvSpPr>
+          <p:cNvPr id="16" name="Shape 14"/>
+          <p:cNvSpPr/>
+          <p:nvPr/>
+        </p:nvSpPr>
+        <p:spPr>
+          <a:xfrm>
+            <a:off x="4480560" y="2606040"/>
+            <a:ext cx="868680" cy="457200"/>
+          </a:xfrm>
+          <a:prstGeom prst="roundRect">
+            <a:avLst>
+              <a:gd name="adj" fmla="val 10000"/>
+            </a:avLst>
+          </a:prstGeom>
+          <a:solidFill>
+            <a:srgbClr val="0E1116"/>
+          </a:solidFill>
+          <a:ln w="12700">
+            <a:solidFill>
+              <a:srgbClr val="2C3440"/>
+            </a:solidFill>
+            <a:prstDash val="solid"/>
+          </a:ln>
+        </p:spPr>
+      </p:sp>
+      <p:sp>
+        <p:nvSpPr>
+          <p:cNvPr id="17" name="Text 15"/>
+          <p:cNvSpPr/>
+          <p:nvPr/>
+        </p:nvSpPr>
+        <p:spPr>
+          <a:xfrm>
+            <a:off x="4480560" y="2606040"/>
+            <a:ext cx="868680" cy="457200"/>
+          </a:xfrm>
+          <a:prstGeom prst="rect">
+            <a:avLst/>
+          </a:prstGeom>
+          <a:noFill/>
+          <a:ln/>
+        </p:spPr>
+        <p:txBody>
+          <a:bodyPr wrap="square" lIns="0" tIns="0" rIns="0" bIns="0" rtlCol="0" anchor="ctr"/>
+          <a:lstStyle/>
+          <a:p>
+            <a:pPr algn="ctr" indent="0" marL="0">
+              <a:buNone/>
+            </a:pPr>
+            <a:r>
+              <a:rPr lang="en-US" sz="1200" b="1" dirty="0">
+                <a:solidFill>
+                  <a:srgbClr val="E8EDF2"/>
+                </a:solidFill>
+                <a:latin typeface="Courier New" pitchFamily="34" charset="0"/>
+                <a:ea typeface="Courier New" pitchFamily="34" charset="-122"/>
+                <a:cs typeface="Courier New" pitchFamily="34" charset="-120"/>
+              </a:rPr>
+              <a:t>T3</a:t>
+            </a:r>
+            <a:endParaRPr lang="en-US" sz="1200" dirty="0"/>
+          </a:p>
+        </p:txBody>
+      </p:sp>
+      <p:sp>
+        <p:nvSpPr>
+          <p:cNvPr id="18" name="Shape 16"/>
+          <p:cNvSpPr/>
+          <p:nvPr/>
+        </p:nvSpPr>
+        <p:spPr>
+          <a:xfrm flipH="1">
+            <a:off x="3223260" y="3063240"/>
+            <a:ext cx="1691640" cy="960120"/>
+          </a:xfrm>
+          <a:prstGeom prst="line">
+            <a:avLst/>
+          </a:prstGeom>
+          <a:noFill/>
+          <a:ln w="16510">
+            <a:solidFill>
+              <a:srgbClr val="9AA6B2"/>
+            </a:solidFill>
+            <a:prstDash val="solid"/>
+          </a:ln>
+        </p:spPr>
+      </p:sp>
+      <p:sp>
+        <p:nvSpPr>
+          <p:cNvPr id="19" name="Shape 17"/>
+          <p:cNvSpPr/>
+          <p:nvPr/>
+        </p:nvSpPr>
+        <p:spPr>
+          <a:xfrm>
+            <a:off x="2308860" y="4023360"/>
+            <a:ext cx="1828800" cy="548640"/>
+          </a:xfrm>
+          <a:prstGeom prst="roundRect">
+            <a:avLst>
+              <a:gd name="adj" fmla="val 8333"/>
+            </a:avLst>
+          </a:prstGeom>
+          <a:solidFill>
+            <a:srgbClr val="16240F"/>
+          </a:solidFill>
+          <a:ln w="19050">
+            <a:solidFill>
+              <a:srgbClr val="8CC63F"/>
+            </a:solidFill>
+            <a:prstDash val="solid"/>
+          </a:ln>
+        </p:spPr>
+      </p:sp>
+      <p:sp>
+        <p:nvSpPr>
+          <p:cNvPr id="20" name="Text 18"/>
+          <p:cNvSpPr/>
+          <p:nvPr/>
+        </p:nvSpPr>
+        <p:spPr>
+          <a:xfrm>
+            <a:off x="2308860" y="4023360"/>
+            <a:ext cx="1828800" cy="548640"/>
+          </a:xfrm>
+          <a:prstGeom prst="rect">
+            <a:avLst/>
+          </a:prstGeom>
+          <a:noFill/>
+          <a:ln/>
+        </p:spPr>
+        <p:txBody>
+          <a:bodyPr wrap="square" lIns="0" tIns="0" rIns="0" bIns="0" rtlCol="0" anchor="ctr"/>
+          <a:lstStyle/>
+          <a:p>
+            <a:pPr algn="ctr" indent="0" marL="0">
+              <a:buNone/>
+            </a:pPr>
+            <a:r>
+              <a:rPr lang="en-US" sz="1300" b="1" dirty="0">
+                <a:solidFill>
+                  <a:srgbClr val="8CC63F"/>
+                </a:solidFill>
+                <a:latin typeface="Courier New" pitchFamily="34" charset="0"/>
+                <a:ea typeface="Courier New" pitchFamily="34" charset="-122"/>
+                <a:cs typeface="Courier New" pitchFamily="34" charset="-120"/>
+              </a:rPr>
+              <a:t>err_count</a:t>
+            </a:r>
+            <a:endParaRPr lang="en-US" sz="1300" dirty="0"/>
+          </a:p>
+        </p:txBody>
+      </p:sp>
+      <p:sp>
+        <p:nvSpPr>
+          <p:cNvPr id="21" name="Text 19"/>
+          <p:cNvSpPr/>
+          <p:nvPr/>
+        </p:nvSpPr>
+        <p:spPr>
+          <a:xfrm>
+            <a:off x="777240" y="4709160"/>
+            <a:ext cx="4892040" cy="365760"/>
+          </a:xfrm>
+          <a:prstGeom prst="rect">
+            <a:avLst/>
+          </a:prstGeom>
+          <a:noFill/>
+          <a:ln/>
+        </p:spPr>
+        <p:txBody>
+          <a:bodyPr wrap="square" lIns="0" tIns="0" rIns="0" bIns="0" rtlCol="0" anchor="ctr"/>
+          <a:lstStyle/>
+          <a:p>
+            <a:pPr algn="ctr" indent="0" marL="0">
+              <a:buNone/>
+            </a:pPr>
+            <a:r>
+              <a:rPr lang="en-US" sz="1200" dirty="0">
+                <a:solidFill>
+                  <a:srgbClr val="9AA6B2"/>
+                </a:solidFill>
+                <a:latin typeface="Malgun Gothic" pitchFamily="34" charset="0"/>
+                <a:ea typeface="Malgun Gothic" pitchFamily="34" charset="-122"/>
+                <a:cs typeface="Malgun Gothic" pitchFamily="34" charset="-120"/>
+              </a:rPr>
+              <a:t>모두가 하나에 원자적 +1 · 간단하지만 경합(contention)</a:t>
+            </a:r>
+            <a:endParaRPr lang="en-US" sz="1200" dirty="0"/>
+          </a:p>
+        </p:txBody>
+      </p:sp>
+      <p:sp>
+        <p:nvSpPr>
+          <p:cNvPr id="22" name="Shape 20"/>
+          <p:cNvSpPr/>
+          <p:nvPr/>
+        </p:nvSpPr>
+        <p:spPr>
+          <a:xfrm>
+            <a:off x="6263640" y="1874520"/>
+            <a:ext cx="5349240" cy="3291840"/>
+          </a:xfrm>
+          <a:prstGeom prst="roundRect">
+            <a:avLst>
+              <a:gd name="adj" fmla="val 1944"/>
             </a:avLst>
           </a:prstGeom>
           <a:solidFill>
             <a:srgbClr val="1E232C"/>
           </a:solidFill>
-          <a:ln/>
-        </p:spPr>
-      </p:sp>
-      <p:sp>
-        <p:nvSpPr>
-          <p:cNvPr id="11" name="Text 9"/>
-          <p:cNvSpPr/>
-          <p:nvPr/>
-        </p:nvSpPr>
-        <p:spPr>
-          <a:xfrm>
-            <a:off x="4626864" y="2350008"/>
-            <a:ext cx="2889504" cy="457200"/>
+          <a:ln w="19050">
+            <a:solidFill>
+              <a:srgbClr val="4FB0C6"/>
+            </a:solidFill>
+            <a:prstDash val="solid"/>
+          </a:ln>
+        </p:spPr>
+      </p:sp>
+      <p:sp>
+        <p:nvSpPr>
+          <p:cNvPr id="23" name="Text 21"/>
+          <p:cNvSpPr/>
+          <p:nvPr/>
+        </p:nvSpPr>
+        <p:spPr>
+          <a:xfrm>
+            <a:off x="6492240" y="2011680"/>
+            <a:ext cx="4892040" cy="365760"/>
           </a:xfrm>
           <a:prstGeom prst="rect">
             <a:avLst/>
@@ -9281,30 +10146,57 @@
               <a:buNone/>
             </a:pPr>
             <a:r>
-              <a:rPr lang="en-US" sz="1700" b="1" dirty="0">
-                <a:solidFill>
-                  <a:srgbClr val="8CC63F"/>
-                </a:solidFill>
-                <a:latin typeface="Malgun Gothic" pitchFamily="34" charset="0"/>
-                <a:ea typeface="Malgun Gothic" pitchFamily="34" charset="-122"/>
-                <a:cs typeface="Malgun Gothic" pitchFamily="34" charset="-120"/>
-              </a:rPr>
-              <a:t>② 동기화</a:t>
-            </a:r>
-            <a:endParaRPr lang="en-US" sz="1700" dirty="0"/>
-          </a:p>
-        </p:txBody>
-      </p:sp>
-      <p:sp>
-        <p:nvSpPr>
-          <p:cNvPr id="12" name="Text 10"/>
-          <p:cNvSpPr/>
-          <p:nvPr/>
-        </p:nvSpPr>
-        <p:spPr>
-          <a:xfrm>
-            <a:off x="4626864" y="2880360"/>
-            <a:ext cx="2889504" cy="548640"/>
+              <a:rPr lang="en-US" sz="1500" b="1" dirty="0">
+                <a:solidFill>
+                  <a:srgbClr val="4FB0C6"/>
+                </a:solidFill>
+                <a:latin typeface="Malgun Gothic" pitchFamily="34" charset="0"/>
+                <a:ea typeface="Malgun Gothic" pitchFamily="34" charset="-122"/>
+                <a:cs typeface="Malgun Gothic" pitchFamily="34" charset="-120"/>
+              </a:rPr>
+              <a:t>② 트리 리덕션(tree reduction)</a:t>
+            </a:r>
+            <a:endParaRPr lang="en-US" sz="1500" dirty="0"/>
+          </a:p>
+        </p:txBody>
+      </p:sp>
+      <p:sp>
+        <p:nvSpPr>
+          <p:cNvPr id="24" name="Shape 22"/>
+          <p:cNvSpPr/>
+          <p:nvPr/>
+        </p:nvSpPr>
+        <p:spPr>
+          <a:xfrm>
+            <a:off x="6766560" y="2606040"/>
+            <a:ext cx="868680" cy="411480"/>
+          </a:xfrm>
+          <a:prstGeom prst="roundRect">
+            <a:avLst>
+              <a:gd name="adj" fmla="val 11111"/>
+            </a:avLst>
+          </a:prstGeom>
+          <a:solidFill>
+            <a:srgbClr val="0E1116"/>
+          </a:solidFill>
+          <a:ln w="12700">
+            <a:solidFill>
+              <a:srgbClr val="2C3440"/>
+            </a:solidFill>
+            <a:prstDash val="solid"/>
+          </a:ln>
+        </p:spPr>
+      </p:sp>
+      <p:sp>
+        <p:nvSpPr>
+          <p:cNvPr id="25" name="Text 23"/>
+          <p:cNvSpPr/>
+          <p:nvPr/>
+        </p:nvSpPr>
+        <p:spPr>
+          <a:xfrm>
+            <a:off x="6766560" y="2606040"/>
+            <a:ext cx="868680" cy="411480"/>
           </a:xfrm>
           <a:prstGeom prst="rect">
             <a:avLst/>
@@ -9316,11 +10208,11 @@
           <a:bodyPr wrap="square" lIns="0" tIns="0" rIns="0" bIns="0" rtlCol="0" anchor="ctr"/>
           <a:lstStyle/>
           <a:p>
-            <a:pPr indent="0" marL="0">
-              <a:buNone/>
-            </a:pPr>
-            <a:r>
-              <a:rPr lang="en-US" sz="1200" dirty="0">
+            <a:pPr algn="ctr" indent="0" marL="0">
+              <a:buNone/>
+            </a:pPr>
+            <a:r>
+              <a:rPr lang="en-US" sz="1100" b="1" dirty="0">
                 <a:solidFill>
                   <a:srgbClr val="E8EDF2"/>
                 </a:solidFill>
@@ -9328,64 +10220,49 @@
                 <a:ea typeface="Courier New" pitchFamily="34" charset="-122"/>
                 <a:cs typeface="Courier New" pitchFamily="34" charset="-120"/>
               </a:rPr>
-              <a:t>cudaDeviceSynchronize()</a:t>
-            </a:r>
-            <a:endParaRPr lang="en-US" sz="1200" dirty="0"/>
-          </a:p>
-        </p:txBody>
-      </p:sp>
-      <p:sp>
-        <p:nvSpPr>
-          <p:cNvPr id="13" name="Text 11"/>
-          <p:cNvSpPr/>
-          <p:nvPr/>
-        </p:nvSpPr>
-        <p:spPr>
-          <a:xfrm>
-            <a:off x="4626864" y="3383280"/>
-            <a:ext cx="2889504" cy="685800"/>
-          </a:xfrm>
-          <a:prstGeom prst="rect">
-            <a:avLst/>
-          </a:prstGeom>
-          <a:noFill/>
-          <a:ln/>
-        </p:spPr>
-        <p:txBody>
-          <a:bodyPr wrap="square" lIns="0" tIns="0" rIns="0" bIns="0" rtlCol="0" anchor="t"/>
-          <a:lstStyle/>
-          <a:p>
-            <a:pPr indent="0" marL="0">
-              <a:lnSpc>
-                <a:spcPct val="110000"/>
-              </a:lnSpc>
-              <a:buNone/>
-            </a:pPr>
-            <a:r>
-              <a:rPr lang="en-US" sz="1350" dirty="0">
-                <a:solidFill>
-                  <a:srgbClr val="9AA6B2"/>
-                </a:solidFill>
-                <a:latin typeface="Malgun Gothic" pitchFamily="34" charset="0"/>
-                <a:ea typeface="Malgun Gothic" pitchFamily="34" charset="-122"/>
-                <a:cs typeface="Malgun Gothic" pitchFamily="34" charset="-120"/>
-              </a:rPr>
-              <a:t>GPU가 끝날 때까지 대기</a:t>
-            </a:r>
-            <a:endParaRPr lang="en-US" sz="1350" dirty="0"/>
-          </a:p>
-        </p:txBody>
-      </p:sp>
-      <p:sp>
-        <p:nvSpPr>
-          <p:cNvPr id="14" name="Text 12"/>
-          <p:cNvSpPr/>
-          <p:nvPr/>
-        </p:nvSpPr>
-        <p:spPr>
-          <a:xfrm>
-            <a:off x="7763256" y="2834640"/>
-            <a:ext cx="466344" cy="640080"/>
+              <a:t>v0</a:t>
+            </a:r>
+            <a:endParaRPr lang="en-US" sz="1100" dirty="0"/>
+          </a:p>
+        </p:txBody>
+      </p:sp>
+      <p:sp>
+        <p:nvSpPr>
+          <p:cNvPr id="26" name="Shape 24"/>
+          <p:cNvSpPr/>
+          <p:nvPr/>
+        </p:nvSpPr>
+        <p:spPr>
+          <a:xfrm>
+            <a:off x="7909560" y="2606040"/>
+            <a:ext cx="868680" cy="411480"/>
+          </a:xfrm>
+          <a:prstGeom prst="roundRect">
+            <a:avLst>
+              <a:gd name="adj" fmla="val 11111"/>
+            </a:avLst>
+          </a:prstGeom>
+          <a:solidFill>
+            <a:srgbClr val="0E1116"/>
+          </a:solidFill>
+          <a:ln w="12700">
+            <a:solidFill>
+              <a:srgbClr val="2C3440"/>
+            </a:solidFill>
+            <a:prstDash val="solid"/>
+          </a:ln>
+        </p:spPr>
+      </p:sp>
+      <p:sp>
+        <p:nvSpPr>
+          <p:cNvPr id="27" name="Text 25"/>
+          <p:cNvSpPr/>
+          <p:nvPr/>
+        </p:nvSpPr>
+        <p:spPr>
+          <a:xfrm>
+            <a:off x="7909560" y="2606040"/>
+            <a:ext cx="868680" cy="411480"/>
           </a:xfrm>
           <a:prstGeom prst="rect">
             <a:avLst/>
@@ -9401,52 +10278,57 @@
               <a:buNone/>
             </a:pPr>
             <a:r>
-              <a:rPr lang="en-US" sz="2600" b="1" dirty="0">
-                <a:solidFill>
-                  <a:srgbClr val="9AA6B2"/>
+              <a:rPr lang="en-US" sz="1100" b="1" dirty="0">
+                <a:solidFill>
+                  <a:srgbClr val="E8EDF2"/>
                 </a:solidFill>
                 <a:latin typeface="Courier New" pitchFamily="34" charset="0"/>
                 <a:ea typeface="Courier New" pitchFamily="34" charset="-122"/>
                 <a:cs typeface="Courier New" pitchFamily="34" charset="-120"/>
               </a:rPr>
-              <a:t>→</a:t>
-            </a:r>
-            <a:endParaRPr lang="en-US" sz="2600" dirty="0"/>
-          </a:p>
-        </p:txBody>
-      </p:sp>
-      <p:sp>
-        <p:nvSpPr>
-          <p:cNvPr id="15" name="Shape 13"/>
-          <p:cNvSpPr/>
-          <p:nvPr/>
-        </p:nvSpPr>
-        <p:spPr>
-          <a:xfrm>
-            <a:off x="8247888" y="2148840"/>
-            <a:ext cx="3346704" cy="2011680"/>
+              <a:t>v1</a:t>
+            </a:r>
+            <a:endParaRPr lang="en-US" sz="1100" dirty="0"/>
+          </a:p>
+        </p:txBody>
+      </p:sp>
+      <p:sp>
+        <p:nvSpPr>
+          <p:cNvPr id="28" name="Shape 26"/>
+          <p:cNvSpPr/>
+          <p:nvPr/>
+        </p:nvSpPr>
+        <p:spPr>
+          <a:xfrm>
+            <a:off x="9052560" y="2606040"/>
+            <a:ext cx="868680" cy="411480"/>
           </a:xfrm>
           <a:prstGeom prst="roundRect">
             <a:avLst>
-              <a:gd name="adj" fmla="val 3636"/>
+              <a:gd name="adj" fmla="val 11111"/>
             </a:avLst>
           </a:prstGeom>
           <a:solidFill>
-            <a:srgbClr val="1E232C"/>
+            <a:srgbClr val="0E1116"/>
           </a:solidFill>
-          <a:ln/>
-        </p:spPr>
-      </p:sp>
-      <p:sp>
-        <p:nvSpPr>
-          <p:cNvPr id="16" name="Text 14"/>
-          <p:cNvSpPr/>
-          <p:nvPr/>
-        </p:nvSpPr>
-        <p:spPr>
-          <a:xfrm>
-            <a:off x="8476488" y="2350008"/>
-            <a:ext cx="2889504" cy="457200"/>
+          <a:ln w="12700">
+            <a:solidFill>
+              <a:srgbClr val="2C3440"/>
+            </a:solidFill>
+            <a:prstDash val="solid"/>
+          </a:ln>
+        </p:spPr>
+      </p:sp>
+      <p:sp>
+        <p:nvSpPr>
+          <p:cNvPr id="29" name="Text 27"/>
+          <p:cNvSpPr/>
+          <p:nvPr/>
+        </p:nvSpPr>
+        <p:spPr>
+          <a:xfrm>
+            <a:off x="9052560" y="2606040"/>
+            <a:ext cx="868680" cy="411480"/>
           </a:xfrm>
           <a:prstGeom prst="rect">
             <a:avLst/>
@@ -9458,50 +10340,11 @@
           <a:bodyPr wrap="square" lIns="0" tIns="0" rIns="0" bIns="0" rtlCol="0" anchor="ctr"/>
           <a:lstStyle/>
           <a:p>
-            <a:pPr indent="0" marL="0">
-              <a:buNone/>
-            </a:pPr>
-            <a:r>
-              <a:rPr lang="en-US" sz="1700" b="1" dirty="0">
-                <a:solidFill>
-                  <a:srgbClr val="E0A458"/>
-                </a:solidFill>
-                <a:latin typeface="Malgun Gothic" pitchFamily="34" charset="0"/>
-                <a:ea typeface="Malgun Gothic" pitchFamily="34" charset="-122"/>
-                <a:cs typeface="Malgun Gothic" pitchFamily="34" charset="-120"/>
-              </a:rPr>
-              <a:t>③ 오류 검사</a:t>
-            </a:r>
-            <a:endParaRPr lang="en-US" sz="1700" dirty="0"/>
-          </a:p>
-        </p:txBody>
-      </p:sp>
-      <p:sp>
-        <p:nvSpPr>
-          <p:cNvPr id="17" name="Text 15"/>
-          <p:cNvSpPr/>
-          <p:nvPr/>
-        </p:nvSpPr>
-        <p:spPr>
-          <a:xfrm>
-            <a:off x="8476488" y="2880360"/>
-            <a:ext cx="2889504" cy="548640"/>
-          </a:xfrm>
-          <a:prstGeom prst="rect">
-            <a:avLst/>
-          </a:prstGeom>
-          <a:noFill/>
-          <a:ln/>
-        </p:spPr>
-        <p:txBody>
-          <a:bodyPr wrap="square" lIns="0" tIns="0" rIns="0" bIns="0" rtlCol="0" anchor="ctr"/>
-          <a:lstStyle/>
-          <a:p>
-            <a:pPr indent="0" marL="0">
-              <a:buNone/>
-            </a:pPr>
-            <a:r>
-              <a:rPr lang="en-US" sz="1200" dirty="0">
+            <a:pPr algn="ctr" indent="0" marL="0">
+              <a:buNone/>
+            </a:pPr>
+            <a:r>
+              <a:rPr lang="en-US" sz="1100" b="1" dirty="0">
                 <a:solidFill>
                   <a:srgbClr val="E8EDF2"/>
                 </a:solidFill>
@@ -9509,7 +10352,363 @@
                 <a:ea typeface="Courier New" pitchFamily="34" charset="-122"/>
                 <a:cs typeface="Courier New" pitchFamily="34" charset="-120"/>
               </a:rPr>
-              <a:t>if (err != cudaSuccess)</a:t>
+              <a:t>v2</a:t>
+            </a:r>
+            <a:endParaRPr lang="en-US" sz="1100" dirty="0"/>
+          </a:p>
+        </p:txBody>
+      </p:sp>
+      <p:sp>
+        <p:nvSpPr>
+          <p:cNvPr id="30" name="Shape 28"/>
+          <p:cNvSpPr/>
+          <p:nvPr/>
+        </p:nvSpPr>
+        <p:spPr>
+          <a:xfrm>
+            <a:off x="10195560" y="2606040"/>
+            <a:ext cx="868680" cy="411480"/>
+          </a:xfrm>
+          <a:prstGeom prst="roundRect">
+            <a:avLst>
+              <a:gd name="adj" fmla="val 11111"/>
+            </a:avLst>
+          </a:prstGeom>
+          <a:solidFill>
+            <a:srgbClr val="0E1116"/>
+          </a:solidFill>
+          <a:ln w="12700">
+            <a:solidFill>
+              <a:srgbClr val="2C3440"/>
+            </a:solidFill>
+            <a:prstDash val="solid"/>
+          </a:ln>
+        </p:spPr>
+      </p:sp>
+      <p:sp>
+        <p:nvSpPr>
+          <p:cNvPr id="31" name="Text 29"/>
+          <p:cNvSpPr/>
+          <p:nvPr/>
+        </p:nvSpPr>
+        <p:spPr>
+          <a:xfrm>
+            <a:off x="10195560" y="2606040"/>
+            <a:ext cx="868680" cy="411480"/>
+          </a:xfrm>
+          <a:prstGeom prst="rect">
+            <a:avLst/>
+          </a:prstGeom>
+          <a:noFill/>
+          <a:ln/>
+        </p:spPr>
+        <p:txBody>
+          <a:bodyPr wrap="square" lIns="0" tIns="0" rIns="0" bIns="0" rtlCol="0" anchor="ctr"/>
+          <a:lstStyle/>
+          <a:p>
+            <a:pPr algn="ctr" indent="0" marL="0">
+              <a:buNone/>
+            </a:pPr>
+            <a:r>
+              <a:rPr lang="en-US" sz="1100" b="1" dirty="0">
+                <a:solidFill>
+                  <a:srgbClr val="E8EDF2"/>
+                </a:solidFill>
+                <a:latin typeface="Courier New" pitchFamily="34" charset="0"/>
+                <a:ea typeface="Courier New" pitchFamily="34" charset="-122"/>
+                <a:cs typeface="Courier New" pitchFamily="34" charset="-120"/>
+              </a:rPr>
+              <a:t>v3</a:t>
+            </a:r>
+            <a:endParaRPr lang="en-US" sz="1100" dirty="0"/>
+          </a:p>
+        </p:txBody>
+      </p:sp>
+      <p:sp>
+        <p:nvSpPr>
+          <p:cNvPr id="32" name="Shape 30"/>
+          <p:cNvSpPr/>
+          <p:nvPr/>
+        </p:nvSpPr>
+        <p:spPr>
+          <a:xfrm>
+            <a:off x="7223760" y="3291840"/>
+            <a:ext cx="1097280" cy="411480"/>
+          </a:xfrm>
+          <a:prstGeom prst="roundRect">
+            <a:avLst>
+              <a:gd name="adj" fmla="val 11111"/>
+            </a:avLst>
+          </a:prstGeom>
+          <a:solidFill>
+            <a:srgbClr val="12212A"/>
+          </a:solidFill>
+          <a:ln w="12700">
+            <a:solidFill>
+              <a:srgbClr val="4FB0C6"/>
+            </a:solidFill>
+            <a:prstDash val="solid"/>
+          </a:ln>
+        </p:spPr>
+      </p:sp>
+      <p:sp>
+        <p:nvSpPr>
+          <p:cNvPr id="33" name="Text 31"/>
+          <p:cNvSpPr/>
+          <p:nvPr/>
+        </p:nvSpPr>
+        <p:spPr>
+          <a:xfrm>
+            <a:off x="7223760" y="3291840"/>
+            <a:ext cx="1097280" cy="411480"/>
+          </a:xfrm>
+          <a:prstGeom prst="rect">
+            <a:avLst/>
+          </a:prstGeom>
+          <a:noFill/>
+          <a:ln/>
+        </p:spPr>
+        <p:txBody>
+          <a:bodyPr wrap="square" lIns="0" tIns="0" rIns="0" bIns="0" rtlCol="0" anchor="ctr"/>
+          <a:lstStyle/>
+          <a:p>
+            <a:pPr algn="ctr" indent="0" marL="0">
+              <a:buNone/>
+            </a:pPr>
+            <a:r>
+              <a:rPr lang="en-US" sz="1050" b="1" dirty="0">
+                <a:solidFill>
+                  <a:srgbClr val="4FB0C6"/>
+                </a:solidFill>
+                <a:latin typeface="Courier New" pitchFamily="34" charset="0"/>
+                <a:ea typeface="Courier New" pitchFamily="34" charset="-122"/>
+                <a:cs typeface="Courier New" pitchFamily="34" charset="-120"/>
+              </a:rPr>
+              <a:t>v0+v1</a:t>
+            </a:r>
+            <a:endParaRPr lang="en-US" sz="1050" dirty="0"/>
+          </a:p>
+        </p:txBody>
+      </p:sp>
+      <p:sp>
+        <p:nvSpPr>
+          <p:cNvPr id="34" name="Shape 32"/>
+          <p:cNvSpPr/>
+          <p:nvPr/>
+        </p:nvSpPr>
+        <p:spPr>
+          <a:xfrm>
+            <a:off x="7200900" y="3017520"/>
+            <a:ext cx="571500" cy="274320"/>
+          </a:xfrm>
+          <a:prstGeom prst="line">
+            <a:avLst/>
+          </a:prstGeom>
+          <a:noFill/>
+          <a:ln w="16510">
+            <a:solidFill>
+              <a:srgbClr val="9AA6B2"/>
+            </a:solidFill>
+            <a:prstDash val="solid"/>
+          </a:ln>
+        </p:spPr>
+      </p:sp>
+      <p:sp>
+        <p:nvSpPr>
+          <p:cNvPr id="35" name="Shape 33"/>
+          <p:cNvSpPr/>
+          <p:nvPr/>
+        </p:nvSpPr>
+        <p:spPr>
+          <a:xfrm flipH="1">
+            <a:off x="7772400" y="3017520"/>
+            <a:ext cx="571500" cy="274320"/>
+          </a:xfrm>
+          <a:prstGeom prst="line">
+            <a:avLst/>
+          </a:prstGeom>
+          <a:noFill/>
+          <a:ln w="16510">
+            <a:solidFill>
+              <a:srgbClr val="9AA6B2"/>
+            </a:solidFill>
+            <a:prstDash val="solid"/>
+          </a:ln>
+        </p:spPr>
+      </p:sp>
+      <p:sp>
+        <p:nvSpPr>
+          <p:cNvPr id="36" name="Shape 34"/>
+          <p:cNvSpPr/>
+          <p:nvPr/>
+        </p:nvSpPr>
+        <p:spPr>
+          <a:xfrm>
+            <a:off x="9509760" y="3291840"/>
+            <a:ext cx="1097280" cy="411480"/>
+          </a:xfrm>
+          <a:prstGeom prst="roundRect">
+            <a:avLst>
+              <a:gd name="adj" fmla="val 11111"/>
+            </a:avLst>
+          </a:prstGeom>
+          <a:solidFill>
+            <a:srgbClr val="12212A"/>
+          </a:solidFill>
+          <a:ln w="12700">
+            <a:solidFill>
+              <a:srgbClr val="4FB0C6"/>
+            </a:solidFill>
+            <a:prstDash val="solid"/>
+          </a:ln>
+        </p:spPr>
+      </p:sp>
+      <p:sp>
+        <p:nvSpPr>
+          <p:cNvPr id="37" name="Text 35"/>
+          <p:cNvSpPr/>
+          <p:nvPr/>
+        </p:nvSpPr>
+        <p:spPr>
+          <a:xfrm>
+            <a:off x="9509760" y="3291840"/>
+            <a:ext cx="1097280" cy="411480"/>
+          </a:xfrm>
+          <a:prstGeom prst="rect">
+            <a:avLst/>
+          </a:prstGeom>
+          <a:noFill/>
+          <a:ln/>
+        </p:spPr>
+        <p:txBody>
+          <a:bodyPr wrap="square" lIns="0" tIns="0" rIns="0" bIns="0" rtlCol="0" anchor="ctr"/>
+          <a:lstStyle/>
+          <a:p>
+            <a:pPr algn="ctr" indent="0" marL="0">
+              <a:buNone/>
+            </a:pPr>
+            <a:r>
+              <a:rPr lang="en-US" sz="1050" b="1" dirty="0">
+                <a:solidFill>
+                  <a:srgbClr val="4FB0C6"/>
+                </a:solidFill>
+                <a:latin typeface="Courier New" pitchFamily="34" charset="0"/>
+                <a:ea typeface="Courier New" pitchFamily="34" charset="-122"/>
+                <a:cs typeface="Courier New" pitchFamily="34" charset="-120"/>
+              </a:rPr>
+              <a:t>v2+v3</a:t>
+            </a:r>
+            <a:endParaRPr lang="en-US" sz="1050" dirty="0"/>
+          </a:p>
+        </p:txBody>
+      </p:sp>
+      <p:sp>
+        <p:nvSpPr>
+          <p:cNvPr id="38" name="Shape 36"/>
+          <p:cNvSpPr/>
+          <p:nvPr/>
+        </p:nvSpPr>
+        <p:spPr>
+          <a:xfrm>
+            <a:off x="9486900" y="3017520"/>
+            <a:ext cx="571500" cy="274320"/>
+          </a:xfrm>
+          <a:prstGeom prst="line">
+            <a:avLst/>
+          </a:prstGeom>
+          <a:noFill/>
+          <a:ln w="16510">
+            <a:solidFill>
+              <a:srgbClr val="9AA6B2"/>
+            </a:solidFill>
+            <a:prstDash val="solid"/>
+          </a:ln>
+        </p:spPr>
+      </p:sp>
+      <p:sp>
+        <p:nvSpPr>
+          <p:cNvPr id="39" name="Shape 37"/>
+          <p:cNvSpPr/>
+          <p:nvPr/>
+        </p:nvSpPr>
+        <p:spPr>
+          <a:xfrm flipH="1">
+            <a:off x="10058400" y="3017520"/>
+            <a:ext cx="571500" cy="274320"/>
+          </a:xfrm>
+          <a:prstGeom prst="line">
+            <a:avLst/>
+          </a:prstGeom>
+          <a:noFill/>
+          <a:ln w="16510">
+            <a:solidFill>
+              <a:srgbClr val="9AA6B2"/>
+            </a:solidFill>
+            <a:prstDash val="solid"/>
+          </a:ln>
+        </p:spPr>
+      </p:sp>
+      <p:sp>
+        <p:nvSpPr>
+          <p:cNvPr id="40" name="Shape 38"/>
+          <p:cNvSpPr/>
+          <p:nvPr/>
+        </p:nvSpPr>
+        <p:spPr>
+          <a:xfrm>
+            <a:off x="8275320" y="3977640"/>
+            <a:ext cx="1280160" cy="457200"/>
+          </a:xfrm>
+          <a:prstGeom prst="roundRect">
+            <a:avLst>
+              <a:gd name="adj" fmla="val 10000"/>
+            </a:avLst>
+          </a:prstGeom>
+          <a:solidFill>
+            <a:srgbClr val="12212A"/>
+          </a:solidFill>
+          <a:ln w="19050">
+            <a:solidFill>
+              <a:srgbClr val="4FB0C6"/>
+            </a:solidFill>
+            <a:prstDash val="solid"/>
+          </a:ln>
+        </p:spPr>
+      </p:sp>
+      <p:sp>
+        <p:nvSpPr>
+          <p:cNvPr id="41" name="Text 39"/>
+          <p:cNvSpPr/>
+          <p:nvPr/>
+        </p:nvSpPr>
+        <p:spPr>
+          <a:xfrm>
+            <a:off x="8275320" y="3977640"/>
+            <a:ext cx="1280160" cy="457200"/>
+          </a:xfrm>
+          <a:prstGeom prst="rect">
+            <a:avLst/>
+          </a:prstGeom>
+          <a:noFill/>
+          <a:ln/>
+        </p:spPr>
+        <p:txBody>
+          <a:bodyPr wrap="square" lIns="0" tIns="0" rIns="0" bIns="0" rtlCol="0" anchor="ctr"/>
+          <a:lstStyle/>
+          <a:p>
+            <a:pPr algn="ctr" indent="0" marL="0">
+              <a:buNone/>
+            </a:pPr>
+            <a:r>
+              <a:rPr lang="en-US" sz="1200" b="1" dirty="0">
+                <a:solidFill>
+                  <a:srgbClr val="4FB0C6"/>
+                </a:solidFill>
+                <a:latin typeface="Malgun Gothic" pitchFamily="34" charset="0"/>
+                <a:ea typeface="Malgun Gothic" pitchFamily="34" charset="-122"/>
+                <a:cs typeface="Malgun Gothic" pitchFamily="34" charset="-120"/>
+              </a:rPr>
+              <a:t>합계</a:t>
             </a:r>
             <a:endParaRPr lang="en-US" sz="1200" dirty="0"/>
           </a:p>
@@ -9517,86 +10716,157 @@
       </p:sp>
       <p:sp>
         <p:nvSpPr>
-          <p:cNvPr id="18" name="Text 16"/>
-          <p:cNvSpPr/>
-          <p:nvPr/>
-        </p:nvSpPr>
-        <p:spPr>
-          <a:xfrm>
-            <a:off x="8476488" y="3383280"/>
-            <a:ext cx="2889504" cy="685800"/>
-          </a:xfrm>
-          <a:prstGeom prst="rect">
-            <a:avLst/>
-          </a:prstGeom>
-          <a:noFill/>
-          <a:ln/>
-        </p:spPr>
-        <p:txBody>
-          <a:bodyPr wrap="square" lIns="0" tIns="0" rIns="0" bIns="0" rtlCol="0" anchor="t"/>
+          <p:cNvPr id="42" name="Shape 40"/>
+          <p:cNvSpPr/>
+          <p:nvPr/>
+        </p:nvSpPr>
+        <p:spPr>
+          <a:xfrm>
+            <a:off x="7772400" y="3703320"/>
+            <a:ext cx="1143000" cy="274320"/>
+          </a:xfrm>
+          <a:prstGeom prst="line">
+            <a:avLst/>
+          </a:prstGeom>
+          <a:noFill/>
+          <a:ln w="16510">
+            <a:solidFill>
+              <a:srgbClr val="9AA6B2"/>
+            </a:solidFill>
+            <a:prstDash val="solid"/>
+          </a:ln>
+        </p:spPr>
+      </p:sp>
+      <p:sp>
+        <p:nvSpPr>
+          <p:cNvPr id="43" name="Shape 41"/>
+          <p:cNvSpPr/>
+          <p:nvPr/>
+        </p:nvSpPr>
+        <p:spPr>
+          <a:xfrm flipH="1">
+            <a:off x="8915400" y="3703320"/>
+            <a:ext cx="1143000" cy="274320"/>
+          </a:xfrm>
+          <a:prstGeom prst="line">
+            <a:avLst/>
+          </a:prstGeom>
+          <a:noFill/>
+          <a:ln w="16510">
+            <a:solidFill>
+              <a:srgbClr val="9AA6B2"/>
+            </a:solidFill>
+            <a:prstDash val="solid"/>
+          </a:ln>
+        </p:spPr>
+      </p:sp>
+      <p:sp>
+        <p:nvSpPr>
+          <p:cNvPr id="44" name="Text 42"/>
+          <p:cNvSpPr/>
+          <p:nvPr/>
+        </p:nvSpPr>
+        <p:spPr>
+          <a:xfrm>
+            <a:off x="6492240" y="4709160"/>
+            <a:ext cx="4892040" cy="365760"/>
+          </a:xfrm>
+          <a:prstGeom prst="rect">
+            <a:avLst/>
+          </a:prstGeom>
+          <a:noFill/>
+          <a:ln/>
+        </p:spPr>
+        <p:txBody>
+          <a:bodyPr wrap="square" lIns="0" tIns="0" rIns="0" bIns="0" rtlCol="0" anchor="ctr"/>
+          <a:lstStyle/>
+          <a:p>
+            <a:pPr algn="ctr" indent="0" marL="0">
+              <a:buNone/>
+            </a:pPr>
+            <a:r>
+              <a:rPr lang="en-US" sz="1200" dirty="0">
+                <a:solidFill>
+                  <a:srgbClr val="9AA6B2"/>
+                </a:solidFill>
+                <a:latin typeface="Malgun Gothic" pitchFamily="34" charset="0"/>
+                <a:ea typeface="Malgun Gothic" pitchFamily="34" charset="-122"/>
+                <a:cs typeface="Malgun Gothic" pitchFamily="34" charset="-120"/>
+              </a:rPr>
+              <a:t>쌍으로 합쳐 절반씩 · log2(n) 단계 · 경합 없음</a:t>
+            </a:r>
+            <a:endParaRPr lang="en-US" sz="1200" dirty="0"/>
+          </a:p>
+        </p:txBody>
+      </p:sp>
+      <p:sp>
+        <p:nvSpPr>
+          <p:cNvPr id="45" name="Shape 43"/>
+          <p:cNvSpPr/>
+          <p:nvPr/>
+        </p:nvSpPr>
+        <p:spPr>
+          <a:xfrm>
+            <a:off x="548640" y="5349240"/>
+            <a:ext cx="11064240" cy="960120"/>
+          </a:xfrm>
+          <a:prstGeom prst="roundRect">
+            <a:avLst>
+              <a:gd name="adj" fmla="val 7619"/>
+            </a:avLst>
+          </a:prstGeom>
+          <a:solidFill>
+            <a:srgbClr val="1A2418"/>
+          </a:solidFill>
+          <a:ln/>
+        </p:spPr>
+      </p:sp>
+      <p:sp>
+        <p:nvSpPr>
+          <p:cNvPr id="46" name="Text 44"/>
+          <p:cNvSpPr/>
+          <p:nvPr/>
+        </p:nvSpPr>
+        <p:spPr>
+          <a:xfrm>
+            <a:off x="822960" y="5504688"/>
+            <a:ext cx="10515600" cy="685800"/>
+          </a:xfrm>
+          <a:prstGeom prst="rect">
+            <a:avLst/>
+          </a:prstGeom>
+          <a:noFill/>
+          <a:ln/>
+        </p:spPr>
+        <p:txBody>
+          <a:bodyPr wrap="square" lIns="0" tIns="0" rIns="0" bIns="0" rtlCol="0" anchor="ctr"/>
           <a:lstStyle/>
           <a:p>
             <a:pPr indent="0" marL="0">
               <a:lnSpc>
-                <a:spcPct val="110000"/>
+                <a:spcPct val="115000"/>
               </a:lnSpc>
               <a:buNone/>
             </a:pPr>
             <a:r>
-              <a:rPr lang="en-US" sz="1350" dirty="0">
-                <a:solidFill>
-                  <a:srgbClr val="9AA6B2"/>
-                </a:solidFill>
-                <a:latin typeface="Malgun Gothic" pitchFamily="34" charset="0"/>
-                <a:ea typeface="Malgun Gothic" pitchFamily="34" charset="-122"/>
-                <a:cs typeface="Malgun Gothic" pitchFamily="34" charset="-120"/>
-              </a:rPr>
-              <a:t>이제서야 커널 오류를 알 수 있음</a:t>
-            </a:r>
-            <a:endParaRPr lang="en-US" sz="1350" dirty="0"/>
-          </a:p>
-        </p:txBody>
-      </p:sp>
-      <p:sp>
-        <p:nvSpPr>
-          <p:cNvPr id="19" name="Text 17"/>
-          <p:cNvSpPr/>
-          <p:nvPr/>
-        </p:nvSpPr>
-        <p:spPr>
-          <a:xfrm>
-            <a:off x="548640" y="4480560"/>
-            <a:ext cx="11064240" cy="914400"/>
-          </a:xfrm>
-          <a:prstGeom prst="rect">
-            <a:avLst/>
-          </a:prstGeom>
-          <a:noFill/>
-          <a:ln/>
-        </p:spPr>
-        <p:txBody>
-          <a:bodyPr wrap="square" lIns="0" tIns="0" rIns="0" bIns="0" rtlCol="0" anchor="t"/>
-          <a:lstStyle/>
-          <a:p>
+              <a:rPr lang="en-US" sz="1400" b="1" dirty="0">
+                <a:solidFill>
+                  <a:srgbClr val="E0A458"/>
+                </a:solidFill>
+                <a:latin typeface="Malgun Gothic" pitchFamily="34" charset="0"/>
+                <a:ea typeface="Malgun Gothic" pitchFamily="34" charset="-122"/>
+                <a:cs typeface="Malgun Gothic" pitchFamily="34" charset="-120"/>
+              </a:rPr>
+              <a:t>언제 무엇을? </a:t>
+            </a:r>
             <a:pPr indent="0" marL="0">
-              <a:buNone/>
-            </a:pPr>
-            <a:r>
-              <a:rPr lang="en-US" sz="1600" b="1" dirty="0">
-                <a:solidFill>
-                  <a:srgbClr val="E0A458"/>
-                </a:solidFill>
-                <a:latin typeface="Malgun Gothic" pitchFamily="34" charset="0"/>
-                <a:ea typeface="Malgun Gothic" pitchFamily="34" charset="-122"/>
-                <a:cs typeface="Malgun Gothic" pitchFamily="34" charset="-120"/>
-              </a:rPr>
-              <a:t>동기화를 건너뛰면</a:t>
-            </a:r>
-            <a:pPr indent="0" marL="0">
-              <a:buNone/>
-            </a:pPr>
-            <a:r>
-              <a:rPr lang="en-US" sz="1600" dirty="0">
+              <a:lnSpc>
+                <a:spcPct val="115000"/>
+              </a:lnSpc>
+              <a:buNone/>
+            </a:pPr>
+            <a:r>
+              <a:rPr lang="en-US" sz="1400" dirty="0">
                 <a:solidFill>
                   <a:srgbClr val="E8EDF2"/>
                 </a:solidFill>
@@ -9604,9 +10874,9 @@
                 <a:ea typeface="Malgun Gothic" pitchFamily="34" charset="-122"/>
                 <a:cs typeface="Malgun Gothic" pitchFamily="34" charset="-120"/>
               </a:rPr>
-              <a:t> 커널이 잘못된 메모리를 건드려도 CPU는 모른 채 계속 진행합니다. 그래서 SYNC_CUERR_KERNEL이 필요합니다.</a:t>
-            </a:r>
-            <a:endParaRPr lang="en-US" sz="1600" dirty="0"/>
+              <a:t>cuda_memtest는 오류가 보통 드물어 atomicAdd로 충분·간단합니다. 반대로 대량의 값을 합·최대·평균 낼 때는 경합 없는 트리 리덕션이 훨씬 빠릅니다.</a:t>
+            </a:r>
+            <a:endParaRPr lang="en-US" sz="1400" dirty="0"/>
           </a:p>
         </p:txBody>
       </p:sp>
@@ -9659,7 +10929,7 @@
             </a:avLst>
           </a:prstGeom>
           <a:solidFill>
-            <a:srgbClr val="8CC63F"/>
+            <a:srgbClr val="E0A458"/>
           </a:solidFill>
           <a:ln/>
         </p:spPr>
@@ -9679,7 +10949,7 @@
                 <a:ea typeface="Courier New" pitchFamily="34" charset="-122"/>
                 <a:cs typeface="Courier New" pitchFamily="34" charset="-120"/>
               </a:rPr>
-              <a:t>7</a:t>
+              <a:t>6</a:t>
             </a:r>
             <a:endParaRPr lang="en-US" sz="2200" dirty="0"/>
           </a:p>
@@ -9718,7 +10988,7 @@
                 <a:ea typeface="Malgun Gothic" pitchFamily="34" charset="-122"/>
                 <a:cs typeface="Malgun Gothic" pitchFamily="34" charset="-120"/>
               </a:rPr>
-              <a:t>방어적 매크로 · CUERR / SYNC_CUERR_KERNEL</a:t>
+              <a:t>함정 · 커널은 비동기(asynchronous)</a:t>
             </a:r>
             <a:endParaRPr lang="en-US" sz="3000" dirty="0"/>
           </a:p>
@@ -9726,310 +10996,595 @@
       </p:sp>
       <p:sp>
         <p:nvSpPr>
-          <p:cNvPr id="4" name="Shape 2"/>
-          <p:cNvSpPr/>
-          <p:nvPr/>
-        </p:nvSpPr>
-        <p:spPr>
-          <a:xfrm>
-            <a:off x="548640" y="1554480"/>
-            <a:ext cx="11064240" cy="3291840"/>
+          <p:cNvPr id="4" name="Text 2"/>
+          <p:cNvSpPr/>
+          <p:nvPr/>
+        </p:nvSpPr>
+        <p:spPr>
+          <a:xfrm>
+            <a:off x="548640" y="1463040"/>
+            <a:ext cx="11064240" cy="457200"/>
+          </a:xfrm>
+          <a:prstGeom prst="rect">
+            <a:avLst/>
+          </a:prstGeom>
+          <a:noFill/>
+          <a:ln/>
+        </p:spPr>
+        <p:txBody>
+          <a:bodyPr wrap="square" lIns="0" tIns="0" rIns="0" bIns="0" rtlCol="0" anchor="ctr"/>
+          <a:lstStyle/>
+          <a:p>
+            <a:pPr indent="0" marL="0">
+              <a:buNone/>
+            </a:pPr>
+            <a:r>
+              <a:rPr lang="en-US" sz="1600" dirty="0">
+                <a:solidFill>
+                  <a:srgbClr val="9AA6B2"/>
+                </a:solidFill>
+                <a:latin typeface="Malgun Gothic" pitchFamily="34" charset="0"/>
+                <a:ea typeface="Malgun Gothic" pitchFamily="34" charset="-122"/>
+                <a:cs typeface="Malgun Gothic" pitchFamily="34" charset="-120"/>
+              </a:rPr>
+              <a:t>커널 실행 &lt;&lt;&lt;&gt;&gt;&gt;은 오류를 반환하지 않습니다. CPU는 커널을 던지고 바로 다음 줄로 갑니다.</a:t>
+            </a:r>
+            <a:endParaRPr lang="en-US" sz="1600" dirty="0"/>
+          </a:p>
+        </p:txBody>
+      </p:sp>
+      <p:sp>
+        <p:nvSpPr>
+          <p:cNvPr id="5" name="Shape 3"/>
+          <p:cNvSpPr/>
+          <p:nvPr/>
+        </p:nvSpPr>
+        <p:spPr>
+          <a:xfrm>
+            <a:off x="548640" y="2148840"/>
+            <a:ext cx="3346704" cy="2011680"/>
           </a:xfrm>
           <a:prstGeom prst="roundRect">
             <a:avLst>
-              <a:gd name="adj" fmla="val 1667"/>
+              <a:gd name="adj" fmla="val 3636"/>
             </a:avLst>
           </a:prstGeom>
           <a:solidFill>
-            <a:srgbClr val="0E1116"/>
+            <a:srgbClr val="1E232C"/>
           </a:solidFill>
-          <a:ln w="12700">
-            <a:solidFill>
-              <a:srgbClr val="2C3440"/>
-            </a:solidFill>
-            <a:prstDash val="solid"/>
-          </a:ln>
-        </p:spPr>
-      </p:sp>
-      <p:sp>
-        <p:nvSpPr>
-          <p:cNvPr id="5" name="Text 3"/>
-          <p:cNvSpPr/>
-          <p:nvPr/>
-        </p:nvSpPr>
-        <p:spPr>
-          <a:xfrm>
-            <a:off x="749808" y="1700784"/>
-            <a:ext cx="10661904" cy="2999232"/>
-          </a:xfrm>
-          <a:prstGeom prst="rect">
-            <a:avLst/>
-          </a:prstGeom>
-          <a:noFill/>
-          <a:ln/>
-        </p:spPr>
-        <p:txBody>
-          <a:bodyPr wrap="square" lIns="0" tIns="0" rIns="0" bIns="0" rtlCol="0" anchor="t"/>
-          <a:lstStyle/>
-          <a:p>
-            <a:pPr algn="l" indent="0" marL="0">
-              <a:lnSpc>
-                <a:spcPct val="108000"/>
-              </a:lnSpc>
-              <a:buNone/>
-            </a:pPr>
-            <a:r>
-              <a:rPr lang="en-US" sz="1250" dirty="0">
-                <a:solidFill>
-                  <a:srgbClr val="9AA6B2"/>
+          <a:ln/>
+        </p:spPr>
+      </p:sp>
+      <p:sp>
+        <p:nvSpPr>
+          <p:cNvPr id="6" name="Text 4"/>
+          <p:cNvSpPr/>
+          <p:nvPr/>
+        </p:nvSpPr>
+        <p:spPr>
+          <a:xfrm>
+            <a:off x="777240" y="2350008"/>
+            <a:ext cx="2889504" cy="457200"/>
+          </a:xfrm>
+          <a:prstGeom prst="rect">
+            <a:avLst/>
+          </a:prstGeom>
+          <a:noFill/>
+          <a:ln/>
+        </p:spPr>
+        <p:txBody>
+          <a:bodyPr wrap="square" lIns="0" tIns="0" rIns="0" bIns="0" rtlCol="0" anchor="ctr"/>
+          <a:lstStyle/>
+          <a:p>
+            <a:pPr indent="0" marL="0">
+              <a:buNone/>
+            </a:pPr>
+            <a:r>
+              <a:rPr lang="en-US" sz="1700" b="1" dirty="0">
+                <a:solidFill>
+                  <a:srgbClr val="4FB0C6"/>
+                </a:solidFill>
+                <a:latin typeface="Malgun Gothic" pitchFamily="34" charset="0"/>
+                <a:ea typeface="Malgun Gothic" pitchFamily="34" charset="-122"/>
+                <a:cs typeface="Malgun Gothic" pitchFamily="34" charset="-120"/>
+              </a:rPr>
+              <a:t>① 커널 실행</a:t>
+            </a:r>
+            <a:endParaRPr lang="en-US" sz="1700" dirty="0"/>
+          </a:p>
+        </p:txBody>
+      </p:sp>
+      <p:sp>
+        <p:nvSpPr>
+          <p:cNvPr id="7" name="Text 5"/>
+          <p:cNvSpPr/>
+          <p:nvPr/>
+        </p:nvSpPr>
+        <p:spPr>
+          <a:xfrm>
+            <a:off x="777240" y="2880360"/>
+            <a:ext cx="2889504" cy="548640"/>
+          </a:xfrm>
+          <a:prstGeom prst="rect">
+            <a:avLst/>
+          </a:prstGeom>
+          <a:noFill/>
+          <a:ln/>
+        </p:spPr>
+        <p:txBody>
+          <a:bodyPr wrap="square" lIns="0" tIns="0" rIns="0" bIns="0" rtlCol="0" anchor="ctr"/>
+          <a:lstStyle/>
+          <a:p>
+            <a:pPr indent="0" marL="0">
+              <a:buNone/>
+            </a:pPr>
+            <a:r>
+              <a:rPr lang="en-US" sz="1200" dirty="0">
+                <a:solidFill>
+                  <a:srgbClr val="E8EDF2"/>
                 </a:solidFill>
                 <a:latin typeface="Courier New" pitchFamily="34" charset="0"/>
                 <a:ea typeface="Courier New" pitchFamily="34" charset="-122"/>
                 <a:cs typeface="Courier New" pitchFamily="34" charset="-120"/>
               </a:rPr>
-              <a:t>// CUERR — 모든 CUDA 호출을 감싼다   cuda_memtest.h:132</a:t>
-            </a:r>
-            <a:endParaRPr lang="en-US" sz="1250" dirty="0"/>
-          </a:p>
-          <a:p>
-            <a:pPr algn="l" indent="0" marL="0">
+              <a:t>kernel&lt;&lt;&lt;...&gt;&gt;&gt;(...)</a:t>
+            </a:r>
+            <a:endParaRPr lang="en-US" sz="1200" dirty="0"/>
+          </a:p>
+        </p:txBody>
+      </p:sp>
+      <p:sp>
+        <p:nvSpPr>
+          <p:cNvPr id="8" name="Text 6"/>
+          <p:cNvSpPr/>
+          <p:nvPr/>
+        </p:nvSpPr>
+        <p:spPr>
+          <a:xfrm>
+            <a:off x="777240" y="3383280"/>
+            <a:ext cx="2889504" cy="685800"/>
+          </a:xfrm>
+          <a:prstGeom prst="rect">
+            <a:avLst/>
+          </a:prstGeom>
+          <a:noFill/>
+          <a:ln/>
+        </p:spPr>
+        <p:txBody>
+          <a:bodyPr wrap="square" lIns="0" tIns="0" rIns="0" bIns="0" rtlCol="0" anchor="t"/>
+          <a:lstStyle/>
+          <a:p>
+            <a:pPr indent="0" marL="0">
               <a:lnSpc>
-                <a:spcPct val="108000"/>
+                <a:spcPct val="110000"/>
               </a:lnSpc>
               <a:buNone/>
             </a:pPr>
             <a:r>
-              <a:rPr lang="en-US" sz="1250" dirty="0">
-                <a:solidFill>
-                  <a:srgbClr val="E8EDF2"/>
+              <a:rPr lang="en-US" sz="1350" dirty="0">
+                <a:solidFill>
+                  <a:srgbClr val="9AA6B2"/>
+                </a:solidFill>
+                <a:latin typeface="Malgun Gothic" pitchFamily="34" charset="0"/>
+                <a:ea typeface="Malgun Gothic" pitchFamily="34" charset="-122"/>
+                <a:cs typeface="Malgun Gothic" pitchFamily="34" charset="-120"/>
+              </a:rPr>
+              <a:t>CPU는 던지고 즉시 리턴 (오류 모름)</a:t>
+            </a:r>
+            <a:endParaRPr lang="en-US" sz="1350" dirty="0"/>
+          </a:p>
+        </p:txBody>
+      </p:sp>
+      <p:sp>
+        <p:nvSpPr>
+          <p:cNvPr id="9" name="Text 7"/>
+          <p:cNvSpPr/>
+          <p:nvPr/>
+        </p:nvSpPr>
+        <p:spPr>
+          <a:xfrm>
+            <a:off x="3913632" y="2834640"/>
+            <a:ext cx="466344" cy="640080"/>
+          </a:xfrm>
+          <a:prstGeom prst="rect">
+            <a:avLst/>
+          </a:prstGeom>
+          <a:noFill/>
+          <a:ln/>
+        </p:spPr>
+        <p:txBody>
+          <a:bodyPr wrap="square" lIns="0" tIns="0" rIns="0" bIns="0" rtlCol="0" anchor="ctr"/>
+          <a:lstStyle/>
+          <a:p>
+            <a:pPr algn="ctr" indent="0" marL="0">
+              <a:buNone/>
+            </a:pPr>
+            <a:r>
+              <a:rPr lang="en-US" sz="2600" b="1" dirty="0">
+                <a:solidFill>
+                  <a:srgbClr val="9AA6B2"/>
                 </a:solidFill>
                 <a:latin typeface="Courier New" pitchFamily="34" charset="0"/>
                 <a:ea typeface="Courier New" pitchFamily="34" charset="-122"/>
                 <a:cs typeface="Courier New" pitchFamily="34" charset="-120"/>
               </a:rPr>
-              <a:t>#define CUERR(...) do{ apiError_t e;                             \</a:t>
-            </a:r>
-            <a:endParaRPr lang="en-US" sz="1250" dirty="0"/>
-          </a:p>
-          <a:p>
-            <a:pPr algn="l" indent="0" marL="0">
-              <a:lnSpc>
-                <a:spcPct val="108000"/>
-              </a:lnSpc>
-              <a:buNone/>
-            </a:pPr>
-            <a:r>
-              <a:rPr lang="en-US" sz="1250" dirty="0">
+              <a:t>→</a:t>
+            </a:r>
+            <a:endParaRPr lang="en-US" sz="2600" dirty="0"/>
+          </a:p>
+        </p:txBody>
+      </p:sp>
+      <p:sp>
+        <p:nvSpPr>
+          <p:cNvPr id="10" name="Shape 8"/>
+          <p:cNvSpPr/>
+          <p:nvPr/>
+        </p:nvSpPr>
+        <p:spPr>
+          <a:xfrm>
+            <a:off x="4398264" y="2148840"/>
+            <a:ext cx="3346704" cy="2011680"/>
+          </a:xfrm>
+          <a:prstGeom prst="roundRect">
+            <a:avLst>
+              <a:gd name="adj" fmla="val 3636"/>
+            </a:avLst>
+          </a:prstGeom>
+          <a:solidFill>
+            <a:srgbClr val="1E232C"/>
+          </a:solidFill>
+          <a:ln/>
+        </p:spPr>
+      </p:sp>
+      <p:sp>
+        <p:nvSpPr>
+          <p:cNvPr id="11" name="Text 9"/>
+          <p:cNvSpPr/>
+          <p:nvPr/>
+        </p:nvSpPr>
+        <p:spPr>
+          <a:xfrm>
+            <a:off x="4626864" y="2350008"/>
+            <a:ext cx="2889504" cy="457200"/>
+          </a:xfrm>
+          <a:prstGeom prst="rect">
+            <a:avLst/>
+          </a:prstGeom>
+          <a:noFill/>
+          <a:ln/>
+        </p:spPr>
+        <p:txBody>
+          <a:bodyPr wrap="square" lIns="0" tIns="0" rIns="0" bIns="0" rtlCol="0" anchor="ctr"/>
+          <a:lstStyle/>
+          <a:p>
+            <a:pPr indent="0" marL="0">
+              <a:buNone/>
+            </a:pPr>
+            <a:r>
+              <a:rPr lang="en-US" sz="1700" b="1" dirty="0">
                 <a:solidFill>
                   <a:srgbClr val="8CC63F"/>
+                </a:solidFill>
+                <a:latin typeface="Malgun Gothic" pitchFamily="34" charset="0"/>
+                <a:ea typeface="Malgun Gothic" pitchFamily="34" charset="-122"/>
+                <a:cs typeface="Malgun Gothic" pitchFamily="34" charset="-120"/>
+              </a:rPr>
+              <a:t>② 동기화</a:t>
+            </a:r>
+            <a:endParaRPr lang="en-US" sz="1700" dirty="0"/>
+          </a:p>
+        </p:txBody>
+      </p:sp>
+      <p:sp>
+        <p:nvSpPr>
+          <p:cNvPr id="12" name="Text 10"/>
+          <p:cNvSpPr/>
+          <p:nvPr/>
+        </p:nvSpPr>
+        <p:spPr>
+          <a:xfrm>
+            <a:off x="4626864" y="2880360"/>
+            <a:ext cx="2889504" cy="548640"/>
+          </a:xfrm>
+          <a:prstGeom prst="rect">
+            <a:avLst/>
+          </a:prstGeom>
+          <a:noFill/>
+          <a:ln/>
+        </p:spPr>
+        <p:txBody>
+          <a:bodyPr wrap="square" lIns="0" tIns="0" rIns="0" bIns="0" rtlCol="0" anchor="ctr"/>
+          <a:lstStyle/>
+          <a:p>
+            <a:pPr indent="0" marL="0">
+              <a:buNone/>
+            </a:pPr>
+            <a:r>
+              <a:rPr lang="en-US" sz="1200" dirty="0">
+                <a:solidFill>
+                  <a:srgbClr val="E8EDF2"/>
                 </a:solidFill>
                 <a:latin typeface="Courier New" pitchFamily="34" charset="0"/>
                 <a:ea typeface="Courier New" pitchFamily="34" charset="-122"/>
                 <a:cs typeface="Courier New" pitchFamily="34" charset="-120"/>
               </a:rPr>
-              <a:t>    if ((e = __VA_ARGS__) != cudaSuccess) {                     \</a:t>
-            </a:r>
-            <a:endParaRPr lang="en-US" sz="1250" dirty="0"/>
-          </a:p>
-          <a:p>
-            <a:pPr algn="l" indent="0" marL="0">
+              <a:t>cudaDeviceSynchronize()</a:t>
+            </a:r>
+            <a:endParaRPr lang="en-US" sz="1200" dirty="0"/>
+          </a:p>
+        </p:txBody>
+      </p:sp>
+      <p:sp>
+        <p:nvSpPr>
+          <p:cNvPr id="13" name="Text 11"/>
+          <p:cNvSpPr/>
+          <p:nvPr/>
+        </p:nvSpPr>
+        <p:spPr>
+          <a:xfrm>
+            <a:off x="4626864" y="3383280"/>
+            <a:ext cx="2889504" cy="685800"/>
+          </a:xfrm>
+          <a:prstGeom prst="rect">
+            <a:avLst/>
+          </a:prstGeom>
+          <a:noFill/>
+          <a:ln/>
+        </p:spPr>
+        <p:txBody>
+          <a:bodyPr wrap="square" lIns="0" tIns="0" rIns="0" bIns="0" rtlCol="0" anchor="t"/>
+          <a:lstStyle/>
+          <a:p>
+            <a:pPr indent="0" marL="0">
               <a:lnSpc>
-                <a:spcPct val="108000"/>
+                <a:spcPct val="110000"/>
               </a:lnSpc>
               <a:buNone/>
             </a:pPr>
             <a:r>
-              <a:rPr lang="en-US" sz="1250" dirty="0">
-                <a:solidFill>
-                  <a:srgbClr val="E8EDF2"/>
+              <a:rPr lang="en-US" sz="1350" dirty="0">
+                <a:solidFill>
+                  <a:srgbClr val="9AA6B2"/>
+                </a:solidFill>
+                <a:latin typeface="Malgun Gothic" pitchFamily="34" charset="0"/>
+                <a:ea typeface="Malgun Gothic" pitchFamily="34" charset="-122"/>
+                <a:cs typeface="Malgun Gothic" pitchFamily="34" charset="-120"/>
+              </a:rPr>
+              <a:t>GPU가 끝날 때까지 대기</a:t>
+            </a:r>
+            <a:endParaRPr lang="en-US" sz="1350" dirty="0"/>
+          </a:p>
+        </p:txBody>
+      </p:sp>
+      <p:sp>
+        <p:nvSpPr>
+          <p:cNvPr id="14" name="Text 12"/>
+          <p:cNvSpPr/>
+          <p:nvPr/>
+        </p:nvSpPr>
+        <p:spPr>
+          <a:xfrm>
+            <a:off x="7763256" y="2834640"/>
+            <a:ext cx="466344" cy="640080"/>
+          </a:xfrm>
+          <a:prstGeom prst="rect">
+            <a:avLst/>
+          </a:prstGeom>
+          <a:noFill/>
+          <a:ln/>
+        </p:spPr>
+        <p:txBody>
+          <a:bodyPr wrap="square" lIns="0" tIns="0" rIns="0" bIns="0" rtlCol="0" anchor="ctr"/>
+          <a:lstStyle/>
+          <a:p>
+            <a:pPr algn="ctr" indent="0" marL="0">
+              <a:buNone/>
+            </a:pPr>
+            <a:r>
+              <a:rPr lang="en-US" sz="2600" b="1" dirty="0">
+                <a:solidFill>
+                  <a:srgbClr val="9AA6B2"/>
                 </a:solidFill>
                 <a:latin typeface="Courier New" pitchFamily="34" charset="0"/>
                 <a:ea typeface="Courier New" pitchFamily="34" charset="-122"/>
                 <a:cs typeface="Courier New" pitchFamily="34" charset="-120"/>
               </a:rPr>
-              <a:t>        FPRINTF("ERROR: CUDA error: %s, line %d, file %s\n",     \</a:t>
-            </a:r>
-            <a:endParaRPr lang="en-US" sz="1250" dirty="0"/>
-          </a:p>
-          <a:p>
-            <a:pPr algn="l" indent="0" marL="0">
-              <a:lnSpc>
-                <a:spcPct val="108000"/>
-              </a:lnSpc>
-              <a:buNone/>
-            </a:pPr>
-            <a:r>
-              <a:rPr lang="en-US" sz="1250" dirty="0">
-                <a:solidFill>
-                  <a:srgbClr val="4FB0C6"/>
+              <a:t>→</a:t>
+            </a:r>
+            <a:endParaRPr lang="en-US" sz="2600" dirty="0"/>
+          </a:p>
+        </p:txBody>
+      </p:sp>
+      <p:sp>
+        <p:nvSpPr>
+          <p:cNvPr id="15" name="Shape 13"/>
+          <p:cNvSpPr/>
+          <p:nvPr/>
+        </p:nvSpPr>
+        <p:spPr>
+          <a:xfrm>
+            <a:off x="8247888" y="2148840"/>
+            <a:ext cx="3346704" cy="2011680"/>
+          </a:xfrm>
+          <a:prstGeom prst="roundRect">
+            <a:avLst>
+              <a:gd name="adj" fmla="val 3636"/>
+            </a:avLst>
+          </a:prstGeom>
+          <a:solidFill>
+            <a:srgbClr val="1E232C"/>
+          </a:solidFill>
+          <a:ln/>
+        </p:spPr>
+      </p:sp>
+      <p:sp>
+        <p:nvSpPr>
+          <p:cNvPr id="16" name="Text 14"/>
+          <p:cNvSpPr/>
+          <p:nvPr/>
+        </p:nvSpPr>
+        <p:spPr>
+          <a:xfrm>
+            <a:off x="8476488" y="2350008"/>
+            <a:ext cx="2889504" cy="457200"/>
+          </a:xfrm>
+          <a:prstGeom prst="rect">
+            <a:avLst/>
+          </a:prstGeom>
+          <a:noFill/>
+          <a:ln/>
+        </p:spPr>
+        <p:txBody>
+          <a:bodyPr wrap="square" lIns="0" tIns="0" rIns="0" bIns="0" rtlCol="0" anchor="ctr"/>
+          <a:lstStyle/>
+          <a:p>
+            <a:pPr indent="0" marL="0">
+              <a:buNone/>
+            </a:pPr>
+            <a:r>
+              <a:rPr lang="en-US" sz="1700" b="1" dirty="0">
+                <a:solidFill>
+                  <a:srgbClr val="E0A458"/>
+                </a:solidFill>
+                <a:latin typeface="Malgun Gothic" pitchFamily="34" charset="0"/>
+                <a:ea typeface="Malgun Gothic" pitchFamily="34" charset="-122"/>
+                <a:cs typeface="Malgun Gothic" pitchFamily="34" charset="-120"/>
+              </a:rPr>
+              <a:t>③ 오류 검사</a:t>
+            </a:r>
+            <a:endParaRPr lang="en-US" sz="1700" dirty="0"/>
+          </a:p>
+        </p:txBody>
+      </p:sp>
+      <p:sp>
+        <p:nvSpPr>
+          <p:cNvPr id="17" name="Text 15"/>
+          <p:cNvSpPr/>
+          <p:nvPr/>
+        </p:nvSpPr>
+        <p:spPr>
+          <a:xfrm>
+            <a:off x="8476488" y="2880360"/>
+            <a:ext cx="2889504" cy="548640"/>
+          </a:xfrm>
+          <a:prstGeom prst="rect">
+            <a:avLst/>
+          </a:prstGeom>
+          <a:noFill/>
+          <a:ln/>
+        </p:spPr>
+        <p:txBody>
+          <a:bodyPr wrap="square" lIns="0" tIns="0" rIns="0" bIns="0" rtlCol="0" anchor="ctr"/>
+          <a:lstStyle/>
+          <a:p>
+            <a:pPr indent="0" marL="0">
+              <a:buNone/>
+            </a:pPr>
+            <a:r>
+              <a:rPr lang="en-US" sz="1200" dirty="0">
+                <a:solidFill>
+                  <a:srgbClr val="E8EDF2"/>
                 </a:solidFill>
                 <a:latin typeface="Courier New" pitchFamily="34" charset="0"/>
                 <a:ea typeface="Courier New" pitchFamily="34" charset="-122"/>
                 <a:cs typeface="Courier New" pitchFamily="34" charset="-120"/>
               </a:rPr>
-              <a:t>                cudaGetErrorString(e), __LINE__, __FILE__);     \</a:t>
-            </a:r>
-            <a:endParaRPr lang="en-US" sz="1250" dirty="0"/>
-          </a:p>
-          <a:p>
-            <a:pPr algn="l" indent="0" marL="0">
+              <a:t>if (err != cudaSuccess)</a:t>
+            </a:r>
+            <a:endParaRPr lang="en-US" sz="1200" dirty="0"/>
+          </a:p>
+        </p:txBody>
+      </p:sp>
+      <p:sp>
+        <p:nvSpPr>
+          <p:cNvPr id="18" name="Text 16"/>
+          <p:cNvSpPr/>
+          <p:nvPr/>
+        </p:nvSpPr>
+        <p:spPr>
+          <a:xfrm>
+            <a:off x="8476488" y="3383280"/>
+            <a:ext cx="2889504" cy="685800"/>
+          </a:xfrm>
+          <a:prstGeom prst="rect">
+            <a:avLst/>
+          </a:prstGeom>
+          <a:noFill/>
+          <a:ln/>
+        </p:spPr>
+        <p:txBody>
+          <a:bodyPr wrap="square" lIns="0" tIns="0" rIns="0" bIns="0" rtlCol="0" anchor="t"/>
+          <a:lstStyle/>
+          <a:p>
+            <a:pPr indent="0" marL="0">
               <a:lnSpc>
-                <a:spcPct val="108000"/>
+                <a:spcPct val="110000"/>
               </a:lnSpc>
               <a:buNone/>
             </a:pPr>
             <a:r>
-              <a:rPr lang="en-US" sz="1250" dirty="0">
+              <a:rPr lang="en-US" sz="1350" dirty="0">
+                <a:solidFill>
+                  <a:srgbClr val="9AA6B2"/>
+                </a:solidFill>
+                <a:latin typeface="Malgun Gothic" pitchFamily="34" charset="0"/>
+                <a:ea typeface="Malgun Gothic" pitchFamily="34" charset="-122"/>
+                <a:cs typeface="Malgun Gothic" pitchFamily="34" charset="-120"/>
+              </a:rPr>
+              <a:t>이제서야 커널 오류를 알 수 있음</a:t>
+            </a:r>
+            <a:endParaRPr lang="en-US" sz="1350" dirty="0"/>
+          </a:p>
+        </p:txBody>
+      </p:sp>
+      <p:sp>
+        <p:nvSpPr>
+          <p:cNvPr id="19" name="Text 17"/>
+          <p:cNvSpPr/>
+          <p:nvPr/>
+        </p:nvSpPr>
+        <p:spPr>
+          <a:xfrm>
+            <a:off x="548640" y="4480560"/>
+            <a:ext cx="11064240" cy="914400"/>
+          </a:xfrm>
+          <a:prstGeom prst="rect">
+            <a:avLst/>
+          </a:prstGeom>
+          <a:noFill/>
+          <a:ln/>
+        </p:spPr>
+        <p:txBody>
+          <a:bodyPr wrap="square" lIns="0" tIns="0" rIns="0" bIns="0" rtlCol="0" anchor="t"/>
+          <a:lstStyle/>
+          <a:p>
+            <a:pPr indent="0" marL="0">
+              <a:buNone/>
+            </a:pPr>
+            <a:r>
+              <a:rPr lang="en-US" sz="1600" b="1" dirty="0">
+                <a:solidFill>
+                  <a:srgbClr val="E0A458"/>
+                </a:solidFill>
+                <a:latin typeface="Malgun Gothic" pitchFamily="34" charset="0"/>
+                <a:ea typeface="Malgun Gothic" pitchFamily="34" charset="-122"/>
+                <a:cs typeface="Malgun Gothic" pitchFamily="34" charset="-120"/>
+              </a:rPr>
+              <a:t>동기화를 건너뛰면</a:t>
+            </a:r>
+            <a:pPr indent="0" marL="0">
+              <a:buNone/>
+            </a:pPr>
+            <a:r>
+              <a:rPr lang="en-US" sz="1600" dirty="0">
                 <a:solidFill>
                   <a:srgbClr val="E8EDF2"/>
                 </a:solidFill>
-                <a:latin typeface="Courier New" pitchFamily="34" charset="0"/>
-                <a:ea typeface="Courier New" pitchFamily="34" charset="-122"/>
-                <a:cs typeface="Courier New" pitchFamily="34" charset="-120"/>
-              </a:rPr>
-              <a:t>        exit(e); }}while(0)</a:t>
-            </a:r>
-            <a:endParaRPr lang="en-US" sz="1250" dirty="0"/>
-          </a:p>
-          <a:p>
-            <a:pPr algn="l" indent="0" marL="0">
-              <a:lnSpc>
-                <a:spcPct val="108000"/>
-              </a:lnSpc>
-              <a:buNone/>
-            </a:pPr>
-            <a:endParaRPr lang="en-US" sz="1250" dirty="0"/>
-          </a:p>
-          <a:p>
-            <a:pPr algn="l" indent="0" marL="0">
-              <a:lnSpc>
-                <a:spcPct val="108000"/>
-              </a:lnSpc>
-              <a:buNone/>
-            </a:pPr>
-            <a:r>
-              <a:rPr lang="en-US" sz="1250" dirty="0">
-                <a:solidFill>
-                  <a:srgbClr val="9AA6B2"/>
-                </a:solidFill>
-                <a:latin typeface="Courier New" pitchFamily="34" charset="0"/>
-                <a:ea typeface="Courier New" pitchFamily="34" charset="-122"/>
-                <a:cs typeface="Courier New" pitchFamily="34" charset="-120"/>
-              </a:rPr>
-              <a:t>// SYNC_CUERR_KERNEL — 커널 실행 + 동기화 + 검사   cuda_memtest.h:138</a:t>
-            </a:r>
-            <a:endParaRPr lang="en-US" sz="1250" dirty="0"/>
-          </a:p>
-          <a:p>
-            <a:pPr algn="l" indent="0" marL="0">
-              <a:lnSpc>
-                <a:spcPct val="108000"/>
-              </a:lnSpc>
-              <a:buNone/>
-            </a:pPr>
-            <a:r>
-              <a:rPr lang="en-US" sz="1250" dirty="0">
-                <a:solidFill>
-                  <a:srgbClr val="8CC63F"/>
-                </a:solidFill>
-                <a:latin typeface="Courier New" pitchFamily="34" charset="0"/>
-                <a:ea typeface="Courier New" pitchFamily="34" charset="-122"/>
-                <a:cs typeface="Courier New" pitchFamily="34" charset="-120"/>
-              </a:rPr>
-              <a:t>#define SYNC_CUERR_KERNEL(...) do{ __VA_ARGS__;                  \</a:t>
-            </a:r>
-            <a:endParaRPr lang="en-US" sz="1250" dirty="0"/>
-          </a:p>
-          <a:p>
-            <a:pPr algn="l" indent="0" marL="0">
-              <a:lnSpc>
-                <a:spcPct val="108000"/>
-              </a:lnSpc>
-              <a:buNone/>
-            </a:pPr>
-            <a:r>
-              <a:rPr lang="en-US" sz="1250" dirty="0">
-                <a:solidFill>
-                  <a:srgbClr val="E0A458"/>
-                </a:solidFill>
-                <a:latin typeface="Courier New" pitchFamily="34" charset="0"/>
-                <a:ea typeface="Courier New" pitchFamily="34" charset="-122"/>
-                <a:cs typeface="Courier New" pitchFamily="34" charset="-120"/>
-              </a:rPr>
-              <a:t>    e = cudaDeviceSynchronize();  /* GPU 완료 대기 후 검사 */      \</a:t>
-            </a:r>
-            <a:endParaRPr lang="en-US" sz="1250" dirty="0"/>
-          </a:p>
-          <a:p>
-            <a:pPr algn="l" indent="0" marL="0">
-              <a:lnSpc>
-                <a:spcPct val="108000"/>
-              </a:lnSpc>
-              <a:buNone/>
-            </a:pPr>
-            <a:r>
-              <a:rPr lang="en-US" sz="1250" dirty="0">
-                <a:solidFill>
-                  <a:srgbClr val="E8EDF2"/>
-                </a:solidFill>
-                <a:latin typeface="Courier New" pitchFamily="34" charset="0"/>
-                <a:ea typeface="Courier New" pitchFamily="34" charset="-122"/>
-                <a:cs typeface="Courier New" pitchFamily="34" charset="-120"/>
-              </a:rPr>
-              <a:t>    if (e != cudaSuccess){ ... exit(e); } }while(0)</a:t>
-            </a:r>
-            <a:endParaRPr lang="en-US" sz="1250" dirty="0"/>
-          </a:p>
-        </p:txBody>
-      </p:sp>
-      <p:sp>
-        <p:nvSpPr>
-          <p:cNvPr id="6" name="Text 4"/>
-          <p:cNvSpPr/>
-          <p:nvPr/>
-        </p:nvSpPr>
-        <p:spPr>
-          <a:xfrm>
-            <a:off x="548640" y="4983480"/>
-            <a:ext cx="11064240" cy="822960"/>
-          </a:xfrm>
-          <a:prstGeom prst="rect">
-            <a:avLst/>
-          </a:prstGeom>
-          <a:noFill/>
-          <a:ln/>
-        </p:spPr>
-        <p:txBody>
-          <a:bodyPr wrap="square" lIns="0" tIns="0" rIns="0" bIns="0" rtlCol="0" anchor="t"/>
-          <a:lstStyle/>
-          <a:p>
-            <a:pPr indent="0" marL="0">
-              <a:buNone/>
-            </a:pPr>
-            <a:r>
-              <a:rPr lang="en-US" sz="1600" b="1" dirty="0">
-                <a:solidFill>
-                  <a:srgbClr val="4FB0C6"/>
-                </a:solidFill>
-                <a:latin typeface="Malgun Gothic" pitchFamily="34" charset="0"/>
-                <a:ea typeface="Malgun Gothic" pitchFamily="34" charset="-122"/>
-                <a:cs typeface="Malgun Gothic" pitchFamily="34" charset="-120"/>
-              </a:rPr>
-              <a:t>__FILE__ · __LINE__</a:t>
-            </a:r>
-            <a:pPr indent="0" marL="0">
-              <a:buNone/>
-            </a:pPr>
-            <a:r>
-              <a:rPr lang="en-US" sz="1600" dirty="0">
-                <a:solidFill>
-                  <a:srgbClr val="E8EDF2"/>
-                </a:solidFill>
-                <a:latin typeface="Malgun Gothic" pitchFamily="34" charset="0"/>
-                <a:ea typeface="Malgun Gothic" pitchFamily="34" charset="-122"/>
-                <a:cs typeface="Malgun Gothic" pitchFamily="34" charset="-120"/>
-              </a:rPr>
-              <a:t> 덕분에 오류가 '어느 파일 몇 번째 줄'에서 났는지 즉시 압니다. 디버깅의 필수 습관입니다.</a:t>
+                <a:latin typeface="Malgun Gothic" pitchFamily="34" charset="0"/>
+                <a:ea typeface="Malgun Gothic" pitchFamily="34" charset="-122"/>
+                <a:cs typeface="Malgun Gothic" pitchFamily="34" charset="-120"/>
+              </a:rPr>
+              <a:t> 커널이 잘못된 메모리를 건드려도 CPU는 모른 채 계속 진행합니다. 그래서 SYNC_CUERR_KERNEL이 필요합니다.</a:t>
             </a:r>
             <a:endParaRPr lang="en-US" sz="1600" dirty="0"/>
           </a:p>
